--- a/luah.pptx
+++ b/luah.pptx
@@ -9,6 +9,7 @@
     <p:sldId id="257" r:id="rId3"/>
     <p:sldId id="258" r:id="rId4"/>
     <p:sldId id="259" r:id="rId5"/>
+    <p:sldId id="260" r:id="rId6"/>
   </p:sldIdLst>
   <p:sldSz cx="12192000" cy="6858000"/>
   <p:notesSz cx="7772400" cy="10058400"/>
@@ -11662,7 +11663,7 @@
               </a:spcAft>
             </a:pPr>
             <a:r>
-              <a:rPr lang="he-IL" sz="3200" u="none" strike="noStrike" dirty="0">
+              <a:rPr lang="he-IL" sz="3200" b="1" u="none" strike="noStrike">
                 <a:effectLst/>
                 <a:uFillTx/>
                 <a:latin typeface="Calibri"/>
@@ -11670,7 +11671,7 @@
               <a:t>#</a:t>
             </a:r>
             <a:r>
-              <a:rPr lang="en-US" sz="3200" u="none" strike="noStrike" dirty="0">
+              <a:rPr lang="en-US" sz="3200" b="1" u="none" strike="noStrike">
                 <a:effectLst/>
                 <a:uFillTx/>
                 <a:latin typeface="Calibri"/>
@@ -11678,7 +11679,7 @@
               <a:t>CMD</a:t>
             </a:r>
             <a:r>
-              <a:rPr lang="he-IL" sz="3200" u="none" strike="noStrike" dirty="0">
+              <a:rPr lang="he-IL" sz="3200" b="1" u="none" strike="noStrike">
                 <a:effectLst/>
                 <a:uFillTx/>
                 <a:latin typeface="Calibri"/>
@@ -11686,22 +11687,30 @@
               <a:t>:&lt;</a:t>
             </a:r>
             <a:r>
-              <a:rPr lang="en-US" sz="3200" u="none" strike="noStrike" dirty="0" err="1">
-                <a:effectLst/>
-                <a:uFillTx/>
-                <a:latin typeface="Calibri"/>
-              </a:rPr>
-              <a:t>chol_desc</a:t>
-            </a:r>
-            <a:r>
-              <a:rPr lang="he-IL" sz="3200" u="none" strike="noStrike" dirty="0">
+              <a:rPr lang="en-US" sz="3200" b="1" u="none" strike="noStrike">
+                <a:effectLst/>
+                <a:uFillTx/>
+                <a:latin typeface="Calibri"/>
+              </a:rPr>
+              <a:t>chol</a:t>
+            </a:r>
+            <a:r>
+              <a:rPr lang="en-US" sz="3200" b="1" u="none" strike="noStrike" dirty="0" err="1">
+                <a:effectLst/>
+                <a:uFillTx/>
+                <a:latin typeface="Calibri"/>
+              </a:rPr>
+              <a:t>_desc</a:t>
+            </a:r>
+            <a:r>
+              <a:rPr lang="he-IL" sz="3200" b="1" u="none" strike="noStrike">
                 <a:effectLst/>
                 <a:uFillTx/>
                 <a:latin typeface="Calibri"/>
               </a:rPr>
               <a:t>&gt;</a:t>
             </a:r>
-            <a:endParaRPr lang="en-US" sz="3200" u="none" strike="noStrike" dirty="0">
+            <a:endParaRPr lang="en-US" sz="3200" b="1" u="none" strike="noStrike" dirty="0">
               <a:effectLst/>
               <a:uFillTx/>
               <a:latin typeface="Arial"/>
@@ -11758,7 +11767,7 @@
               </a:spcAft>
             </a:pPr>
             <a:r>
-              <a:rPr lang="he-IL" sz="3200" u="none" strike="noStrike" dirty="0">
+              <a:rPr lang="he-IL" sz="3200" b="1" u="none" strike="noStrike">
                 <a:effectLst/>
                 <a:uFillTx/>
                 <a:latin typeface="Calibri"/>
@@ -11766,7 +11775,7 @@
               <a:t>#</a:t>
             </a:r>
             <a:r>
-              <a:rPr lang="en-US" sz="3200" u="none" strike="noStrike" dirty="0">
+              <a:rPr lang="en-US" sz="3200" b="1" u="none" strike="noStrike">
                 <a:effectLst/>
                 <a:uFillTx/>
                 <a:latin typeface="Calibri"/>
@@ -11774,7 +11783,7 @@
               <a:t>CMD</a:t>
             </a:r>
             <a:r>
-              <a:rPr lang="he-IL" sz="3200" u="none" strike="noStrike" dirty="0">
+              <a:rPr lang="he-IL" sz="3200" b="1" u="none" strike="noStrike">
                 <a:effectLst/>
                 <a:uFillTx/>
                 <a:latin typeface="Calibri"/>
@@ -11782,22 +11791,30 @@
               <a:t>:&lt;</a:t>
             </a:r>
             <a:r>
-              <a:rPr lang="en-US" sz="3200" u="none" strike="noStrike" dirty="0" err="1">
-                <a:effectLst/>
-                <a:uFillTx/>
-                <a:latin typeface="Calibri"/>
-              </a:rPr>
-              <a:t>chol_times</a:t>
-            </a:r>
-            <a:r>
-              <a:rPr lang="he-IL" sz="3200" u="none" strike="noStrike" dirty="0">
+              <a:rPr lang="en-US" sz="3200" b="1" u="none" strike="noStrike">
+                <a:effectLst/>
+                <a:uFillTx/>
+                <a:latin typeface="Calibri"/>
+              </a:rPr>
+              <a:t>chol</a:t>
+            </a:r>
+            <a:r>
+              <a:rPr lang="en-US" sz="3200" b="1" u="none" strike="noStrike" dirty="0" err="1">
+                <a:effectLst/>
+                <a:uFillTx/>
+                <a:latin typeface="Calibri"/>
+              </a:rPr>
+              <a:t>_times</a:t>
+            </a:r>
+            <a:r>
+              <a:rPr lang="he-IL" sz="3200" b="1" u="none" strike="noStrike">
                 <a:effectLst/>
                 <a:uFillTx/>
                 <a:latin typeface="Calibri"/>
               </a:rPr>
               <a:t>&gt;</a:t>
             </a:r>
-            <a:endParaRPr lang="en-US" sz="3200" u="none" strike="noStrike" dirty="0">
+            <a:endParaRPr lang="en-US" sz="3200" b="1" u="none" strike="noStrike" dirty="0">
               <a:effectLst/>
               <a:uFillTx/>
               <a:latin typeface="Arial"/>
@@ -12504,6 +12521,127 @@
     <p:extLst>
       <p:ext uri="{BB962C8B-B14F-4D97-AF65-F5344CB8AC3E}">
         <p14:creationId xmlns:p14="http://schemas.microsoft.com/office/powerpoint/2010/main" val="2515977163"/>
+      </p:ext>
+    </p:extLst>
+  </p:cSld>
+  <p:clrMapOvr>
+    <a:masterClrMapping/>
+  </p:clrMapOvr>
+</p:sld>
+</file>
+
+<file path=ppt/slides/slide5.xml><?xml version="1.0" encoding="utf-8"?>
+<p:sld xmlns:a="http://schemas.openxmlformats.org/drawingml/2006/main" xmlns:r="http://schemas.openxmlformats.org/officeDocument/2006/relationships" xmlns:p="http://schemas.openxmlformats.org/presentationml/2006/main">
+  <p:cSld>
+    <p:spTree>
+      <p:nvGrpSpPr>
+        <p:cNvPr id="1" name=""/>
+        <p:cNvGrpSpPr/>
+        <p:nvPr/>
+      </p:nvGrpSpPr>
+      <p:grpSpPr>
+        <a:xfrm>
+          <a:off x="0" y="0"/>
+          <a:ext cx="0" cy="0"/>
+          <a:chOff x="0" y="0"/>
+          <a:chExt cx="0" cy="0"/>
+        </a:xfrm>
+      </p:grpSpPr>
+      <p:sp>
+        <p:nvSpPr>
+          <p:cNvPr id="4" name="TextBox 3">
+            <a:extLst>
+              <a:ext uri="{FF2B5EF4-FFF2-40B4-BE49-F238E27FC236}">
+                <a16:creationId xmlns:a16="http://schemas.microsoft.com/office/drawing/2014/main" id="{10BDF163-A326-A48D-78C5-8A59F580915C}"/>
+              </a:ext>
+            </a:extLst>
+          </p:cNvPr>
+          <p:cNvSpPr txBox="1"/>
+          <p:nvPr/>
+        </p:nvSpPr>
+        <p:spPr>
+          <a:xfrm>
+            <a:off x="179294" y="98612"/>
+            <a:ext cx="11707906" cy="1754326"/>
+          </a:xfrm>
+          <a:prstGeom prst="rect">
+            <a:avLst/>
+          </a:prstGeom>
+          <a:noFill/>
+        </p:spPr>
+        <p:txBody>
+          <a:bodyPr wrap="square" rtlCol="0">
+            <a:spAutoFit/>
+          </a:bodyPr>
+          <a:lstStyle/>
+          <a:p>
+            <a:r>
+              <a:rPr lang="en-US" dirty="0"/>
+              <a:t>#CONFIG:{</a:t>
+            </a:r>
+          </a:p>
+          <a:p>
+            <a:r>
+              <a:rPr lang="en-US" dirty="0"/>
+              <a:t>"clock_tick_seconds": 1.0,</a:t>
+            </a:r>
+          </a:p>
+          <a:p>
+            <a:r>
+              <a:rPr lang="en-US" dirty="0"/>
+              <a:t>"</a:t>
+            </a:r>
+            <a:r>
+              <a:rPr lang="en-US" dirty="0" err="1"/>
+              <a:t>debug_repaint_nudge_shape</a:t>
+            </a:r>
+            <a:r>
+              <a:rPr lang="en-US" dirty="0"/>
+              <a:t>": true,</a:t>
+            </a:r>
+          </a:p>
+          <a:p>
+            <a:r>
+              <a:rPr lang="en-US" dirty="0"/>
+              <a:t>"</a:t>
+            </a:r>
+            <a:r>
+              <a:rPr lang="en-US" dirty="0" err="1"/>
+              <a:t>clock_style</a:t>
+            </a:r>
+            <a:r>
+              <a:rPr lang="en-US" dirty="0"/>
+              <a:t>":{</a:t>
+            </a:r>
+            <a:r>
+              <a:rPr lang="" dirty="0"/>
+              <a:t>"hour_color": 255</a:t>
+            </a:r>
+            <a:r>
+              <a:rPr lang="en-US" dirty="0"/>
+              <a:t>},</a:t>
+            </a:r>
+          </a:p>
+          <a:p>
+            <a:r>
+              <a:rPr lang="" dirty="0"/>
+              <a:t>"debug_skip_slideshow": false</a:t>
+            </a:r>
+            <a:endParaRPr lang="en-US" dirty="0"/>
+          </a:p>
+          <a:p>
+            <a:r>
+              <a:rPr lang="en-US" dirty="0"/>
+              <a:t>}</a:t>
+            </a:r>
+            <a:endParaRPr lang="LID4096" dirty="0"/>
+          </a:p>
+        </p:txBody>
+      </p:sp>
+    </p:spTree>
+    <p:extLst>
+      <p:ext uri="{BB962C8B-B14F-4D97-AF65-F5344CB8AC3E}">
+        <p14:creationId xmlns:p14="http://schemas.microsoft.com/office/powerpoint/2010/main" val="3506289245"/>
       </p:ext>
     </p:extLst>
   </p:cSld>

--- a/luah.pptx
+++ b/luah.pptx
@@ -4,12 +4,17 @@
   <p:sldMasterIdLst>
     <p:sldMasterId id="2147483648" r:id="rId1"/>
   </p:sldMasterIdLst>
+  <p:notesMasterIdLst>
+    <p:notesMasterId r:id="rId9"/>
+  </p:notesMasterIdLst>
   <p:sldIdLst>
     <p:sldId id="256" r:id="rId2"/>
     <p:sldId id="257" r:id="rId3"/>
     <p:sldId id="258" r:id="rId4"/>
-    <p:sldId id="259" r:id="rId5"/>
-    <p:sldId id="260" r:id="rId6"/>
+    <p:sldId id="260" r:id="rId5"/>
+    <p:sldId id="259" r:id="rId6"/>
+    <p:sldId id="261" r:id="rId7"/>
+    <p:sldId id="262" r:id="rId8"/>
   </p:sldIdLst>
   <p:sldSz cx="12192000" cy="6858000"/>
   <p:notesSz cx="7772400" cy="10058400"/>
@@ -114,6 +119,440 @@
     </p:ext>
   </p:extLst>
 </p:presentation>
+</file>
+
+<file path=ppt/notesMasters/notesMaster1.xml><?xml version="1.0" encoding="utf-8"?>
+<p:notesMaster xmlns:a="http://schemas.openxmlformats.org/drawingml/2006/main" xmlns:r="http://schemas.openxmlformats.org/officeDocument/2006/relationships" xmlns:p="http://schemas.openxmlformats.org/presentationml/2006/main">
+  <p:cSld>
+    <p:bg>
+      <p:bgRef idx="1001">
+        <a:schemeClr val="bg1"/>
+      </p:bgRef>
+    </p:bg>
+    <p:spTree>
+      <p:nvGrpSpPr>
+        <p:cNvPr id="1" name=""/>
+        <p:cNvGrpSpPr/>
+        <p:nvPr/>
+      </p:nvGrpSpPr>
+      <p:grpSpPr>
+        <a:xfrm>
+          <a:off x="0" y="0"/>
+          <a:ext cx="0" cy="0"/>
+          <a:chOff x="0" y="0"/>
+          <a:chExt cx="0" cy="0"/>
+        </a:xfrm>
+      </p:grpSpPr>
+      <p:sp>
+        <p:nvSpPr>
+          <p:cNvPr id="2" name="Header Placeholder 1"/>
+          <p:cNvSpPr>
+            <a:spLocks noGrp="1"/>
+          </p:cNvSpPr>
+          <p:nvPr>
+            <p:ph type="hdr" sz="quarter"/>
+          </p:nvPr>
+        </p:nvSpPr>
+        <p:spPr>
+          <a:xfrm>
+            <a:off x="0" y="0"/>
+            <a:ext cx="3368675" cy="504825"/>
+          </a:xfrm>
+          <a:prstGeom prst="rect">
+            <a:avLst/>
+          </a:prstGeom>
+        </p:spPr>
+        <p:txBody>
+          <a:bodyPr vert="horz" lIns="91440" tIns="45720" rIns="91440" bIns="45720" rtlCol="0"/>
+          <a:lstStyle>
+            <a:lvl1pPr algn="l">
+              <a:defRPr sz="1200"/>
+            </a:lvl1pPr>
+          </a:lstStyle>
+          <a:p>
+            <a:endParaRPr lang="LID4096"/>
+          </a:p>
+        </p:txBody>
+      </p:sp>
+      <p:sp>
+        <p:nvSpPr>
+          <p:cNvPr id="3" name="Date Placeholder 2"/>
+          <p:cNvSpPr>
+            <a:spLocks noGrp="1"/>
+          </p:cNvSpPr>
+          <p:nvPr>
+            <p:ph type="dt" idx="1"/>
+          </p:nvPr>
+        </p:nvSpPr>
+        <p:spPr>
+          <a:xfrm>
+            <a:off x="4402138" y="0"/>
+            <a:ext cx="3368675" cy="504825"/>
+          </a:xfrm>
+          <a:prstGeom prst="rect">
+            <a:avLst/>
+          </a:prstGeom>
+        </p:spPr>
+        <p:txBody>
+          <a:bodyPr vert="horz" lIns="91440" tIns="45720" rIns="91440" bIns="45720" rtlCol="0"/>
+          <a:lstStyle>
+            <a:lvl1pPr algn="r">
+              <a:defRPr sz="1200"/>
+            </a:lvl1pPr>
+          </a:lstStyle>
+          <a:p>
+            <a:fld id="{FD5B471E-2D90-49BC-A0B2-2FC9EAC1BE17}" type="datetimeFigureOut">
+              <a:rPr lang="LID4096" smtClean="0"/>
+              <a:t>10/07/2026</a:t>
+            </a:fld>
+            <a:endParaRPr lang="LID4096"/>
+          </a:p>
+        </p:txBody>
+      </p:sp>
+      <p:sp>
+        <p:nvSpPr>
+          <p:cNvPr id="4" name="Slide Image Placeholder 3"/>
+          <p:cNvSpPr>
+            <a:spLocks noGrp="1" noRot="1" noChangeAspect="1"/>
+          </p:cNvSpPr>
+          <p:nvPr>
+            <p:ph type="sldImg" idx="2"/>
+          </p:nvPr>
+        </p:nvSpPr>
+        <p:spPr>
+          <a:xfrm>
+            <a:off x="869950" y="1257300"/>
+            <a:ext cx="6032500" cy="3394075"/>
+          </a:xfrm>
+          <a:prstGeom prst="rect">
+            <a:avLst/>
+          </a:prstGeom>
+          <a:noFill/>
+          <a:ln w="12700">
+            <a:solidFill>
+              <a:prstClr val="black"/>
+            </a:solidFill>
+          </a:ln>
+        </p:spPr>
+        <p:txBody>
+          <a:bodyPr vert="horz" lIns="91440" tIns="45720" rIns="91440" bIns="45720" rtlCol="0" anchor="ctr"/>
+          <a:lstStyle/>
+          <a:p>
+            <a:endParaRPr lang="LID4096"/>
+          </a:p>
+        </p:txBody>
+      </p:sp>
+      <p:sp>
+        <p:nvSpPr>
+          <p:cNvPr id="5" name="Notes Placeholder 4"/>
+          <p:cNvSpPr>
+            <a:spLocks noGrp="1"/>
+          </p:cNvSpPr>
+          <p:nvPr>
+            <p:ph type="body" sz="quarter" idx="3"/>
+          </p:nvPr>
+        </p:nvSpPr>
+        <p:spPr>
+          <a:xfrm>
+            <a:off x="777875" y="4840288"/>
+            <a:ext cx="6216650" cy="3960812"/>
+          </a:xfrm>
+          <a:prstGeom prst="rect">
+            <a:avLst/>
+          </a:prstGeom>
+        </p:spPr>
+        <p:txBody>
+          <a:bodyPr vert="horz" lIns="91440" tIns="45720" rIns="91440" bIns="45720" rtlCol="0"/>
+          <a:lstStyle/>
+          <a:p>
+            <a:pPr lvl="0"/>
+            <a:r>
+              <a:rPr lang="en-US"/>
+              <a:t>Click to edit Master text styles</a:t>
+            </a:r>
+          </a:p>
+          <a:p>
+            <a:pPr lvl="1"/>
+            <a:r>
+              <a:rPr lang="en-US"/>
+              <a:t>Second level</a:t>
+            </a:r>
+          </a:p>
+          <a:p>
+            <a:pPr lvl="2"/>
+            <a:r>
+              <a:rPr lang="en-US"/>
+              <a:t>Third level</a:t>
+            </a:r>
+          </a:p>
+          <a:p>
+            <a:pPr lvl="3"/>
+            <a:r>
+              <a:rPr lang="en-US"/>
+              <a:t>Fourth level</a:t>
+            </a:r>
+          </a:p>
+          <a:p>
+            <a:pPr lvl="4"/>
+            <a:r>
+              <a:rPr lang="en-US"/>
+              <a:t>Fifth level</a:t>
+            </a:r>
+            <a:endParaRPr lang="LID4096"/>
+          </a:p>
+        </p:txBody>
+      </p:sp>
+      <p:sp>
+        <p:nvSpPr>
+          <p:cNvPr id="6" name="Footer Placeholder 5"/>
+          <p:cNvSpPr>
+            <a:spLocks noGrp="1"/>
+          </p:cNvSpPr>
+          <p:nvPr>
+            <p:ph type="ftr" sz="quarter" idx="4"/>
+          </p:nvPr>
+        </p:nvSpPr>
+        <p:spPr>
+          <a:xfrm>
+            <a:off x="0" y="9553575"/>
+            <a:ext cx="3368675" cy="504825"/>
+          </a:xfrm>
+          <a:prstGeom prst="rect">
+            <a:avLst/>
+          </a:prstGeom>
+        </p:spPr>
+        <p:txBody>
+          <a:bodyPr vert="horz" lIns="91440" tIns="45720" rIns="91440" bIns="45720" rtlCol="0" anchor="b"/>
+          <a:lstStyle>
+            <a:lvl1pPr algn="l">
+              <a:defRPr sz="1200"/>
+            </a:lvl1pPr>
+          </a:lstStyle>
+          <a:p>
+            <a:endParaRPr lang="LID4096"/>
+          </a:p>
+        </p:txBody>
+      </p:sp>
+      <p:sp>
+        <p:nvSpPr>
+          <p:cNvPr id="7" name="Slide Number Placeholder 6"/>
+          <p:cNvSpPr>
+            <a:spLocks noGrp="1"/>
+          </p:cNvSpPr>
+          <p:nvPr>
+            <p:ph type="sldNum" sz="quarter" idx="5"/>
+          </p:nvPr>
+        </p:nvSpPr>
+        <p:spPr>
+          <a:xfrm>
+            <a:off x="4402138" y="9553575"/>
+            <a:ext cx="3368675" cy="504825"/>
+          </a:xfrm>
+          <a:prstGeom prst="rect">
+            <a:avLst/>
+          </a:prstGeom>
+        </p:spPr>
+        <p:txBody>
+          <a:bodyPr vert="horz" lIns="91440" tIns="45720" rIns="91440" bIns="45720" rtlCol="0" anchor="b"/>
+          <a:lstStyle>
+            <a:lvl1pPr algn="r">
+              <a:defRPr sz="1200"/>
+            </a:lvl1pPr>
+          </a:lstStyle>
+          <a:p>
+            <a:fld id="{B161048A-9FF3-42A8-9F95-F29AC97CB98C}" type="slidenum">
+              <a:rPr lang="LID4096" smtClean="0"/>
+              <a:t>‹#›</a:t>
+            </a:fld>
+            <a:endParaRPr lang="LID4096"/>
+          </a:p>
+        </p:txBody>
+      </p:sp>
+    </p:spTree>
+    <p:extLst>
+      <p:ext uri="{BB962C8B-B14F-4D97-AF65-F5344CB8AC3E}">
+        <p14:creationId xmlns:p14="http://schemas.microsoft.com/office/powerpoint/2010/main" val="2734787707"/>
+      </p:ext>
+    </p:extLst>
+  </p:cSld>
+  <p:clrMap bg1="lt1" tx1="dk1" bg2="lt2" tx2="dk2" accent1="accent1" accent2="accent2" accent3="accent3" accent4="accent4" accent5="accent5" accent6="accent6" hlink="hlink" folHlink="folHlink"/>
+  <p:notesStyle>
+    <a:lvl1pPr marL="0" algn="l" defTabSz="914400" rtl="0" eaLnBrk="1" latinLnBrk="0" hangingPunct="1">
+      <a:defRPr sz="1200" kern="1200">
+        <a:solidFill>
+          <a:schemeClr val="tx1"/>
+        </a:solidFill>
+        <a:latin typeface="+mn-lt"/>
+        <a:ea typeface="+mn-ea"/>
+        <a:cs typeface="+mn-cs"/>
+      </a:defRPr>
+    </a:lvl1pPr>
+    <a:lvl2pPr marL="457200" algn="l" defTabSz="914400" rtl="0" eaLnBrk="1" latinLnBrk="0" hangingPunct="1">
+      <a:defRPr sz="1200" kern="1200">
+        <a:solidFill>
+          <a:schemeClr val="tx1"/>
+        </a:solidFill>
+        <a:latin typeface="+mn-lt"/>
+        <a:ea typeface="+mn-ea"/>
+        <a:cs typeface="+mn-cs"/>
+      </a:defRPr>
+    </a:lvl2pPr>
+    <a:lvl3pPr marL="914400" algn="l" defTabSz="914400" rtl="0" eaLnBrk="1" latinLnBrk="0" hangingPunct="1">
+      <a:defRPr sz="1200" kern="1200">
+        <a:solidFill>
+          <a:schemeClr val="tx1"/>
+        </a:solidFill>
+        <a:latin typeface="+mn-lt"/>
+        <a:ea typeface="+mn-ea"/>
+        <a:cs typeface="+mn-cs"/>
+      </a:defRPr>
+    </a:lvl3pPr>
+    <a:lvl4pPr marL="1371600" algn="l" defTabSz="914400" rtl="0" eaLnBrk="1" latinLnBrk="0" hangingPunct="1">
+      <a:defRPr sz="1200" kern="1200">
+        <a:solidFill>
+          <a:schemeClr val="tx1"/>
+        </a:solidFill>
+        <a:latin typeface="+mn-lt"/>
+        <a:ea typeface="+mn-ea"/>
+        <a:cs typeface="+mn-cs"/>
+      </a:defRPr>
+    </a:lvl4pPr>
+    <a:lvl5pPr marL="1828800" algn="l" defTabSz="914400" rtl="0" eaLnBrk="1" latinLnBrk="0" hangingPunct="1">
+      <a:defRPr sz="1200" kern="1200">
+        <a:solidFill>
+          <a:schemeClr val="tx1"/>
+        </a:solidFill>
+        <a:latin typeface="+mn-lt"/>
+        <a:ea typeface="+mn-ea"/>
+        <a:cs typeface="+mn-cs"/>
+      </a:defRPr>
+    </a:lvl5pPr>
+    <a:lvl6pPr marL="2286000" algn="l" defTabSz="914400" rtl="0" eaLnBrk="1" latinLnBrk="0" hangingPunct="1">
+      <a:defRPr sz="1200" kern="1200">
+        <a:solidFill>
+          <a:schemeClr val="tx1"/>
+        </a:solidFill>
+        <a:latin typeface="+mn-lt"/>
+        <a:ea typeface="+mn-ea"/>
+        <a:cs typeface="+mn-cs"/>
+      </a:defRPr>
+    </a:lvl6pPr>
+    <a:lvl7pPr marL="2743200" algn="l" defTabSz="914400" rtl="0" eaLnBrk="1" latinLnBrk="0" hangingPunct="1">
+      <a:defRPr sz="1200" kern="1200">
+        <a:solidFill>
+          <a:schemeClr val="tx1"/>
+        </a:solidFill>
+        <a:latin typeface="+mn-lt"/>
+        <a:ea typeface="+mn-ea"/>
+        <a:cs typeface="+mn-cs"/>
+      </a:defRPr>
+    </a:lvl7pPr>
+    <a:lvl8pPr marL="3200400" algn="l" defTabSz="914400" rtl="0" eaLnBrk="1" latinLnBrk="0" hangingPunct="1">
+      <a:defRPr sz="1200" kern="1200">
+        <a:solidFill>
+          <a:schemeClr val="tx1"/>
+        </a:solidFill>
+        <a:latin typeface="+mn-lt"/>
+        <a:ea typeface="+mn-ea"/>
+        <a:cs typeface="+mn-cs"/>
+      </a:defRPr>
+    </a:lvl8pPr>
+    <a:lvl9pPr marL="3657600" algn="l" defTabSz="914400" rtl="0" eaLnBrk="1" latinLnBrk="0" hangingPunct="1">
+      <a:defRPr sz="1200" kern="1200">
+        <a:solidFill>
+          <a:schemeClr val="tx1"/>
+        </a:solidFill>
+        <a:latin typeface="+mn-lt"/>
+        <a:ea typeface="+mn-ea"/>
+        <a:cs typeface="+mn-cs"/>
+      </a:defRPr>
+    </a:lvl9pPr>
+  </p:notesStyle>
+</p:notesMaster>
+</file>
+
+<file path=ppt/notesSlides/notesSlide1.xml><?xml version="1.0" encoding="utf-8"?>
+<p:notes xmlns:a="http://schemas.openxmlformats.org/drawingml/2006/main" xmlns:r="http://schemas.openxmlformats.org/officeDocument/2006/relationships" xmlns:p="http://schemas.openxmlformats.org/presentationml/2006/main">
+  <p:cSld>
+    <p:spTree>
+      <p:nvGrpSpPr>
+        <p:cNvPr id="1" name=""/>
+        <p:cNvGrpSpPr/>
+        <p:nvPr/>
+      </p:nvGrpSpPr>
+      <p:grpSpPr>
+        <a:xfrm>
+          <a:off x="0" y="0"/>
+          <a:ext cx="0" cy="0"/>
+          <a:chOff x="0" y="0"/>
+          <a:chExt cx="0" cy="0"/>
+        </a:xfrm>
+      </p:grpSpPr>
+      <p:sp>
+        <p:nvSpPr>
+          <p:cNvPr id="2" name="Slide Image Placeholder 1"/>
+          <p:cNvSpPr>
+            <a:spLocks noGrp="1" noRot="1" noChangeAspect="1"/>
+          </p:cNvSpPr>
+          <p:nvPr>
+            <p:ph type="sldImg"/>
+          </p:nvPr>
+        </p:nvSpPr>
+        <p:spPr/>
+      </p:sp>
+      <p:sp>
+        <p:nvSpPr>
+          <p:cNvPr id="3" name="Notes Placeholder 2"/>
+          <p:cNvSpPr>
+            <a:spLocks noGrp="1"/>
+          </p:cNvSpPr>
+          <p:nvPr>
+            <p:ph type="body" idx="1"/>
+          </p:nvPr>
+        </p:nvSpPr>
+        <p:spPr/>
+        <p:txBody>
+          <a:bodyPr/>
+          <a:lstStyle/>
+          <a:p>
+            <a:endParaRPr lang="LID4096" dirty="0"/>
+          </a:p>
+        </p:txBody>
+      </p:sp>
+      <p:sp>
+        <p:nvSpPr>
+          <p:cNvPr id="4" name="Slide Number Placeholder 3"/>
+          <p:cNvSpPr>
+            <a:spLocks noGrp="1"/>
+          </p:cNvSpPr>
+          <p:nvPr>
+            <p:ph type="sldNum" sz="quarter" idx="5"/>
+          </p:nvPr>
+        </p:nvSpPr>
+        <p:spPr/>
+        <p:txBody>
+          <a:bodyPr/>
+          <a:lstStyle/>
+          <a:p>
+            <a:fld id="{B161048A-9FF3-42A8-9F95-F29AC97CB98C}" type="slidenum">
+              <a:rPr lang="LID4096" smtClean="0"/>
+              <a:t>6</a:t>
+            </a:fld>
+            <a:endParaRPr lang="LID4096"/>
+          </a:p>
+        </p:txBody>
+      </p:sp>
+    </p:spTree>
+    <p:extLst>
+      <p:ext uri="{BB962C8B-B14F-4D97-AF65-F5344CB8AC3E}">
+        <p14:creationId xmlns:p14="http://schemas.microsoft.com/office/powerpoint/2010/main" val="328508359"/>
+      </p:ext>
+    </p:extLst>
+  </p:cSld>
+  <p:clrMapOvr>
+    <a:masterClrMapping/>
+  </p:clrMapOvr>
+</p:notes>
 </file>
 
 <file path=ppt/slideLayouts/slideLayout1.xml><?xml version="1.0" encoding="utf-8"?>
@@ -7671,7 +8110,7 @@
               </a:lnSpc>
             </a:pPr>
             <a:r>
-              <a:rPr lang="en-US" sz="1800" b="0" u="none" strike="noStrike">
+              <a:rPr lang="en-US" sz="1800" b="0" u="none" strike="noStrike" dirty="0">
                 <a:solidFill>
                   <a:srgbClr val="FF0000"/>
                 </a:solidFill>
@@ -7681,7 +8120,7 @@
               </a:rPr>
               <a:t>#ANCLOCK</a:t>
             </a:r>
-            <a:endParaRPr lang="en-US" sz="1800" b="0" u="none" strike="noStrike">
+            <a:endParaRPr lang="en-US" sz="1800" b="0" u="none" strike="noStrike" dirty="0">
               <a:solidFill>
                 <a:srgbClr val="000000"/>
               </a:solidFill>
@@ -7923,7 +8362,7 @@
               </a:lnSpc>
             </a:pPr>
             <a:r>
-              <a:rPr lang="en-US" sz="1800" b="1" u="none" strike="noStrike">
+              <a:rPr lang="en-US" sz="1800" b="1" u="none" strike="noStrike" dirty="0">
                 <a:solidFill>
                   <a:schemeClr val="dk1"/>
                 </a:solidFill>
@@ -7933,7 +8372,7 @@
               </a:rPr>
               <a:t>#DAYZMANIM</a:t>
             </a:r>
-            <a:endParaRPr lang="en-US" sz="1800" b="0" u="none" strike="noStrike">
+            <a:endParaRPr lang="en-US" sz="1800" b="0" u="none" strike="noStrike" dirty="0">
               <a:solidFill>
                 <a:srgbClr val="000000"/>
               </a:solidFill>
@@ -9538,7 +9977,7 @@
               </a:lnSpc>
             </a:pPr>
             <a:r>
-              <a:rPr lang="en-US" sz="2400" b="1" u="none" strike="noStrike">
+              <a:rPr lang="en-US" sz="2400" b="1" u="none" strike="noStrike" dirty="0">
                 <a:solidFill>
                   <a:srgbClr val="606279"/>
                 </a:solidFill>
@@ -9549,99 +9988,7 @@
               </a:rPr>
               <a:t>#PARSHA</a:t>
             </a:r>
-            <a:endParaRPr lang="en-US" sz="2400" b="0" u="none" strike="noStrike">
-              <a:solidFill>
-                <a:srgbClr val="000000"/>
-              </a:solidFill>
-              <a:effectLst/>
-              <a:uFillTx/>
-              <a:latin typeface="Arial"/>
-            </a:endParaRPr>
-          </a:p>
-        </p:txBody>
-      </p:sp>
-      <p:sp>
-        <p:nvSpPr>
-          <p:cNvPr id="93" name="Rectangle 2"/>
-          <p:cNvSpPr/>
-          <p:nvPr/>
-        </p:nvSpPr>
-        <p:spPr>
-          <a:xfrm>
-            <a:off x="530280" y="2971800"/>
-            <a:ext cx="3583800" cy="943560"/>
-          </a:xfrm>
-          <a:prstGeom prst="rect">
-            <a:avLst/>
-          </a:prstGeom>
-          <a:solidFill>
-            <a:srgbClr val="FFFFFF"/>
-          </a:solidFill>
-          <a:ln w="0">
-            <a:noFill/>
-          </a:ln>
-        </p:spPr>
-        <p:style>
-          <a:lnRef idx="0">
-            <a:scrgbClr r="0" g="0" b="0"/>
-          </a:lnRef>
-          <a:fillRef idx="0">
-            <a:scrgbClr r="0" g="0" b="0"/>
-          </a:fillRef>
-          <a:effectRef idx="0">
-            <a:scrgbClr r="0" g="0" b="0"/>
-          </a:effectRef>
-          <a:fontRef idx="minor"/>
-        </p:style>
-        <p:txBody>
-          <a:bodyPr lIns="90000" tIns="45000" rIns="90000" bIns="45000" anchor="t">
-            <a:spAutoFit/>
-          </a:bodyPr>
-          <a:lstStyle/>
-          <a:p>
-            <a:pPr algn="ctr" defTabSz="914400" rtl="1">
-              <a:lnSpc>
-                <a:spcPct val="100000"/>
-              </a:lnSpc>
-            </a:pPr>
-            <a:r>
-              <a:rPr lang="he-IL" sz="2800" b="1" u="none" strike="noStrike" dirty="0">
-                <a:solidFill>
-                  <a:schemeClr val="accent1"/>
-                </a:solidFill>
-                <a:effectLst/>
-                <a:uFillTx/>
-                <a:latin typeface="Calibri"/>
-              </a:rPr>
-              <a:t>זמני חול:</a:t>
-            </a:r>
-            <a:endParaRPr lang="en-US" sz="2800" b="0" u="none" strike="noStrike" dirty="0">
-              <a:solidFill>
-                <a:srgbClr val="000000"/>
-              </a:solidFill>
-              <a:effectLst/>
-              <a:uFillTx/>
-              <a:latin typeface="Arial"/>
-            </a:endParaRPr>
-          </a:p>
-          <a:p>
-            <a:pPr algn="ctr" defTabSz="914400">
-              <a:lnSpc>
-                <a:spcPct val="100000"/>
-              </a:lnSpc>
-            </a:pPr>
-            <a:r>
-              <a:rPr lang="en-US" sz="2800" b="1" u="none" strike="noStrike" dirty="0">
-                <a:solidFill>
-                  <a:schemeClr val="accent1"/>
-                </a:solidFill>
-                <a:effectLst/>
-                <a:uFillTx/>
-                <a:latin typeface="Calibri"/>
-              </a:rPr>
-              <a:t>#CMD:&lt;shabbos&gt;</a:t>
-            </a:r>
-            <a:endParaRPr lang="en-US" sz="2800" b="0" u="none" strike="noStrike" dirty="0">
+            <a:endParaRPr lang="en-US" sz="2400" b="0" u="none" strike="noStrike" dirty="0">
               <a:solidFill>
                 <a:srgbClr val="000000"/>
               </a:solidFill>
@@ -11232,6 +11579,145 @@
 <file path=ppt/slides/slide4.xml><?xml version="1.0" encoding="utf-8"?>
 <p:sld xmlns:a="http://schemas.openxmlformats.org/drawingml/2006/main" xmlns:r="http://schemas.openxmlformats.org/officeDocument/2006/relationships" xmlns:p="http://schemas.openxmlformats.org/presentationml/2006/main">
   <p:cSld>
+    <p:spTree>
+      <p:nvGrpSpPr>
+        <p:cNvPr id="1" name=""/>
+        <p:cNvGrpSpPr/>
+        <p:nvPr/>
+      </p:nvGrpSpPr>
+      <p:grpSpPr>
+        <a:xfrm>
+          <a:off x="0" y="0"/>
+          <a:ext cx="0" cy="0"/>
+          <a:chOff x="0" y="0"/>
+          <a:chExt cx="0" cy="0"/>
+        </a:xfrm>
+      </p:grpSpPr>
+      <p:sp>
+        <p:nvSpPr>
+          <p:cNvPr id="4" name="TextBox 3">
+            <a:extLst>
+              <a:ext uri="{FF2B5EF4-FFF2-40B4-BE49-F238E27FC236}">
+                <a16:creationId xmlns:a16="http://schemas.microsoft.com/office/drawing/2014/main" id="{10BDF163-A326-A48D-78C5-8A59F580915C}"/>
+              </a:ext>
+            </a:extLst>
+          </p:cNvPr>
+          <p:cNvSpPr txBox="1"/>
+          <p:nvPr/>
+        </p:nvSpPr>
+        <p:spPr>
+          <a:xfrm>
+            <a:off x="179294" y="98612"/>
+            <a:ext cx="11707906" cy="2031325"/>
+          </a:xfrm>
+          <a:prstGeom prst="rect">
+            <a:avLst/>
+          </a:prstGeom>
+          <a:noFill/>
+        </p:spPr>
+        <p:txBody>
+          <a:bodyPr wrap="square" rtlCol="0">
+            <a:spAutoFit/>
+          </a:bodyPr>
+          <a:lstStyle/>
+          <a:p>
+            <a:r>
+              <a:rPr lang="en-US" dirty="0"/>
+              <a:t>#CONFIG:{</a:t>
+            </a:r>
+          </a:p>
+          <a:p>
+            <a:r>
+              <a:rPr lang="en-US" dirty="0"/>
+              <a:t>"clock_tick_seconds": 1.0,</a:t>
+            </a:r>
+          </a:p>
+          <a:p>
+            <a:r>
+              <a:rPr lang="en-US" dirty="0"/>
+              <a:t>"</a:t>
+            </a:r>
+            <a:r>
+              <a:rPr lang="he-IL" dirty="0"/>
+              <a:t>_</a:t>
+            </a:r>
+            <a:r>
+              <a:rPr lang="en-US" dirty="0" err="1"/>
+              <a:t>mock_start_datetime</a:t>
+            </a:r>
+            <a:r>
+              <a:rPr lang="en-US" dirty="0"/>
+              <a:t>": "2026-03-28T14:30:00",</a:t>
+            </a:r>
+          </a:p>
+          <a:p>
+            <a:r>
+              <a:rPr lang="en-US" dirty="0"/>
+              <a:t>"</a:t>
+            </a:r>
+            <a:r>
+              <a:rPr lang="en-US" dirty="0" err="1"/>
+              <a:t>debug_repaint_lock_controllers</a:t>
+            </a:r>
+            <a:r>
+              <a:rPr lang="en-US" dirty="0"/>
+              <a:t>": false,</a:t>
+            </a:r>
+          </a:p>
+          <a:p>
+            <a:r>
+              <a:rPr lang="" dirty="0"/>
+              <a:t>"debug_skip_slideshow": true,</a:t>
+            </a:r>
+            <a:endParaRPr lang="en-US" dirty="0"/>
+          </a:p>
+          <a:p>
+            <a:r>
+              <a:rPr lang="en-US" dirty="0"/>
+              <a:t>"</a:t>
+            </a:r>
+            <a:r>
+              <a:rPr lang="en-US" dirty="0" err="1"/>
+              <a:t>clock_style</a:t>
+            </a:r>
+            <a:r>
+              <a:rPr lang="en-US" dirty="0"/>
+              <a:t>":{</a:t>
+            </a:r>
+            <a:r>
+              <a:rPr lang="" dirty="0"/>
+              <a:t>"hour_color": 0</a:t>
+            </a:r>
+            <a:r>
+              <a:rPr lang="en-US" dirty="0"/>
+              <a:t>}</a:t>
+            </a:r>
+          </a:p>
+          <a:p>
+            <a:r>
+              <a:rPr lang="en-US" dirty="0"/>
+              <a:t>}</a:t>
+            </a:r>
+            <a:endParaRPr lang="LID4096" dirty="0"/>
+          </a:p>
+        </p:txBody>
+      </p:sp>
+    </p:spTree>
+    <p:extLst>
+      <p:ext uri="{BB962C8B-B14F-4D97-AF65-F5344CB8AC3E}">
+        <p14:creationId xmlns:p14="http://schemas.microsoft.com/office/powerpoint/2010/main" val="3506289245"/>
+      </p:ext>
+    </p:extLst>
+  </p:cSld>
+  <p:clrMapOvr>
+    <a:masterClrMapping/>
+  </p:clrMapOvr>
+</p:sld>
+</file>
+
+<file path=ppt/slides/slide5.xml><?xml version="1.0" encoding="utf-8"?>
+<p:sld xmlns:a="http://schemas.openxmlformats.org/drawingml/2006/main" xmlns:r="http://schemas.openxmlformats.org/officeDocument/2006/relationships" xmlns:p="http://schemas.openxmlformats.org/presentationml/2006/main">
+  <p:cSld>
     <p:bg>
       <p:bgPr>
         <a:blipFill dpi="0" rotWithShape="1">
@@ -11346,8 +11832,8 @@
         </p:nvSpPr>
         <p:spPr>
           <a:xfrm>
-            <a:off x="7256071" y="394529"/>
-            <a:ext cx="4516881" cy="460211"/>
+            <a:off x="7976846" y="179873"/>
+            <a:ext cx="4158004" cy="839302"/>
           </a:xfrm>
           <a:prstGeom prst="rect">
             <a:avLst/>
@@ -11370,18 +11856,18 @@
           <a:fontRef idx="minor"/>
         </p:style>
         <p:txBody>
-          <a:bodyPr wrap="square" lIns="90000" tIns="45000" rIns="90000" bIns="45000" anchor="t">
-            <a:spAutoFit/>
+          <a:bodyPr wrap="square" lIns="90000" tIns="45000" rIns="90000" bIns="45000" anchor="ctr" anchorCtr="0">
+            <a:normAutofit/>
           </a:bodyPr>
           <a:lstStyle/>
           <a:p>
-            <a:pPr algn="r" defTabSz="914400" rtl="1">
+            <a:pPr algn="ctr" defTabSz="914400" rtl="1">
               <a:lnSpc>
                 <a:spcPct val="100000"/>
               </a:lnSpc>
             </a:pPr>
             <a:r>
-              <a:rPr lang="en-US" sz="2400" b="1" u="none" strike="noStrike" dirty="0">
+              <a:rPr lang="en-US" sz="2800" b="1" u="none" strike="noStrike" dirty="0">
                 <a:solidFill>
                   <a:schemeClr val="dk1"/>
                 </a:solidFill>
@@ -11392,15 +11878,18 @@
               </a:rPr>
               <a:t>#HEBDATE</a:t>
             </a:r>
-            <a:endParaRPr lang="en-US" sz="2400" b="0" u="none" strike="noStrike" dirty="0">
-              <a:solidFill>
-                <a:srgbClr val="000000"/>
-              </a:solidFill>
-              <a:effectLst/>
-              <a:uFillTx/>
-              <a:latin typeface="Arial" panose="020B0604020202020204" pitchFamily="34" charset="0"/>
-              <a:cs typeface="Arial" panose="020B0604020202020204" pitchFamily="34" charset="0"/>
-            </a:endParaRPr>
+            <a:r>
+              <a:rPr lang="en-US" sz="2400" b="0" u="none" strike="noStrike" dirty="0">
+                <a:solidFill>
+                  <a:srgbClr val="000000"/>
+                </a:solidFill>
+                <a:effectLst/>
+                <a:uFillTx/>
+                <a:latin typeface="Arial" panose="020B0604020202020204" pitchFamily="34" charset="0"/>
+                <a:cs typeface="Arial" panose="020B0604020202020204" pitchFamily="34" charset="0"/>
+              </a:rPr>
+              <a:t>#DAYINFO:n</a:t>
+            </a:r>
           </a:p>
         </p:txBody>
       </p:sp>
@@ -11428,6 +11917,7 @@
           <a:ln w="0">
             <a:noFill/>
           </a:ln>
+          <a:effectLst/>
         </p:spPr>
         <p:style>
           <a:lnRef idx="0">
@@ -11498,6 +11988,7 @@
           <a:ln w="0">
             <a:noFill/>
           </a:ln>
+          <a:effectLst/>
         </p:spPr>
         <p:style>
           <a:lnRef idx="0">
@@ -11558,7 +12049,7 @@
         </p:nvSpPr>
         <p:spPr>
           <a:xfrm>
-            <a:off x="249382" y="3156986"/>
+            <a:off x="249382" y="3537986"/>
             <a:ext cx="3583800" cy="521766"/>
           </a:xfrm>
           <a:prstGeom prst="rect">
@@ -11568,6 +12059,7 @@
           <a:ln w="0">
             <a:noFill/>
           </a:ln>
+          <a:effectLst/>
         </p:spPr>
         <p:style>
           <a:lnRef idx="0">
@@ -11628,8 +12120,8 @@
         </p:nvSpPr>
         <p:spPr>
           <a:xfrm>
-            <a:off x="8482817" y="1791011"/>
-            <a:ext cx="3338494" cy="1075764"/>
+            <a:off x="8482817" y="1791010"/>
+            <a:ext cx="3338494" cy="4771281"/>
           </a:xfrm>
           <a:prstGeom prst="rect">
             <a:avLst/>
@@ -11638,6 +12130,7 @@
           <a:ln w="0">
             <a:noFill/>
           </a:ln>
+          <a:effectLst/>
         </p:spPr>
         <p:style>
           <a:lnRef idx="0">
@@ -11653,7 +12146,7 @@
         </p:style>
         <p:txBody>
           <a:bodyPr wrap="square" lIns="90000" tIns="45000" rIns="90000" bIns="45000" anchor="t">
-            <a:spAutoFit/>
+            <a:normAutofit/>
           </a:bodyPr>
           <a:lstStyle/>
           <a:p>
@@ -11663,7 +12156,7 @@
               </a:spcAft>
             </a:pPr>
             <a:r>
-              <a:rPr lang="he-IL" sz="3200" b="1" u="none" strike="noStrike">
+              <a:rPr lang="he-IL" sz="3200" b="1" u="none" strike="noStrike" dirty="0">
                 <a:effectLst/>
                 <a:uFillTx/>
                 <a:latin typeface="Calibri"/>
@@ -11671,7 +12164,7 @@
               <a:t>#</a:t>
             </a:r>
             <a:r>
-              <a:rPr lang="en-US" sz="3200" b="1" u="none" strike="noStrike">
+              <a:rPr lang="en-US" sz="3200" b="1" u="none" strike="noStrike" dirty="0">
                 <a:effectLst/>
                 <a:uFillTx/>
                 <a:latin typeface="Calibri"/>
@@ -11679,7 +12172,7 @@
               <a:t>CMD</a:t>
             </a:r>
             <a:r>
-              <a:rPr lang="he-IL" sz="3200" b="1" u="none" strike="noStrike">
+              <a:rPr lang="he-IL" sz="3200" b="1" u="none" strike="noStrike" dirty="0">
                 <a:effectLst/>
                 <a:uFillTx/>
                 <a:latin typeface="Calibri"/>
@@ -11687,23 +12180,15 @@
               <a:t>:&lt;</a:t>
             </a:r>
             <a:r>
-              <a:rPr lang="en-US" sz="3200" b="1" u="none" strike="noStrike">
-                <a:effectLst/>
-                <a:uFillTx/>
-                <a:latin typeface="Calibri"/>
-              </a:rPr>
-              <a:t>chol</a:t>
-            </a:r>
-            <a:r>
               <a:rPr lang="en-US" sz="3200" b="1" u="none" strike="noStrike" dirty="0" err="1">
                 <a:effectLst/>
                 <a:uFillTx/>
                 <a:latin typeface="Calibri"/>
               </a:rPr>
-              <a:t>_desc</a:t>
-            </a:r>
-            <a:r>
-              <a:rPr lang="he-IL" sz="3200" b="1" u="none" strike="noStrike">
+              <a:t>chol_desc</a:t>
+            </a:r>
+            <a:r>
+              <a:rPr lang="he-IL" sz="3200" b="1" u="none" strike="noStrike" dirty="0">
                 <a:effectLst/>
                 <a:uFillTx/>
                 <a:latin typeface="Calibri"/>
@@ -11732,8 +12217,8 @@
         </p:nvSpPr>
         <p:spPr>
           <a:xfrm>
-            <a:off x="8482817" y="1789193"/>
-            <a:ext cx="3338493" cy="1075764"/>
+            <a:off x="8482817" y="1789192"/>
+            <a:ext cx="3338493" cy="4771281"/>
           </a:xfrm>
           <a:prstGeom prst="rect">
             <a:avLst/>
@@ -11742,6 +12227,7 @@
           <a:ln w="0">
             <a:noFill/>
           </a:ln>
+          <a:effectLst/>
         </p:spPr>
         <p:style>
           <a:lnRef idx="0">
@@ -11757,7 +12243,7 @@
         </p:style>
         <p:txBody>
           <a:bodyPr wrap="square" lIns="90000" tIns="45000" rIns="90000" bIns="45000" anchor="t">
-            <a:spAutoFit/>
+            <a:normAutofit/>
           </a:bodyPr>
           <a:lstStyle/>
           <a:p>
@@ -11767,7 +12253,7 @@
               </a:spcAft>
             </a:pPr>
             <a:r>
-              <a:rPr lang="he-IL" sz="3200" b="1" u="none" strike="noStrike">
+              <a:rPr lang="he-IL" sz="3200" u="none" strike="noStrike" dirty="0">
                 <a:effectLst/>
                 <a:uFillTx/>
                 <a:latin typeface="Calibri"/>
@@ -11775,7 +12261,7 @@
               <a:t>#</a:t>
             </a:r>
             <a:r>
-              <a:rPr lang="en-US" sz="3200" b="1" u="none" strike="noStrike">
+              <a:rPr lang="en-US" sz="3200" u="none" strike="noStrike" dirty="0">
                 <a:effectLst/>
                 <a:uFillTx/>
                 <a:latin typeface="Calibri"/>
@@ -11783,7 +12269,7 @@
               <a:t>CMD</a:t>
             </a:r>
             <a:r>
-              <a:rPr lang="he-IL" sz="3200" b="1" u="none" strike="noStrike">
+              <a:rPr lang="he-IL" sz="3200" u="none" strike="noStrike" dirty="0">
                 <a:effectLst/>
                 <a:uFillTx/>
                 <a:latin typeface="Calibri"/>
@@ -11791,30 +12277,22 @@
               <a:t>:&lt;</a:t>
             </a:r>
             <a:r>
-              <a:rPr lang="en-US" sz="3200" b="1" u="none" strike="noStrike">
-                <a:effectLst/>
-                <a:uFillTx/>
-                <a:latin typeface="Calibri"/>
-              </a:rPr>
-              <a:t>chol</a:t>
-            </a:r>
-            <a:r>
-              <a:rPr lang="en-US" sz="3200" b="1" u="none" strike="noStrike" dirty="0" err="1">
-                <a:effectLst/>
-                <a:uFillTx/>
-                <a:latin typeface="Calibri"/>
-              </a:rPr>
-              <a:t>_times</a:t>
-            </a:r>
-            <a:r>
-              <a:rPr lang="he-IL" sz="3200" b="1" u="none" strike="noStrike">
+              <a:rPr lang="en-US" sz="3200" u="none" strike="noStrike" dirty="0" err="1">
+                <a:effectLst/>
+                <a:uFillTx/>
+                <a:latin typeface="Calibri"/>
+              </a:rPr>
+              <a:t>chol_times</a:t>
+            </a:r>
+            <a:r>
+              <a:rPr lang="he-IL" sz="3200" u="none" strike="noStrike" dirty="0">
                 <a:effectLst/>
                 <a:uFillTx/>
                 <a:latin typeface="Calibri"/>
               </a:rPr>
               <a:t>&gt;</a:t>
             </a:r>
-            <a:endParaRPr lang="en-US" sz="3200" b="1" u="none" strike="noStrike" dirty="0">
+            <a:endParaRPr lang="en-US" sz="3200" u="none" strike="noStrike" dirty="0">
               <a:effectLst/>
               <a:uFillTx/>
               <a:latin typeface="Arial"/>
@@ -11836,8 +12314,8 @@
         </p:nvSpPr>
         <p:spPr>
           <a:xfrm>
-            <a:off x="249382" y="1761509"/>
-            <a:ext cx="3583800" cy="1475873"/>
+            <a:off x="249382" y="1774209"/>
+            <a:ext cx="3583800" cy="1666310"/>
           </a:xfrm>
           <a:prstGeom prst="rect">
             <a:avLst/>
@@ -11846,6 +12324,7 @@
           <a:ln w="0">
             <a:noFill/>
           </a:ln>
+          <a:effectLst/>
         </p:spPr>
         <p:style>
           <a:lnRef idx="0">
@@ -11867,7 +12346,7 @@
           <a:p>
             <a:pPr algn="ctr" defTabSz="914400" rtl="1">
               <a:lnSpc>
-                <a:spcPct val="100000"/>
+                <a:spcPts val="2500"/>
               </a:lnSpc>
             </a:pPr>
             <a:r>
@@ -11959,7 +12438,7 @@
           <a:p>
             <a:pPr algn="ctr" defTabSz="914400" rtl="1">
               <a:lnSpc>
-                <a:spcPct val="100000"/>
+                <a:spcPts val="2500"/>
               </a:lnSpc>
             </a:pPr>
             <a:r>
@@ -11982,15 +12461,13 @@
               </a:rPr>
               <a:t>#SUNSET</a:t>
             </a:r>
-            <a:br>
-              <a:rPr lang="en-US" dirty="0">
-                <a:solidFill>
-                  <a:srgbClr val="000000"/>
-                </a:solidFill>
-                <a:latin typeface="Arial" panose="020B0604020202020204" pitchFamily="34" charset="0"/>
-                <a:cs typeface="Arial" panose="020B0604020202020204" pitchFamily="34" charset="0"/>
-              </a:rPr>
-            </a:br>
+          </a:p>
+          <a:p>
+            <a:pPr algn="ctr" defTabSz="914400" rtl="1">
+              <a:lnSpc>
+                <a:spcPts val="2500"/>
+              </a:lnSpc>
+            </a:pPr>
             <a:r>
               <a:rPr lang="he-IL" dirty="0">
                 <a:solidFill>
@@ -12037,8 +12514,8 @@
         </p:nvSpPr>
         <p:spPr>
           <a:xfrm>
-            <a:off x="249382" y="3575186"/>
-            <a:ext cx="3583800" cy="337100"/>
+            <a:off x="249382" y="3981586"/>
+            <a:ext cx="3583800" cy="2578887"/>
           </a:xfrm>
           <a:prstGeom prst="rect">
             <a:avLst/>
@@ -12047,6 +12524,7 @@
           <a:ln w="0">
             <a:noFill/>
           </a:ln>
+          <a:effectLst/>
         </p:spPr>
         <p:style>
           <a:lnRef idx="0">
@@ -12062,32 +12540,235 @@
         </p:style>
         <p:txBody>
           <a:bodyPr lIns="90000" tIns="45000" rIns="90000" bIns="45000" anchor="t">
-            <a:spAutoFit/>
+            <a:normAutofit/>
           </a:bodyPr>
           <a:lstStyle/>
           <a:p>
             <a:pPr algn="ctr" defTabSz="914400" rtl="1">
               <a:lnSpc>
-                <a:spcPct val="100000"/>
-              </a:lnSpc>
-            </a:pPr>
-            <a:r>
-              <a:rPr lang="en-US" sz="1200" u="none" strike="noStrike" dirty="0">
+                <a:spcPts val="2400"/>
+              </a:lnSpc>
+            </a:pPr>
+            <a:r>
+              <a:rPr lang="he-IL" b="1" u="none" strike="noStrike" dirty="0">
                 <a:effectLst/>
                 <a:uFillTx/>
                 <a:latin typeface="Arial" panose="020B0604020202020204" pitchFamily="34" charset="0"/>
                 <a:cs typeface="Arial" panose="020B0604020202020204" pitchFamily="34" charset="0"/>
               </a:rPr>
-              <a:t>#</a:t>
-            </a:r>
-            <a:r>
-              <a:rPr lang="en-US" sz="1600" u="none" strike="noStrike" dirty="0">
+              <a:t>בבלי:</a:t>
+            </a:r>
+            <a:r>
+              <a:rPr lang="he-IL" u="none" strike="noStrike" dirty="0">
                 <a:effectLst/>
                 <a:uFillTx/>
                 <a:latin typeface="Arial" panose="020B0604020202020204" pitchFamily="34" charset="0"/>
                 <a:cs typeface="Arial" panose="020B0604020202020204" pitchFamily="34" charset="0"/>
               </a:rPr>
-              <a:t>LIMUDYOMI</a:t>
+              <a:t> </a:t>
+            </a:r>
+            <a:r>
+              <a:rPr lang="en-US" u="none" strike="noStrike" dirty="0">
+                <a:effectLst/>
+                <a:uFillTx/>
+                <a:latin typeface="Arial" panose="020B0604020202020204" pitchFamily="34" charset="0"/>
+                <a:cs typeface="Arial" panose="020B0604020202020204" pitchFamily="34" charset="0"/>
+              </a:rPr>
+              <a:t>#DAFYOMIBV</a:t>
+            </a:r>
+          </a:p>
+          <a:p>
+            <a:pPr algn="ctr" defTabSz="914400" rtl="1">
+              <a:lnSpc>
+                <a:spcPts val="2400"/>
+              </a:lnSpc>
+            </a:pPr>
+            <a:r>
+              <a:rPr lang="he-IL" b="1" u="none" strike="noStrike" dirty="0">
+                <a:effectLst/>
+                <a:uFillTx/>
+                <a:latin typeface="Arial" panose="020B0604020202020204" pitchFamily="34" charset="0"/>
+                <a:cs typeface="Arial" panose="020B0604020202020204" pitchFamily="34" charset="0"/>
+              </a:rPr>
+              <a:t>ירושלמי:</a:t>
+            </a:r>
+            <a:r>
+              <a:rPr lang="he-IL" u="none" strike="noStrike" dirty="0">
+                <a:effectLst/>
+                <a:uFillTx/>
+                <a:latin typeface="Arial" panose="020B0604020202020204" pitchFamily="34" charset="0"/>
+                <a:cs typeface="Arial" panose="020B0604020202020204" pitchFamily="34" charset="0"/>
+              </a:rPr>
+              <a:t> </a:t>
+            </a:r>
+            <a:r>
+              <a:rPr lang="en-US" u="none" strike="noStrike" dirty="0">
+                <a:effectLst/>
+                <a:uFillTx/>
+                <a:latin typeface="Arial" panose="020B0604020202020204" pitchFamily="34" charset="0"/>
+                <a:cs typeface="Arial" panose="020B0604020202020204" pitchFamily="34" charset="0"/>
+              </a:rPr>
+              <a:t>#DAFYOMIYR</a:t>
+            </a:r>
+            <a:endParaRPr lang="he-IL" u="none" strike="noStrike" dirty="0">
+              <a:effectLst/>
+              <a:uFillTx/>
+              <a:latin typeface="Arial" panose="020B0604020202020204" pitchFamily="34" charset="0"/>
+              <a:cs typeface="Arial" panose="020B0604020202020204" pitchFamily="34" charset="0"/>
+            </a:endParaRPr>
+          </a:p>
+          <a:p>
+            <a:pPr algn="ctr" defTabSz="914400" rtl="1">
+              <a:lnSpc>
+                <a:spcPts val="2400"/>
+              </a:lnSpc>
+            </a:pPr>
+            <a:r>
+              <a:rPr lang="he-IL" b="1" u="none" strike="noStrike" dirty="0">
+                <a:effectLst/>
+                <a:uFillTx/>
+                <a:latin typeface="Arial" panose="020B0604020202020204" pitchFamily="34" charset="0"/>
+                <a:cs typeface="Arial" panose="020B0604020202020204" pitchFamily="34" charset="0"/>
+              </a:rPr>
+              <a:t>משניות:</a:t>
+            </a:r>
+            <a:r>
+              <a:rPr lang="he-IL" u="none" strike="noStrike" dirty="0">
+                <a:effectLst/>
+                <a:uFillTx/>
+                <a:latin typeface="Arial" panose="020B0604020202020204" pitchFamily="34" charset="0"/>
+                <a:cs typeface="Arial" panose="020B0604020202020204" pitchFamily="34" charset="0"/>
+              </a:rPr>
+              <a:t> </a:t>
+            </a:r>
+            <a:r>
+              <a:rPr lang="en-US" u="none" strike="noStrike" dirty="0">
+                <a:effectLst/>
+                <a:uFillTx/>
+                <a:latin typeface="Arial" panose="020B0604020202020204" pitchFamily="34" charset="0"/>
+                <a:cs typeface="Arial" panose="020B0604020202020204" pitchFamily="34" charset="0"/>
+              </a:rPr>
+              <a:t>#MISHNA</a:t>
+            </a:r>
+            <a:endParaRPr lang="he-IL" u="none" strike="noStrike" dirty="0">
+              <a:effectLst/>
+              <a:uFillTx/>
+              <a:latin typeface="Arial" panose="020B0604020202020204" pitchFamily="34" charset="0"/>
+              <a:cs typeface="Arial" panose="020B0604020202020204" pitchFamily="34" charset="0"/>
+            </a:endParaRPr>
+          </a:p>
+          <a:p>
+            <a:pPr algn="ctr" defTabSz="914400" rtl="1">
+              <a:lnSpc>
+                <a:spcPts val="2400"/>
+              </a:lnSpc>
+            </a:pPr>
+            <a:r>
+              <a:rPr lang="he-IL" b="1" u="none" strike="noStrike" dirty="0">
+                <a:effectLst/>
+                <a:uFillTx/>
+                <a:latin typeface="Arial" panose="020B0604020202020204" pitchFamily="34" charset="0"/>
+                <a:cs typeface="Arial" panose="020B0604020202020204" pitchFamily="34" charset="0"/>
+              </a:rPr>
+              <a:t>הלכה:</a:t>
+            </a:r>
+            <a:r>
+              <a:rPr lang="he-IL" u="none" strike="noStrike" dirty="0">
+                <a:effectLst/>
+                <a:uFillTx/>
+                <a:latin typeface="Arial" panose="020B0604020202020204" pitchFamily="34" charset="0"/>
+                <a:cs typeface="Arial" panose="020B0604020202020204" pitchFamily="34" charset="0"/>
+              </a:rPr>
+              <a:t> </a:t>
+            </a:r>
+            <a:r>
+              <a:rPr lang="en-US" u="none" strike="noStrike" dirty="0">
+                <a:effectLst/>
+                <a:uFillTx/>
+                <a:latin typeface="Arial" panose="020B0604020202020204" pitchFamily="34" charset="0"/>
+                <a:cs typeface="Arial" panose="020B0604020202020204" pitchFamily="34" charset="0"/>
+              </a:rPr>
+              <a:t>#HALACHA</a:t>
+            </a:r>
+            <a:endParaRPr lang="he-IL" u="none" strike="noStrike" dirty="0">
+              <a:effectLst/>
+              <a:uFillTx/>
+              <a:latin typeface="Arial" panose="020B0604020202020204" pitchFamily="34" charset="0"/>
+              <a:cs typeface="Arial" panose="020B0604020202020204" pitchFamily="34" charset="0"/>
+            </a:endParaRPr>
+          </a:p>
+          <a:p>
+            <a:pPr algn="ctr" defTabSz="914400" rtl="1">
+              <a:lnSpc>
+                <a:spcPts val="2400"/>
+              </a:lnSpc>
+            </a:pPr>
+            <a:r>
+              <a:rPr lang="he-IL" b="1" u="none" strike="noStrike" dirty="0">
+                <a:effectLst/>
+                <a:uFillTx/>
+                <a:latin typeface="Arial" panose="020B0604020202020204" pitchFamily="34" charset="0"/>
+                <a:cs typeface="Arial" panose="020B0604020202020204" pitchFamily="34" charset="0"/>
+              </a:rPr>
+              <a:t>רמב"ם:</a:t>
+            </a:r>
+            <a:r>
+              <a:rPr lang="he-IL" u="none" strike="noStrike" dirty="0">
+                <a:effectLst/>
+                <a:uFillTx/>
+                <a:latin typeface="Arial" panose="020B0604020202020204" pitchFamily="34" charset="0"/>
+                <a:cs typeface="Arial" panose="020B0604020202020204" pitchFamily="34" charset="0"/>
+              </a:rPr>
+              <a:t> </a:t>
+            </a:r>
+            <a:r>
+              <a:rPr lang="en-US" u="none" strike="noStrike" dirty="0">
+                <a:effectLst/>
+                <a:uFillTx/>
+                <a:latin typeface="Arial" panose="020B0604020202020204" pitchFamily="34" charset="0"/>
+                <a:cs typeface="Arial" panose="020B0604020202020204" pitchFamily="34" charset="0"/>
+              </a:rPr>
+              <a:t>#RAMBAM</a:t>
+            </a:r>
+            <a:endParaRPr lang="he-IL" u="none" strike="noStrike" dirty="0">
+              <a:effectLst/>
+              <a:uFillTx/>
+              <a:latin typeface="Arial" panose="020B0604020202020204" pitchFamily="34" charset="0"/>
+              <a:cs typeface="Arial" panose="020B0604020202020204" pitchFamily="34" charset="0"/>
+            </a:endParaRPr>
+          </a:p>
+          <a:p>
+            <a:pPr algn="ctr" defTabSz="914400" rtl="1">
+              <a:lnSpc>
+                <a:spcPts val="2400"/>
+              </a:lnSpc>
+            </a:pPr>
+            <a:r>
+              <a:rPr lang="he-IL" b="1" u="none" strike="noStrike" dirty="0">
+                <a:effectLst/>
+                <a:uFillTx/>
+                <a:latin typeface="Arial" panose="020B0604020202020204" pitchFamily="34" charset="0"/>
+                <a:cs typeface="Arial" panose="020B0604020202020204" pitchFamily="34" charset="0"/>
+              </a:rPr>
+              <a:t>תהילים:</a:t>
+            </a:r>
+            <a:r>
+              <a:rPr lang="he-IL" u="none" strike="noStrike" dirty="0">
+                <a:effectLst/>
+                <a:uFillTx/>
+                <a:latin typeface="Arial" panose="020B0604020202020204" pitchFamily="34" charset="0"/>
+                <a:cs typeface="Arial" panose="020B0604020202020204" pitchFamily="34" charset="0"/>
+              </a:rPr>
+              <a:t> </a:t>
+            </a:r>
+            <a:r>
+              <a:rPr lang="en-US" u="none" strike="noStrike" dirty="0">
+                <a:effectLst/>
+                <a:uFillTx/>
+                <a:latin typeface="Arial" panose="020B0604020202020204" pitchFamily="34" charset="0"/>
+                <a:cs typeface="Arial" panose="020B0604020202020204" pitchFamily="34" charset="0"/>
+              </a:rPr>
+              <a:t>#TEHILIM</a:t>
             </a:r>
           </a:p>
         </p:txBody>
@@ -12106,8 +12787,8 @@
         </p:nvSpPr>
         <p:spPr>
           <a:xfrm>
-            <a:off x="419045" y="363145"/>
-            <a:ext cx="2458626" cy="521766"/>
+            <a:off x="419048" y="179872"/>
+            <a:ext cx="3414133" cy="839301"/>
           </a:xfrm>
           <a:prstGeom prst="rect">
             <a:avLst/>
@@ -12130,27 +12811,16 @@
           <a:fontRef idx="minor"/>
         </p:style>
         <p:txBody>
-          <a:bodyPr wrap="square" lIns="90000" tIns="45000" rIns="90000" bIns="45000" anchor="t">
-            <a:spAutoFit/>
+          <a:bodyPr wrap="square" lIns="90000" tIns="45000" rIns="90000" bIns="45000" anchor="ctr" anchorCtr="0">
+            <a:normAutofit/>
           </a:bodyPr>
           <a:lstStyle/>
           <a:p>
-            <a:pPr defTabSz="914400">
+            <a:pPr algn="ctr" defTabSz="914400">
               <a:lnSpc>
                 <a:spcPct val="100000"/>
               </a:lnSpc>
             </a:pPr>
-            <a:r>
-              <a:rPr lang="en-US" sz="2800" b="1" u="none" strike="noStrike" dirty="0">
-                <a:solidFill>
-                  <a:schemeClr val="dk1"/>
-                </a:solidFill>
-                <a:effectLst/>
-                <a:uFillTx/>
-                <a:latin typeface="Calibri"/>
-              </a:rPr>
-              <a:t>#</a:t>
-            </a:r>
             <a:r>
               <a:rPr lang="en-US" sz="2800" b="1" u="none" strike="noStrike" dirty="0">
                 <a:solidFill>
@@ -12161,7 +12831,7 @@
                 <a:latin typeface="Arial" panose="020B0604020202020204" pitchFamily="34" charset="0"/>
                 <a:cs typeface="Arial" panose="020B0604020202020204" pitchFamily="34" charset="0"/>
               </a:rPr>
-              <a:t>DICLOCK</a:t>
+              <a:t>#DICLOCK</a:t>
             </a:r>
             <a:endParaRPr lang="en-US" sz="2800" b="0" u="none" strike="noStrike" dirty="0">
               <a:solidFill>
@@ -12360,8 +13030,8 @@
         </p:nvSpPr>
         <p:spPr>
           <a:xfrm>
-            <a:off x="4304097" y="5688760"/>
-            <a:ext cx="3583800" cy="398655"/>
+            <a:off x="4143369" y="5663360"/>
+            <a:ext cx="3905256" cy="460211"/>
           </a:xfrm>
           <a:prstGeom prst="rect">
             <a:avLst/>
@@ -12370,6 +13040,7 @@
           <a:ln w="0">
             <a:noFill/>
           </a:ln>
+          <a:effectLst/>
         </p:spPr>
         <p:style>
           <a:lnRef idx="0">
@@ -12384,8 +13055,8 @@
           <a:fontRef idx="minor"/>
         </p:style>
         <p:txBody>
-          <a:bodyPr lIns="90000" tIns="45000" rIns="90000" bIns="45000" anchor="t">
-            <a:spAutoFit/>
+          <a:bodyPr wrap="square" lIns="90000" tIns="45000" rIns="90000" bIns="45000" anchor="ctr" anchorCtr="0">
+            <a:normAutofit/>
           </a:bodyPr>
           <a:lstStyle/>
           <a:p>
@@ -12395,7 +13066,7 @@
               </a:lnSpc>
             </a:pPr>
             <a:r>
-              <a:rPr lang="he-IL" sz="2000" b="1" u="none" strike="noStrike" dirty="0">
+              <a:rPr lang="he-IL" sz="2400" b="1" u="none" strike="noStrike" dirty="0">
                 <a:solidFill>
                   <a:schemeClr val="accent1"/>
                 </a:solidFill>
@@ -12406,7 +13077,7 @@
               <a:t>#</a:t>
             </a:r>
             <a:r>
-              <a:rPr lang="en-US" sz="2000" b="1" u="none" strike="noStrike" dirty="0">
+              <a:rPr lang="en-US" sz="2400" b="1" u="none" strike="noStrike" dirty="0">
                 <a:solidFill>
                   <a:schemeClr val="accent1"/>
                 </a:solidFill>
@@ -12416,7 +13087,7 @@
               </a:rPr>
               <a:t>PARSHA</a:t>
             </a:r>
-            <a:endParaRPr lang="en-US" sz="2000" b="1" u="none" strike="noStrike" dirty="0">
+            <a:endParaRPr lang="en-US" sz="2400" b="1" u="none" strike="noStrike" dirty="0">
               <a:solidFill>
                 <a:srgbClr val="000000"/>
               </a:solidFill>
@@ -12472,8 +13143,18 @@
           <a:p>
             <a:pPr algn="ctr" rtl="1"/>
             <a:r>
-              <a:rPr lang="he-IL" sz="1400" dirty="0"/>
-              <a:t>הדלקת נרות - </a:t>
+              <a:rPr lang="he-IL" sz="1400" b="1" dirty="0">
+                <a:latin typeface="Arial" panose="020B0604020202020204" pitchFamily="34" charset="0"/>
+                <a:cs typeface="Arial" panose="020B0604020202020204" pitchFamily="34" charset="0"/>
+              </a:rPr>
+              <a:t>הדלקת נרות</a:t>
+            </a:r>
+            <a:r>
+              <a:rPr lang="he-IL" sz="1400" dirty="0">
+                <a:latin typeface="Arial" panose="020B0604020202020204" pitchFamily="34" charset="0"/>
+                <a:cs typeface="Arial" panose="020B0604020202020204" pitchFamily="34" charset="0"/>
+              </a:rPr>
+              <a:t> - </a:t>
             </a:r>
             <a:r>
               <a:rPr lang="en-US" sz="1400" dirty="0">
@@ -12490,29 +13171,38 @@
           <a:p>
             <a:pPr algn="ctr" rtl="1"/>
             <a:r>
-              <a:rPr lang="he-IL" sz="1400" u="none" strike="noStrike" dirty="0">
-                <a:effectLst/>
-                <a:uFillTx/>
-                <a:latin typeface="Arial"/>
-              </a:rPr>
-              <a:t>מוצ</a:t>
+              <a:rPr lang="he-IL" sz="1400" b="1" dirty="0">
+                <a:latin typeface="Arial" panose="020B0604020202020204" pitchFamily="34" charset="0"/>
+                <a:cs typeface="Arial" panose="020B0604020202020204" pitchFamily="34" charset="0"/>
+              </a:rPr>
+              <a:t>#</a:t>
+            </a:r>
+            <a:r>
+              <a:rPr lang="en-US" sz="1400" b="1" dirty="0">
+                <a:latin typeface="Arial" panose="020B0604020202020204" pitchFamily="34" charset="0"/>
+                <a:cs typeface="Arial" panose="020B0604020202020204" pitchFamily="34" charset="0"/>
+              </a:rPr>
+              <a:t>MOZASHTITLE</a:t>
             </a:r>
             <a:r>
               <a:rPr lang="he-IL" sz="1400" dirty="0">
-                <a:latin typeface="Arial"/>
-              </a:rPr>
-              <a:t>"ש - </a:t>
+                <a:latin typeface="Arial" panose="020B0604020202020204" pitchFamily="34" charset="0"/>
+                <a:cs typeface="Arial" panose="020B0604020202020204" pitchFamily="34" charset="0"/>
+              </a:rPr>
+              <a:t> - </a:t>
             </a:r>
             <a:r>
               <a:rPr lang="en-US" sz="1400" dirty="0">
-                <a:latin typeface="Arial"/>
+                <a:latin typeface="Arial" panose="020B0604020202020204" pitchFamily="34" charset="0"/>
+                <a:cs typeface="Arial" panose="020B0604020202020204" pitchFamily="34" charset="0"/>
               </a:rPr>
               <a:t>#MOZASH</a:t>
             </a:r>
             <a:endParaRPr lang="en-US" sz="1400" u="none" strike="noStrike" dirty="0">
               <a:effectLst/>
               <a:uFillTx/>
-              <a:latin typeface="Arial"/>
+              <a:latin typeface="Arial" panose="020B0604020202020204" pitchFamily="34" charset="0"/>
+              <a:cs typeface="Arial" panose="020B0604020202020204" pitchFamily="34" charset="0"/>
             </a:endParaRPr>
           </a:p>
         </p:txBody>
@@ -12530,9 +13220,17 @@
 </p:sld>
 </file>
 
-<file path=ppt/slides/slide5.xml><?xml version="1.0" encoding="utf-8"?>
+<file path=ppt/slides/slide6.xml><?xml version="1.0" encoding="utf-8"?>
 <p:sld xmlns:a="http://schemas.openxmlformats.org/drawingml/2006/main" xmlns:r="http://schemas.openxmlformats.org/officeDocument/2006/relationships" xmlns:p="http://schemas.openxmlformats.org/presentationml/2006/main">
   <p:cSld>
+    <p:bg>
+      <p:bgPr>
+        <a:solidFill>
+          <a:srgbClr val="002060"/>
+        </a:solidFill>
+        <a:effectLst/>
+      </p:bgPr>
+    </p:bg>
     <p:spTree>
       <p:nvGrpSpPr>
         <p:cNvPr id="1" name=""/>
@@ -12549,99 +13247,2683 @@
       </p:grpSpPr>
       <p:sp>
         <p:nvSpPr>
-          <p:cNvPr id="4" name="TextBox 3">
+          <p:cNvPr id="45" name="Rectangle: Rounded Corners 44">
             <a:extLst>
               <a:ext uri="{FF2B5EF4-FFF2-40B4-BE49-F238E27FC236}">
-                <a16:creationId xmlns:a16="http://schemas.microsoft.com/office/drawing/2014/main" id="{10BDF163-A326-A48D-78C5-8A59F580915C}"/>
+                <a16:creationId xmlns:a16="http://schemas.microsoft.com/office/drawing/2014/main" id="{2ABA875F-9D5A-2053-BF6E-F66A8DA76D40}"/>
               </a:ext>
             </a:extLst>
           </p:cNvPr>
-          <p:cNvSpPr txBox="1"/>
+          <p:cNvSpPr/>
           <p:nvPr/>
         </p:nvSpPr>
         <p:spPr>
           <a:xfrm>
-            <a:off x="179294" y="98612"/>
-            <a:ext cx="11707906" cy="1754326"/>
+            <a:off x="3189680" y="1161936"/>
+            <a:ext cx="5815818" cy="5506458"/>
+          </a:xfrm>
+          <a:prstGeom prst="roundRect">
+            <a:avLst>
+              <a:gd name="adj" fmla="val 0"/>
+            </a:avLst>
+          </a:prstGeom>
+          <a:solidFill>
+            <a:srgbClr val="FAF4E3"/>
+          </a:solidFill>
+          <a:ln w="69850" cap="flat" cmpd="sng" algn="ctr">
+            <a:solidFill>
+              <a:srgbClr val="E2F0D9"/>
+            </a:solidFill>
+            <a:prstDash val="solid"/>
+            <a:round/>
+            <a:headEnd type="none" w="med" len="med"/>
+            <a:tailEnd type="none" w="med" len="med"/>
+          </a:ln>
+        </p:spPr>
+        <p:style>
+          <a:lnRef idx="0">
+            <a:scrgbClr r="0" g="0" b="0"/>
+          </a:lnRef>
+          <a:fillRef idx="0">
+            <a:scrgbClr r="0" g="0" b="0"/>
+          </a:fillRef>
+          <a:effectRef idx="0">
+            <a:scrgbClr r="0" g="0" b="0"/>
+          </a:effectRef>
+          <a:fontRef idx="minor">
+            <a:schemeClr val="dk1"/>
+          </a:fontRef>
+        </p:style>
+        <p:txBody>
+          <a:bodyPr rtlCol="0" anchor="ctr"/>
+          <a:lstStyle/>
+          <a:p>
+            <a:pPr algn="ctr"/>
+            <a:endParaRPr lang="LID4096"/>
+          </a:p>
+        </p:txBody>
+      </p:sp>
+      <p:sp>
+        <p:nvSpPr>
+          <p:cNvPr id="61" name="Rectangle: Rounded Corners 60">
+            <a:extLst>
+              <a:ext uri="{FF2B5EF4-FFF2-40B4-BE49-F238E27FC236}">
+                <a16:creationId xmlns:a16="http://schemas.microsoft.com/office/drawing/2014/main" id="{EFCFE9F0-3614-5B24-3744-8AE0D622E75E}"/>
+              </a:ext>
+            </a:extLst>
+          </p:cNvPr>
+          <p:cNvSpPr/>
+          <p:nvPr/>
+        </p:nvSpPr>
+        <p:spPr>
+          <a:xfrm>
+            <a:off x="3279777" y="1752601"/>
+            <a:ext cx="5641978" cy="4814006"/>
+          </a:xfrm>
+          <a:prstGeom prst="roundRect">
+            <a:avLst>
+              <a:gd name="adj" fmla="val 0"/>
+            </a:avLst>
+          </a:prstGeom>
+          <a:solidFill>
+            <a:srgbClr val="002060"/>
+          </a:solidFill>
+          <a:ln w="69850" cap="flat" cmpd="sng" algn="ctr">
+            <a:solidFill>
+              <a:srgbClr val="E2F0D9"/>
+            </a:solidFill>
+            <a:prstDash val="solid"/>
+            <a:round/>
+            <a:headEnd type="none" w="med" len="med"/>
+            <a:tailEnd type="none" w="med" len="med"/>
+          </a:ln>
+        </p:spPr>
+        <p:style>
+          <a:lnRef idx="0">
+            <a:scrgbClr r="0" g="0" b="0"/>
+          </a:lnRef>
+          <a:fillRef idx="0">
+            <a:scrgbClr r="0" g="0" b="0"/>
+          </a:fillRef>
+          <a:effectRef idx="0">
+            <a:scrgbClr r="0" g="0" b="0"/>
+          </a:effectRef>
+          <a:fontRef idx="minor">
+            <a:schemeClr val="dk1"/>
+          </a:fontRef>
+        </p:style>
+        <p:txBody>
+          <a:bodyPr rtlCol="0" anchor="ctr"/>
+          <a:lstStyle/>
+          <a:p>
+            <a:pPr algn="ctr"/>
+            <a:endParaRPr lang="LID4096"/>
+          </a:p>
+        </p:txBody>
+      </p:sp>
+      <p:sp>
+        <p:nvSpPr>
+          <p:cNvPr id="47" name="Rectangle: Rounded Corners 46">
+            <a:extLst>
+              <a:ext uri="{FF2B5EF4-FFF2-40B4-BE49-F238E27FC236}">
+                <a16:creationId xmlns:a16="http://schemas.microsoft.com/office/drawing/2014/main" id="{63443DA7-67B7-7E86-9229-3920E3E5F324}"/>
+              </a:ext>
+            </a:extLst>
+          </p:cNvPr>
+          <p:cNvSpPr/>
+          <p:nvPr/>
+        </p:nvSpPr>
+        <p:spPr>
+          <a:xfrm>
+            <a:off x="9166221" y="4316459"/>
+            <a:ext cx="2838837" cy="2357044"/>
+          </a:xfrm>
+          <a:prstGeom prst="roundRect">
+            <a:avLst>
+              <a:gd name="adj" fmla="val 0"/>
+            </a:avLst>
+          </a:prstGeom>
+          <a:solidFill>
+            <a:srgbClr val="002060"/>
+          </a:solidFill>
+          <a:ln w="69850" cap="flat" cmpd="sng" algn="ctr">
+            <a:solidFill>
+              <a:srgbClr val="FAF4E3"/>
+            </a:solidFill>
+            <a:prstDash val="solid"/>
+            <a:round/>
+            <a:headEnd type="none" w="med" len="med"/>
+            <a:tailEnd type="none" w="med" len="med"/>
+          </a:ln>
+        </p:spPr>
+        <p:style>
+          <a:lnRef idx="0">
+            <a:scrgbClr r="0" g="0" b="0"/>
+          </a:lnRef>
+          <a:fillRef idx="0">
+            <a:scrgbClr r="0" g="0" b="0"/>
+          </a:fillRef>
+          <a:effectRef idx="0">
+            <a:scrgbClr r="0" g="0" b="0"/>
+          </a:effectRef>
+          <a:fontRef idx="minor">
+            <a:schemeClr val="dk1"/>
+          </a:fontRef>
+        </p:style>
+        <p:txBody>
+          <a:bodyPr rtlCol="0" anchor="ctr"/>
+          <a:lstStyle/>
+          <a:p>
+            <a:pPr algn="ctr"/>
+            <a:endParaRPr lang="LID4096"/>
+          </a:p>
+        </p:txBody>
+      </p:sp>
+      <p:sp>
+        <p:nvSpPr>
+          <p:cNvPr id="43" name="Rectangle: Rounded Corners 42">
+            <a:extLst>
+              <a:ext uri="{FF2B5EF4-FFF2-40B4-BE49-F238E27FC236}">
+                <a16:creationId xmlns:a16="http://schemas.microsoft.com/office/drawing/2014/main" id="{4BCB5AA4-C9ED-2095-4A08-F6DB6E482463}"/>
+              </a:ext>
+            </a:extLst>
+          </p:cNvPr>
+          <p:cNvSpPr/>
+          <p:nvPr/>
+        </p:nvSpPr>
+        <p:spPr>
+          <a:xfrm>
+            <a:off x="9166221" y="1161936"/>
+            <a:ext cx="2829315" cy="2930148"/>
+          </a:xfrm>
+          <a:prstGeom prst="roundRect">
+            <a:avLst>
+              <a:gd name="adj" fmla="val 0"/>
+            </a:avLst>
+          </a:prstGeom>
+          <a:solidFill>
+            <a:srgbClr val="FAF4E3"/>
+          </a:solidFill>
+          <a:ln w="69850" cap="flat" cmpd="sng" algn="ctr">
+            <a:solidFill>
+              <a:srgbClr val="FAF4E3"/>
+            </a:solidFill>
+            <a:prstDash val="solid"/>
+            <a:round/>
+            <a:headEnd type="none" w="med" len="med"/>
+            <a:tailEnd type="none" w="med" len="med"/>
+          </a:ln>
+        </p:spPr>
+        <p:style>
+          <a:lnRef idx="0">
+            <a:scrgbClr r="0" g="0" b="0"/>
+          </a:lnRef>
+          <a:fillRef idx="0">
+            <a:scrgbClr r="0" g="0" b="0"/>
+          </a:fillRef>
+          <a:effectRef idx="0">
+            <a:scrgbClr r="0" g="0" b="0"/>
+          </a:effectRef>
+          <a:fontRef idx="minor">
+            <a:schemeClr val="dk1"/>
+          </a:fontRef>
+        </p:style>
+        <p:txBody>
+          <a:bodyPr rtlCol="0" anchor="ctr"/>
+          <a:lstStyle/>
+          <a:p>
+            <a:pPr algn="ctr"/>
+            <a:endParaRPr lang="LID4096"/>
+          </a:p>
+        </p:txBody>
+      </p:sp>
+      <p:sp>
+        <p:nvSpPr>
+          <p:cNvPr id="4" name="Rectangle: Rounded Corners 3">
+            <a:extLst>
+              <a:ext uri="{FF2B5EF4-FFF2-40B4-BE49-F238E27FC236}">
+                <a16:creationId xmlns:a16="http://schemas.microsoft.com/office/drawing/2014/main" id="{865BBBDF-34EF-3350-5D8C-89B86681B602}"/>
+              </a:ext>
+            </a:extLst>
+          </p:cNvPr>
+          <p:cNvSpPr/>
+          <p:nvPr/>
+        </p:nvSpPr>
+        <p:spPr>
+          <a:xfrm>
+            <a:off x="186940" y="226164"/>
+            <a:ext cx="11818120" cy="767987"/>
+          </a:xfrm>
+          <a:prstGeom prst="roundRect">
+            <a:avLst>
+              <a:gd name="adj" fmla="val 0"/>
+            </a:avLst>
+          </a:prstGeom>
+          <a:solidFill>
+            <a:srgbClr val="FAF4E3"/>
+          </a:solidFill>
+          <a:ln w="69850" cap="flat" cmpd="sng" algn="ctr">
+            <a:solidFill>
+              <a:srgbClr val="E2F0D9"/>
+            </a:solidFill>
+            <a:prstDash val="solid"/>
+            <a:round/>
+            <a:headEnd type="none" w="med" len="med"/>
+            <a:tailEnd type="none" w="med" len="med"/>
+          </a:ln>
+        </p:spPr>
+        <p:style>
+          <a:lnRef idx="0">
+            <a:scrgbClr r="0" g="0" b="0"/>
+          </a:lnRef>
+          <a:fillRef idx="0">
+            <a:scrgbClr r="0" g="0" b="0"/>
+          </a:fillRef>
+          <a:effectRef idx="0">
+            <a:scrgbClr r="0" g="0" b="0"/>
+          </a:effectRef>
+          <a:fontRef idx="minor">
+            <a:schemeClr val="dk1"/>
+          </a:fontRef>
+        </p:style>
+        <p:txBody>
+          <a:bodyPr rtlCol="0" anchor="ctr"/>
+          <a:lstStyle/>
+          <a:p>
+            <a:pPr algn="ctr"/>
+            <a:endParaRPr lang="LID4096"/>
+          </a:p>
+        </p:txBody>
+      </p:sp>
+      <p:pic>
+        <p:nvPicPr>
+          <p:cNvPr id="37" name="Picture 36">
+            <a:extLst>
+              <a:ext uri="{FF2B5EF4-FFF2-40B4-BE49-F238E27FC236}">
+                <a16:creationId xmlns:a16="http://schemas.microsoft.com/office/drawing/2014/main" id="{3D678AA0-A96F-5339-D35E-A017D4083E21}"/>
+              </a:ext>
+            </a:extLst>
+          </p:cNvPr>
+          <p:cNvPicPr>
+            <a:picLocks noChangeAspect="1"/>
+          </p:cNvPicPr>
+          <p:nvPr/>
+        </p:nvPicPr>
+        <p:blipFill>
+          <a:blip r:embed="rId3"/>
+          <a:stretch>
+            <a:fillRect/>
+          </a:stretch>
+        </p:blipFill>
+        <p:spPr>
+          <a:xfrm>
+            <a:off x="3943350" y="317477"/>
+            <a:ext cx="133350" cy="619125"/>
+          </a:xfrm>
+          <a:prstGeom prst="rect">
+            <a:avLst/>
+          </a:prstGeom>
+        </p:spPr>
+      </p:pic>
+      <p:pic>
+        <p:nvPicPr>
+          <p:cNvPr id="38" name="Picture 37">
+            <a:extLst>
+              <a:ext uri="{FF2B5EF4-FFF2-40B4-BE49-F238E27FC236}">
+                <a16:creationId xmlns:a16="http://schemas.microsoft.com/office/drawing/2014/main" id="{57F2B7CB-4178-F3A2-5E7B-FBA9E7EBBB03}"/>
+              </a:ext>
+            </a:extLst>
+          </p:cNvPr>
+          <p:cNvPicPr>
+            <a:picLocks noChangeAspect="1"/>
+          </p:cNvPicPr>
+          <p:nvPr/>
+        </p:nvPicPr>
+        <p:blipFill>
+          <a:blip r:embed="rId3"/>
+          <a:stretch>
+            <a:fillRect/>
+          </a:stretch>
+        </p:blipFill>
+        <p:spPr>
+          <a:xfrm>
+            <a:off x="8143877" y="317477"/>
+            <a:ext cx="133350" cy="619125"/>
+          </a:xfrm>
+          <a:prstGeom prst="rect">
+            <a:avLst/>
+          </a:prstGeom>
+        </p:spPr>
+      </p:pic>
+      <p:grpSp>
+        <p:nvGrpSpPr>
+          <p:cNvPr id="46" name="Group 45">
+            <a:extLst>
+              <a:ext uri="{FF2B5EF4-FFF2-40B4-BE49-F238E27FC236}">
+                <a16:creationId xmlns:a16="http://schemas.microsoft.com/office/drawing/2014/main" id="{0793E57D-3C94-4AC7-C149-6DA983A963BB}"/>
+              </a:ext>
+            </a:extLst>
+          </p:cNvPr>
+          <p:cNvGrpSpPr/>
+          <p:nvPr/>
+        </p:nvGrpSpPr>
+        <p:grpSpPr>
+          <a:xfrm>
+            <a:off x="9307899" y="4186696"/>
+            <a:ext cx="2536436" cy="2536436"/>
+            <a:chOff x="8654743" y="3502910"/>
+            <a:chExt cx="3098224" cy="3098224"/>
+          </a:xfrm>
+        </p:grpSpPr>
+        <p:sp>
+          <p:nvSpPr>
+            <p:cNvPr id="31" name="Oval 30">
+              <a:extLst>
+                <a:ext uri="{FF2B5EF4-FFF2-40B4-BE49-F238E27FC236}">
+                  <a16:creationId xmlns:a16="http://schemas.microsoft.com/office/drawing/2014/main" id="{8EAC478F-6641-35A7-E421-88089C0579F4}"/>
+                </a:ext>
+              </a:extLst>
+            </p:cNvPr>
+            <p:cNvSpPr/>
+            <p:nvPr/>
+          </p:nvSpPr>
+          <p:spPr>
+            <a:xfrm>
+              <a:off x="8654743" y="3502910"/>
+              <a:ext cx="3098224" cy="3098224"/>
+            </a:xfrm>
+            <a:prstGeom prst="ellipse">
+              <a:avLst/>
+            </a:prstGeom>
+            <a:solidFill>
+              <a:schemeClr val="bg1"/>
+            </a:solidFill>
+            <a:ln w="127000" cap="flat" cmpd="sng" algn="ctr">
+              <a:solidFill>
+                <a:srgbClr val="E2F0D9"/>
+              </a:solidFill>
+              <a:prstDash val="solid"/>
+              <a:round/>
+              <a:headEnd type="none" w="med" len="med"/>
+              <a:tailEnd type="none" w="med" len="med"/>
+            </a:ln>
+          </p:spPr>
+          <p:style>
+            <a:lnRef idx="0">
+              <a:scrgbClr r="0" g="0" b="0"/>
+            </a:lnRef>
+            <a:fillRef idx="0">
+              <a:scrgbClr r="0" g="0" b="0"/>
+            </a:fillRef>
+            <a:effectRef idx="0">
+              <a:scrgbClr r="0" g="0" b="0"/>
+            </a:effectRef>
+            <a:fontRef idx="minor">
+              <a:schemeClr val="dk1"/>
+            </a:fontRef>
+          </p:style>
+          <p:txBody>
+            <a:bodyPr rtlCol="0" anchor="ctr"/>
+            <a:lstStyle/>
+            <a:p>
+              <a:pPr algn="ctr"/>
+              <a:endParaRPr lang="LID4096"/>
+            </a:p>
+          </p:txBody>
+        </p:sp>
+        <p:sp>
+          <p:nvSpPr>
+            <p:cNvPr id="8" name="Oval 7">
+              <a:extLst>
+                <a:ext uri="{FF2B5EF4-FFF2-40B4-BE49-F238E27FC236}">
+                  <a16:creationId xmlns:a16="http://schemas.microsoft.com/office/drawing/2014/main" id="{0BC09833-B6B5-704E-7221-760FA878CC48}"/>
+                </a:ext>
+              </a:extLst>
+            </p:cNvPr>
+            <p:cNvSpPr/>
+            <p:nvPr/>
+          </p:nvSpPr>
+          <p:spPr>
+            <a:xfrm>
+              <a:off x="8680235" y="3533288"/>
+              <a:ext cx="3042352" cy="3042352"/>
+            </a:xfrm>
+            <a:prstGeom prst="ellipse">
+              <a:avLst/>
+            </a:prstGeom>
+            <a:solidFill>
+              <a:schemeClr val="bg1"/>
+            </a:solidFill>
+            <a:ln w="127000" cap="flat" cmpd="sng" algn="ctr">
+              <a:solidFill>
+                <a:srgbClr val="002060"/>
+              </a:solidFill>
+              <a:prstDash val="solid"/>
+              <a:round/>
+              <a:headEnd type="none" w="med" len="med"/>
+              <a:tailEnd type="none" w="med" len="med"/>
+            </a:ln>
+          </p:spPr>
+          <p:style>
+            <a:lnRef idx="0">
+              <a:scrgbClr r="0" g="0" b="0"/>
+            </a:lnRef>
+            <a:fillRef idx="0">
+              <a:scrgbClr r="0" g="0" b="0"/>
+            </a:fillRef>
+            <a:effectRef idx="0">
+              <a:scrgbClr r="0" g="0" b="0"/>
+            </a:effectRef>
+            <a:fontRef idx="minor">
+              <a:schemeClr val="dk1"/>
+            </a:fontRef>
+          </p:style>
+          <p:txBody>
+            <a:bodyPr rtlCol="0" anchor="ctr"/>
+            <a:lstStyle/>
+            <a:p>
+              <a:pPr algn="ctr"/>
+              <a:endParaRPr lang="LID4096"/>
+            </a:p>
+          </p:txBody>
+        </p:sp>
+      </p:grpSp>
+      <p:sp>
+        <p:nvSpPr>
+          <p:cNvPr id="40" name="Rectangle 39">
+            <a:extLst>
+              <a:ext uri="{FF2B5EF4-FFF2-40B4-BE49-F238E27FC236}">
+                <a16:creationId xmlns:a16="http://schemas.microsoft.com/office/drawing/2014/main" id="{3609E623-0778-ADD8-33F0-2AB1F5021D26}"/>
+              </a:ext>
+            </a:extLst>
+          </p:cNvPr>
+          <p:cNvSpPr/>
+          <p:nvPr/>
+        </p:nvSpPr>
+        <p:spPr>
+          <a:xfrm>
+            <a:off x="3251200" y="1098436"/>
+            <a:ext cx="5626100" cy="722925"/>
           </a:xfrm>
           <a:prstGeom prst="rect">
             <a:avLst/>
           </a:prstGeom>
           <a:noFill/>
+          <a:ln w="0">
+            <a:noFill/>
+          </a:ln>
         </p:spPr>
+        <p:style>
+          <a:lnRef idx="0">
+            <a:scrgbClr r="0" g="0" b="0"/>
+          </a:lnRef>
+          <a:fillRef idx="0">
+            <a:scrgbClr r="0" g="0" b="0"/>
+          </a:fillRef>
+          <a:effectRef idx="0">
+            <a:scrgbClr r="0" g="0" b="0"/>
+          </a:effectRef>
+          <a:fontRef idx="minor"/>
+        </p:style>
         <p:txBody>
-          <a:bodyPr wrap="square" rtlCol="0">
+          <a:bodyPr wrap="square" lIns="90000" tIns="45000" rIns="90000" bIns="45000" anchor="ctr" anchorCtr="0">
+            <a:normAutofit/>
+          </a:bodyPr>
+          <a:lstStyle/>
+          <a:p>
+            <a:pPr algn="ctr" defTabSz="914400" rtl="1">
+              <a:lnSpc>
+                <a:spcPct val="100000"/>
+              </a:lnSpc>
+            </a:pPr>
+            <a:r>
+              <a:rPr lang="he-IL" sz="3200" b="1" u="none" strike="noStrike" dirty="0">
+                <a:solidFill>
+                  <a:schemeClr val="accent1"/>
+                </a:solidFill>
+                <a:effectLst/>
+                <a:uFillTx/>
+                <a:latin typeface="Calibri"/>
+              </a:rPr>
+              <a:t>#</a:t>
+            </a:r>
+            <a:r>
+              <a:rPr lang="en-US" sz="3200" b="1" u="none" strike="noStrike" dirty="0">
+                <a:solidFill>
+                  <a:schemeClr val="accent1"/>
+                </a:solidFill>
+                <a:effectLst/>
+                <a:uFillTx/>
+                <a:latin typeface="Calibri"/>
+              </a:rPr>
+              <a:t>PARSHA</a:t>
+            </a:r>
+            <a:endParaRPr lang="en-US" sz="3200" b="1" u="none" strike="noStrike" dirty="0">
+              <a:solidFill>
+                <a:srgbClr val="000000"/>
+              </a:solidFill>
+              <a:effectLst/>
+              <a:uFillTx/>
+              <a:latin typeface="Arial"/>
+            </a:endParaRPr>
+          </a:p>
+        </p:txBody>
+      </p:sp>
+      <p:sp>
+        <p:nvSpPr>
+          <p:cNvPr id="42" name="Rectangle 2">
+            <a:extLst>
+              <a:ext uri="{FF2B5EF4-FFF2-40B4-BE49-F238E27FC236}">
+                <a16:creationId xmlns:a16="http://schemas.microsoft.com/office/drawing/2014/main" id="{A2CA2829-FDAA-CC0B-ABC9-CEADD1F190EC}"/>
+              </a:ext>
+            </a:extLst>
+          </p:cNvPr>
+          <p:cNvSpPr/>
+          <p:nvPr/>
+        </p:nvSpPr>
+        <p:spPr>
+          <a:xfrm>
+            <a:off x="3321824" y="1884861"/>
+            <a:ext cx="5555475" cy="4681745"/>
+          </a:xfrm>
+          <a:prstGeom prst="rect">
+            <a:avLst/>
+          </a:prstGeom>
+          <a:noFill/>
+          <a:ln w="0">
+            <a:noFill/>
+          </a:ln>
+        </p:spPr>
+        <p:style>
+          <a:lnRef idx="0">
+            <a:scrgbClr r="0" g="0" b="0"/>
+          </a:lnRef>
+          <a:fillRef idx="0">
+            <a:scrgbClr r="0" g="0" b="0"/>
+          </a:fillRef>
+          <a:effectRef idx="0">
+            <a:scrgbClr r="0" g="0" b="0"/>
+          </a:effectRef>
+          <a:fontRef idx="minor"/>
+        </p:style>
+        <p:txBody>
+          <a:bodyPr wrap="square" lIns="90000" tIns="45000" rIns="90000" bIns="45000" anchor="ctr" anchorCtr="0">
+            <a:normAutofit/>
+          </a:bodyPr>
+          <a:lstStyle/>
+          <a:p>
+            <a:pPr algn="ctr" defTabSz="914400" rtl="1">
+              <a:spcAft>
+                <a:spcPts val="600"/>
+              </a:spcAft>
+              <a:tabLst>
+                <a:tab pos="1257300" algn="r"/>
+              </a:tabLst>
+            </a:pPr>
+            <a:r>
+              <a:rPr lang="he-IL" sz="3600" u="none" strike="noStrike" dirty="0">
+                <a:solidFill>
+                  <a:srgbClr val="FAF4E3"/>
+                </a:solidFill>
+                <a:effectLst/>
+                <a:uFillTx/>
+                <a:latin typeface="Calibri"/>
+              </a:rPr>
+              <a:t>#</a:t>
+            </a:r>
+            <a:r>
+              <a:rPr lang="en-US" sz="3600" u="none" strike="noStrike" dirty="0">
+                <a:solidFill>
+                  <a:srgbClr val="FAF4E3"/>
+                </a:solidFill>
+                <a:effectLst/>
+                <a:uFillTx/>
+                <a:latin typeface="Calibri"/>
+              </a:rPr>
+              <a:t>CMD</a:t>
+            </a:r>
+            <a:r>
+              <a:rPr lang="he-IL" sz="3600" u="none" strike="noStrike" dirty="0">
+                <a:solidFill>
+                  <a:srgbClr val="FAF4E3"/>
+                </a:solidFill>
+                <a:effectLst/>
+                <a:uFillTx/>
+                <a:latin typeface="Calibri"/>
+              </a:rPr>
+              <a:t>:&lt;</a:t>
+            </a:r>
+            <a:r>
+              <a:rPr lang="en-US" sz="3600" u="none" strike="noStrike" dirty="0" err="1">
+                <a:solidFill>
+                  <a:srgbClr val="FAF4E3"/>
+                </a:solidFill>
+                <a:effectLst/>
+                <a:uFillTx/>
+                <a:latin typeface="Calibri"/>
+              </a:rPr>
+              <a:t>chol</a:t>
+            </a:r>
+            <a:r>
+              <a:rPr lang="he-IL" sz="3600" u="none" strike="noStrike" dirty="0">
+                <a:solidFill>
+                  <a:srgbClr val="FAF4E3"/>
+                </a:solidFill>
+                <a:effectLst/>
+                <a:uFillTx/>
+                <a:latin typeface="Calibri"/>
+              </a:rPr>
+              <a:t>&gt;</a:t>
+            </a:r>
+            <a:endParaRPr lang="en-US" sz="3600" u="none" strike="noStrike" dirty="0">
+              <a:solidFill>
+                <a:srgbClr val="FAF4E3"/>
+              </a:solidFill>
+              <a:effectLst/>
+              <a:uFillTx/>
+              <a:latin typeface="Arial"/>
+            </a:endParaRPr>
+          </a:p>
+        </p:txBody>
+      </p:sp>
+      <p:sp>
+        <p:nvSpPr>
+          <p:cNvPr id="50" name="Rectangle: Rounded Corners 49">
+            <a:extLst>
+              <a:ext uri="{FF2B5EF4-FFF2-40B4-BE49-F238E27FC236}">
+                <a16:creationId xmlns:a16="http://schemas.microsoft.com/office/drawing/2014/main" id="{7FC74106-B75D-6DCC-6E33-23FC6C010586}"/>
+              </a:ext>
+            </a:extLst>
+          </p:cNvPr>
+          <p:cNvSpPr/>
+          <p:nvPr/>
+        </p:nvSpPr>
+        <p:spPr>
+          <a:xfrm>
+            <a:off x="186940" y="4316459"/>
+            <a:ext cx="2826138" cy="2357044"/>
+          </a:xfrm>
+          <a:prstGeom prst="roundRect">
+            <a:avLst>
+              <a:gd name="adj" fmla="val 0"/>
+            </a:avLst>
+          </a:prstGeom>
+          <a:solidFill>
+            <a:srgbClr val="002060"/>
+          </a:solidFill>
+          <a:ln w="69850" cap="flat" cmpd="sng" algn="ctr">
+            <a:solidFill>
+              <a:srgbClr val="FAF4E3"/>
+            </a:solidFill>
+            <a:prstDash val="solid"/>
+            <a:round/>
+            <a:headEnd type="none" w="med" len="med"/>
+            <a:tailEnd type="none" w="med" len="med"/>
+          </a:ln>
+        </p:spPr>
+        <p:style>
+          <a:lnRef idx="0">
+            <a:scrgbClr r="0" g="0" b="0"/>
+          </a:lnRef>
+          <a:fillRef idx="0">
+            <a:scrgbClr r="0" g="0" b="0"/>
+          </a:fillRef>
+          <a:effectRef idx="0">
+            <a:scrgbClr r="0" g="0" b="0"/>
+          </a:effectRef>
+          <a:fontRef idx="minor">
+            <a:schemeClr val="dk1"/>
+          </a:fontRef>
+        </p:style>
+        <p:txBody>
+          <a:bodyPr rtlCol="0" anchor="ctr"/>
+          <a:lstStyle/>
+          <a:p>
+            <a:pPr algn="ctr"/>
+            <a:endParaRPr lang="LID4096"/>
+          </a:p>
+        </p:txBody>
+      </p:sp>
+      <p:sp>
+        <p:nvSpPr>
+          <p:cNvPr id="52" name="Rectangle 51">
+            <a:extLst>
+              <a:ext uri="{FF2B5EF4-FFF2-40B4-BE49-F238E27FC236}">
+                <a16:creationId xmlns:a16="http://schemas.microsoft.com/office/drawing/2014/main" id="{51DF3889-91E9-9032-34F7-9CFDF3841985}"/>
+              </a:ext>
+            </a:extLst>
+          </p:cNvPr>
+          <p:cNvSpPr/>
+          <p:nvPr/>
+        </p:nvSpPr>
+        <p:spPr>
+          <a:xfrm>
+            <a:off x="9213854" y="3452397"/>
+            <a:ext cx="2664411" cy="521766"/>
+          </a:xfrm>
+          <a:prstGeom prst="rect">
+            <a:avLst/>
+          </a:prstGeom>
+          <a:noFill/>
+          <a:ln w="0">
+            <a:noFill/>
+          </a:ln>
+        </p:spPr>
+        <p:style>
+          <a:lnRef idx="0">
+            <a:scrgbClr r="0" g="0" b="0"/>
+          </a:lnRef>
+          <a:fillRef idx="0">
+            <a:scrgbClr r="0" g="0" b="0"/>
+          </a:fillRef>
+          <a:effectRef idx="0">
+            <a:scrgbClr r="0" g="0" b="0"/>
+          </a:effectRef>
+          <a:fontRef idx="minor"/>
+        </p:style>
+        <p:txBody>
+          <a:bodyPr wrap="square" lIns="90000" tIns="45000" rIns="90000" bIns="45000" anchor="t">
             <a:spAutoFit/>
           </a:bodyPr>
           <a:lstStyle/>
           <a:p>
-            <a:r>
-              <a:rPr lang="en-US" dirty="0"/>
-              <a:t>#CONFIG:{</a:t>
-            </a:r>
-          </a:p>
-          <a:p>
-            <a:r>
-              <a:rPr lang="en-US" dirty="0"/>
-              <a:t>"clock_tick_seconds": 1.0,</a:t>
-            </a:r>
-          </a:p>
-          <a:p>
-            <a:r>
-              <a:rPr lang="en-US" dirty="0"/>
-              <a:t>"</a:t>
-            </a:r>
-            <a:r>
-              <a:rPr lang="en-US" dirty="0" err="1"/>
-              <a:t>debug_repaint_nudge_shape</a:t>
-            </a:r>
-            <a:r>
-              <a:rPr lang="en-US" dirty="0"/>
-              <a:t>": true,</a:t>
-            </a:r>
-          </a:p>
-          <a:p>
-            <a:r>
-              <a:rPr lang="en-US" dirty="0"/>
-              <a:t>"</a:t>
-            </a:r>
-            <a:r>
-              <a:rPr lang="en-US" dirty="0" err="1"/>
-              <a:t>clock_style</a:t>
-            </a:r>
-            <a:r>
-              <a:rPr lang="en-US" dirty="0"/>
-              <a:t>":{</a:t>
-            </a:r>
-            <a:r>
-              <a:rPr lang="" dirty="0"/>
-              <a:t>"hour_color": 255</a:t>
-            </a:r>
-            <a:r>
-              <a:rPr lang="en-US" dirty="0"/>
-              <a:t>},</a:t>
-            </a:r>
-          </a:p>
-          <a:p>
-            <a:r>
-              <a:rPr lang="" dirty="0"/>
-              <a:t>"debug_skip_slideshow": false</a:t>
-            </a:r>
-            <a:endParaRPr lang="en-US" dirty="0"/>
-          </a:p>
-          <a:p>
-            <a:r>
-              <a:rPr lang="en-US" dirty="0"/>
-              <a:t>}</a:t>
-            </a:r>
-            <a:endParaRPr lang="LID4096" dirty="0"/>
+            <a:pPr algn="ctr" rtl="1"/>
+            <a:r>
+              <a:rPr lang="he-IL" sz="1400" b="1" dirty="0">
+                <a:latin typeface="Arial" panose="020B0604020202020204" pitchFamily="34" charset="0"/>
+                <a:cs typeface="Arial" panose="020B0604020202020204" pitchFamily="34" charset="0"/>
+              </a:rPr>
+              <a:t>הדלקת נרות</a:t>
+            </a:r>
+            <a:r>
+              <a:rPr lang="he-IL" sz="1400" dirty="0">
+                <a:latin typeface="Arial" panose="020B0604020202020204" pitchFamily="34" charset="0"/>
+                <a:cs typeface="Arial" panose="020B0604020202020204" pitchFamily="34" charset="0"/>
+              </a:rPr>
+              <a:t> - </a:t>
+            </a:r>
+            <a:r>
+              <a:rPr lang="en-US" sz="1400" dirty="0">
+                <a:latin typeface="Arial" panose="020B0604020202020204" pitchFamily="34" charset="0"/>
+                <a:cs typeface="Arial" panose="020B0604020202020204" pitchFamily="34" charset="0"/>
+              </a:rPr>
+              <a:t>#SHABBOS-30</a:t>
+            </a:r>
+            <a:endParaRPr lang="he-IL" sz="1400" dirty="0">
+              <a:latin typeface="Arial" panose="020B0604020202020204" pitchFamily="34" charset="0"/>
+              <a:cs typeface="Arial" panose="020B0604020202020204" pitchFamily="34" charset="0"/>
+            </a:endParaRPr>
+          </a:p>
+          <a:p>
+            <a:pPr algn="ctr" rtl="1"/>
+            <a:r>
+              <a:rPr lang="he-IL" sz="1400" b="1" dirty="0">
+                <a:latin typeface="Arial" panose="020B0604020202020204" pitchFamily="34" charset="0"/>
+                <a:cs typeface="Arial" panose="020B0604020202020204" pitchFamily="34" charset="0"/>
+              </a:rPr>
+              <a:t>#</a:t>
+            </a:r>
+            <a:r>
+              <a:rPr lang="en-US" sz="1400" b="1" dirty="0">
+                <a:latin typeface="Arial" panose="020B0604020202020204" pitchFamily="34" charset="0"/>
+                <a:cs typeface="Arial" panose="020B0604020202020204" pitchFamily="34" charset="0"/>
+              </a:rPr>
+              <a:t>MOZASHTITLE</a:t>
+            </a:r>
+            <a:r>
+              <a:rPr lang="he-IL" sz="1400" dirty="0">
+                <a:latin typeface="Arial" panose="020B0604020202020204" pitchFamily="34" charset="0"/>
+                <a:cs typeface="Arial" panose="020B0604020202020204" pitchFamily="34" charset="0"/>
+              </a:rPr>
+              <a:t> - </a:t>
+            </a:r>
+            <a:r>
+              <a:rPr lang="en-US" sz="1400" dirty="0">
+                <a:latin typeface="Arial" panose="020B0604020202020204" pitchFamily="34" charset="0"/>
+                <a:cs typeface="Arial" panose="020B0604020202020204" pitchFamily="34" charset="0"/>
+              </a:rPr>
+              <a:t>#MOZASH</a:t>
+            </a:r>
+            <a:endParaRPr lang="en-US" sz="1400" u="none" strike="noStrike" dirty="0">
+              <a:effectLst/>
+              <a:uFillTx/>
+              <a:latin typeface="Arial" panose="020B0604020202020204" pitchFamily="34" charset="0"/>
+              <a:cs typeface="Arial" panose="020B0604020202020204" pitchFamily="34" charset="0"/>
+            </a:endParaRPr>
+          </a:p>
+        </p:txBody>
+      </p:sp>
+      <p:sp>
+        <p:nvSpPr>
+          <p:cNvPr id="54" name="Rectangle 11">
+            <a:extLst>
+              <a:ext uri="{FF2B5EF4-FFF2-40B4-BE49-F238E27FC236}">
+                <a16:creationId xmlns:a16="http://schemas.microsoft.com/office/drawing/2014/main" id="{B7F77739-78CD-3EE2-AB95-B92E6BCEF58F}"/>
+              </a:ext>
+            </a:extLst>
+          </p:cNvPr>
+          <p:cNvSpPr/>
+          <p:nvPr/>
+        </p:nvSpPr>
+        <p:spPr>
+          <a:xfrm>
+            <a:off x="9366869" y="4259626"/>
+            <a:ext cx="2408768" cy="2408768"/>
+          </a:xfrm>
+          <a:prstGeom prst="rect">
+            <a:avLst/>
+          </a:prstGeom>
+          <a:noFill/>
+          <a:ln>
+            <a:noFill/>
+          </a:ln>
+        </p:spPr>
+        <p:style>
+          <a:lnRef idx="2">
+            <a:schemeClr val="accent4">
+              <a:shade val="50000"/>
+            </a:schemeClr>
+          </a:lnRef>
+          <a:fillRef idx="1">
+            <a:schemeClr val="accent4"/>
+          </a:fillRef>
+          <a:effectRef idx="0">
+            <a:schemeClr val="accent4"/>
+          </a:effectRef>
+          <a:fontRef idx="minor"/>
+        </p:style>
+        <p:txBody>
+          <a:bodyPr lIns="90000" tIns="45000" rIns="90000" bIns="45000" anchor="ctr">
+            <a:noAutofit/>
+          </a:bodyPr>
+          <a:lstStyle/>
+          <a:p>
+            <a:pPr algn="ctr" defTabSz="914400">
+              <a:lnSpc>
+                <a:spcPct val="100000"/>
+              </a:lnSpc>
+            </a:pPr>
+            <a:r>
+              <a:rPr lang="en-US" sz="1800" b="0" u="none" strike="noStrike" dirty="0">
+                <a:solidFill>
+                  <a:srgbClr val="FF0000"/>
+                </a:solidFill>
+                <a:effectLst/>
+                <a:uFillTx/>
+                <a:latin typeface="Calibri"/>
+              </a:rPr>
+              <a:t>#ANCLOCK</a:t>
+            </a:r>
+            <a:endParaRPr lang="en-US" sz="1800" b="0" u="none" strike="noStrike" dirty="0">
+              <a:solidFill>
+                <a:srgbClr val="000000"/>
+              </a:solidFill>
+              <a:effectLst/>
+              <a:uFillTx/>
+              <a:latin typeface="Arial"/>
+            </a:endParaRPr>
+          </a:p>
+        </p:txBody>
+      </p:sp>
+      <p:sp>
+        <p:nvSpPr>
+          <p:cNvPr id="56" name="dtHebDate_0">
+            <a:extLst>
+              <a:ext uri="{FF2B5EF4-FFF2-40B4-BE49-F238E27FC236}">
+                <a16:creationId xmlns:a16="http://schemas.microsoft.com/office/drawing/2014/main" id="{46ADA304-E8E7-F476-8248-AB5163ACCCBF}"/>
+              </a:ext>
+            </a:extLst>
+          </p:cNvPr>
+          <p:cNvSpPr/>
+          <p:nvPr/>
+        </p:nvSpPr>
+        <p:spPr>
+          <a:xfrm>
+            <a:off x="7976846" y="179873"/>
+            <a:ext cx="4158004" cy="839302"/>
+          </a:xfrm>
+          <a:prstGeom prst="rect">
+            <a:avLst/>
+          </a:prstGeom>
+          <a:noFill/>
+          <a:ln w="0">
+            <a:noFill/>
+          </a:ln>
+        </p:spPr>
+        <p:style>
+          <a:lnRef idx="0">
+            <a:scrgbClr r="0" g="0" b="0"/>
+          </a:lnRef>
+          <a:fillRef idx="0">
+            <a:scrgbClr r="0" g="0" b="0"/>
+          </a:fillRef>
+          <a:effectRef idx="0">
+            <a:scrgbClr r="0" g="0" b="0"/>
+          </a:effectRef>
+          <a:fontRef idx="minor"/>
+        </p:style>
+        <p:txBody>
+          <a:bodyPr wrap="square" lIns="90000" tIns="45000" rIns="90000" bIns="45000" anchor="ctr" anchorCtr="0">
+            <a:normAutofit/>
+          </a:bodyPr>
+          <a:lstStyle/>
+          <a:p>
+            <a:pPr algn="ctr" defTabSz="914400" rtl="1">
+              <a:lnSpc>
+                <a:spcPct val="100000"/>
+              </a:lnSpc>
+            </a:pPr>
+            <a:r>
+              <a:rPr lang="en-US" sz="2800" b="1" u="none" strike="noStrike" dirty="0">
+                <a:solidFill>
+                  <a:schemeClr val="dk1"/>
+                </a:solidFill>
+                <a:effectLst/>
+                <a:uFillTx/>
+                <a:latin typeface="Arial" panose="020B0604020202020204" pitchFamily="34" charset="0"/>
+                <a:cs typeface="Arial" panose="020B0604020202020204" pitchFamily="34" charset="0"/>
+              </a:rPr>
+              <a:t>#HEBDATE</a:t>
+            </a:r>
+            <a:r>
+              <a:rPr lang="en-US" sz="2400" b="0" u="none" strike="noStrike" dirty="0">
+                <a:solidFill>
+                  <a:srgbClr val="000000"/>
+                </a:solidFill>
+                <a:effectLst/>
+                <a:uFillTx/>
+                <a:latin typeface="Arial" panose="020B0604020202020204" pitchFamily="34" charset="0"/>
+                <a:cs typeface="Arial" panose="020B0604020202020204" pitchFamily="34" charset="0"/>
+              </a:rPr>
+              <a:t>#DAYINFO:n</a:t>
+            </a:r>
+          </a:p>
+        </p:txBody>
+      </p:sp>
+      <p:sp>
+        <p:nvSpPr>
+          <p:cNvPr id="58" name="dtHebDate_0">
+            <a:extLst>
+              <a:ext uri="{FF2B5EF4-FFF2-40B4-BE49-F238E27FC236}">
+                <a16:creationId xmlns:a16="http://schemas.microsoft.com/office/drawing/2014/main" id="{F0C62599-1767-9F41-BE06-290355C298B4}"/>
+              </a:ext>
+            </a:extLst>
+          </p:cNvPr>
+          <p:cNvSpPr/>
+          <p:nvPr/>
+        </p:nvSpPr>
+        <p:spPr>
+          <a:xfrm>
+            <a:off x="419048" y="179872"/>
+            <a:ext cx="3414133" cy="839301"/>
+          </a:xfrm>
+          <a:prstGeom prst="rect">
+            <a:avLst/>
+          </a:prstGeom>
+          <a:noFill/>
+          <a:ln w="0">
+            <a:noFill/>
+          </a:ln>
+        </p:spPr>
+        <p:style>
+          <a:lnRef idx="0">
+            <a:scrgbClr r="0" g="0" b="0"/>
+          </a:lnRef>
+          <a:fillRef idx="0">
+            <a:scrgbClr r="0" g="0" b="0"/>
+          </a:fillRef>
+          <a:effectRef idx="0">
+            <a:scrgbClr r="0" g="0" b="0"/>
+          </a:effectRef>
+          <a:fontRef idx="minor"/>
+        </p:style>
+        <p:txBody>
+          <a:bodyPr wrap="square" lIns="90000" tIns="45000" rIns="90000" bIns="45000" anchor="ctr" anchorCtr="0">
+            <a:normAutofit/>
+          </a:bodyPr>
+          <a:lstStyle/>
+          <a:p>
+            <a:pPr algn="ctr" defTabSz="914400">
+              <a:lnSpc>
+                <a:spcPct val="100000"/>
+              </a:lnSpc>
+            </a:pPr>
+            <a:r>
+              <a:rPr lang="en-US" sz="2800" b="1" u="none" strike="noStrike" dirty="0">
+                <a:solidFill>
+                  <a:schemeClr val="dk1"/>
+                </a:solidFill>
+                <a:effectLst/>
+                <a:uFillTx/>
+                <a:latin typeface="Arial" panose="020B0604020202020204" pitchFamily="34" charset="0"/>
+                <a:cs typeface="Arial" panose="020B0604020202020204" pitchFamily="34" charset="0"/>
+              </a:rPr>
+              <a:t>#DICLOCK</a:t>
+            </a:r>
+            <a:endParaRPr lang="en-US" sz="2800" b="0" u="none" strike="noStrike" dirty="0">
+              <a:solidFill>
+                <a:srgbClr val="000000"/>
+              </a:solidFill>
+              <a:effectLst/>
+              <a:uFillTx/>
+              <a:latin typeface="Arial" panose="020B0604020202020204" pitchFamily="34" charset="0"/>
+              <a:cs typeface="Arial" panose="020B0604020202020204" pitchFamily="34" charset="0"/>
+            </a:endParaRPr>
+          </a:p>
+        </p:txBody>
+      </p:sp>
+      <p:sp>
+        <p:nvSpPr>
+          <p:cNvPr id="60" name="dtHebDate_0">
+            <a:extLst>
+              <a:ext uri="{FF2B5EF4-FFF2-40B4-BE49-F238E27FC236}">
+                <a16:creationId xmlns:a16="http://schemas.microsoft.com/office/drawing/2014/main" id="{CFA2B258-8BD7-82D9-A344-B1317F35FCBD}"/>
+              </a:ext>
+            </a:extLst>
+          </p:cNvPr>
+          <p:cNvSpPr/>
+          <p:nvPr/>
+        </p:nvSpPr>
+        <p:spPr>
+          <a:xfrm>
+            <a:off x="4097959" y="181691"/>
+            <a:ext cx="3996079" cy="767987"/>
+          </a:xfrm>
+          <a:prstGeom prst="rect">
+            <a:avLst/>
+          </a:prstGeom>
+          <a:noFill/>
+          <a:ln w="0">
+            <a:noFill/>
+          </a:ln>
+        </p:spPr>
+        <p:style>
+          <a:lnRef idx="0">
+            <a:scrgbClr r="0" g="0" b="0"/>
+          </a:lnRef>
+          <a:fillRef idx="0">
+            <a:scrgbClr r="0" g="0" b="0"/>
+          </a:fillRef>
+          <a:effectRef idx="0">
+            <a:scrgbClr r="0" g="0" b="0"/>
+          </a:effectRef>
+          <a:fontRef idx="minor"/>
+        </p:style>
+        <p:txBody>
+          <a:bodyPr wrap="square" lIns="90000" tIns="45000" rIns="90000" bIns="45000" anchor="t">
+            <a:spAutoFit/>
+          </a:bodyPr>
+          <a:lstStyle/>
+          <a:p>
+            <a:pPr algn="ctr" defTabSz="914400">
+              <a:lnSpc>
+                <a:spcPct val="100000"/>
+              </a:lnSpc>
+            </a:pPr>
+            <a:r>
+              <a:rPr lang="he-IL" sz="2000" dirty="0">
+                <a:solidFill>
+                  <a:schemeClr val="dk1"/>
+                </a:solidFill>
+                <a:latin typeface="Arial" panose="020B0604020202020204" pitchFamily="34" charset="0"/>
+                <a:cs typeface="Arial" panose="020B0604020202020204" pitchFamily="34" charset="0"/>
+              </a:rPr>
+              <a:t>בית הכנסת הספרדי</a:t>
+            </a:r>
+          </a:p>
+          <a:p>
+            <a:pPr algn="ctr" defTabSz="914400">
+              <a:lnSpc>
+                <a:spcPct val="100000"/>
+              </a:lnSpc>
+            </a:pPr>
+            <a:r>
+              <a:rPr lang="he-IL" sz="2400" b="1" u="none" strike="noStrike" dirty="0">
+                <a:solidFill>
+                  <a:schemeClr val="dk1"/>
+                </a:solidFill>
+                <a:effectLst/>
+                <a:uFillTx/>
+                <a:latin typeface="Arial" panose="020B0604020202020204" pitchFamily="34" charset="0"/>
+                <a:cs typeface="Arial" panose="020B0604020202020204" pitchFamily="34" charset="0"/>
+              </a:rPr>
+              <a:t>מעשה ניסים</a:t>
+            </a:r>
+            <a:endParaRPr lang="en-US" sz="2400" b="1" u="none" strike="noStrike" dirty="0">
+              <a:solidFill>
+                <a:srgbClr val="000000"/>
+              </a:solidFill>
+              <a:effectLst/>
+              <a:uFillTx/>
+              <a:latin typeface="Arial" panose="020B0604020202020204" pitchFamily="34" charset="0"/>
+              <a:cs typeface="Arial" panose="020B0604020202020204" pitchFamily="34" charset="0"/>
+            </a:endParaRPr>
+          </a:p>
+        </p:txBody>
+      </p:sp>
+      <p:sp>
+        <p:nvSpPr>
+          <p:cNvPr id="63" name="Rectangle 2">
+            <a:extLst>
+              <a:ext uri="{FF2B5EF4-FFF2-40B4-BE49-F238E27FC236}">
+                <a16:creationId xmlns:a16="http://schemas.microsoft.com/office/drawing/2014/main" id="{AB362A89-5CC7-BEE6-CE36-0F2502067525}"/>
+              </a:ext>
+            </a:extLst>
+          </p:cNvPr>
+          <p:cNvSpPr/>
+          <p:nvPr/>
+        </p:nvSpPr>
+        <p:spPr>
+          <a:xfrm>
+            <a:off x="9166221" y="1277624"/>
+            <a:ext cx="2838837" cy="1260430"/>
+          </a:xfrm>
+          <a:prstGeom prst="rect">
+            <a:avLst/>
+          </a:prstGeom>
+          <a:noFill/>
+          <a:ln w="0">
+            <a:noFill/>
+          </a:ln>
+        </p:spPr>
+        <p:style>
+          <a:lnRef idx="0">
+            <a:scrgbClr r="0" g="0" b="0"/>
+          </a:lnRef>
+          <a:fillRef idx="0">
+            <a:scrgbClr r="0" g="0" b="0"/>
+          </a:fillRef>
+          <a:effectRef idx="0">
+            <a:scrgbClr r="0" g="0" b="0"/>
+          </a:effectRef>
+          <a:fontRef idx="minor"/>
+        </p:style>
+        <p:txBody>
+          <a:bodyPr wrap="square" lIns="90000" tIns="45000" rIns="90000" bIns="45000" anchor="t">
+            <a:spAutoFit/>
+          </a:bodyPr>
+          <a:lstStyle/>
+          <a:p>
+            <a:pPr algn="ctr" defTabSz="914400" rtl="1">
+              <a:lnSpc>
+                <a:spcPct val="100000"/>
+              </a:lnSpc>
+            </a:pPr>
+            <a:r>
+              <a:rPr lang="he-IL" sz="2800" b="1" u="none" strike="noStrike" dirty="0">
+                <a:solidFill>
+                  <a:schemeClr val="accent1"/>
+                </a:solidFill>
+                <a:effectLst/>
+                <a:uFillTx/>
+                <a:latin typeface="Calibri"/>
+              </a:rPr>
+              <a:t>זמני היום:</a:t>
+            </a:r>
+            <a:br>
+              <a:rPr lang="en-US" sz="2800" dirty="0">
+                <a:solidFill>
+                  <a:srgbClr val="000000"/>
+                </a:solidFill>
+                <a:latin typeface="Arial" panose="020B0604020202020204" pitchFamily="34" charset="0"/>
+                <a:cs typeface="Arial" panose="020B0604020202020204" pitchFamily="34" charset="0"/>
+              </a:rPr>
+            </a:br>
+            <a:r>
+              <a:rPr lang="en-US" dirty="0">
+                <a:solidFill>
+                  <a:srgbClr val="000000"/>
+                </a:solidFill>
+                <a:latin typeface="Arial" panose="020B0604020202020204" pitchFamily="34" charset="0"/>
+                <a:cs typeface="Arial" panose="020B0604020202020204" pitchFamily="34" charset="0"/>
+              </a:rPr>
+              <a:t>#DAYZMANIM</a:t>
+            </a:r>
+          </a:p>
+          <a:p>
+            <a:pPr algn="ctr" defTabSz="914400" rtl="1">
+              <a:lnSpc>
+                <a:spcPct val="100000"/>
+              </a:lnSpc>
+            </a:pPr>
+            <a:endParaRPr lang="en-US" sz="2800" b="1" u="none" strike="noStrike" dirty="0">
+              <a:solidFill>
+                <a:srgbClr val="000000"/>
+              </a:solidFill>
+              <a:effectLst/>
+              <a:uFillTx/>
+              <a:latin typeface="Arial"/>
+            </a:endParaRPr>
+          </a:p>
+        </p:txBody>
+      </p:sp>
+      <p:sp>
+        <p:nvSpPr>
+          <p:cNvPr id="64" name="Rectangle: Rounded Corners 63">
+            <a:extLst>
+              <a:ext uri="{FF2B5EF4-FFF2-40B4-BE49-F238E27FC236}">
+                <a16:creationId xmlns:a16="http://schemas.microsoft.com/office/drawing/2014/main" id="{AD4F57B3-0F68-5DAB-1071-97E1CFFFEB45}"/>
+              </a:ext>
+            </a:extLst>
+          </p:cNvPr>
+          <p:cNvSpPr/>
+          <p:nvPr/>
+        </p:nvSpPr>
+        <p:spPr>
+          <a:xfrm>
+            <a:off x="196465" y="1161936"/>
+            <a:ext cx="2816614" cy="2930148"/>
+          </a:xfrm>
+          <a:prstGeom prst="roundRect">
+            <a:avLst>
+              <a:gd name="adj" fmla="val 0"/>
+            </a:avLst>
+          </a:prstGeom>
+          <a:solidFill>
+            <a:srgbClr val="FAF4E3"/>
+          </a:solidFill>
+          <a:ln w="69850" cap="flat" cmpd="sng" algn="ctr">
+            <a:solidFill>
+              <a:srgbClr val="FAF4E3"/>
+            </a:solidFill>
+            <a:prstDash val="solid"/>
+            <a:round/>
+            <a:headEnd type="none" w="med" len="med"/>
+            <a:tailEnd type="none" w="med" len="med"/>
+          </a:ln>
+        </p:spPr>
+        <p:style>
+          <a:lnRef idx="0">
+            <a:scrgbClr r="0" g="0" b="0"/>
+          </a:lnRef>
+          <a:fillRef idx="0">
+            <a:scrgbClr r="0" g="0" b="0"/>
+          </a:fillRef>
+          <a:effectRef idx="0">
+            <a:scrgbClr r="0" g="0" b="0"/>
+          </a:effectRef>
+          <a:fontRef idx="minor">
+            <a:schemeClr val="dk1"/>
+          </a:fontRef>
+        </p:style>
+        <p:txBody>
+          <a:bodyPr rtlCol="0" anchor="ctr"/>
+          <a:lstStyle/>
+          <a:p>
+            <a:pPr algn="ctr"/>
+            <a:endParaRPr lang="LID4096"/>
+          </a:p>
+        </p:txBody>
+      </p:sp>
+      <p:sp>
+        <p:nvSpPr>
+          <p:cNvPr id="65" name="Rectangle 2">
+            <a:extLst>
+              <a:ext uri="{FF2B5EF4-FFF2-40B4-BE49-F238E27FC236}">
+                <a16:creationId xmlns:a16="http://schemas.microsoft.com/office/drawing/2014/main" id="{AA0FCFD6-7EF7-B30C-6667-0890174B9988}"/>
+              </a:ext>
+            </a:extLst>
+          </p:cNvPr>
+          <p:cNvSpPr/>
+          <p:nvPr/>
+        </p:nvSpPr>
+        <p:spPr>
+          <a:xfrm>
+            <a:off x="109542" y="4234847"/>
+            <a:ext cx="2919415" cy="2484440"/>
+          </a:xfrm>
+          <a:prstGeom prst="rect">
+            <a:avLst/>
+          </a:prstGeom>
+          <a:noFill/>
+          <a:ln w="0">
+            <a:noFill/>
+          </a:ln>
+        </p:spPr>
+        <p:style>
+          <a:lnRef idx="0">
+            <a:scrgbClr r="0" g="0" b="0"/>
+          </a:lnRef>
+          <a:fillRef idx="0">
+            <a:scrgbClr r="0" g="0" b="0"/>
+          </a:fillRef>
+          <a:effectRef idx="0">
+            <a:scrgbClr r="0" g="0" b="0"/>
+          </a:effectRef>
+          <a:fontRef idx="minor"/>
+        </p:style>
+        <p:txBody>
+          <a:bodyPr wrap="square" lIns="90000" tIns="45000" rIns="90000" bIns="45000" anchor="ctr" anchorCtr="0">
+            <a:normAutofit/>
+          </a:bodyPr>
+          <a:lstStyle/>
+          <a:p>
+            <a:pPr algn="ctr" defTabSz="914400" rtl="1">
+              <a:spcAft>
+                <a:spcPts val="600"/>
+              </a:spcAft>
+              <a:tabLst>
+                <a:tab pos="1257300" algn="r"/>
+              </a:tabLst>
+            </a:pPr>
+            <a:r>
+              <a:rPr lang="he-IL" sz="2000" dirty="0">
+                <a:solidFill>
+                  <a:srgbClr val="FAF4E3"/>
+                </a:solidFill>
+                <a:latin typeface="Arial"/>
+              </a:rPr>
+              <a:t>קהילת מעשה ניסים </a:t>
+            </a:r>
+            <a:br>
+              <a:rPr lang="en-US" sz="2000" dirty="0">
+                <a:solidFill>
+                  <a:srgbClr val="FAF4E3"/>
+                </a:solidFill>
+                <a:latin typeface="Arial"/>
+              </a:rPr>
+            </a:br>
+            <a:r>
+              <a:rPr lang="he-IL" sz="2000" dirty="0">
+                <a:solidFill>
+                  <a:srgbClr val="FAF4E3"/>
+                </a:solidFill>
+                <a:latin typeface="Arial"/>
+              </a:rPr>
+              <a:t>מברכים את כל אורחינו בברכת שבת שלום!</a:t>
+            </a:r>
+            <a:endParaRPr lang="en-US" sz="2000" u="none" strike="noStrike" dirty="0">
+              <a:solidFill>
+                <a:srgbClr val="FAF4E3"/>
+              </a:solidFill>
+              <a:effectLst/>
+              <a:uFillTx/>
+              <a:latin typeface="Arial"/>
+            </a:endParaRPr>
           </a:p>
         </p:txBody>
       </p:sp>
     </p:spTree>
     <p:extLst>
       <p:ext uri="{BB962C8B-B14F-4D97-AF65-F5344CB8AC3E}">
-        <p14:creationId xmlns:p14="http://schemas.microsoft.com/office/powerpoint/2010/main" val="3506289245"/>
+        <p14:creationId xmlns:p14="http://schemas.microsoft.com/office/powerpoint/2010/main" val="3044285190"/>
+      </p:ext>
+    </p:extLst>
+  </p:cSld>
+  <p:clrMapOvr>
+    <a:masterClrMapping/>
+  </p:clrMapOvr>
+</p:sld>
+</file>
+
+<file path=ppt/slides/slide7.xml><?xml version="1.0" encoding="utf-8"?>
+<p:sld xmlns:a="http://schemas.openxmlformats.org/drawingml/2006/main" xmlns:r="http://schemas.openxmlformats.org/officeDocument/2006/relationships" xmlns:p="http://schemas.openxmlformats.org/presentationml/2006/main">
+  <p:cSld>
+    <p:bg>
+      <p:bgPr>
+        <a:blipFill dpi="0" rotWithShape="1">
+          <a:blip r:embed="rId2">
+            <a:lum/>
+          </a:blip>
+          <a:srcRect/>
+          <a:stretch>
+            <a:fillRect/>
+          </a:stretch>
+        </a:blipFill>
+        <a:effectLst/>
+      </p:bgPr>
+    </p:bg>
+    <p:spTree>
+      <p:nvGrpSpPr>
+        <p:cNvPr id="1" name=""/>
+        <p:cNvGrpSpPr/>
+        <p:nvPr/>
+      </p:nvGrpSpPr>
+      <p:grpSpPr>
+        <a:xfrm>
+          <a:off x="0" y="0"/>
+          <a:ext cx="0" cy="0"/>
+          <a:chOff x="0" y="0"/>
+          <a:chExt cx="0" cy="0"/>
+        </a:xfrm>
+      </p:grpSpPr>
+      <p:sp>
+        <p:nvSpPr>
+          <p:cNvPr id="20" name="Rectangle 19">
+            <a:extLst>
+              <a:ext uri="{FF2B5EF4-FFF2-40B4-BE49-F238E27FC236}">
+                <a16:creationId xmlns:a16="http://schemas.microsoft.com/office/drawing/2014/main" id="{81B1FB30-B867-C5A8-A6A5-8BF41F8B5A61}"/>
+              </a:ext>
+            </a:extLst>
+          </p:cNvPr>
+          <p:cNvSpPr/>
+          <p:nvPr/>
+        </p:nvSpPr>
+        <p:spPr>
+          <a:xfrm>
+            <a:off x="3251200" y="1286396"/>
+            <a:ext cx="5626100" cy="722925"/>
+          </a:xfrm>
+          <a:prstGeom prst="rect">
+            <a:avLst/>
+          </a:prstGeom>
+          <a:noFill/>
+          <a:ln w="0">
+            <a:noFill/>
+          </a:ln>
+          <a:effectLst/>
+        </p:spPr>
+        <p:style>
+          <a:lnRef idx="0">
+            <a:scrgbClr r="0" g="0" b="0"/>
+          </a:lnRef>
+          <a:fillRef idx="0">
+            <a:scrgbClr r="0" g="0" b="0"/>
+          </a:fillRef>
+          <a:effectRef idx="0">
+            <a:scrgbClr r="0" g="0" b="0"/>
+          </a:effectRef>
+          <a:fontRef idx="minor"/>
+        </p:style>
+        <p:txBody>
+          <a:bodyPr wrap="square" lIns="90000" tIns="45000" rIns="90000" bIns="45000" anchor="ctr" anchorCtr="0">
+            <a:normAutofit lnSpcReduction="10000"/>
+          </a:bodyPr>
+          <a:lstStyle/>
+          <a:p>
+            <a:pPr algn="ctr" defTabSz="914400" rtl="1">
+              <a:lnSpc>
+                <a:spcPct val="100000"/>
+              </a:lnSpc>
+            </a:pPr>
+            <a:r>
+              <a:rPr lang="he-IL" sz="4400" b="1" u="none" strike="noStrike" dirty="0">
+                <a:solidFill>
+                  <a:schemeClr val="accent1"/>
+                </a:solidFill>
+                <a:effectLst/>
+                <a:uFillTx/>
+                <a:latin typeface="Calibri"/>
+              </a:rPr>
+              <a:t>#</a:t>
+            </a:r>
+            <a:r>
+              <a:rPr lang="en-US" sz="4400" b="1" u="none" strike="noStrike" dirty="0">
+                <a:solidFill>
+                  <a:schemeClr val="accent1"/>
+                </a:solidFill>
+                <a:effectLst/>
+                <a:uFillTx/>
+                <a:latin typeface="Calibri"/>
+              </a:rPr>
+              <a:t>PARSHA</a:t>
+            </a:r>
+            <a:endParaRPr lang="en-US" sz="4400" b="1" u="none" strike="noStrike" dirty="0">
+              <a:solidFill>
+                <a:srgbClr val="000000"/>
+              </a:solidFill>
+              <a:effectLst/>
+              <a:uFillTx/>
+              <a:latin typeface="Arial"/>
+            </a:endParaRPr>
+          </a:p>
+        </p:txBody>
+      </p:sp>
+      <p:sp>
+        <p:nvSpPr>
+          <p:cNvPr id="22" name="Rectangle 2">
+            <a:extLst>
+              <a:ext uri="{FF2B5EF4-FFF2-40B4-BE49-F238E27FC236}">
+                <a16:creationId xmlns:a16="http://schemas.microsoft.com/office/drawing/2014/main" id="{6C501901-BF39-C62F-8D1E-A71E3C1A5985}"/>
+              </a:ext>
+            </a:extLst>
+          </p:cNvPr>
+          <p:cNvSpPr/>
+          <p:nvPr/>
+        </p:nvSpPr>
+        <p:spPr>
+          <a:xfrm>
+            <a:off x="3412915" y="2024561"/>
+            <a:ext cx="5121486" cy="4542045"/>
+          </a:xfrm>
+          <a:prstGeom prst="rect">
+            <a:avLst/>
+          </a:prstGeom>
+          <a:noFill/>
+          <a:ln w="0">
+            <a:noFill/>
+          </a:ln>
+          <a:effectLst>
+            <a:outerShdw blurRad="50800" dist="38100" dir="2700000" algn="tl" rotWithShape="0">
+              <a:prstClr val="black"/>
+            </a:outerShdw>
+          </a:effectLst>
+        </p:spPr>
+        <p:style>
+          <a:lnRef idx="0">
+            <a:scrgbClr r="0" g="0" b="0"/>
+          </a:lnRef>
+          <a:fillRef idx="0">
+            <a:scrgbClr r="0" g="0" b="0"/>
+          </a:fillRef>
+          <a:effectRef idx="0">
+            <a:scrgbClr r="0" g="0" b="0"/>
+          </a:effectRef>
+          <a:fontRef idx="minor"/>
+        </p:style>
+        <p:txBody>
+          <a:bodyPr wrap="square" lIns="90000" tIns="45000" rIns="90000" bIns="45000" anchor="ctr" anchorCtr="0">
+            <a:normAutofit/>
+          </a:bodyPr>
+          <a:lstStyle/>
+          <a:p>
+            <a:pPr algn="r" defTabSz="914400" rtl="1">
+              <a:spcAft>
+                <a:spcPts val="600"/>
+              </a:spcAft>
+              <a:tabLst>
+                <a:tab pos="1257300" algn="r"/>
+              </a:tabLst>
+            </a:pPr>
+            <a:r>
+              <a:rPr lang="he-IL" sz="3200" b="1" u="none" strike="noStrike" dirty="0">
+                <a:solidFill>
+                  <a:srgbClr val="FAF4E3"/>
+                </a:solidFill>
+                <a:effectLst>
+                  <a:outerShdw blurRad="38100" dist="38100" dir="2700000" algn="tl">
+                    <a:srgbClr val="000000">
+                      <a:alpha val="43137"/>
+                    </a:srgbClr>
+                  </a:outerShdw>
+                </a:effectLst>
+                <a:uFillTx/>
+                <a:latin typeface="Arial" panose="020B0604020202020204" pitchFamily="34" charset="0"/>
+                <a:cs typeface="Arial" panose="020B0604020202020204" pitchFamily="34" charset="0"/>
+              </a:rPr>
+              <a:t>#</a:t>
+            </a:r>
+            <a:r>
+              <a:rPr lang="en-US" sz="3200" b="1" u="none" strike="noStrike" dirty="0">
+                <a:solidFill>
+                  <a:srgbClr val="FAF4E3"/>
+                </a:solidFill>
+                <a:effectLst>
+                  <a:outerShdw blurRad="38100" dist="38100" dir="2700000" algn="tl">
+                    <a:srgbClr val="000000">
+                      <a:alpha val="43137"/>
+                    </a:srgbClr>
+                  </a:outerShdw>
+                </a:effectLst>
+                <a:uFillTx/>
+                <a:latin typeface="Arial" panose="020B0604020202020204" pitchFamily="34" charset="0"/>
+                <a:cs typeface="Arial" panose="020B0604020202020204" pitchFamily="34" charset="0"/>
+              </a:rPr>
+              <a:t>CMD</a:t>
+            </a:r>
+            <a:r>
+              <a:rPr lang="he-IL" sz="3200" b="1" u="none" strike="noStrike" dirty="0">
+                <a:solidFill>
+                  <a:srgbClr val="FAF4E3"/>
+                </a:solidFill>
+                <a:effectLst>
+                  <a:outerShdw blurRad="38100" dist="38100" dir="2700000" algn="tl">
+                    <a:srgbClr val="000000">
+                      <a:alpha val="43137"/>
+                    </a:srgbClr>
+                  </a:outerShdw>
+                </a:effectLst>
+                <a:uFillTx/>
+                <a:latin typeface="Arial" panose="020B0604020202020204" pitchFamily="34" charset="0"/>
+                <a:cs typeface="Arial" panose="020B0604020202020204" pitchFamily="34" charset="0"/>
+              </a:rPr>
+              <a:t>:&lt;</a:t>
+            </a:r>
+            <a:r>
+              <a:rPr lang="en-US" sz="3200" b="1" dirty="0" err="1">
+                <a:solidFill>
+                  <a:srgbClr val="FAF4E3"/>
+                </a:solidFill>
+                <a:effectLst>
+                  <a:outerShdw blurRad="38100" dist="38100" dir="2700000" algn="tl">
+                    <a:srgbClr val="000000">
+                      <a:alpha val="43137"/>
+                    </a:srgbClr>
+                  </a:outerShdw>
+                </a:effectLst>
+                <a:latin typeface="Arial" panose="020B0604020202020204" pitchFamily="34" charset="0"/>
+                <a:cs typeface="Arial" panose="020B0604020202020204" pitchFamily="34" charset="0"/>
+              </a:rPr>
+              <a:t>shabbos</a:t>
+            </a:r>
+            <a:r>
+              <a:rPr lang="he-IL" sz="3200" b="1" u="none" strike="noStrike" dirty="0">
+                <a:solidFill>
+                  <a:srgbClr val="FAF4E3"/>
+                </a:solidFill>
+                <a:effectLst>
+                  <a:outerShdw blurRad="38100" dist="38100" dir="2700000" algn="tl">
+                    <a:srgbClr val="000000">
+                      <a:alpha val="43137"/>
+                    </a:srgbClr>
+                  </a:outerShdw>
+                </a:effectLst>
+                <a:uFillTx/>
+                <a:latin typeface="Arial" panose="020B0604020202020204" pitchFamily="34" charset="0"/>
+                <a:cs typeface="Arial" panose="020B0604020202020204" pitchFamily="34" charset="0"/>
+              </a:rPr>
+              <a:t>&gt;</a:t>
+            </a:r>
+            <a:endParaRPr lang="en-US" sz="3200" b="1" u="none" strike="noStrike" dirty="0">
+              <a:solidFill>
+                <a:srgbClr val="FAF4E3"/>
+              </a:solidFill>
+              <a:effectLst>
+                <a:outerShdw blurRad="38100" dist="38100" dir="2700000" algn="tl">
+                  <a:srgbClr val="000000">
+                    <a:alpha val="43137"/>
+                  </a:srgbClr>
+                </a:outerShdw>
+              </a:effectLst>
+              <a:uFillTx/>
+              <a:latin typeface="Arial" panose="020B0604020202020204" pitchFamily="34" charset="0"/>
+              <a:cs typeface="Arial" panose="020B0604020202020204" pitchFamily="34" charset="0"/>
+            </a:endParaRPr>
+          </a:p>
+        </p:txBody>
+      </p:sp>
+      <p:sp>
+        <p:nvSpPr>
+          <p:cNvPr id="26" name="Rectangle 11">
+            <a:extLst>
+              <a:ext uri="{FF2B5EF4-FFF2-40B4-BE49-F238E27FC236}">
+                <a16:creationId xmlns:a16="http://schemas.microsoft.com/office/drawing/2014/main" id="{51893EF7-7CCE-E3CE-BA57-30A1AA21A090}"/>
+              </a:ext>
+            </a:extLst>
+          </p:cNvPr>
+          <p:cNvSpPr/>
+          <p:nvPr/>
+        </p:nvSpPr>
+        <p:spPr>
+          <a:xfrm>
+            <a:off x="9494519" y="4411980"/>
+            <a:ext cx="2148841" cy="2162246"/>
+          </a:xfrm>
+          <a:prstGeom prst="rect">
+            <a:avLst/>
+          </a:prstGeom>
+          <a:noFill/>
+          <a:ln>
+            <a:noFill/>
+          </a:ln>
+        </p:spPr>
+        <p:style>
+          <a:lnRef idx="2">
+            <a:schemeClr val="accent4">
+              <a:shade val="50000"/>
+            </a:schemeClr>
+          </a:lnRef>
+          <a:fillRef idx="1">
+            <a:schemeClr val="accent4"/>
+          </a:fillRef>
+          <a:effectRef idx="0">
+            <a:schemeClr val="accent4"/>
+          </a:effectRef>
+          <a:fontRef idx="minor"/>
+        </p:style>
+        <p:txBody>
+          <a:bodyPr lIns="90000" tIns="45000" rIns="90000" bIns="45000" anchor="ctr">
+            <a:noAutofit/>
+          </a:bodyPr>
+          <a:lstStyle/>
+          <a:p>
+            <a:pPr algn="ctr" defTabSz="914400">
+              <a:lnSpc>
+                <a:spcPct val="100000"/>
+              </a:lnSpc>
+            </a:pPr>
+            <a:r>
+              <a:rPr lang="en-US" sz="1800" b="0" u="none" strike="noStrike" dirty="0">
+                <a:solidFill>
+                  <a:srgbClr val="FF0000"/>
+                </a:solidFill>
+                <a:effectLst/>
+                <a:uFillTx/>
+                <a:latin typeface="Calibri"/>
+              </a:rPr>
+              <a:t>#ANCLOCK</a:t>
+            </a:r>
+            <a:endParaRPr lang="en-US" sz="1800" b="0" u="none" strike="noStrike" dirty="0">
+              <a:solidFill>
+                <a:srgbClr val="000000"/>
+              </a:solidFill>
+              <a:effectLst/>
+              <a:uFillTx/>
+              <a:latin typeface="Arial"/>
+            </a:endParaRPr>
+          </a:p>
+        </p:txBody>
+      </p:sp>
+      <p:sp>
+        <p:nvSpPr>
+          <p:cNvPr id="28" name="dtHebDate_0">
+            <a:extLst>
+              <a:ext uri="{FF2B5EF4-FFF2-40B4-BE49-F238E27FC236}">
+                <a16:creationId xmlns:a16="http://schemas.microsoft.com/office/drawing/2014/main" id="{59550F5E-D74A-6FA5-4B8F-04025C162451}"/>
+              </a:ext>
+            </a:extLst>
+          </p:cNvPr>
+          <p:cNvSpPr/>
+          <p:nvPr/>
+        </p:nvSpPr>
+        <p:spPr>
+          <a:xfrm>
+            <a:off x="7976846" y="179873"/>
+            <a:ext cx="4158004" cy="839302"/>
+          </a:xfrm>
+          <a:prstGeom prst="rect">
+            <a:avLst/>
+          </a:prstGeom>
+          <a:noFill/>
+          <a:ln w="0">
+            <a:noFill/>
+          </a:ln>
+        </p:spPr>
+        <p:style>
+          <a:lnRef idx="0">
+            <a:scrgbClr r="0" g="0" b="0"/>
+          </a:lnRef>
+          <a:fillRef idx="0">
+            <a:scrgbClr r="0" g="0" b="0"/>
+          </a:fillRef>
+          <a:effectRef idx="0">
+            <a:scrgbClr r="0" g="0" b="0"/>
+          </a:effectRef>
+          <a:fontRef idx="minor"/>
+        </p:style>
+        <p:txBody>
+          <a:bodyPr wrap="square" lIns="90000" tIns="45000" rIns="90000" bIns="45000" anchor="ctr" anchorCtr="0">
+            <a:normAutofit/>
+          </a:bodyPr>
+          <a:lstStyle/>
+          <a:p>
+            <a:pPr algn="ctr" defTabSz="914400" rtl="1">
+              <a:lnSpc>
+                <a:spcPct val="100000"/>
+              </a:lnSpc>
+            </a:pPr>
+            <a:r>
+              <a:rPr lang="en-US" sz="2800" b="1" u="none" strike="noStrike" dirty="0">
+                <a:solidFill>
+                  <a:schemeClr val="dk1"/>
+                </a:solidFill>
+                <a:effectLst/>
+                <a:uFillTx/>
+                <a:latin typeface="Arial" panose="020B0604020202020204" pitchFamily="34" charset="0"/>
+                <a:cs typeface="Arial" panose="020B0604020202020204" pitchFamily="34" charset="0"/>
+              </a:rPr>
+              <a:t>#HEBDATE</a:t>
+            </a:r>
+            <a:r>
+              <a:rPr lang="en-US" sz="2400" b="0" u="none" strike="noStrike" dirty="0">
+                <a:solidFill>
+                  <a:srgbClr val="000000"/>
+                </a:solidFill>
+                <a:effectLst/>
+                <a:uFillTx/>
+                <a:latin typeface="Arial" panose="020B0604020202020204" pitchFamily="34" charset="0"/>
+                <a:cs typeface="Arial" panose="020B0604020202020204" pitchFamily="34" charset="0"/>
+              </a:rPr>
+              <a:t>#DAYINFO:n</a:t>
+            </a:r>
+          </a:p>
+        </p:txBody>
+      </p:sp>
+      <p:sp>
+        <p:nvSpPr>
+          <p:cNvPr id="30" name="dtHebDate_0">
+            <a:extLst>
+              <a:ext uri="{FF2B5EF4-FFF2-40B4-BE49-F238E27FC236}">
+                <a16:creationId xmlns:a16="http://schemas.microsoft.com/office/drawing/2014/main" id="{179FDD16-5E45-6FF0-2EBB-CED2A54286D7}"/>
+              </a:ext>
+            </a:extLst>
+          </p:cNvPr>
+          <p:cNvSpPr/>
+          <p:nvPr/>
+        </p:nvSpPr>
+        <p:spPr>
+          <a:xfrm>
+            <a:off x="419048" y="179872"/>
+            <a:ext cx="3414133" cy="839301"/>
+          </a:xfrm>
+          <a:prstGeom prst="rect">
+            <a:avLst/>
+          </a:prstGeom>
+          <a:noFill/>
+          <a:ln w="0">
+            <a:noFill/>
+          </a:ln>
+        </p:spPr>
+        <p:style>
+          <a:lnRef idx="0">
+            <a:scrgbClr r="0" g="0" b="0"/>
+          </a:lnRef>
+          <a:fillRef idx="0">
+            <a:scrgbClr r="0" g="0" b="0"/>
+          </a:fillRef>
+          <a:effectRef idx="0">
+            <a:scrgbClr r="0" g="0" b="0"/>
+          </a:effectRef>
+          <a:fontRef idx="minor"/>
+        </p:style>
+        <p:txBody>
+          <a:bodyPr wrap="square" lIns="90000" tIns="45000" rIns="90000" bIns="45000" anchor="ctr" anchorCtr="0">
+            <a:normAutofit/>
+          </a:bodyPr>
+          <a:lstStyle/>
+          <a:p>
+            <a:pPr algn="ctr" defTabSz="914400">
+              <a:lnSpc>
+                <a:spcPct val="100000"/>
+              </a:lnSpc>
+            </a:pPr>
+            <a:r>
+              <a:rPr lang="en-US" sz="2800" b="1" u="none" strike="noStrike" dirty="0">
+                <a:solidFill>
+                  <a:schemeClr val="dk1"/>
+                </a:solidFill>
+                <a:effectLst/>
+                <a:uFillTx/>
+                <a:latin typeface="Arial" panose="020B0604020202020204" pitchFamily="34" charset="0"/>
+                <a:cs typeface="Arial" panose="020B0604020202020204" pitchFamily="34" charset="0"/>
+              </a:rPr>
+              <a:t>#DICLOCK</a:t>
+            </a:r>
+            <a:endParaRPr lang="en-US" sz="2800" b="0" u="none" strike="noStrike" dirty="0">
+              <a:solidFill>
+                <a:srgbClr val="000000"/>
+              </a:solidFill>
+              <a:effectLst/>
+              <a:uFillTx/>
+              <a:latin typeface="Arial" panose="020B0604020202020204" pitchFamily="34" charset="0"/>
+              <a:cs typeface="Arial" panose="020B0604020202020204" pitchFamily="34" charset="0"/>
+            </a:endParaRPr>
+          </a:p>
+        </p:txBody>
+      </p:sp>
+      <p:sp>
+        <p:nvSpPr>
+          <p:cNvPr id="32" name="dtHebDate_0">
+            <a:extLst>
+              <a:ext uri="{FF2B5EF4-FFF2-40B4-BE49-F238E27FC236}">
+                <a16:creationId xmlns:a16="http://schemas.microsoft.com/office/drawing/2014/main" id="{92369504-10A6-286A-00EE-EB27E26C9863}"/>
+              </a:ext>
+            </a:extLst>
+          </p:cNvPr>
+          <p:cNvSpPr/>
+          <p:nvPr/>
+        </p:nvSpPr>
+        <p:spPr>
+          <a:xfrm>
+            <a:off x="4097959" y="181691"/>
+            <a:ext cx="3996079" cy="767987"/>
+          </a:xfrm>
+          <a:prstGeom prst="rect">
+            <a:avLst/>
+          </a:prstGeom>
+          <a:noFill/>
+          <a:ln w="0">
+            <a:noFill/>
+          </a:ln>
+        </p:spPr>
+        <p:style>
+          <a:lnRef idx="0">
+            <a:scrgbClr r="0" g="0" b="0"/>
+          </a:lnRef>
+          <a:fillRef idx="0">
+            <a:scrgbClr r="0" g="0" b="0"/>
+          </a:fillRef>
+          <a:effectRef idx="0">
+            <a:scrgbClr r="0" g="0" b="0"/>
+          </a:effectRef>
+          <a:fontRef idx="minor"/>
+        </p:style>
+        <p:txBody>
+          <a:bodyPr wrap="square" lIns="90000" tIns="45000" rIns="90000" bIns="45000" anchor="t">
+            <a:spAutoFit/>
+          </a:bodyPr>
+          <a:lstStyle/>
+          <a:p>
+            <a:pPr algn="ctr" defTabSz="914400">
+              <a:lnSpc>
+                <a:spcPct val="100000"/>
+              </a:lnSpc>
+            </a:pPr>
+            <a:r>
+              <a:rPr lang="he-IL" sz="2000" dirty="0">
+                <a:solidFill>
+                  <a:schemeClr val="dk1"/>
+                </a:solidFill>
+                <a:latin typeface="Arial" panose="020B0604020202020204" pitchFamily="34" charset="0"/>
+                <a:cs typeface="Arial" panose="020B0604020202020204" pitchFamily="34" charset="0"/>
+              </a:rPr>
+              <a:t>בית הכנסת הספרדי</a:t>
+            </a:r>
+          </a:p>
+          <a:p>
+            <a:pPr algn="ctr" defTabSz="914400">
+              <a:lnSpc>
+                <a:spcPct val="100000"/>
+              </a:lnSpc>
+            </a:pPr>
+            <a:r>
+              <a:rPr lang="he-IL" sz="2400" b="1" u="none" strike="noStrike" dirty="0">
+                <a:solidFill>
+                  <a:schemeClr val="dk1"/>
+                </a:solidFill>
+                <a:effectLst/>
+                <a:uFillTx/>
+                <a:latin typeface="Arial" panose="020B0604020202020204" pitchFamily="34" charset="0"/>
+                <a:cs typeface="Arial" panose="020B0604020202020204" pitchFamily="34" charset="0"/>
+              </a:rPr>
+              <a:t>מעשה ניסים</a:t>
+            </a:r>
+            <a:endParaRPr lang="en-US" sz="2400" b="1" u="none" strike="noStrike" dirty="0">
+              <a:solidFill>
+                <a:srgbClr val="000000"/>
+              </a:solidFill>
+              <a:effectLst/>
+              <a:uFillTx/>
+              <a:latin typeface="Arial" panose="020B0604020202020204" pitchFamily="34" charset="0"/>
+              <a:cs typeface="Arial" panose="020B0604020202020204" pitchFamily="34" charset="0"/>
+            </a:endParaRPr>
+          </a:p>
+        </p:txBody>
+      </p:sp>
+      <p:sp>
+        <p:nvSpPr>
+          <p:cNvPr id="34" name="Rectangle 2">
+            <a:extLst>
+              <a:ext uri="{FF2B5EF4-FFF2-40B4-BE49-F238E27FC236}">
+                <a16:creationId xmlns:a16="http://schemas.microsoft.com/office/drawing/2014/main" id="{6BEA0ADC-CC12-67FC-3996-D7F61E283000}"/>
+              </a:ext>
+            </a:extLst>
+          </p:cNvPr>
+          <p:cNvSpPr/>
+          <p:nvPr/>
+        </p:nvSpPr>
+        <p:spPr>
+          <a:xfrm>
+            <a:off x="9088821" y="1277624"/>
+            <a:ext cx="2993638" cy="2676202"/>
+          </a:xfrm>
+          <a:prstGeom prst="rect">
+            <a:avLst/>
+          </a:prstGeom>
+          <a:noFill/>
+          <a:ln w="0">
+            <a:noFill/>
+          </a:ln>
+          <a:effectLst/>
+        </p:spPr>
+        <p:style>
+          <a:lnRef idx="0">
+            <a:scrgbClr r="0" g="0" b="0"/>
+          </a:lnRef>
+          <a:fillRef idx="0">
+            <a:scrgbClr r="0" g="0" b="0"/>
+          </a:fillRef>
+          <a:effectRef idx="0">
+            <a:scrgbClr r="0" g="0" b="0"/>
+          </a:effectRef>
+          <a:fontRef idx="minor"/>
+        </p:style>
+        <p:txBody>
+          <a:bodyPr wrap="square" lIns="90000" tIns="45000" rIns="90000" bIns="45000" anchor="t">
+            <a:spAutoFit/>
+          </a:bodyPr>
+          <a:lstStyle/>
+          <a:p>
+            <a:pPr algn="ctr" rtl="1"/>
+            <a:r>
+              <a:rPr lang="he-IL" sz="2800" b="1" u="none" strike="noStrike" dirty="0">
+                <a:solidFill>
+                  <a:schemeClr val="accent1"/>
+                </a:solidFill>
+                <a:uFillTx/>
+                <a:latin typeface="Calibri"/>
+              </a:rPr>
+              <a:t>זמני היום:</a:t>
+            </a:r>
+            <a:br>
+              <a:rPr lang="en-US" sz="2800" dirty="0">
+                <a:solidFill>
+                  <a:srgbClr val="000000"/>
+                </a:solidFill>
+                <a:latin typeface="Arial" panose="020B0604020202020204" pitchFamily="34" charset="0"/>
+                <a:cs typeface="Arial" panose="020B0604020202020204" pitchFamily="34" charset="0"/>
+              </a:rPr>
+            </a:br>
+            <a:endParaRPr lang="he-IL" sz="1000" dirty="0">
+              <a:solidFill>
+                <a:srgbClr val="000000"/>
+              </a:solidFill>
+              <a:latin typeface="Arial" panose="020B0604020202020204" pitchFamily="34" charset="0"/>
+              <a:cs typeface="Arial" panose="020B0604020202020204" pitchFamily="34" charset="0"/>
+            </a:endParaRPr>
+          </a:p>
+          <a:p>
+            <a:pPr algn="ctr" rtl="1"/>
+            <a:r>
+              <a:rPr lang="he-IL" sz="2000" b="1" dirty="0">
+                <a:solidFill>
+                  <a:srgbClr val="000000"/>
+                </a:solidFill>
+                <a:latin typeface="Arial" panose="020B0604020202020204" pitchFamily="34" charset="0"/>
+                <a:cs typeface="Arial" panose="020B0604020202020204" pitchFamily="34" charset="0"/>
+              </a:rPr>
+              <a:t>זריחה:</a:t>
+            </a:r>
+            <a:r>
+              <a:rPr lang="he-IL" sz="2000" dirty="0">
+                <a:solidFill>
+                  <a:srgbClr val="000000"/>
+                </a:solidFill>
+                <a:latin typeface="Arial" panose="020B0604020202020204" pitchFamily="34" charset="0"/>
+                <a:cs typeface="Arial" panose="020B0604020202020204" pitchFamily="34" charset="0"/>
+              </a:rPr>
+              <a:t> </a:t>
+            </a:r>
+            <a:r>
+              <a:rPr lang="en-US" sz="2000" dirty="0">
+                <a:solidFill>
+                  <a:srgbClr val="000000"/>
+                </a:solidFill>
+                <a:latin typeface="Arial" panose="020B0604020202020204" pitchFamily="34" charset="0"/>
+                <a:cs typeface="Arial" panose="020B0604020202020204" pitchFamily="34" charset="0"/>
+              </a:rPr>
+              <a:t>#SUNRISE</a:t>
+            </a:r>
+            <a:br>
+              <a:rPr lang="en-US" sz="2000" dirty="0">
+                <a:solidFill>
+                  <a:srgbClr val="000000"/>
+                </a:solidFill>
+                <a:latin typeface="Arial" panose="020B0604020202020204" pitchFamily="34" charset="0"/>
+                <a:cs typeface="Arial" panose="020B0604020202020204" pitchFamily="34" charset="0"/>
+              </a:rPr>
+            </a:br>
+            <a:r>
+              <a:rPr lang="he-IL" sz="2000" b="1" dirty="0">
+                <a:solidFill>
+                  <a:srgbClr val="000000"/>
+                </a:solidFill>
+                <a:latin typeface="Arial" panose="020B0604020202020204" pitchFamily="34" charset="0"/>
+                <a:cs typeface="Arial" panose="020B0604020202020204" pitchFamily="34" charset="0"/>
+              </a:rPr>
+              <a:t>שקיעה:</a:t>
+            </a:r>
+            <a:r>
+              <a:rPr lang="he-IL" sz="2000" dirty="0">
+                <a:solidFill>
+                  <a:srgbClr val="000000"/>
+                </a:solidFill>
+                <a:latin typeface="Arial" panose="020B0604020202020204" pitchFamily="34" charset="0"/>
+                <a:cs typeface="Arial" panose="020B0604020202020204" pitchFamily="34" charset="0"/>
+              </a:rPr>
+              <a:t> </a:t>
+            </a:r>
+            <a:r>
+              <a:rPr lang="en-US" sz="2000" dirty="0">
+                <a:solidFill>
+                  <a:srgbClr val="000000"/>
+                </a:solidFill>
+                <a:latin typeface="Arial" panose="020B0604020202020204" pitchFamily="34" charset="0"/>
+                <a:cs typeface="Arial" panose="020B0604020202020204" pitchFamily="34" charset="0"/>
+              </a:rPr>
+              <a:t>#SUNSET</a:t>
+            </a:r>
+            <a:endParaRPr lang="he-IL" sz="2000" dirty="0">
+              <a:solidFill>
+                <a:srgbClr val="000000"/>
+              </a:solidFill>
+              <a:latin typeface="Arial" panose="020B0604020202020204" pitchFamily="34" charset="0"/>
+              <a:cs typeface="Arial" panose="020B0604020202020204" pitchFamily="34" charset="0"/>
+            </a:endParaRPr>
+          </a:p>
+          <a:p>
+            <a:pPr algn="ctr" rtl="1"/>
+            <a:endParaRPr lang="he-IL" sz="1000" dirty="0">
+              <a:solidFill>
+                <a:srgbClr val="000000"/>
+              </a:solidFill>
+              <a:latin typeface="Arial" panose="020B0604020202020204" pitchFamily="34" charset="0"/>
+              <a:cs typeface="Arial" panose="020B0604020202020204" pitchFamily="34" charset="0"/>
+            </a:endParaRPr>
+          </a:p>
+          <a:p>
+            <a:pPr algn="ctr" rtl="1"/>
+            <a:r>
+              <a:rPr lang="he-IL" sz="2000" b="1" dirty="0">
+                <a:latin typeface="Arial" panose="020B0604020202020204" pitchFamily="34" charset="0"/>
+                <a:cs typeface="Arial" panose="020B0604020202020204" pitchFamily="34" charset="0"/>
+              </a:rPr>
+              <a:t>הדלקת נרות:</a:t>
+            </a:r>
+            <a:r>
+              <a:rPr lang="he-IL" sz="2000" dirty="0">
+                <a:latin typeface="Arial" panose="020B0604020202020204" pitchFamily="34" charset="0"/>
+                <a:cs typeface="Arial" panose="020B0604020202020204" pitchFamily="34" charset="0"/>
+              </a:rPr>
+              <a:t> </a:t>
+            </a:r>
+            <a:r>
+              <a:rPr lang="en-US" sz="2000" dirty="0">
+                <a:latin typeface="Arial" panose="020B0604020202020204" pitchFamily="34" charset="0"/>
+                <a:cs typeface="Arial" panose="020B0604020202020204" pitchFamily="34" charset="0"/>
+              </a:rPr>
+              <a:t>#SHABBOS-30</a:t>
+            </a:r>
+            <a:endParaRPr lang="he-IL" sz="2000" dirty="0">
+              <a:latin typeface="Arial" panose="020B0604020202020204" pitchFamily="34" charset="0"/>
+              <a:cs typeface="Arial" panose="020B0604020202020204" pitchFamily="34" charset="0"/>
+            </a:endParaRPr>
+          </a:p>
+          <a:p>
+            <a:pPr algn="ctr" rtl="1"/>
+            <a:r>
+              <a:rPr lang="he-IL" sz="2000" b="1" dirty="0">
+                <a:latin typeface="Arial" panose="020B0604020202020204" pitchFamily="34" charset="0"/>
+                <a:cs typeface="Arial" panose="020B0604020202020204" pitchFamily="34" charset="0"/>
+              </a:rPr>
+              <a:t>#</a:t>
+            </a:r>
+            <a:r>
+              <a:rPr lang="en-US" sz="2000" b="1" dirty="0">
+                <a:latin typeface="Arial" panose="020B0604020202020204" pitchFamily="34" charset="0"/>
+                <a:cs typeface="Arial" panose="020B0604020202020204" pitchFamily="34" charset="0"/>
+              </a:rPr>
+              <a:t>MOZASHTITLE</a:t>
+            </a:r>
+            <a:r>
+              <a:rPr lang="he-IL" sz="2000" b="1" dirty="0">
+                <a:latin typeface="Arial" panose="020B0604020202020204" pitchFamily="34" charset="0"/>
+                <a:cs typeface="Arial" panose="020B0604020202020204" pitchFamily="34" charset="0"/>
+              </a:rPr>
+              <a:t>:</a:t>
+            </a:r>
+            <a:r>
+              <a:rPr lang="he-IL" sz="2000" dirty="0">
+                <a:latin typeface="Arial" panose="020B0604020202020204" pitchFamily="34" charset="0"/>
+                <a:cs typeface="Arial" panose="020B0604020202020204" pitchFamily="34" charset="0"/>
+              </a:rPr>
+              <a:t> </a:t>
+            </a:r>
+            <a:r>
+              <a:rPr lang="en-US" sz="2000" dirty="0">
+                <a:latin typeface="Arial" panose="020B0604020202020204" pitchFamily="34" charset="0"/>
+                <a:cs typeface="Arial" panose="020B0604020202020204" pitchFamily="34" charset="0"/>
+              </a:rPr>
+              <a:t>#MOZASH</a:t>
+            </a:r>
+          </a:p>
+        </p:txBody>
+      </p:sp>
+      <p:sp>
+        <p:nvSpPr>
+          <p:cNvPr id="36" name="Rectangle 2">
+            <a:extLst>
+              <a:ext uri="{FF2B5EF4-FFF2-40B4-BE49-F238E27FC236}">
+                <a16:creationId xmlns:a16="http://schemas.microsoft.com/office/drawing/2014/main" id="{D92A2ECE-DC18-0680-A816-1FEAD62D9D5A}"/>
+              </a:ext>
+            </a:extLst>
+          </p:cNvPr>
+          <p:cNvSpPr/>
+          <p:nvPr/>
+        </p:nvSpPr>
+        <p:spPr>
+          <a:xfrm>
+            <a:off x="109542" y="4234847"/>
+            <a:ext cx="2919415" cy="2484440"/>
+          </a:xfrm>
+          <a:prstGeom prst="rect">
+            <a:avLst/>
+          </a:prstGeom>
+          <a:noFill/>
+          <a:ln w="0">
+            <a:noFill/>
+          </a:ln>
+        </p:spPr>
+        <p:style>
+          <a:lnRef idx="0">
+            <a:scrgbClr r="0" g="0" b="0"/>
+          </a:lnRef>
+          <a:fillRef idx="0">
+            <a:scrgbClr r="0" g="0" b="0"/>
+          </a:fillRef>
+          <a:effectRef idx="0">
+            <a:scrgbClr r="0" g="0" b="0"/>
+          </a:effectRef>
+          <a:fontRef idx="minor"/>
+        </p:style>
+        <p:txBody>
+          <a:bodyPr wrap="square" lIns="90000" tIns="45000" rIns="90000" bIns="45000" anchor="ctr" anchorCtr="0">
+            <a:normAutofit/>
+          </a:bodyPr>
+          <a:lstStyle/>
+          <a:p>
+            <a:pPr algn="ctr" defTabSz="914400" rtl="1">
+              <a:spcAft>
+                <a:spcPts val="600"/>
+              </a:spcAft>
+              <a:tabLst>
+                <a:tab pos="1257300" algn="r"/>
+              </a:tabLst>
+            </a:pPr>
+            <a:r>
+              <a:rPr lang="he-IL" sz="2000" dirty="0">
+                <a:solidFill>
+                  <a:srgbClr val="FAF4E3"/>
+                </a:solidFill>
+                <a:latin typeface="Arial"/>
+              </a:rPr>
+              <a:t>קהילת מעשה ניסים </a:t>
+            </a:r>
+            <a:br>
+              <a:rPr lang="en-US" sz="2000" dirty="0">
+                <a:solidFill>
+                  <a:srgbClr val="FAF4E3"/>
+                </a:solidFill>
+                <a:latin typeface="Arial"/>
+              </a:rPr>
+            </a:br>
+            <a:r>
+              <a:rPr lang="he-IL" sz="2000" dirty="0">
+                <a:solidFill>
+                  <a:srgbClr val="FAF4E3"/>
+                </a:solidFill>
+                <a:latin typeface="Arial"/>
+              </a:rPr>
+              <a:t>מברכים את כל אורחינו בברכת שבת שלום!</a:t>
+            </a:r>
+            <a:endParaRPr lang="en-US" sz="2000" u="none" strike="noStrike" dirty="0">
+              <a:solidFill>
+                <a:srgbClr val="FAF4E3"/>
+              </a:solidFill>
+              <a:effectLst/>
+              <a:uFillTx/>
+              <a:latin typeface="Arial"/>
+            </a:endParaRPr>
+          </a:p>
+        </p:txBody>
+      </p:sp>
+      <p:pic>
+        <p:nvPicPr>
+          <p:cNvPr id="38" name="Picture 37">
+            <a:extLst>
+              <a:ext uri="{FF2B5EF4-FFF2-40B4-BE49-F238E27FC236}">
+                <a16:creationId xmlns:a16="http://schemas.microsoft.com/office/drawing/2014/main" id="{8C6DCFF7-3155-7BE1-A07F-53CF75CF7EDC}"/>
+              </a:ext>
+            </a:extLst>
+          </p:cNvPr>
+          <p:cNvPicPr>
+            <a:picLocks noChangeAspect="1"/>
+          </p:cNvPicPr>
+          <p:nvPr/>
+        </p:nvPicPr>
+        <p:blipFill>
+          <a:blip r:embed="rId3">
+            <a:clrChange>
+              <a:clrFrom>
+                <a:srgbClr val="ED1C24"/>
+              </a:clrFrom>
+              <a:clrTo>
+                <a:srgbClr val="ED1C24">
+                  <a:alpha val="0"/>
+                </a:srgbClr>
+              </a:clrTo>
+            </a:clrChange>
+          </a:blip>
+          <a:stretch>
+            <a:fillRect/>
+          </a:stretch>
+        </p:blipFill>
+        <p:spPr>
+          <a:xfrm>
+            <a:off x="4097959" y="215528"/>
+            <a:ext cx="987963" cy="767987"/>
+          </a:xfrm>
+          <a:prstGeom prst="rect">
+            <a:avLst/>
+          </a:prstGeom>
+        </p:spPr>
+      </p:pic>
+      <p:sp>
+        <p:nvSpPr>
+          <p:cNvPr id="40" name="Rectangle 2">
+            <a:extLst>
+              <a:ext uri="{FF2B5EF4-FFF2-40B4-BE49-F238E27FC236}">
+                <a16:creationId xmlns:a16="http://schemas.microsoft.com/office/drawing/2014/main" id="{94FA05E9-7FB3-2406-49C0-494AD646C44D}"/>
+              </a:ext>
+            </a:extLst>
+          </p:cNvPr>
+          <p:cNvSpPr/>
+          <p:nvPr/>
+        </p:nvSpPr>
+        <p:spPr>
+          <a:xfrm>
+            <a:off x="-170886" y="1277624"/>
+            <a:ext cx="3583800" cy="521766"/>
+          </a:xfrm>
+          <a:prstGeom prst="rect">
+            <a:avLst/>
+          </a:prstGeom>
+          <a:noFill/>
+          <a:ln w="0">
+            <a:noFill/>
+          </a:ln>
+          <a:effectLst/>
+        </p:spPr>
+        <p:style>
+          <a:lnRef idx="0">
+            <a:scrgbClr r="0" g="0" b="0"/>
+          </a:lnRef>
+          <a:fillRef idx="0">
+            <a:scrgbClr r="0" g="0" b="0"/>
+          </a:fillRef>
+          <a:effectRef idx="0">
+            <a:scrgbClr r="0" g="0" b="0"/>
+          </a:effectRef>
+          <a:fontRef idx="minor"/>
+        </p:style>
+        <p:txBody>
+          <a:bodyPr lIns="90000" tIns="45000" rIns="90000" bIns="45000" anchor="t">
+            <a:spAutoFit/>
+          </a:bodyPr>
+          <a:lstStyle/>
+          <a:p>
+            <a:pPr algn="ctr" defTabSz="914400" rtl="1">
+              <a:lnSpc>
+                <a:spcPct val="100000"/>
+              </a:lnSpc>
+            </a:pPr>
+            <a:r>
+              <a:rPr lang="he-IL" sz="2800" b="1" u="none" strike="noStrike" dirty="0">
+                <a:solidFill>
+                  <a:schemeClr val="accent1"/>
+                </a:solidFill>
+                <a:effectLst/>
+                <a:uFillTx/>
+                <a:latin typeface="Calibri"/>
+              </a:rPr>
+              <a:t>לימוד יומי:</a:t>
+            </a:r>
+            <a:endParaRPr lang="en-US" sz="2800" b="1" u="none" strike="noStrike" dirty="0">
+              <a:solidFill>
+                <a:srgbClr val="000000"/>
+              </a:solidFill>
+              <a:effectLst/>
+              <a:uFillTx/>
+              <a:latin typeface="Arial"/>
+            </a:endParaRPr>
+          </a:p>
+        </p:txBody>
+      </p:sp>
+      <p:sp>
+        <p:nvSpPr>
+          <p:cNvPr id="42" name="Rectangle 2">
+            <a:extLst>
+              <a:ext uri="{FF2B5EF4-FFF2-40B4-BE49-F238E27FC236}">
+                <a16:creationId xmlns:a16="http://schemas.microsoft.com/office/drawing/2014/main" id="{EEC7C473-78D7-9138-5AF3-4325216DAEA0}"/>
+              </a:ext>
+            </a:extLst>
+          </p:cNvPr>
+          <p:cNvSpPr/>
+          <p:nvPr/>
+        </p:nvSpPr>
+        <p:spPr>
+          <a:xfrm>
+            <a:off x="333728" y="1721225"/>
+            <a:ext cx="2574572" cy="2368176"/>
+          </a:xfrm>
+          <a:prstGeom prst="rect">
+            <a:avLst/>
+          </a:prstGeom>
+          <a:noFill/>
+          <a:ln w="0">
+            <a:noFill/>
+          </a:ln>
+          <a:effectLst/>
+        </p:spPr>
+        <p:style>
+          <a:lnRef idx="0">
+            <a:scrgbClr r="0" g="0" b="0"/>
+          </a:lnRef>
+          <a:fillRef idx="0">
+            <a:scrgbClr r="0" g="0" b="0"/>
+          </a:fillRef>
+          <a:effectRef idx="0">
+            <a:scrgbClr r="0" g="0" b="0"/>
+          </a:effectRef>
+          <a:fontRef idx="minor"/>
+        </p:style>
+        <p:txBody>
+          <a:bodyPr lIns="90000" tIns="45000" rIns="90000" bIns="45000" anchor="t">
+            <a:normAutofit/>
+          </a:bodyPr>
+          <a:lstStyle/>
+          <a:p>
+            <a:pPr algn="ctr" defTabSz="914400" rtl="1">
+              <a:lnSpc>
+                <a:spcPts val="2400"/>
+              </a:lnSpc>
+            </a:pPr>
+            <a:r>
+              <a:rPr lang="he-IL" b="1" u="none" strike="noStrike" dirty="0">
+                <a:uFillTx/>
+                <a:latin typeface="Arial" panose="020B0604020202020204" pitchFamily="34" charset="0"/>
+                <a:cs typeface="Arial" panose="020B0604020202020204" pitchFamily="34" charset="0"/>
+              </a:rPr>
+              <a:t>בבלי:</a:t>
+            </a:r>
+            <a:r>
+              <a:rPr lang="he-IL" u="none" strike="noStrike" dirty="0">
+                <a:uFillTx/>
+                <a:latin typeface="Arial" panose="020B0604020202020204" pitchFamily="34" charset="0"/>
+                <a:cs typeface="Arial" panose="020B0604020202020204" pitchFamily="34" charset="0"/>
+              </a:rPr>
+              <a:t> </a:t>
+            </a:r>
+            <a:r>
+              <a:rPr lang="en-US" u="none" strike="noStrike" dirty="0">
+                <a:uFillTx/>
+                <a:latin typeface="Arial" panose="020B0604020202020204" pitchFamily="34" charset="0"/>
+                <a:cs typeface="Arial" panose="020B0604020202020204" pitchFamily="34" charset="0"/>
+              </a:rPr>
+              <a:t>#DAFYOMIBV</a:t>
+            </a:r>
+          </a:p>
+          <a:p>
+            <a:pPr algn="ctr" defTabSz="914400" rtl="1">
+              <a:lnSpc>
+                <a:spcPts val="2400"/>
+              </a:lnSpc>
+            </a:pPr>
+            <a:r>
+              <a:rPr lang="he-IL" b="1" u="none" strike="noStrike" dirty="0">
+                <a:uFillTx/>
+                <a:latin typeface="Arial" panose="020B0604020202020204" pitchFamily="34" charset="0"/>
+                <a:cs typeface="Arial" panose="020B0604020202020204" pitchFamily="34" charset="0"/>
+              </a:rPr>
+              <a:t>ירושלמי:</a:t>
+            </a:r>
+            <a:r>
+              <a:rPr lang="he-IL" u="none" strike="noStrike" dirty="0">
+                <a:uFillTx/>
+                <a:latin typeface="Arial" panose="020B0604020202020204" pitchFamily="34" charset="0"/>
+                <a:cs typeface="Arial" panose="020B0604020202020204" pitchFamily="34" charset="0"/>
+              </a:rPr>
+              <a:t> </a:t>
+            </a:r>
+            <a:r>
+              <a:rPr lang="en-US" u="none" strike="noStrike" dirty="0">
+                <a:uFillTx/>
+                <a:latin typeface="Arial" panose="020B0604020202020204" pitchFamily="34" charset="0"/>
+                <a:cs typeface="Arial" panose="020B0604020202020204" pitchFamily="34" charset="0"/>
+              </a:rPr>
+              <a:t>#DAFYOMIYR</a:t>
+            </a:r>
+            <a:endParaRPr lang="he-IL" u="none" strike="noStrike" dirty="0">
+              <a:uFillTx/>
+              <a:latin typeface="Arial" panose="020B0604020202020204" pitchFamily="34" charset="0"/>
+              <a:cs typeface="Arial" panose="020B0604020202020204" pitchFamily="34" charset="0"/>
+            </a:endParaRPr>
+          </a:p>
+          <a:p>
+            <a:pPr algn="ctr" defTabSz="914400" rtl="1">
+              <a:lnSpc>
+                <a:spcPts val="2400"/>
+              </a:lnSpc>
+            </a:pPr>
+            <a:r>
+              <a:rPr lang="he-IL" b="1" u="none" strike="noStrike" dirty="0">
+                <a:uFillTx/>
+                <a:latin typeface="Arial" panose="020B0604020202020204" pitchFamily="34" charset="0"/>
+                <a:cs typeface="Arial" panose="020B0604020202020204" pitchFamily="34" charset="0"/>
+              </a:rPr>
+              <a:t>משניות:</a:t>
+            </a:r>
+            <a:r>
+              <a:rPr lang="he-IL" u="none" strike="noStrike" dirty="0">
+                <a:uFillTx/>
+                <a:latin typeface="Arial" panose="020B0604020202020204" pitchFamily="34" charset="0"/>
+                <a:cs typeface="Arial" panose="020B0604020202020204" pitchFamily="34" charset="0"/>
+              </a:rPr>
+              <a:t> </a:t>
+            </a:r>
+            <a:r>
+              <a:rPr lang="en-US" u="none" strike="noStrike" dirty="0">
+                <a:uFillTx/>
+                <a:latin typeface="Arial" panose="020B0604020202020204" pitchFamily="34" charset="0"/>
+                <a:cs typeface="Arial" panose="020B0604020202020204" pitchFamily="34" charset="0"/>
+              </a:rPr>
+              <a:t>#MISHNA</a:t>
+            </a:r>
+            <a:endParaRPr lang="he-IL" u="none" strike="noStrike" dirty="0">
+              <a:uFillTx/>
+              <a:latin typeface="Arial" panose="020B0604020202020204" pitchFamily="34" charset="0"/>
+              <a:cs typeface="Arial" panose="020B0604020202020204" pitchFamily="34" charset="0"/>
+            </a:endParaRPr>
+          </a:p>
+          <a:p>
+            <a:pPr algn="ctr" defTabSz="914400" rtl="1">
+              <a:lnSpc>
+                <a:spcPts val="2400"/>
+              </a:lnSpc>
+            </a:pPr>
+            <a:r>
+              <a:rPr lang="he-IL" b="1" u="none" strike="noStrike" dirty="0">
+                <a:uFillTx/>
+                <a:latin typeface="Arial" panose="020B0604020202020204" pitchFamily="34" charset="0"/>
+                <a:cs typeface="Arial" panose="020B0604020202020204" pitchFamily="34" charset="0"/>
+              </a:rPr>
+              <a:t>הלכה:</a:t>
+            </a:r>
+            <a:r>
+              <a:rPr lang="he-IL" u="none" strike="noStrike" dirty="0">
+                <a:uFillTx/>
+                <a:latin typeface="Arial" panose="020B0604020202020204" pitchFamily="34" charset="0"/>
+                <a:cs typeface="Arial" panose="020B0604020202020204" pitchFamily="34" charset="0"/>
+              </a:rPr>
+              <a:t> </a:t>
+            </a:r>
+            <a:r>
+              <a:rPr lang="en-US" u="none" strike="noStrike" dirty="0">
+                <a:uFillTx/>
+                <a:latin typeface="Arial" panose="020B0604020202020204" pitchFamily="34" charset="0"/>
+                <a:cs typeface="Arial" panose="020B0604020202020204" pitchFamily="34" charset="0"/>
+              </a:rPr>
+              <a:t>#HALACHA</a:t>
+            </a:r>
+            <a:endParaRPr lang="he-IL" u="none" strike="noStrike" dirty="0">
+              <a:uFillTx/>
+              <a:latin typeface="Arial" panose="020B0604020202020204" pitchFamily="34" charset="0"/>
+              <a:cs typeface="Arial" panose="020B0604020202020204" pitchFamily="34" charset="0"/>
+            </a:endParaRPr>
+          </a:p>
+          <a:p>
+            <a:pPr algn="ctr" defTabSz="914400" rtl="1">
+              <a:lnSpc>
+                <a:spcPts val="2400"/>
+              </a:lnSpc>
+            </a:pPr>
+            <a:r>
+              <a:rPr lang="he-IL" b="1" u="none" strike="noStrike" dirty="0">
+                <a:uFillTx/>
+                <a:latin typeface="Arial" panose="020B0604020202020204" pitchFamily="34" charset="0"/>
+                <a:cs typeface="Arial" panose="020B0604020202020204" pitchFamily="34" charset="0"/>
+              </a:rPr>
+              <a:t>רמב"ם:</a:t>
+            </a:r>
+            <a:r>
+              <a:rPr lang="he-IL" u="none" strike="noStrike" dirty="0">
+                <a:uFillTx/>
+                <a:latin typeface="Arial" panose="020B0604020202020204" pitchFamily="34" charset="0"/>
+                <a:cs typeface="Arial" panose="020B0604020202020204" pitchFamily="34" charset="0"/>
+              </a:rPr>
+              <a:t> </a:t>
+            </a:r>
+            <a:r>
+              <a:rPr lang="en-US" u="none" strike="noStrike" dirty="0">
+                <a:uFillTx/>
+                <a:latin typeface="Arial" panose="020B0604020202020204" pitchFamily="34" charset="0"/>
+                <a:cs typeface="Arial" panose="020B0604020202020204" pitchFamily="34" charset="0"/>
+              </a:rPr>
+              <a:t>#RAMBAM</a:t>
+            </a:r>
+            <a:endParaRPr lang="he-IL" u="none" strike="noStrike" dirty="0">
+              <a:uFillTx/>
+              <a:latin typeface="Arial" panose="020B0604020202020204" pitchFamily="34" charset="0"/>
+              <a:cs typeface="Arial" panose="020B0604020202020204" pitchFamily="34" charset="0"/>
+            </a:endParaRPr>
+          </a:p>
+          <a:p>
+            <a:pPr algn="ctr" defTabSz="914400" rtl="1">
+              <a:lnSpc>
+                <a:spcPts val="2400"/>
+              </a:lnSpc>
+            </a:pPr>
+            <a:r>
+              <a:rPr lang="he-IL" b="1" u="none" strike="noStrike" dirty="0">
+                <a:uFillTx/>
+                <a:latin typeface="Arial" panose="020B0604020202020204" pitchFamily="34" charset="0"/>
+                <a:cs typeface="Arial" panose="020B0604020202020204" pitchFamily="34" charset="0"/>
+              </a:rPr>
+              <a:t>תהילים:</a:t>
+            </a:r>
+            <a:r>
+              <a:rPr lang="he-IL" u="none" strike="noStrike" dirty="0">
+                <a:uFillTx/>
+                <a:latin typeface="Arial" panose="020B0604020202020204" pitchFamily="34" charset="0"/>
+                <a:cs typeface="Arial" panose="020B0604020202020204" pitchFamily="34" charset="0"/>
+              </a:rPr>
+              <a:t> </a:t>
+            </a:r>
+            <a:r>
+              <a:rPr lang="en-US" u="none" strike="noStrike" dirty="0">
+                <a:uFillTx/>
+                <a:latin typeface="Arial" panose="020B0604020202020204" pitchFamily="34" charset="0"/>
+                <a:cs typeface="Arial" panose="020B0604020202020204" pitchFamily="34" charset="0"/>
+              </a:rPr>
+              <a:t>#TEHILIM</a:t>
+            </a:r>
+          </a:p>
+        </p:txBody>
+      </p:sp>
+    </p:spTree>
+    <p:extLst>
+      <p:ext uri="{BB962C8B-B14F-4D97-AF65-F5344CB8AC3E}">
+        <p14:creationId xmlns:p14="http://schemas.microsoft.com/office/powerpoint/2010/main" val="140939558"/>
       </p:ext>
     </p:extLst>
   </p:cSld>
@@ -12917,4 +16199,319 @@
   <a:objectDefaults/>
   <a:extraClrSchemeLst/>
 </a:theme>
+</file>
+
+<file path=ppt/theme/theme2.xml><?xml version="1.0" encoding="utf-8"?>
+<a:theme xmlns:a="http://schemas.openxmlformats.org/drawingml/2006/main" name="Office Theme">
+  <a:themeElements>
+    <a:clrScheme name="Office">
+      <a:dk1>
+        <a:sysClr val="windowText" lastClr="000000"/>
+      </a:dk1>
+      <a:lt1>
+        <a:sysClr val="window" lastClr="FFFFFF"/>
+      </a:lt1>
+      <a:dk2>
+        <a:srgbClr val="0E2841"/>
+      </a:dk2>
+      <a:lt2>
+        <a:srgbClr val="E8E8E8"/>
+      </a:lt2>
+      <a:accent1>
+        <a:srgbClr val="156082"/>
+      </a:accent1>
+      <a:accent2>
+        <a:srgbClr val="E97132"/>
+      </a:accent2>
+      <a:accent3>
+        <a:srgbClr val="196B24"/>
+      </a:accent3>
+      <a:accent4>
+        <a:srgbClr val="0F9ED5"/>
+      </a:accent4>
+      <a:accent5>
+        <a:srgbClr val="A02B93"/>
+      </a:accent5>
+      <a:accent6>
+        <a:srgbClr val="4EA72E"/>
+      </a:accent6>
+      <a:hlink>
+        <a:srgbClr val="467886"/>
+      </a:hlink>
+      <a:folHlink>
+        <a:srgbClr val="96607D"/>
+      </a:folHlink>
+    </a:clrScheme>
+    <a:fontScheme name="Office">
+      <a:majorFont>
+        <a:latin typeface="Aptos Display" panose="02110004020202020204"/>
+        <a:ea typeface=""/>
+        <a:cs typeface=""/>
+        <a:font script="Jpan" typeface="游ゴシック Light"/>
+        <a:font script="Hang" typeface="맑은 고딕"/>
+        <a:font script="Hans" typeface="等线 Light"/>
+        <a:font script="Hant" typeface="新細明體"/>
+        <a:font script="Arab" typeface="Times New Roman"/>
+        <a:font script="Hebr" typeface="Times New Roman"/>
+        <a:font script="Thai" typeface="Angsana New"/>
+        <a:font script="Ethi" typeface="Nyala"/>
+        <a:font script="Beng" typeface="Vrinda"/>
+        <a:font script="Gujr" typeface="Shruti"/>
+        <a:font script="Khmr" typeface="MoolBoran"/>
+        <a:font script="Knda" typeface="Tunga"/>
+        <a:font script="Guru" typeface="Raavi"/>
+        <a:font script="Cans" typeface="Euphemia"/>
+        <a:font script="Cher" typeface="Plantagenet Cherokee"/>
+        <a:font script="Yiii" typeface="Microsoft Yi Baiti"/>
+        <a:font script="Tibt" typeface="Microsoft Himalaya"/>
+        <a:font script="Thaa" typeface="MV Boli"/>
+        <a:font script="Deva" typeface="Mangal"/>
+        <a:font script="Telu" typeface="Gautami"/>
+        <a:font script="Taml" typeface="Latha"/>
+        <a:font script="Syrc" typeface="Estrangelo Edessa"/>
+        <a:font script="Orya" typeface="Kalinga"/>
+        <a:font script="Mlym" typeface="Kartika"/>
+        <a:font script="Laoo" typeface="DokChampa"/>
+        <a:font script="Sinh" typeface="Iskoola Pota"/>
+        <a:font script="Mong" typeface="Mongolian Baiti"/>
+        <a:font script="Viet" typeface="Times New Roman"/>
+        <a:font script="Uigh" typeface="Microsoft Uighur"/>
+        <a:font script="Geor" typeface="Sylfaen"/>
+        <a:font script="Armn" typeface="Arial"/>
+        <a:font script="Bugi" typeface="Leelawadee UI"/>
+        <a:font script="Bopo" typeface="Microsoft JhengHei"/>
+        <a:font script="Java" typeface="Javanese Text"/>
+        <a:font script="Lisu" typeface="Segoe UI"/>
+        <a:font script="Mymr" typeface="Myanmar Text"/>
+        <a:font script="Nkoo" typeface="Ebrima"/>
+        <a:font script="Olck" typeface="Nirmala UI"/>
+        <a:font script="Osma" typeface="Ebrima"/>
+        <a:font script="Phag" typeface="Phagspa"/>
+        <a:font script="Syrn" typeface="Estrangelo Edessa"/>
+        <a:font script="Syrj" typeface="Estrangelo Edessa"/>
+        <a:font script="Syre" typeface="Estrangelo Edessa"/>
+        <a:font script="Sora" typeface="Nirmala UI"/>
+        <a:font script="Tale" typeface="Microsoft Tai Le"/>
+        <a:font script="Talu" typeface="Microsoft New Tai Lue"/>
+        <a:font script="Tfng" typeface="Ebrima"/>
+      </a:majorFont>
+      <a:minorFont>
+        <a:latin typeface="Aptos" panose="02110004020202020204"/>
+        <a:ea typeface=""/>
+        <a:cs typeface=""/>
+        <a:font script="Jpan" typeface="游ゴシック"/>
+        <a:font script="Hang" typeface="맑은 고딕"/>
+        <a:font script="Hans" typeface="等线"/>
+        <a:font script="Hant" typeface="新細明體"/>
+        <a:font script="Arab" typeface="Arial"/>
+        <a:font script="Hebr" typeface="Arial"/>
+        <a:font script="Thai" typeface="Cordia New"/>
+        <a:font script="Ethi" typeface="Nyala"/>
+        <a:font script="Beng" typeface="Vrinda"/>
+        <a:font script="Gujr" typeface="Shruti"/>
+        <a:font script="Khmr" typeface="DaunPenh"/>
+        <a:font script="Knda" typeface="Tunga"/>
+        <a:font script="Guru" typeface="Raavi"/>
+        <a:font script="Cans" typeface="Euphemia"/>
+        <a:font script="Cher" typeface="Plantagenet Cherokee"/>
+        <a:font script="Yiii" typeface="Microsoft Yi Baiti"/>
+        <a:font script="Tibt" typeface="Microsoft Himalaya"/>
+        <a:font script="Thaa" typeface="MV Boli"/>
+        <a:font script="Deva" typeface="Mangal"/>
+        <a:font script="Telu" typeface="Gautami"/>
+        <a:font script="Taml" typeface="Latha"/>
+        <a:font script="Syrc" typeface="Estrangelo Edessa"/>
+        <a:font script="Orya" typeface="Kalinga"/>
+        <a:font script="Mlym" typeface="Kartika"/>
+        <a:font script="Laoo" typeface="DokChampa"/>
+        <a:font script="Sinh" typeface="Iskoola Pota"/>
+        <a:font script="Mong" typeface="Mongolian Baiti"/>
+        <a:font script="Viet" typeface="Arial"/>
+        <a:font script="Uigh" typeface="Microsoft Uighur"/>
+        <a:font script="Geor" typeface="Sylfaen"/>
+        <a:font script="Armn" typeface="Arial"/>
+        <a:font script="Bugi" typeface="Leelawadee UI"/>
+        <a:font script="Bopo" typeface="Microsoft JhengHei"/>
+        <a:font script="Java" typeface="Javanese Text"/>
+        <a:font script="Lisu" typeface="Segoe UI"/>
+        <a:font script="Mymr" typeface="Myanmar Text"/>
+        <a:font script="Nkoo" typeface="Ebrima"/>
+        <a:font script="Olck" typeface="Nirmala UI"/>
+        <a:font script="Osma" typeface="Ebrima"/>
+        <a:font script="Phag" typeface="Phagspa"/>
+        <a:font script="Syrn" typeface="Estrangelo Edessa"/>
+        <a:font script="Syrj" typeface="Estrangelo Edessa"/>
+        <a:font script="Syre" typeface="Estrangelo Edessa"/>
+        <a:font script="Sora" typeface="Nirmala UI"/>
+        <a:font script="Tale" typeface="Microsoft Tai Le"/>
+        <a:font script="Talu" typeface="Microsoft New Tai Lue"/>
+        <a:font script="Tfng" typeface="Ebrima"/>
+      </a:minorFont>
+    </a:fontScheme>
+    <a:fmtScheme name="Office">
+      <a:fillStyleLst>
+        <a:solidFill>
+          <a:schemeClr val="phClr"/>
+        </a:solidFill>
+        <a:gradFill rotWithShape="1">
+          <a:gsLst>
+            <a:gs pos="0">
+              <a:schemeClr val="phClr">
+                <a:lumMod val="110000"/>
+                <a:satMod val="105000"/>
+                <a:tint val="67000"/>
+              </a:schemeClr>
+            </a:gs>
+            <a:gs pos="50000">
+              <a:schemeClr val="phClr">
+                <a:lumMod val="105000"/>
+                <a:satMod val="103000"/>
+                <a:tint val="73000"/>
+              </a:schemeClr>
+            </a:gs>
+            <a:gs pos="100000">
+              <a:schemeClr val="phClr">
+                <a:lumMod val="105000"/>
+                <a:satMod val="109000"/>
+                <a:tint val="81000"/>
+              </a:schemeClr>
+            </a:gs>
+          </a:gsLst>
+          <a:lin ang="5400000" scaled="0"/>
+        </a:gradFill>
+        <a:gradFill rotWithShape="1">
+          <a:gsLst>
+            <a:gs pos="0">
+              <a:schemeClr val="phClr">
+                <a:satMod val="103000"/>
+                <a:lumMod val="102000"/>
+                <a:tint val="94000"/>
+              </a:schemeClr>
+            </a:gs>
+            <a:gs pos="50000">
+              <a:schemeClr val="phClr">
+                <a:satMod val="110000"/>
+                <a:lumMod val="100000"/>
+                <a:shade val="100000"/>
+              </a:schemeClr>
+            </a:gs>
+            <a:gs pos="100000">
+              <a:schemeClr val="phClr">
+                <a:lumMod val="99000"/>
+                <a:satMod val="120000"/>
+                <a:shade val="78000"/>
+              </a:schemeClr>
+            </a:gs>
+          </a:gsLst>
+          <a:lin ang="5400000" scaled="0"/>
+        </a:gradFill>
+      </a:fillStyleLst>
+      <a:lnStyleLst>
+        <a:ln w="12700" cap="flat" cmpd="sng" algn="ctr">
+          <a:solidFill>
+            <a:schemeClr val="phClr"/>
+          </a:solidFill>
+          <a:prstDash val="solid"/>
+          <a:miter lim="800000"/>
+        </a:ln>
+        <a:ln w="19050" cap="flat" cmpd="sng" algn="ctr">
+          <a:solidFill>
+            <a:schemeClr val="phClr"/>
+          </a:solidFill>
+          <a:prstDash val="solid"/>
+          <a:miter lim="800000"/>
+        </a:ln>
+        <a:ln w="25400" cap="flat" cmpd="sng" algn="ctr">
+          <a:solidFill>
+            <a:schemeClr val="phClr"/>
+          </a:solidFill>
+          <a:prstDash val="solid"/>
+          <a:miter lim="800000"/>
+        </a:ln>
+      </a:lnStyleLst>
+      <a:effectStyleLst>
+        <a:effectStyle>
+          <a:effectLst/>
+        </a:effectStyle>
+        <a:effectStyle>
+          <a:effectLst/>
+        </a:effectStyle>
+        <a:effectStyle>
+          <a:effectLst>
+            <a:outerShdw blurRad="57150" dist="19050" dir="5400000" algn="ctr" rotWithShape="0">
+              <a:srgbClr val="000000">
+                <a:alpha val="63000"/>
+              </a:srgbClr>
+            </a:outerShdw>
+          </a:effectLst>
+        </a:effectStyle>
+      </a:effectStyleLst>
+      <a:bgFillStyleLst>
+        <a:solidFill>
+          <a:schemeClr val="phClr"/>
+        </a:solidFill>
+        <a:solidFill>
+          <a:schemeClr val="phClr">
+            <a:tint val="95000"/>
+            <a:satMod val="170000"/>
+          </a:schemeClr>
+        </a:solidFill>
+        <a:gradFill rotWithShape="1">
+          <a:gsLst>
+            <a:gs pos="0">
+              <a:schemeClr val="phClr">
+                <a:tint val="93000"/>
+                <a:satMod val="150000"/>
+                <a:shade val="98000"/>
+                <a:lumMod val="102000"/>
+              </a:schemeClr>
+            </a:gs>
+            <a:gs pos="50000">
+              <a:schemeClr val="phClr">
+                <a:tint val="98000"/>
+                <a:satMod val="130000"/>
+                <a:shade val="90000"/>
+                <a:lumMod val="103000"/>
+              </a:schemeClr>
+            </a:gs>
+            <a:gs pos="100000">
+              <a:schemeClr val="phClr">
+                <a:shade val="63000"/>
+                <a:satMod val="120000"/>
+              </a:schemeClr>
+            </a:gs>
+          </a:gsLst>
+          <a:lin ang="5400000" scaled="0"/>
+        </a:gradFill>
+      </a:bgFillStyleLst>
+    </a:fmtScheme>
+  </a:themeElements>
+  <a:objectDefaults>
+    <a:lnDef>
+      <a:spPr/>
+      <a:bodyPr/>
+      <a:lstStyle/>
+      <a:style>
+        <a:lnRef idx="2">
+          <a:schemeClr val="accent1"/>
+        </a:lnRef>
+        <a:fillRef idx="0">
+          <a:schemeClr val="accent1"/>
+        </a:fillRef>
+        <a:effectRef idx="1">
+          <a:schemeClr val="accent1"/>
+        </a:effectRef>
+        <a:fontRef idx="minor">
+          <a:schemeClr val="tx1"/>
+        </a:fontRef>
+      </a:style>
+    </a:lnDef>
+  </a:objectDefaults>
+  <a:extraClrSchemeLst/>
+  <a:extLst>
+    <a:ext uri="{05A4C25C-085E-4340-85A3-A5531E510DB2}">
+      <thm15:themeFamily xmlns:thm15="http://schemas.microsoft.com/office/thememl/2012/main" name="Office Theme" id="{2E142A2C-CD16-42D6-873A-C26D2A0506FA}" vid="{1BDDFF52-6CD6-40A5-AB3C-68EB2F1E4D0A}"/>
+    </a:ext>
+  </a:extLst>
+</a:theme>
 </file>
--- a/luah.pptx
+++ b/luah.pptx
@@ -5,16 +5,13 @@
     <p:sldMasterId id="2147483648" r:id="rId1"/>
   </p:sldMasterIdLst>
   <p:notesMasterIdLst>
-    <p:notesMasterId r:id="rId9"/>
+    <p:notesMasterId r:id="rId6"/>
   </p:notesMasterIdLst>
   <p:sldIdLst>
-    <p:sldId id="256" r:id="rId2"/>
-    <p:sldId id="257" r:id="rId3"/>
-    <p:sldId id="258" r:id="rId4"/>
-    <p:sldId id="260" r:id="rId5"/>
-    <p:sldId id="259" r:id="rId6"/>
-    <p:sldId id="261" r:id="rId7"/>
-    <p:sldId id="262" r:id="rId8"/>
+    <p:sldId id="260" r:id="rId2"/>
+    <p:sldId id="259" r:id="rId3"/>
+    <p:sldId id="262" r:id="rId4"/>
+    <p:sldId id="263" r:id="rId5"/>
   </p:sldIdLst>
   <p:sldSz cx="12192000" cy="6858000"/>
   <p:notesSz cx="7772400" cy="10058400"/>
@@ -203,7 +200,7 @@
           <a:p>
             <a:fld id="{FD5B471E-2D90-49BC-A0B2-2FC9EAC1BE17}" type="datetimeFigureOut">
               <a:rPr lang="LID4096" smtClean="0"/>
-              <a:t>10/07/2026</a:t>
+              <a:t>10/08/2026</a:t>
             </a:fld>
             <a:endParaRPr lang="LID4096"/>
           </a:p>
@@ -469,90 +466,6 @@
     </a:lvl9pPr>
   </p:notesStyle>
 </p:notesMaster>
-</file>
-
-<file path=ppt/notesSlides/notesSlide1.xml><?xml version="1.0" encoding="utf-8"?>
-<p:notes xmlns:a="http://schemas.openxmlformats.org/drawingml/2006/main" xmlns:r="http://schemas.openxmlformats.org/officeDocument/2006/relationships" xmlns:p="http://schemas.openxmlformats.org/presentationml/2006/main">
-  <p:cSld>
-    <p:spTree>
-      <p:nvGrpSpPr>
-        <p:cNvPr id="1" name=""/>
-        <p:cNvGrpSpPr/>
-        <p:nvPr/>
-      </p:nvGrpSpPr>
-      <p:grpSpPr>
-        <a:xfrm>
-          <a:off x="0" y="0"/>
-          <a:ext cx="0" cy="0"/>
-          <a:chOff x="0" y="0"/>
-          <a:chExt cx="0" cy="0"/>
-        </a:xfrm>
-      </p:grpSpPr>
-      <p:sp>
-        <p:nvSpPr>
-          <p:cNvPr id="2" name="Slide Image Placeholder 1"/>
-          <p:cNvSpPr>
-            <a:spLocks noGrp="1" noRot="1" noChangeAspect="1"/>
-          </p:cNvSpPr>
-          <p:nvPr>
-            <p:ph type="sldImg"/>
-          </p:nvPr>
-        </p:nvSpPr>
-        <p:spPr/>
-      </p:sp>
-      <p:sp>
-        <p:nvSpPr>
-          <p:cNvPr id="3" name="Notes Placeholder 2"/>
-          <p:cNvSpPr>
-            <a:spLocks noGrp="1"/>
-          </p:cNvSpPr>
-          <p:nvPr>
-            <p:ph type="body" idx="1"/>
-          </p:nvPr>
-        </p:nvSpPr>
-        <p:spPr/>
-        <p:txBody>
-          <a:bodyPr/>
-          <a:lstStyle/>
-          <a:p>
-            <a:endParaRPr lang="LID4096" dirty="0"/>
-          </a:p>
-        </p:txBody>
-      </p:sp>
-      <p:sp>
-        <p:nvSpPr>
-          <p:cNvPr id="4" name="Slide Number Placeholder 3"/>
-          <p:cNvSpPr>
-            <a:spLocks noGrp="1"/>
-          </p:cNvSpPr>
-          <p:nvPr>
-            <p:ph type="sldNum" sz="quarter" idx="5"/>
-          </p:nvPr>
-        </p:nvSpPr>
-        <p:spPr/>
-        <p:txBody>
-          <a:bodyPr/>
-          <a:lstStyle/>
-          <a:p>
-            <a:fld id="{B161048A-9FF3-42A8-9F95-F29AC97CB98C}" type="slidenum">
-              <a:rPr lang="LID4096" smtClean="0"/>
-              <a:t>6</a:t>
-            </a:fld>
-            <a:endParaRPr lang="LID4096"/>
-          </a:p>
-        </p:txBody>
-      </p:sp>
-    </p:spTree>
-    <p:extLst>
-      <p:ext uri="{BB962C8B-B14F-4D97-AF65-F5344CB8AC3E}">
-        <p14:creationId xmlns:p14="http://schemas.microsoft.com/office/powerpoint/2010/main" val="328508359"/>
-      </p:ext>
-    </p:extLst>
-  </p:cSld>
-  <p:clrMapOvr>
-    <a:masterClrMapping/>
-  </p:clrMapOvr>
-</p:notes>
 </file>
 
 <file path=ppt/slideLayouts/slideLayout1.xml><?xml version="1.0" encoding="utf-8"?>
@@ -7964,3621 +7877,6 @@
 <file path=ppt/slides/slide1.xml><?xml version="1.0" encoding="utf-8"?>
 <p:sld xmlns:a="http://schemas.openxmlformats.org/drawingml/2006/main" xmlns:r="http://schemas.openxmlformats.org/officeDocument/2006/relationships" xmlns:p="http://schemas.openxmlformats.org/presentationml/2006/main">
   <p:cSld>
-    <p:bg>
-      <p:bgPr>
-        <a:blipFill rotWithShape="0">
-          <a:blip r:embed="rId2"/>
-          <a:tile tx="0" ty="0" sx="100000" sy="100000" algn="tl"/>
-        </a:blipFill>
-        <a:effectLst/>
-      </p:bgPr>
-    </p:bg>
-    <p:spTree>
-      <p:nvGrpSpPr>
-        <p:cNvPr id="1" name=""/>
-        <p:cNvGrpSpPr/>
-        <p:nvPr/>
-      </p:nvGrpSpPr>
-      <p:grpSpPr>
-        <a:xfrm>
-          <a:off x="0" y="0"/>
-          <a:ext cx="0" cy="0"/>
-          <a:chOff x="0" y="0"/>
-          <a:chExt cx="0" cy="0"/>
-        </a:xfrm>
-      </p:grpSpPr>
-      <p:pic>
-        <p:nvPicPr>
-          <p:cNvPr id="62" name="Picture 2" descr="Cartoon Clock Png"/>
-          <p:cNvPicPr/>
-          <p:nvPr/>
-        </p:nvPicPr>
-        <p:blipFill>
-          <a:blip r:embed="rId3"/>
-          <a:stretch/>
-        </p:blipFill>
-        <p:spPr>
-          <a:xfrm>
-            <a:off x="8460000" y="3106800"/>
-            <a:ext cx="3542400" cy="3542400"/>
-          </a:xfrm>
-          <a:prstGeom prst="rect">
-            <a:avLst/>
-          </a:prstGeom>
-          <a:noFill/>
-          <a:ln w="0">
-            <a:noFill/>
-          </a:ln>
-        </p:spPr>
-      </p:pic>
-      <p:sp>
-        <p:nvSpPr>
-          <p:cNvPr id="63" name="Rectangle 44"/>
-          <p:cNvSpPr/>
-          <p:nvPr/>
-        </p:nvSpPr>
-        <p:spPr>
-          <a:xfrm>
-            <a:off x="325440" y="331200"/>
-            <a:ext cx="3049560" cy="3376080"/>
-          </a:xfrm>
-          <a:prstGeom prst="rect">
-            <a:avLst/>
-          </a:prstGeom>
-          <a:solidFill>
-            <a:schemeClr val="bg1"/>
-          </a:solidFill>
-          <a:ln w="9525">
-            <a:solidFill>
-              <a:srgbClr val="FFC000"/>
-            </a:solidFill>
-          </a:ln>
-        </p:spPr>
-        <p:style>
-          <a:lnRef idx="2">
-            <a:schemeClr val="accent1">
-              <a:shade val="50000"/>
-            </a:schemeClr>
-          </a:lnRef>
-          <a:fillRef idx="1">
-            <a:schemeClr val="accent1"/>
-          </a:fillRef>
-          <a:effectRef idx="0">
-            <a:schemeClr val="accent1"/>
-          </a:effectRef>
-          <a:fontRef idx="minor"/>
-        </p:style>
-        <p:txBody>
-          <a:bodyPr lIns="90000" tIns="45000" rIns="90000" bIns="45000" anchor="ctr">
-            <a:noAutofit/>
-          </a:bodyPr>
-          <a:lstStyle/>
-          <a:p>
-            <a:endParaRPr lang="en-IL" sz="1800" b="0" u="none" strike="noStrike">
-              <a:solidFill>
-                <a:schemeClr val="lt1"/>
-              </a:solidFill>
-              <a:effectLst/>
-              <a:uFillTx/>
-              <a:latin typeface="Calibri"/>
-            </a:endParaRPr>
-          </a:p>
-        </p:txBody>
-      </p:sp>
-      <p:sp>
-        <p:nvSpPr>
-          <p:cNvPr id="64" name="Rectangle 5"/>
-          <p:cNvSpPr/>
-          <p:nvPr/>
-        </p:nvSpPr>
-        <p:spPr>
-          <a:xfrm>
-            <a:off x="8458200" y="3106800"/>
-            <a:ext cx="3542400" cy="3542400"/>
-          </a:xfrm>
-          <a:prstGeom prst="rect">
-            <a:avLst/>
-          </a:prstGeom>
-          <a:noFill/>
-          <a:ln>
-            <a:noFill/>
-          </a:ln>
-        </p:spPr>
-        <p:style>
-          <a:lnRef idx="2">
-            <a:schemeClr val="accent4">
-              <a:shade val="50000"/>
-            </a:schemeClr>
-          </a:lnRef>
-          <a:fillRef idx="1">
-            <a:schemeClr val="accent4"/>
-          </a:fillRef>
-          <a:effectRef idx="0">
-            <a:schemeClr val="accent4"/>
-          </a:effectRef>
-          <a:fontRef idx="minor"/>
-        </p:style>
-        <p:txBody>
-          <a:bodyPr lIns="90000" tIns="45000" rIns="90000" bIns="45000" anchor="ctr">
-            <a:noAutofit/>
-          </a:bodyPr>
-          <a:lstStyle/>
-          <a:p>
-            <a:pPr algn="ctr" defTabSz="914400">
-              <a:lnSpc>
-                <a:spcPct val="100000"/>
-              </a:lnSpc>
-            </a:pPr>
-            <a:r>
-              <a:rPr lang="en-US" sz="1800" b="0" u="none" strike="noStrike" dirty="0">
-                <a:solidFill>
-                  <a:srgbClr val="FF0000"/>
-                </a:solidFill>
-                <a:effectLst/>
-                <a:uFillTx/>
-                <a:latin typeface="Calibri"/>
-              </a:rPr>
-              <a:t>#ANCLOCK</a:t>
-            </a:r>
-            <a:endParaRPr lang="en-US" sz="1800" b="0" u="none" strike="noStrike" dirty="0">
-              <a:solidFill>
-                <a:srgbClr val="000000"/>
-              </a:solidFill>
-              <a:effectLst/>
-              <a:uFillTx/>
-              <a:latin typeface="Arial"/>
-            </a:endParaRPr>
-          </a:p>
-        </p:txBody>
-      </p:sp>
-      <p:sp>
-        <p:nvSpPr>
-          <p:cNvPr id="65" name="dtFullZmanim_0"/>
-          <p:cNvSpPr/>
-          <p:nvPr/>
-        </p:nvSpPr>
-        <p:spPr>
-          <a:xfrm>
-            <a:off x="1134360" y="880560"/>
-            <a:ext cx="1433880" cy="337320"/>
-          </a:xfrm>
-          <a:prstGeom prst="rect">
-            <a:avLst/>
-          </a:prstGeom>
-          <a:solidFill>
-            <a:schemeClr val="bg1"/>
-          </a:solidFill>
-          <a:ln w="0">
-            <a:noFill/>
-          </a:ln>
-        </p:spPr>
-        <p:style>
-          <a:lnRef idx="0">
-            <a:scrgbClr r="0" g="0" b="0"/>
-          </a:lnRef>
-          <a:fillRef idx="0">
-            <a:scrgbClr r="0" g="0" b="0"/>
-          </a:fillRef>
-          <a:effectRef idx="0">
-            <a:scrgbClr r="0" g="0" b="0"/>
-          </a:effectRef>
-          <a:fontRef idx="minor"/>
-        </p:style>
-        <p:txBody>
-          <a:bodyPr wrap="none" lIns="90000" tIns="45000" rIns="90000" bIns="45000" anchor="t">
-            <a:spAutoFit/>
-          </a:bodyPr>
-          <a:lstStyle/>
-          <a:p>
-            <a:pPr algn="ctr" defTabSz="914400" rtl="1">
-              <a:lnSpc>
-                <a:spcPct val="100000"/>
-              </a:lnSpc>
-            </a:pPr>
-            <a:r>
-              <a:rPr lang="en-US" sz="1600" b="0" u="none" strike="noStrike" dirty="0">
-                <a:solidFill>
-                  <a:schemeClr val="dk1"/>
-                </a:solidFill>
-                <a:effectLst/>
-                <a:uFillTx/>
-                <a:latin typeface="Calibri"/>
-              </a:rPr>
-              <a:t>#FULLZMANIM</a:t>
-            </a:r>
-            <a:endParaRPr lang="en-US" sz="1600" b="0" u="none" strike="noStrike" dirty="0">
-              <a:solidFill>
-                <a:srgbClr val="000000"/>
-              </a:solidFill>
-              <a:effectLst/>
-              <a:uFillTx/>
-              <a:latin typeface="Arial"/>
-            </a:endParaRPr>
-          </a:p>
-        </p:txBody>
-      </p:sp>
-      <p:sp>
-        <p:nvSpPr>
-          <p:cNvPr id="66" name="Rectangle 10"/>
-          <p:cNvSpPr/>
-          <p:nvPr/>
-        </p:nvSpPr>
-        <p:spPr>
-          <a:xfrm>
-            <a:off x="8644680" y="293760"/>
-            <a:ext cx="3181680" cy="2482200"/>
-          </a:xfrm>
-          <a:prstGeom prst="rect">
-            <a:avLst/>
-          </a:prstGeom>
-          <a:solidFill>
-            <a:schemeClr val="bg1"/>
-          </a:solidFill>
-          <a:ln w="9525">
-            <a:solidFill>
-              <a:srgbClr val="FFC000"/>
-            </a:solidFill>
-          </a:ln>
-        </p:spPr>
-        <p:style>
-          <a:lnRef idx="2">
-            <a:schemeClr val="accent1">
-              <a:shade val="50000"/>
-            </a:schemeClr>
-          </a:lnRef>
-          <a:fillRef idx="1">
-            <a:schemeClr val="accent1"/>
-          </a:fillRef>
-          <a:effectRef idx="0">
-            <a:schemeClr val="accent1"/>
-          </a:effectRef>
-          <a:fontRef idx="minor"/>
-        </p:style>
-        <p:txBody>
-          <a:bodyPr lIns="90000" tIns="45000" rIns="90000" bIns="45000" anchor="ctr">
-            <a:noAutofit/>
-          </a:bodyPr>
-          <a:lstStyle/>
-          <a:p>
-            <a:endParaRPr lang="en-IL" sz="1800" b="0" u="none" strike="noStrike">
-              <a:solidFill>
-                <a:schemeClr val="lt1"/>
-              </a:solidFill>
-              <a:effectLst/>
-              <a:uFillTx/>
-              <a:latin typeface="Calibri"/>
-            </a:endParaRPr>
-          </a:p>
-        </p:txBody>
-      </p:sp>
-      <p:sp>
-        <p:nvSpPr>
-          <p:cNvPr id="67" name="dtHebDate_0"/>
-          <p:cNvSpPr/>
-          <p:nvPr/>
-        </p:nvSpPr>
-        <p:spPr>
-          <a:xfrm>
-            <a:off x="9489240" y="331200"/>
-            <a:ext cx="1506960" cy="460440"/>
-          </a:xfrm>
-          <a:prstGeom prst="rect">
-            <a:avLst/>
-          </a:prstGeom>
-          <a:solidFill>
-            <a:schemeClr val="bg1"/>
-          </a:solidFill>
-          <a:ln w="0">
-            <a:noFill/>
-          </a:ln>
-        </p:spPr>
-        <p:style>
-          <a:lnRef idx="0">
-            <a:scrgbClr r="0" g="0" b="0"/>
-          </a:lnRef>
-          <a:fillRef idx="0">
-            <a:scrgbClr r="0" g="0" b="0"/>
-          </a:fillRef>
-          <a:effectRef idx="0">
-            <a:scrgbClr r="0" g="0" b="0"/>
-          </a:effectRef>
-          <a:fontRef idx="minor"/>
-        </p:style>
-        <p:txBody>
-          <a:bodyPr wrap="none" lIns="90000" tIns="45000" rIns="90000" bIns="45000" anchor="t">
-            <a:spAutoFit/>
-          </a:bodyPr>
-          <a:lstStyle/>
-          <a:p>
-            <a:pPr algn="ctr" defTabSz="914400">
-              <a:lnSpc>
-                <a:spcPct val="100000"/>
-              </a:lnSpc>
-            </a:pPr>
-            <a:r>
-              <a:rPr lang="en-US" sz="2400" b="1" u="none" strike="noStrike" dirty="0">
-                <a:solidFill>
-                  <a:schemeClr val="dk1"/>
-                </a:solidFill>
-                <a:effectLst/>
-                <a:uFillTx/>
-                <a:latin typeface="Calibri"/>
-              </a:rPr>
-              <a:t>#HEBDATE</a:t>
-            </a:r>
-            <a:endParaRPr lang="en-US" sz="2400" b="0" u="none" strike="noStrike" dirty="0">
-              <a:solidFill>
-                <a:srgbClr val="000000"/>
-              </a:solidFill>
-              <a:effectLst/>
-              <a:uFillTx/>
-              <a:latin typeface="Arial"/>
-            </a:endParaRPr>
-          </a:p>
-        </p:txBody>
-      </p:sp>
-      <p:sp>
-        <p:nvSpPr>
-          <p:cNvPr id="68" name="dtDayZmanim_0"/>
-          <p:cNvSpPr/>
-          <p:nvPr/>
-        </p:nvSpPr>
-        <p:spPr>
-          <a:xfrm>
-            <a:off x="9468000" y="899640"/>
-            <a:ext cx="1546560" cy="368280"/>
-          </a:xfrm>
-          <a:prstGeom prst="rect">
-            <a:avLst/>
-          </a:prstGeom>
-          <a:solidFill>
-            <a:schemeClr val="bg1"/>
-          </a:solidFill>
-          <a:ln w="0">
-            <a:noFill/>
-          </a:ln>
-        </p:spPr>
-        <p:style>
-          <a:lnRef idx="0">
-            <a:scrgbClr r="0" g="0" b="0"/>
-          </a:lnRef>
-          <a:fillRef idx="0">
-            <a:scrgbClr r="0" g="0" b="0"/>
-          </a:fillRef>
-          <a:effectRef idx="0">
-            <a:scrgbClr r="0" g="0" b="0"/>
-          </a:effectRef>
-          <a:fontRef idx="minor"/>
-        </p:style>
-        <p:txBody>
-          <a:bodyPr wrap="none" lIns="90000" tIns="45000" rIns="90000" bIns="45000" anchor="t">
-            <a:spAutoFit/>
-          </a:bodyPr>
-          <a:lstStyle/>
-          <a:p>
-            <a:pPr algn="ctr" defTabSz="914400" rtl="1">
-              <a:lnSpc>
-                <a:spcPct val="100000"/>
-              </a:lnSpc>
-            </a:pPr>
-            <a:r>
-              <a:rPr lang="en-US" sz="1800" b="1" u="none" strike="noStrike" dirty="0">
-                <a:solidFill>
-                  <a:schemeClr val="dk1"/>
-                </a:solidFill>
-                <a:effectLst/>
-                <a:uFillTx/>
-                <a:latin typeface="Calibri"/>
-              </a:rPr>
-              <a:t>#DAYZMANIM</a:t>
-            </a:r>
-            <a:endParaRPr lang="en-US" sz="1800" b="0" u="none" strike="noStrike" dirty="0">
-              <a:solidFill>
-                <a:srgbClr val="000000"/>
-              </a:solidFill>
-              <a:effectLst/>
-              <a:uFillTx/>
-              <a:latin typeface="Arial"/>
-            </a:endParaRPr>
-          </a:p>
-        </p:txBody>
-      </p:sp>
-      <p:sp>
-        <p:nvSpPr>
-          <p:cNvPr id="69" name="dtDafYomi_0"/>
-          <p:cNvSpPr/>
-          <p:nvPr/>
-        </p:nvSpPr>
-        <p:spPr>
-          <a:xfrm>
-            <a:off x="9588600" y="1980000"/>
-            <a:ext cx="1189080" cy="368280"/>
-          </a:xfrm>
-          <a:prstGeom prst="rect">
-            <a:avLst/>
-          </a:prstGeom>
-          <a:solidFill>
-            <a:schemeClr val="bg1"/>
-          </a:solidFill>
-          <a:ln w="0">
-            <a:noFill/>
-          </a:ln>
-        </p:spPr>
-        <p:style>
-          <a:lnRef idx="0">
-            <a:scrgbClr r="0" g="0" b="0"/>
-          </a:lnRef>
-          <a:fillRef idx="0">
-            <a:scrgbClr r="0" g="0" b="0"/>
-          </a:fillRef>
-          <a:effectRef idx="0">
-            <a:scrgbClr r="0" g="0" b="0"/>
-          </a:effectRef>
-          <a:fontRef idx="minor"/>
-        </p:style>
-        <p:txBody>
-          <a:bodyPr wrap="none" lIns="90000" tIns="45000" rIns="90000" bIns="45000" anchor="t">
-            <a:spAutoFit/>
-          </a:bodyPr>
-          <a:lstStyle/>
-          <a:p>
-            <a:pPr algn="ctr" defTabSz="914400">
-              <a:lnSpc>
-                <a:spcPct val="100000"/>
-              </a:lnSpc>
-            </a:pPr>
-            <a:r>
-              <a:rPr lang="en-US" sz="1800" b="0" u="none" strike="noStrike">
-                <a:solidFill>
-                  <a:schemeClr val="dk1"/>
-                </a:solidFill>
-                <a:effectLst/>
-                <a:uFillTx/>
-                <a:latin typeface="Calibri"/>
-              </a:rPr>
-              <a:t>#DAFYOMI</a:t>
-            </a:r>
-            <a:endParaRPr lang="en-US" sz="1800" b="0" u="none" strike="noStrike">
-              <a:solidFill>
-                <a:srgbClr val="000000"/>
-              </a:solidFill>
-              <a:effectLst/>
-              <a:uFillTx/>
-              <a:latin typeface="Arial"/>
-            </a:endParaRPr>
-          </a:p>
-        </p:txBody>
-      </p:sp>
-      <p:sp>
-        <p:nvSpPr>
-          <p:cNvPr id="70" name="Rectangle 12"/>
-          <p:cNvSpPr/>
-          <p:nvPr/>
-        </p:nvSpPr>
-        <p:spPr>
-          <a:xfrm>
-            <a:off x="3727080" y="112680"/>
-            <a:ext cx="4565520" cy="6550200"/>
-          </a:xfrm>
-          <a:prstGeom prst="rect">
-            <a:avLst/>
-          </a:prstGeom>
-          <a:solidFill>
-            <a:schemeClr val="bg1"/>
-          </a:solidFill>
-          <a:ln w="9525">
-            <a:solidFill>
-              <a:srgbClr val="FFC000"/>
-            </a:solidFill>
-          </a:ln>
-        </p:spPr>
-        <p:style>
-          <a:lnRef idx="2">
-            <a:schemeClr val="accent1">
-              <a:shade val="50000"/>
-            </a:schemeClr>
-          </a:lnRef>
-          <a:fillRef idx="1">
-            <a:schemeClr val="accent1"/>
-          </a:fillRef>
-          <a:effectRef idx="0">
-            <a:schemeClr val="accent1"/>
-          </a:effectRef>
-          <a:fontRef idx="minor"/>
-        </p:style>
-        <p:txBody>
-          <a:bodyPr lIns="90000" tIns="45000" rIns="90000" bIns="45000" anchor="ctr">
-            <a:noAutofit/>
-          </a:bodyPr>
-          <a:lstStyle/>
-          <a:p>
-            <a:endParaRPr lang="en-IL" sz="1800" b="0" u="none" strike="noStrike">
-              <a:solidFill>
-                <a:schemeClr val="lt1"/>
-              </a:solidFill>
-              <a:effectLst/>
-              <a:uFillTx/>
-              <a:latin typeface="Calibri"/>
-            </a:endParaRPr>
-          </a:p>
-        </p:txBody>
-      </p:sp>
-      <p:pic>
-        <p:nvPicPr>
-          <p:cNvPr id="71" name="Picture 14"/>
-          <p:cNvPicPr/>
-          <p:nvPr/>
-        </p:nvPicPr>
-        <p:blipFill>
-          <a:blip r:embed="rId4"/>
-          <a:stretch/>
-        </p:blipFill>
-        <p:spPr>
-          <a:xfrm>
-            <a:off x="3848400" y="221760"/>
-            <a:ext cx="1003680" cy="690480"/>
-          </a:xfrm>
-          <a:prstGeom prst="rect">
-            <a:avLst/>
-          </a:prstGeom>
-          <a:noFill/>
-          <a:ln w="0">
-            <a:noFill/>
-          </a:ln>
-        </p:spPr>
-      </p:pic>
-      <p:sp>
-        <p:nvSpPr>
-          <p:cNvPr id="72" name="Rectangle 16"/>
-          <p:cNvSpPr/>
-          <p:nvPr/>
-        </p:nvSpPr>
-        <p:spPr>
-          <a:xfrm>
-            <a:off x="3802320" y="1383480"/>
-            <a:ext cx="4424040" cy="5191920"/>
-          </a:xfrm>
-          <a:prstGeom prst="rect">
-            <a:avLst/>
-          </a:prstGeom>
-          <a:solidFill>
-            <a:srgbClr val="606279"/>
-          </a:solidFill>
-          <a:ln>
-            <a:noFill/>
-          </a:ln>
-        </p:spPr>
-        <p:style>
-          <a:lnRef idx="2">
-            <a:schemeClr val="accent1">
-              <a:shade val="50000"/>
-            </a:schemeClr>
-          </a:lnRef>
-          <a:fillRef idx="1">
-            <a:schemeClr val="accent1"/>
-          </a:fillRef>
-          <a:effectRef idx="0">
-            <a:schemeClr val="accent1"/>
-          </a:effectRef>
-          <a:fontRef idx="minor"/>
-        </p:style>
-        <p:txBody>
-          <a:bodyPr lIns="90000" tIns="45000" rIns="90000" bIns="45000" anchor="ctr">
-            <a:noAutofit/>
-          </a:bodyPr>
-          <a:lstStyle/>
-          <a:p>
-            <a:endParaRPr lang="en-IL" sz="2000" b="0" u="none" strike="noStrike">
-              <a:solidFill>
-                <a:schemeClr val="lt1"/>
-              </a:solidFill>
-              <a:effectLst/>
-              <a:uFillTx/>
-              <a:latin typeface="Calibri"/>
-            </a:endParaRPr>
-          </a:p>
-        </p:txBody>
-      </p:sp>
-      <p:sp>
-        <p:nvSpPr>
-          <p:cNvPr id="73" name="Rectangle 19"/>
-          <p:cNvSpPr/>
-          <p:nvPr/>
-        </p:nvSpPr>
-        <p:spPr>
-          <a:xfrm>
-            <a:off x="6094800" y="1772280"/>
-            <a:ext cx="2084400" cy="460440"/>
-          </a:xfrm>
-          <a:prstGeom prst="rect">
-            <a:avLst/>
-          </a:prstGeom>
-          <a:solidFill>
-            <a:srgbClr val="606279"/>
-          </a:solidFill>
-          <a:ln w="0">
-            <a:noFill/>
-          </a:ln>
-        </p:spPr>
-        <p:style>
-          <a:lnRef idx="0">
-            <a:scrgbClr r="0" g="0" b="0"/>
-          </a:lnRef>
-          <a:fillRef idx="0">
-            <a:scrgbClr r="0" g="0" b="0"/>
-          </a:fillRef>
-          <a:effectRef idx="0">
-            <a:scrgbClr r="0" g="0" b="0"/>
-          </a:effectRef>
-          <a:fontRef idx="minor"/>
-        </p:style>
-        <p:txBody>
-          <a:bodyPr lIns="90000" tIns="45000" rIns="90000" bIns="45000" anchor="t">
-            <a:spAutoFit/>
-          </a:bodyPr>
-          <a:lstStyle/>
-          <a:p>
-            <a:pPr algn="r" defTabSz="914400">
-              <a:lnSpc>
-                <a:spcPct val="100000"/>
-              </a:lnSpc>
-            </a:pPr>
-            <a:r>
-              <a:rPr lang="he-IL" sz="2400" b="1" u="none" strike="noStrike">
-                <a:solidFill>
-                  <a:schemeClr val="lt1"/>
-                </a:solidFill>
-                <a:effectLst/>
-                <a:uFillTx/>
-                <a:latin typeface="Microsoft JhengHei UI Light"/>
-              </a:rPr>
-              <a:t>הדלקת נרות</a:t>
-            </a:r>
-            <a:r>
-              <a:rPr lang="en-US" sz="2400" b="1" u="none" strike="noStrike">
-                <a:solidFill>
-                  <a:schemeClr val="lt1"/>
-                </a:solidFill>
-                <a:effectLst/>
-                <a:uFillTx/>
-                <a:latin typeface="Microsoft JhengHei UI Light"/>
-                <a:ea typeface="Microsoft JhengHei UI Light"/>
-              </a:rPr>
-              <a:t>:</a:t>
-            </a:r>
-            <a:endParaRPr lang="en-US" sz="2400" b="0" u="none" strike="noStrike">
-              <a:solidFill>
-                <a:srgbClr val="FFFFFF"/>
-              </a:solidFill>
-              <a:effectLst/>
-              <a:uFillTx/>
-              <a:latin typeface="Arial"/>
-            </a:endParaRPr>
-          </a:p>
-        </p:txBody>
-      </p:sp>
-      <p:sp>
-        <p:nvSpPr>
-          <p:cNvPr id="74" name="Rectangle 21"/>
-          <p:cNvSpPr/>
-          <p:nvPr/>
-        </p:nvSpPr>
-        <p:spPr>
-          <a:xfrm>
-            <a:off x="6094800" y="2272320"/>
-            <a:ext cx="2084400" cy="460440"/>
-          </a:xfrm>
-          <a:prstGeom prst="rect">
-            <a:avLst/>
-          </a:prstGeom>
-          <a:solidFill>
-            <a:srgbClr val="606279"/>
-          </a:solidFill>
-          <a:ln w="0">
-            <a:noFill/>
-          </a:ln>
-        </p:spPr>
-        <p:style>
-          <a:lnRef idx="0">
-            <a:scrgbClr r="0" g="0" b="0"/>
-          </a:lnRef>
-          <a:fillRef idx="0">
-            <a:scrgbClr r="0" g="0" b="0"/>
-          </a:fillRef>
-          <a:effectRef idx="0">
-            <a:scrgbClr r="0" g="0" b="0"/>
-          </a:effectRef>
-          <a:fontRef idx="minor"/>
-        </p:style>
-        <p:txBody>
-          <a:bodyPr lIns="90000" tIns="45000" rIns="90000" bIns="45000" anchor="t">
-            <a:spAutoFit/>
-          </a:bodyPr>
-          <a:lstStyle/>
-          <a:p>
-            <a:pPr algn="r" defTabSz="914400">
-              <a:lnSpc>
-                <a:spcPct val="100000"/>
-              </a:lnSpc>
-            </a:pPr>
-            <a:r>
-              <a:rPr lang="he-IL" sz="2400" b="1" u="none" strike="noStrike">
-                <a:solidFill>
-                  <a:schemeClr val="lt1"/>
-                </a:solidFill>
-                <a:effectLst/>
-                <a:uFillTx/>
-                <a:latin typeface="Microsoft JhengHei UI Light"/>
-              </a:rPr>
-              <a:t>שיר השירים</a:t>
-            </a:r>
-            <a:r>
-              <a:rPr lang="en-US" sz="2400" b="1" u="none" strike="noStrike">
-                <a:solidFill>
-                  <a:schemeClr val="lt1"/>
-                </a:solidFill>
-                <a:effectLst/>
-                <a:uFillTx/>
-                <a:latin typeface="Microsoft JhengHei UI Light"/>
-                <a:ea typeface="Microsoft JhengHei UI Light"/>
-              </a:rPr>
-              <a:t>:</a:t>
-            </a:r>
-            <a:endParaRPr lang="en-US" sz="2400" b="0" u="none" strike="noStrike">
-              <a:solidFill>
-                <a:srgbClr val="FFFFFF"/>
-              </a:solidFill>
-              <a:effectLst/>
-              <a:uFillTx/>
-              <a:latin typeface="Arial"/>
-            </a:endParaRPr>
-          </a:p>
-        </p:txBody>
-      </p:sp>
-      <p:sp>
-        <p:nvSpPr>
-          <p:cNvPr id="75" name="Rectangle 22"/>
-          <p:cNvSpPr/>
-          <p:nvPr/>
-        </p:nvSpPr>
-        <p:spPr>
-          <a:xfrm>
-            <a:off x="6094800" y="2775600"/>
-            <a:ext cx="2084400" cy="460440"/>
-          </a:xfrm>
-          <a:prstGeom prst="rect">
-            <a:avLst/>
-          </a:prstGeom>
-          <a:solidFill>
-            <a:srgbClr val="606279"/>
-          </a:solidFill>
-          <a:ln w="0">
-            <a:noFill/>
-          </a:ln>
-        </p:spPr>
-        <p:style>
-          <a:lnRef idx="0">
-            <a:scrgbClr r="0" g="0" b="0"/>
-          </a:lnRef>
-          <a:fillRef idx="0">
-            <a:scrgbClr r="0" g="0" b="0"/>
-          </a:fillRef>
-          <a:effectRef idx="0">
-            <a:scrgbClr r="0" g="0" b="0"/>
-          </a:effectRef>
-          <a:fontRef idx="minor"/>
-        </p:style>
-        <p:txBody>
-          <a:bodyPr lIns="90000" tIns="45000" rIns="90000" bIns="45000" anchor="t">
-            <a:spAutoFit/>
-          </a:bodyPr>
-          <a:lstStyle/>
-          <a:p>
-            <a:pPr algn="r" defTabSz="914400">
-              <a:lnSpc>
-                <a:spcPct val="100000"/>
-              </a:lnSpc>
-            </a:pPr>
-            <a:r>
-              <a:rPr lang="he-IL" sz="2400" b="1" u="none" strike="noStrike">
-                <a:solidFill>
-                  <a:schemeClr val="lt1"/>
-                </a:solidFill>
-                <a:effectLst/>
-                <a:uFillTx/>
-                <a:latin typeface="Microsoft JhengHei UI Light"/>
-              </a:rPr>
-              <a:t>מנחה</a:t>
-            </a:r>
-            <a:r>
-              <a:rPr lang="en-US" sz="2400" b="1" u="none" strike="noStrike">
-                <a:solidFill>
-                  <a:schemeClr val="lt1"/>
-                </a:solidFill>
-                <a:effectLst/>
-                <a:uFillTx/>
-                <a:latin typeface="Microsoft JhengHei UI Light"/>
-                <a:ea typeface="Microsoft JhengHei UI Light"/>
-              </a:rPr>
-              <a:t>:</a:t>
-            </a:r>
-            <a:endParaRPr lang="en-US" sz="2400" b="0" u="none" strike="noStrike">
-              <a:solidFill>
-                <a:srgbClr val="FFFFFF"/>
-              </a:solidFill>
-              <a:effectLst/>
-              <a:uFillTx/>
-              <a:latin typeface="Arial"/>
-            </a:endParaRPr>
-          </a:p>
-        </p:txBody>
-      </p:sp>
-      <p:sp>
-        <p:nvSpPr>
-          <p:cNvPr id="76" name="Rectangle 23"/>
-          <p:cNvSpPr/>
-          <p:nvPr/>
-        </p:nvSpPr>
-        <p:spPr>
-          <a:xfrm>
-            <a:off x="6094800" y="3276360"/>
-            <a:ext cx="2084400" cy="460440"/>
-          </a:xfrm>
-          <a:prstGeom prst="rect">
-            <a:avLst/>
-          </a:prstGeom>
-          <a:solidFill>
-            <a:srgbClr val="606279"/>
-          </a:solidFill>
-          <a:ln w="0">
-            <a:noFill/>
-          </a:ln>
-        </p:spPr>
-        <p:style>
-          <a:lnRef idx="0">
-            <a:scrgbClr r="0" g="0" b="0"/>
-          </a:lnRef>
-          <a:fillRef idx="0">
-            <a:scrgbClr r="0" g="0" b="0"/>
-          </a:fillRef>
-          <a:effectRef idx="0">
-            <a:scrgbClr r="0" g="0" b="0"/>
-          </a:effectRef>
-          <a:fontRef idx="minor"/>
-        </p:style>
-        <p:txBody>
-          <a:bodyPr lIns="90000" tIns="45000" rIns="90000" bIns="45000" anchor="t">
-            <a:spAutoFit/>
-          </a:bodyPr>
-          <a:lstStyle/>
-          <a:p>
-            <a:pPr algn="r" defTabSz="914400">
-              <a:lnSpc>
-                <a:spcPct val="100000"/>
-              </a:lnSpc>
-            </a:pPr>
-            <a:r>
-              <a:rPr lang="he-IL" sz="2400" b="1" u="none" strike="noStrike">
-                <a:solidFill>
-                  <a:schemeClr val="lt1"/>
-                </a:solidFill>
-                <a:effectLst/>
-                <a:uFillTx/>
-                <a:latin typeface="Microsoft JhengHei UI Light"/>
-              </a:rPr>
-              <a:t>שחרית</a:t>
-            </a:r>
-            <a:r>
-              <a:rPr lang="en-US" sz="2400" b="1" u="none" strike="noStrike">
-                <a:solidFill>
-                  <a:schemeClr val="lt1"/>
-                </a:solidFill>
-                <a:effectLst/>
-                <a:uFillTx/>
-                <a:latin typeface="Microsoft JhengHei UI Light"/>
-                <a:ea typeface="Microsoft JhengHei UI Light"/>
-              </a:rPr>
-              <a:t>:</a:t>
-            </a:r>
-            <a:endParaRPr lang="en-US" sz="2400" b="0" u="none" strike="noStrike">
-              <a:solidFill>
-                <a:srgbClr val="FFFFFF"/>
-              </a:solidFill>
-              <a:effectLst/>
-              <a:uFillTx/>
-              <a:latin typeface="Arial"/>
-            </a:endParaRPr>
-          </a:p>
-        </p:txBody>
-      </p:sp>
-      <p:sp>
-        <p:nvSpPr>
-          <p:cNvPr id="77" name="Rectangle 25"/>
-          <p:cNvSpPr/>
-          <p:nvPr/>
-        </p:nvSpPr>
-        <p:spPr>
-          <a:xfrm>
-            <a:off x="4986000" y="3778920"/>
-            <a:ext cx="3192120" cy="460440"/>
-          </a:xfrm>
-          <a:prstGeom prst="rect">
-            <a:avLst/>
-          </a:prstGeom>
-          <a:solidFill>
-            <a:srgbClr val="606279"/>
-          </a:solidFill>
-          <a:ln w="0">
-            <a:noFill/>
-          </a:ln>
-        </p:spPr>
-        <p:style>
-          <a:lnRef idx="0">
-            <a:scrgbClr r="0" g="0" b="0"/>
-          </a:lnRef>
-          <a:fillRef idx="0">
-            <a:scrgbClr r="0" g="0" b="0"/>
-          </a:fillRef>
-          <a:effectRef idx="0">
-            <a:scrgbClr r="0" g="0" b="0"/>
-          </a:effectRef>
-          <a:fontRef idx="minor"/>
-        </p:style>
-        <p:txBody>
-          <a:bodyPr lIns="90000" tIns="45000" rIns="90000" bIns="45000" anchor="t">
-            <a:spAutoFit/>
-          </a:bodyPr>
-          <a:lstStyle/>
-          <a:p>
-            <a:pPr algn="r" defTabSz="914400">
-              <a:lnSpc>
-                <a:spcPct val="100000"/>
-              </a:lnSpc>
-            </a:pPr>
-            <a:r>
-              <a:rPr lang="he-IL" sz="2400" b="1" u="none" strike="noStrike">
-                <a:solidFill>
-                  <a:schemeClr val="lt1"/>
-                </a:solidFill>
-                <a:effectLst/>
-                <a:uFillTx/>
-                <a:latin typeface="Microsoft JhengHei UI Light"/>
-              </a:rPr>
-              <a:t>תפילת ילדים אחרי מוסף</a:t>
-            </a:r>
-            <a:endParaRPr lang="en-US" sz="2400" b="0" u="none" strike="noStrike">
-              <a:solidFill>
-                <a:srgbClr val="FFFFFF"/>
-              </a:solidFill>
-              <a:effectLst/>
-              <a:uFillTx/>
-              <a:latin typeface="Arial"/>
-            </a:endParaRPr>
-          </a:p>
-        </p:txBody>
-      </p:sp>
-      <p:sp>
-        <p:nvSpPr>
-          <p:cNvPr id="78" name="Rectangle 26"/>
-          <p:cNvSpPr/>
-          <p:nvPr/>
-        </p:nvSpPr>
-        <p:spPr>
-          <a:xfrm>
-            <a:off x="6094800" y="4278960"/>
-            <a:ext cx="2084400" cy="460440"/>
-          </a:xfrm>
-          <a:prstGeom prst="rect">
-            <a:avLst/>
-          </a:prstGeom>
-          <a:solidFill>
-            <a:srgbClr val="606279"/>
-          </a:solidFill>
-          <a:ln w="0">
-            <a:noFill/>
-          </a:ln>
-        </p:spPr>
-        <p:style>
-          <a:lnRef idx="0">
-            <a:scrgbClr r="0" g="0" b="0"/>
-          </a:lnRef>
-          <a:fillRef idx="0">
-            <a:scrgbClr r="0" g="0" b="0"/>
-          </a:fillRef>
-          <a:effectRef idx="0">
-            <a:scrgbClr r="0" g="0" b="0"/>
-          </a:effectRef>
-          <a:fontRef idx="minor"/>
-        </p:style>
-        <p:txBody>
-          <a:bodyPr lIns="90000" tIns="45000" rIns="90000" bIns="45000" anchor="t">
-            <a:spAutoFit/>
-          </a:bodyPr>
-          <a:lstStyle/>
-          <a:p>
-            <a:pPr algn="r" defTabSz="914400">
-              <a:lnSpc>
-                <a:spcPct val="100000"/>
-              </a:lnSpc>
-            </a:pPr>
-            <a:r>
-              <a:rPr lang="he-IL" sz="2400" b="1" u="none" strike="noStrike">
-                <a:solidFill>
-                  <a:schemeClr val="lt1"/>
-                </a:solidFill>
-                <a:effectLst/>
-                <a:uFillTx/>
-                <a:latin typeface="Microsoft JhengHei UI Light"/>
-              </a:rPr>
-              <a:t>תהילים</a:t>
-            </a:r>
-            <a:r>
-              <a:rPr lang="en-US" sz="2400" b="1" u="none" strike="noStrike">
-                <a:solidFill>
-                  <a:schemeClr val="lt1"/>
-                </a:solidFill>
-                <a:effectLst/>
-                <a:uFillTx/>
-                <a:latin typeface="Microsoft JhengHei UI Light"/>
-                <a:ea typeface="Microsoft JhengHei UI Light"/>
-              </a:rPr>
-              <a:t>:</a:t>
-            </a:r>
-            <a:endParaRPr lang="en-US" sz="2400" b="0" u="none" strike="noStrike">
-              <a:solidFill>
-                <a:srgbClr val="FFFFFF"/>
-              </a:solidFill>
-              <a:effectLst/>
-              <a:uFillTx/>
-              <a:latin typeface="Arial"/>
-            </a:endParaRPr>
-          </a:p>
-        </p:txBody>
-      </p:sp>
-      <p:sp>
-        <p:nvSpPr>
-          <p:cNvPr id="79" name="Rectangle 27"/>
-          <p:cNvSpPr/>
-          <p:nvPr/>
-        </p:nvSpPr>
-        <p:spPr>
-          <a:xfrm>
-            <a:off x="6094800" y="4782240"/>
-            <a:ext cx="2084400" cy="460440"/>
-          </a:xfrm>
-          <a:prstGeom prst="rect">
-            <a:avLst/>
-          </a:prstGeom>
-          <a:solidFill>
-            <a:srgbClr val="606279"/>
-          </a:solidFill>
-          <a:ln w="0">
-            <a:noFill/>
-          </a:ln>
-        </p:spPr>
-        <p:style>
-          <a:lnRef idx="0">
-            <a:scrgbClr r="0" g="0" b="0"/>
-          </a:lnRef>
-          <a:fillRef idx="0">
-            <a:scrgbClr r="0" g="0" b="0"/>
-          </a:fillRef>
-          <a:effectRef idx="0">
-            <a:scrgbClr r="0" g="0" b="0"/>
-          </a:effectRef>
-          <a:fontRef idx="minor"/>
-        </p:style>
-        <p:txBody>
-          <a:bodyPr lIns="90000" tIns="45000" rIns="90000" bIns="45000" anchor="t">
-            <a:spAutoFit/>
-          </a:bodyPr>
-          <a:lstStyle/>
-          <a:p>
-            <a:pPr algn="r" defTabSz="914400">
-              <a:lnSpc>
-                <a:spcPct val="100000"/>
-              </a:lnSpc>
-            </a:pPr>
-            <a:r>
-              <a:rPr lang="he-IL" sz="2400" b="1" u="none" strike="noStrike">
-                <a:solidFill>
-                  <a:schemeClr val="lt1"/>
-                </a:solidFill>
-                <a:effectLst/>
-                <a:uFillTx/>
-                <a:latin typeface="Microsoft JhengHei UI Light"/>
-              </a:rPr>
-              <a:t>שיעור</a:t>
-            </a:r>
-            <a:r>
-              <a:rPr lang="en-US" sz="2400" b="1" u="none" strike="noStrike">
-                <a:solidFill>
-                  <a:schemeClr val="lt1"/>
-                </a:solidFill>
-                <a:effectLst/>
-                <a:uFillTx/>
-                <a:latin typeface="Microsoft JhengHei UI Light"/>
-                <a:ea typeface="Microsoft JhengHei UI Light"/>
-              </a:rPr>
-              <a:t>:</a:t>
-            </a:r>
-            <a:endParaRPr lang="en-US" sz="2400" b="0" u="none" strike="noStrike">
-              <a:solidFill>
-                <a:srgbClr val="FFFFFF"/>
-              </a:solidFill>
-              <a:effectLst/>
-              <a:uFillTx/>
-              <a:latin typeface="Arial"/>
-            </a:endParaRPr>
-          </a:p>
-        </p:txBody>
-      </p:sp>
-      <p:sp>
-        <p:nvSpPr>
-          <p:cNvPr id="80" name="Rectangle 28"/>
-          <p:cNvSpPr/>
-          <p:nvPr/>
-        </p:nvSpPr>
-        <p:spPr>
-          <a:xfrm>
-            <a:off x="6094800" y="5283000"/>
-            <a:ext cx="2084400" cy="460440"/>
-          </a:xfrm>
-          <a:prstGeom prst="rect">
-            <a:avLst/>
-          </a:prstGeom>
-          <a:solidFill>
-            <a:srgbClr val="606279"/>
-          </a:solidFill>
-          <a:ln w="0">
-            <a:noFill/>
-          </a:ln>
-        </p:spPr>
-        <p:style>
-          <a:lnRef idx="0">
-            <a:scrgbClr r="0" g="0" b="0"/>
-          </a:lnRef>
-          <a:fillRef idx="0">
-            <a:scrgbClr r="0" g="0" b="0"/>
-          </a:fillRef>
-          <a:effectRef idx="0">
-            <a:scrgbClr r="0" g="0" b="0"/>
-          </a:effectRef>
-          <a:fontRef idx="minor"/>
-        </p:style>
-        <p:txBody>
-          <a:bodyPr lIns="90000" tIns="45000" rIns="90000" bIns="45000" anchor="t">
-            <a:spAutoFit/>
-          </a:bodyPr>
-          <a:lstStyle/>
-          <a:p>
-            <a:pPr algn="r" defTabSz="914400">
-              <a:lnSpc>
-                <a:spcPct val="100000"/>
-              </a:lnSpc>
-            </a:pPr>
-            <a:r>
-              <a:rPr lang="he-IL" sz="2400" b="1" u="none" strike="noStrike">
-                <a:solidFill>
-                  <a:schemeClr val="lt1"/>
-                </a:solidFill>
-                <a:effectLst/>
-                <a:uFillTx/>
-                <a:latin typeface="Microsoft JhengHei UI Light"/>
-              </a:rPr>
-              <a:t>מנחה</a:t>
-            </a:r>
-            <a:r>
-              <a:rPr lang="en-US" sz="2400" b="1" u="none" strike="noStrike">
-                <a:solidFill>
-                  <a:schemeClr val="lt1"/>
-                </a:solidFill>
-                <a:effectLst/>
-                <a:uFillTx/>
-                <a:latin typeface="Microsoft JhengHei UI Light"/>
-                <a:ea typeface="Microsoft JhengHei UI Light"/>
-              </a:rPr>
-              <a:t>:</a:t>
-            </a:r>
-            <a:endParaRPr lang="en-US" sz="2400" b="0" u="none" strike="noStrike">
-              <a:solidFill>
-                <a:srgbClr val="FFFFFF"/>
-              </a:solidFill>
-              <a:effectLst/>
-              <a:uFillTx/>
-              <a:latin typeface="Arial"/>
-            </a:endParaRPr>
-          </a:p>
-        </p:txBody>
-      </p:sp>
-      <p:sp>
-        <p:nvSpPr>
-          <p:cNvPr id="81" name="Rectangle 29"/>
-          <p:cNvSpPr/>
-          <p:nvPr/>
-        </p:nvSpPr>
-        <p:spPr>
-          <a:xfrm>
-            <a:off x="5608800" y="5785560"/>
-            <a:ext cx="2590920" cy="460440"/>
-          </a:xfrm>
-          <a:prstGeom prst="rect">
-            <a:avLst/>
-          </a:prstGeom>
-          <a:solidFill>
-            <a:srgbClr val="606279"/>
-          </a:solidFill>
-          <a:ln w="0">
-            <a:noFill/>
-          </a:ln>
-        </p:spPr>
-        <p:style>
-          <a:lnRef idx="0">
-            <a:scrgbClr r="0" g="0" b="0"/>
-          </a:lnRef>
-          <a:fillRef idx="0">
-            <a:scrgbClr r="0" g="0" b="0"/>
-          </a:fillRef>
-          <a:effectRef idx="0">
-            <a:scrgbClr r="0" g="0" b="0"/>
-          </a:effectRef>
-          <a:fontRef idx="minor"/>
-        </p:style>
-        <p:txBody>
-          <a:bodyPr lIns="90000" tIns="45000" rIns="90000" bIns="45000" anchor="t">
-            <a:spAutoFit/>
-          </a:bodyPr>
-          <a:lstStyle/>
-          <a:p>
-            <a:pPr algn="r" defTabSz="914400">
-              <a:lnSpc>
-                <a:spcPct val="100000"/>
-              </a:lnSpc>
-            </a:pPr>
-            <a:r>
-              <a:rPr lang="he-IL" sz="2400" b="1" u="none" strike="noStrike">
-                <a:solidFill>
-                  <a:schemeClr val="lt1"/>
-                </a:solidFill>
-                <a:effectLst/>
-                <a:uFillTx/>
-                <a:latin typeface="Microsoft JhengHei UI Light"/>
-              </a:rPr>
-              <a:t>ערבית וצאת שבת</a:t>
-            </a:r>
-            <a:r>
-              <a:rPr lang="en-US" sz="2400" b="1" u="none" strike="noStrike">
-                <a:solidFill>
-                  <a:schemeClr val="lt1"/>
-                </a:solidFill>
-                <a:effectLst/>
-                <a:uFillTx/>
-                <a:latin typeface="Microsoft JhengHei UI Light"/>
-                <a:ea typeface="Microsoft JhengHei UI Light"/>
-              </a:rPr>
-              <a:t>:</a:t>
-            </a:r>
-            <a:endParaRPr lang="en-US" sz="2400" b="0" u="none" strike="noStrike">
-              <a:solidFill>
-                <a:srgbClr val="FFFFFF"/>
-              </a:solidFill>
-              <a:effectLst/>
-              <a:uFillTx/>
-              <a:latin typeface="Arial"/>
-            </a:endParaRPr>
-          </a:p>
-        </p:txBody>
-      </p:sp>
-      <p:sp>
-        <p:nvSpPr>
-          <p:cNvPr id="82" name="Rectangle 30"/>
-          <p:cNvSpPr/>
-          <p:nvPr/>
-        </p:nvSpPr>
-        <p:spPr>
-          <a:xfrm>
-            <a:off x="3853440" y="3778920"/>
-            <a:ext cx="1131120" cy="460440"/>
-          </a:xfrm>
-          <a:prstGeom prst="rect">
-            <a:avLst/>
-          </a:prstGeom>
-          <a:solidFill>
-            <a:srgbClr val="606279"/>
-          </a:solidFill>
-          <a:ln w="0">
-            <a:noFill/>
-          </a:ln>
-        </p:spPr>
-        <p:style>
-          <a:lnRef idx="0">
-            <a:scrgbClr r="0" g="0" b="0"/>
-          </a:lnRef>
-          <a:fillRef idx="0">
-            <a:scrgbClr r="0" g="0" b="0"/>
-          </a:fillRef>
-          <a:effectRef idx="0">
-            <a:scrgbClr r="0" g="0" b="0"/>
-          </a:effectRef>
-          <a:fontRef idx="minor"/>
-        </p:style>
-        <p:txBody>
-          <a:bodyPr lIns="90000" tIns="45000" rIns="90000" bIns="45000" anchor="t">
-            <a:spAutoFit/>
-          </a:bodyPr>
-          <a:lstStyle/>
-          <a:p>
-            <a:endParaRPr lang="en-US" sz="2400" b="0" u="none" strike="noStrike">
-              <a:solidFill>
-                <a:schemeClr val="lt1"/>
-              </a:solidFill>
-              <a:effectLst/>
-              <a:uFillTx/>
-              <a:latin typeface="Microsoft JhengHei UI Light"/>
-            </a:endParaRPr>
-          </a:p>
-        </p:txBody>
-      </p:sp>
-      <p:sp>
-        <p:nvSpPr>
-          <p:cNvPr id="83" name="Rectangle 31"/>
-          <p:cNvSpPr/>
-          <p:nvPr/>
-        </p:nvSpPr>
-        <p:spPr>
-          <a:xfrm>
-            <a:off x="3853440" y="3276360"/>
-            <a:ext cx="1490760" cy="460440"/>
-          </a:xfrm>
-          <a:prstGeom prst="rect">
-            <a:avLst/>
-          </a:prstGeom>
-          <a:solidFill>
-            <a:srgbClr val="606279"/>
-          </a:solidFill>
-          <a:ln w="0">
-            <a:noFill/>
-          </a:ln>
-        </p:spPr>
-        <p:style>
-          <a:lnRef idx="0">
-            <a:scrgbClr r="0" g="0" b="0"/>
-          </a:lnRef>
-          <a:fillRef idx="0">
-            <a:scrgbClr r="0" g="0" b="0"/>
-          </a:fillRef>
-          <a:effectRef idx="0">
-            <a:scrgbClr r="0" g="0" b="0"/>
-          </a:effectRef>
-          <a:fontRef idx="minor"/>
-        </p:style>
-        <p:txBody>
-          <a:bodyPr lIns="90000" tIns="45000" rIns="90000" bIns="45000" anchor="t">
-            <a:spAutoFit/>
-          </a:bodyPr>
-          <a:lstStyle/>
-          <a:p>
-            <a:pPr defTabSz="914400" rtl="1">
-              <a:lnSpc>
-                <a:spcPct val="100000"/>
-              </a:lnSpc>
-            </a:pPr>
-            <a:r>
-              <a:rPr lang="en-US" sz="2400" b="1" u="none" strike="noStrike">
-                <a:solidFill>
-                  <a:schemeClr val="lt1"/>
-                </a:solidFill>
-                <a:effectLst/>
-                <a:uFillTx/>
-                <a:latin typeface="Microsoft JhengHei UI Light"/>
-                <a:ea typeface="Microsoft JhengHei UI Light"/>
-              </a:rPr>
-              <a:t>08:15</a:t>
-            </a:r>
-            <a:endParaRPr lang="en-US" sz="2400" b="0" u="none" strike="noStrike">
-              <a:solidFill>
-                <a:srgbClr val="FFFFFF"/>
-              </a:solidFill>
-              <a:effectLst/>
-              <a:uFillTx/>
-              <a:latin typeface="Arial"/>
-            </a:endParaRPr>
-          </a:p>
-        </p:txBody>
-      </p:sp>
-      <p:sp>
-        <p:nvSpPr>
-          <p:cNvPr id="84" name="Rectangle 32"/>
-          <p:cNvSpPr/>
-          <p:nvPr/>
-        </p:nvSpPr>
-        <p:spPr>
-          <a:xfrm>
-            <a:off x="3853440" y="4782600"/>
-            <a:ext cx="1490760" cy="460440"/>
-          </a:xfrm>
-          <a:prstGeom prst="rect">
-            <a:avLst/>
-          </a:prstGeom>
-          <a:solidFill>
-            <a:srgbClr val="606279"/>
-          </a:solidFill>
-          <a:ln w="0">
-            <a:noFill/>
-          </a:ln>
-        </p:spPr>
-        <p:style>
-          <a:lnRef idx="0">
-            <a:scrgbClr r="0" g="0" b="0"/>
-          </a:lnRef>
-          <a:fillRef idx="0">
-            <a:scrgbClr r="0" g="0" b="0"/>
-          </a:fillRef>
-          <a:effectRef idx="0">
-            <a:scrgbClr r="0" g="0" b="0"/>
-          </a:effectRef>
-          <a:fontRef idx="minor"/>
-        </p:style>
-        <p:txBody>
-          <a:bodyPr lIns="90000" tIns="45000" rIns="90000" bIns="45000" anchor="t">
-            <a:spAutoFit/>
-          </a:bodyPr>
-          <a:lstStyle/>
-          <a:p>
-            <a:pPr defTabSz="914400" rtl="1">
-              <a:lnSpc>
-                <a:spcPct val="100000"/>
-              </a:lnSpc>
-            </a:pPr>
-            <a:r>
-              <a:rPr lang="en-US" sz="2400" b="1" u="none" strike="noStrike">
-                <a:solidFill>
-                  <a:schemeClr val="lt1"/>
-                </a:solidFill>
-                <a:effectLst/>
-                <a:uFillTx/>
-                <a:latin typeface="Microsoft JhengHei UI Light"/>
-                <a:ea typeface="Microsoft JhengHei UI Light"/>
-              </a:rPr>
-              <a:t>17:30</a:t>
-            </a:r>
-            <a:endParaRPr lang="en-US" sz="2400" b="0" u="none" strike="noStrike">
-              <a:solidFill>
-                <a:srgbClr val="FFFFFF"/>
-              </a:solidFill>
-              <a:effectLst/>
-              <a:uFillTx/>
-              <a:latin typeface="Arial"/>
-            </a:endParaRPr>
-          </a:p>
-        </p:txBody>
-      </p:sp>
-      <p:sp>
-        <p:nvSpPr>
-          <p:cNvPr id="85" name="Rectangle 33"/>
-          <p:cNvSpPr/>
-          <p:nvPr/>
-        </p:nvSpPr>
-        <p:spPr>
-          <a:xfrm>
-            <a:off x="3853440" y="4280400"/>
-            <a:ext cx="1490760" cy="460440"/>
-          </a:xfrm>
-          <a:prstGeom prst="rect">
-            <a:avLst/>
-          </a:prstGeom>
-          <a:solidFill>
-            <a:srgbClr val="606279"/>
-          </a:solidFill>
-          <a:ln w="0">
-            <a:noFill/>
-          </a:ln>
-        </p:spPr>
-        <p:style>
-          <a:lnRef idx="0">
-            <a:scrgbClr r="0" g="0" b="0"/>
-          </a:lnRef>
-          <a:fillRef idx="0">
-            <a:scrgbClr r="0" g="0" b="0"/>
-          </a:fillRef>
-          <a:effectRef idx="0">
-            <a:scrgbClr r="0" g="0" b="0"/>
-          </a:effectRef>
-          <a:fontRef idx="minor"/>
-        </p:style>
-        <p:txBody>
-          <a:bodyPr lIns="90000" tIns="45000" rIns="90000" bIns="45000" anchor="t">
-            <a:spAutoFit/>
-          </a:bodyPr>
-          <a:lstStyle/>
-          <a:p>
-            <a:pPr defTabSz="914400" rtl="1">
-              <a:lnSpc>
-                <a:spcPct val="100000"/>
-              </a:lnSpc>
-            </a:pPr>
-            <a:r>
-              <a:rPr lang="en-US" sz="2400" b="1" u="none" strike="noStrike">
-                <a:solidFill>
-                  <a:schemeClr val="lt1"/>
-                </a:solidFill>
-                <a:effectLst/>
-                <a:uFillTx/>
-                <a:latin typeface="Microsoft JhengHei UI Light"/>
-                <a:ea typeface="Microsoft JhengHei UI Light"/>
-              </a:rPr>
-              <a:t>17:00</a:t>
-            </a:r>
-            <a:endParaRPr lang="en-US" sz="2400" b="0" u="none" strike="noStrike">
-              <a:solidFill>
-                <a:srgbClr val="FFFFFF"/>
-              </a:solidFill>
-              <a:effectLst/>
-              <a:uFillTx/>
-              <a:latin typeface="Arial"/>
-            </a:endParaRPr>
-          </a:p>
-        </p:txBody>
-      </p:sp>
-      <p:sp>
-        <p:nvSpPr>
-          <p:cNvPr id="86" name="dtMinha_1"/>
-          <p:cNvSpPr/>
-          <p:nvPr/>
-        </p:nvSpPr>
-        <p:spPr>
-          <a:xfrm>
-            <a:off x="3853800" y="2774880"/>
-            <a:ext cx="1998000" cy="460440"/>
-          </a:xfrm>
-          <a:prstGeom prst="rect">
-            <a:avLst/>
-          </a:prstGeom>
-          <a:solidFill>
-            <a:srgbClr val="606279"/>
-          </a:solidFill>
-          <a:ln w="0">
-            <a:noFill/>
-          </a:ln>
-        </p:spPr>
-        <p:style>
-          <a:lnRef idx="0">
-            <a:scrgbClr r="0" g="0" b="0"/>
-          </a:lnRef>
-          <a:fillRef idx="0">
-            <a:scrgbClr r="0" g="0" b="0"/>
-          </a:fillRef>
-          <a:effectRef idx="0">
-            <a:scrgbClr r="0" g="0" b="0"/>
-          </a:effectRef>
-          <a:fontRef idx="minor"/>
-        </p:style>
-        <p:txBody>
-          <a:bodyPr lIns="90000" tIns="45000" rIns="90000" bIns="45000" anchor="t">
-            <a:spAutoFit/>
-          </a:bodyPr>
-          <a:lstStyle/>
-          <a:p>
-            <a:pPr defTabSz="914400" rtl="1">
-              <a:lnSpc>
-                <a:spcPct val="100000"/>
-              </a:lnSpc>
-            </a:pPr>
-            <a:r>
-              <a:rPr lang="en-US" sz="2400" b="1" u="none" strike="noStrike">
-                <a:solidFill>
-                  <a:schemeClr val="lt1"/>
-                </a:solidFill>
-                <a:effectLst/>
-                <a:uFillTx/>
-                <a:latin typeface="Microsoft JhengHei UI Light"/>
-                <a:ea typeface="Microsoft JhengHei UI Light"/>
-              </a:rPr>
-              <a:t>#MINHA</a:t>
-            </a:r>
-            <a:endParaRPr lang="en-US" sz="2400" b="0" u="none" strike="noStrike">
-              <a:solidFill>
-                <a:srgbClr val="FFFFFF"/>
-              </a:solidFill>
-              <a:effectLst/>
-              <a:uFillTx/>
-              <a:latin typeface="Arial"/>
-            </a:endParaRPr>
-          </a:p>
-        </p:txBody>
-      </p:sp>
-      <p:sp>
-        <p:nvSpPr>
-          <p:cNvPr id="87" name="dtShir_1"/>
-          <p:cNvSpPr/>
-          <p:nvPr/>
-        </p:nvSpPr>
-        <p:spPr>
-          <a:xfrm>
-            <a:off x="3853800" y="2272320"/>
-            <a:ext cx="1490760" cy="460440"/>
-          </a:xfrm>
-          <a:prstGeom prst="rect">
-            <a:avLst/>
-          </a:prstGeom>
-          <a:solidFill>
-            <a:srgbClr val="606279"/>
-          </a:solidFill>
-          <a:ln w="0">
-            <a:noFill/>
-          </a:ln>
-        </p:spPr>
-        <p:style>
-          <a:lnRef idx="0">
-            <a:scrgbClr r="0" g="0" b="0"/>
-          </a:lnRef>
-          <a:fillRef idx="0">
-            <a:scrgbClr r="0" g="0" b="0"/>
-          </a:fillRef>
-          <a:effectRef idx="0">
-            <a:scrgbClr r="0" g="0" b="0"/>
-          </a:effectRef>
-          <a:fontRef idx="minor"/>
-        </p:style>
-        <p:txBody>
-          <a:bodyPr lIns="90000" tIns="45000" rIns="90000" bIns="45000" anchor="t">
-            <a:spAutoFit/>
-          </a:bodyPr>
-          <a:lstStyle/>
-          <a:p>
-            <a:pPr defTabSz="914400" rtl="1">
-              <a:lnSpc>
-                <a:spcPct val="100000"/>
-              </a:lnSpc>
-            </a:pPr>
-            <a:r>
-              <a:rPr lang="en-US" sz="2400" b="1" u="none" strike="noStrike">
-                <a:solidFill>
-                  <a:schemeClr val="lt1"/>
-                </a:solidFill>
-                <a:effectLst/>
-                <a:uFillTx/>
-                <a:latin typeface="Microsoft JhengHei UI Light"/>
-                <a:ea typeface="Microsoft JhengHei UI Light"/>
-              </a:rPr>
-              <a:t>#SHIR</a:t>
-            </a:r>
-            <a:endParaRPr lang="en-US" sz="2400" b="0" u="none" strike="noStrike">
-              <a:solidFill>
-                <a:srgbClr val="FFFFFF"/>
-              </a:solidFill>
-              <a:effectLst/>
-              <a:uFillTx/>
-              <a:latin typeface="Arial"/>
-            </a:endParaRPr>
-          </a:p>
-        </p:txBody>
-      </p:sp>
-      <p:sp>
-        <p:nvSpPr>
-          <p:cNvPr id="88" name="dtNerot_1"/>
-          <p:cNvSpPr/>
-          <p:nvPr/>
-        </p:nvSpPr>
-        <p:spPr>
-          <a:xfrm>
-            <a:off x="3853440" y="1771560"/>
-            <a:ext cx="1490760" cy="829800"/>
-          </a:xfrm>
-          <a:prstGeom prst="rect">
-            <a:avLst/>
-          </a:prstGeom>
-          <a:solidFill>
-            <a:srgbClr val="606279"/>
-          </a:solidFill>
-          <a:ln w="0">
-            <a:noFill/>
-          </a:ln>
-        </p:spPr>
-        <p:style>
-          <a:lnRef idx="0">
-            <a:scrgbClr r="0" g="0" b="0"/>
-          </a:lnRef>
-          <a:fillRef idx="0">
-            <a:scrgbClr r="0" g="0" b="0"/>
-          </a:fillRef>
-          <a:effectRef idx="0">
-            <a:scrgbClr r="0" g="0" b="0"/>
-          </a:effectRef>
-          <a:fontRef idx="minor"/>
-        </p:style>
-        <p:txBody>
-          <a:bodyPr lIns="90000" tIns="45000" rIns="90000" bIns="45000" anchor="t">
-            <a:spAutoFit/>
-          </a:bodyPr>
-          <a:lstStyle/>
-          <a:p>
-            <a:pPr algn="r" defTabSz="914400">
-              <a:lnSpc>
-                <a:spcPct val="100000"/>
-              </a:lnSpc>
-            </a:pPr>
-            <a:r>
-              <a:rPr lang="en-US" sz="2400" b="1" u="none" strike="noStrike">
-                <a:solidFill>
-                  <a:schemeClr val="lt1"/>
-                </a:solidFill>
-                <a:effectLst/>
-                <a:uFillTx/>
-                <a:latin typeface="Microsoft JhengHei UI Light"/>
-                <a:ea typeface="Microsoft JhengHei UI Light"/>
-              </a:rPr>
-              <a:t>#SUNSET-01:30</a:t>
-            </a:r>
-            <a:endParaRPr lang="en-US" sz="2400" b="0" u="none" strike="noStrike">
-              <a:solidFill>
-                <a:srgbClr val="FFFFFF"/>
-              </a:solidFill>
-              <a:effectLst/>
-              <a:uFillTx/>
-              <a:latin typeface="Arial"/>
-            </a:endParaRPr>
-          </a:p>
-        </p:txBody>
-      </p:sp>
-      <p:sp>
-        <p:nvSpPr>
-          <p:cNvPr id="89" name="Rectangle 37"/>
-          <p:cNvSpPr/>
-          <p:nvPr/>
-        </p:nvSpPr>
-        <p:spPr>
-          <a:xfrm>
-            <a:off x="3853440" y="5286240"/>
-            <a:ext cx="1490760" cy="460440"/>
-          </a:xfrm>
-          <a:prstGeom prst="rect">
-            <a:avLst/>
-          </a:prstGeom>
-          <a:solidFill>
-            <a:srgbClr val="606279"/>
-          </a:solidFill>
-          <a:ln w="0">
-            <a:noFill/>
-          </a:ln>
-        </p:spPr>
-        <p:style>
-          <a:lnRef idx="0">
-            <a:scrgbClr r="0" g="0" b="0"/>
-          </a:lnRef>
-          <a:fillRef idx="0">
-            <a:scrgbClr r="0" g="0" b="0"/>
-          </a:fillRef>
-          <a:effectRef idx="0">
-            <a:scrgbClr r="0" g="0" b="0"/>
-          </a:effectRef>
-          <a:fontRef idx="minor"/>
-        </p:style>
-        <p:txBody>
-          <a:bodyPr lIns="90000" tIns="45000" rIns="90000" bIns="45000" anchor="t">
-            <a:spAutoFit/>
-          </a:bodyPr>
-          <a:lstStyle/>
-          <a:p>
-            <a:pPr defTabSz="914400" rtl="1">
-              <a:lnSpc>
-                <a:spcPct val="100000"/>
-              </a:lnSpc>
-            </a:pPr>
-            <a:r>
-              <a:rPr lang="en-US" sz="2400" b="1" u="none" strike="noStrike">
-                <a:solidFill>
-                  <a:schemeClr val="lt1"/>
-                </a:solidFill>
-                <a:effectLst/>
-                <a:uFillTx/>
-                <a:latin typeface="Microsoft JhengHei UI Light"/>
-                <a:ea typeface="Microsoft JhengHei UI Light"/>
-              </a:rPr>
-              <a:t>18:15</a:t>
-            </a:r>
-            <a:endParaRPr lang="en-US" sz="2400" b="0" u="none" strike="noStrike">
-              <a:solidFill>
-                <a:srgbClr val="FFFFFF"/>
-              </a:solidFill>
-              <a:effectLst/>
-              <a:uFillTx/>
-              <a:latin typeface="Arial"/>
-            </a:endParaRPr>
-          </a:p>
-        </p:txBody>
-      </p:sp>
-      <p:sp>
-        <p:nvSpPr>
-          <p:cNvPr id="90" name="dtMozash_1"/>
-          <p:cNvSpPr/>
-          <p:nvPr/>
-        </p:nvSpPr>
-        <p:spPr>
-          <a:xfrm>
-            <a:off x="3853440" y="5786640"/>
-            <a:ext cx="1850040" cy="460440"/>
-          </a:xfrm>
-          <a:prstGeom prst="rect">
-            <a:avLst/>
-          </a:prstGeom>
-          <a:solidFill>
-            <a:srgbClr val="606279"/>
-          </a:solidFill>
-          <a:ln w="0">
-            <a:noFill/>
-          </a:ln>
-        </p:spPr>
-        <p:style>
-          <a:lnRef idx="0">
-            <a:scrgbClr r="0" g="0" b="0"/>
-          </a:lnRef>
-          <a:fillRef idx="0">
-            <a:scrgbClr r="0" g="0" b="0"/>
-          </a:fillRef>
-          <a:effectRef idx="0">
-            <a:scrgbClr r="0" g="0" b="0"/>
-          </a:effectRef>
-          <a:fontRef idx="minor"/>
-        </p:style>
-        <p:txBody>
-          <a:bodyPr lIns="90000" tIns="45000" rIns="90000" bIns="45000" anchor="t">
-            <a:spAutoFit/>
-          </a:bodyPr>
-          <a:lstStyle/>
-          <a:p>
-            <a:pPr defTabSz="914400" rtl="1">
-              <a:lnSpc>
-                <a:spcPct val="100000"/>
-              </a:lnSpc>
-            </a:pPr>
-            <a:r>
-              <a:rPr lang="en-US" sz="2400" b="1" u="none" strike="noStrike" dirty="0">
-                <a:solidFill>
-                  <a:schemeClr val="lt1"/>
-                </a:solidFill>
-                <a:effectLst/>
-                <a:uFillTx/>
-                <a:latin typeface="Microsoft JhengHei UI Light"/>
-                <a:ea typeface="Microsoft JhengHei UI Light"/>
-              </a:rPr>
-              <a:t>#MOZASH</a:t>
-            </a:r>
-            <a:endParaRPr lang="en-US" sz="2400" b="0" u="none" strike="noStrike" dirty="0">
-              <a:solidFill>
-                <a:srgbClr val="FFFFFF"/>
-              </a:solidFill>
-              <a:effectLst/>
-              <a:uFillTx/>
-              <a:latin typeface="Arial"/>
-            </a:endParaRPr>
-          </a:p>
-        </p:txBody>
-      </p:sp>
-      <p:sp>
-        <p:nvSpPr>
-          <p:cNvPr id="91" name="Rectangle 48"/>
-          <p:cNvSpPr/>
-          <p:nvPr/>
-        </p:nvSpPr>
-        <p:spPr>
-          <a:xfrm>
-            <a:off x="430920" y="377280"/>
-            <a:ext cx="2873880" cy="460440"/>
-          </a:xfrm>
-          <a:prstGeom prst="rect">
-            <a:avLst/>
-          </a:prstGeom>
-          <a:solidFill>
-            <a:schemeClr val="bg1"/>
-          </a:solidFill>
-          <a:ln w="0">
-            <a:noFill/>
-          </a:ln>
-        </p:spPr>
-        <p:style>
-          <a:lnRef idx="0">
-            <a:scrgbClr r="0" g="0" b="0"/>
-          </a:lnRef>
-          <a:fillRef idx="0">
-            <a:scrgbClr r="0" g="0" b="0"/>
-          </a:fillRef>
-          <a:effectRef idx="0">
-            <a:scrgbClr r="0" g="0" b="0"/>
-          </a:effectRef>
-          <a:fontRef idx="minor"/>
-        </p:style>
-        <p:txBody>
-          <a:bodyPr lIns="90000" tIns="45000" rIns="90000" bIns="45000" anchor="t">
-            <a:spAutoFit/>
-          </a:bodyPr>
-          <a:lstStyle/>
-          <a:p>
-            <a:pPr algn="ctr" defTabSz="914400">
-              <a:lnSpc>
-                <a:spcPct val="100000"/>
-              </a:lnSpc>
-            </a:pPr>
-            <a:r>
-              <a:rPr lang="he-IL" sz="2400" b="1" u="none" strike="noStrike" dirty="0">
-                <a:solidFill>
-                  <a:schemeClr val="dk1"/>
-                </a:solidFill>
-                <a:effectLst/>
-                <a:uFillTx/>
-                <a:latin typeface="Calibri"/>
-              </a:rPr>
-              <a:t>זמני היום</a:t>
-            </a:r>
-            <a:r>
-              <a:rPr lang="en-US" sz="2400" b="1" u="none" strike="noStrike" dirty="0">
-                <a:solidFill>
-                  <a:schemeClr val="dk1"/>
-                </a:solidFill>
-                <a:effectLst/>
-                <a:uFillTx/>
-                <a:latin typeface="Calibri"/>
-              </a:rPr>
-              <a:t>:</a:t>
-            </a:r>
-            <a:endParaRPr lang="en-US" sz="2400" b="0" u="none" strike="noStrike" dirty="0">
-              <a:solidFill>
-                <a:srgbClr val="000000"/>
-              </a:solidFill>
-              <a:effectLst/>
-              <a:uFillTx/>
-              <a:latin typeface="Arial"/>
-            </a:endParaRPr>
-          </a:p>
-        </p:txBody>
-      </p:sp>
-      <p:sp>
-        <p:nvSpPr>
-          <p:cNvPr id="92" name="dtParsha_1"/>
-          <p:cNvSpPr/>
-          <p:nvPr/>
-        </p:nvSpPr>
-        <p:spPr>
-          <a:xfrm>
-            <a:off x="3802320" y="917640"/>
-            <a:ext cx="4424040" cy="460440"/>
-          </a:xfrm>
-          <a:prstGeom prst="rect">
-            <a:avLst/>
-          </a:prstGeom>
-          <a:solidFill>
-            <a:schemeClr val="bg1"/>
-          </a:solidFill>
-          <a:ln w="0">
-            <a:noFill/>
-          </a:ln>
-        </p:spPr>
-        <p:style>
-          <a:lnRef idx="0">
-            <a:scrgbClr r="0" g="0" b="0"/>
-          </a:lnRef>
-          <a:fillRef idx="0">
-            <a:scrgbClr r="0" g="0" b="0"/>
-          </a:fillRef>
-          <a:effectRef idx="0">
-            <a:scrgbClr r="0" g="0" b="0"/>
-          </a:effectRef>
-          <a:fontRef idx="minor"/>
-        </p:style>
-        <p:txBody>
-          <a:bodyPr lIns="90000" tIns="45000" rIns="90000" bIns="45000" anchor="t">
-            <a:spAutoFit/>
-          </a:bodyPr>
-          <a:lstStyle/>
-          <a:p>
-            <a:pPr algn="ctr" defTabSz="914400" rtl="1">
-              <a:lnSpc>
-                <a:spcPct val="100000"/>
-              </a:lnSpc>
-            </a:pPr>
-            <a:r>
-              <a:rPr lang="en-US" sz="2400" b="1" u="none" strike="noStrike" dirty="0">
-                <a:solidFill>
-                  <a:srgbClr val="606279"/>
-                </a:solidFill>
-                <a:effectLst/>
-                <a:uFillTx/>
-                <a:latin typeface="Microsoft JhengHei UI Light"/>
-                <a:ea typeface="Microsoft JhengHei UI Light"/>
-              </a:rPr>
-              <a:t>#PARSHA</a:t>
-            </a:r>
-            <a:endParaRPr lang="en-US" sz="2400" b="0" u="none" strike="noStrike" dirty="0">
-              <a:solidFill>
-                <a:srgbClr val="000000"/>
-              </a:solidFill>
-              <a:effectLst/>
-              <a:uFillTx/>
-              <a:latin typeface="Arial"/>
-            </a:endParaRPr>
-          </a:p>
-        </p:txBody>
-      </p:sp>
-      <p:sp>
-        <p:nvSpPr>
-          <p:cNvPr id="94" name="Rectangle 3"/>
-          <p:cNvSpPr/>
-          <p:nvPr/>
-        </p:nvSpPr>
-        <p:spPr>
-          <a:xfrm>
-            <a:off x="430920" y="6137640"/>
-            <a:ext cx="2873880" cy="554040"/>
-          </a:xfrm>
-          <a:prstGeom prst="rect">
-            <a:avLst/>
-          </a:prstGeom>
-          <a:solidFill>
-            <a:srgbClr val="000000"/>
-          </a:solidFill>
-          <a:ln>
-            <a:solidFill>
-              <a:srgbClr val="FFFFFF"/>
-            </a:solidFill>
-          </a:ln>
-        </p:spPr>
-        <p:style>
-          <a:lnRef idx="3">
-            <a:schemeClr val="lt1"/>
-          </a:lnRef>
-          <a:fillRef idx="1">
-            <a:schemeClr val="dk1"/>
-          </a:fillRef>
-          <a:effectRef idx="1">
-            <a:schemeClr val="dk1"/>
-          </a:effectRef>
-          <a:fontRef idx="minor"/>
-        </p:style>
-        <p:txBody>
-          <a:bodyPr lIns="90000" tIns="45000" rIns="90000" bIns="45000" anchor="ctr">
-            <a:noAutofit/>
-          </a:bodyPr>
-          <a:lstStyle/>
-          <a:p>
-            <a:pPr algn="ctr"/>
-            <a:r>
-              <a:rPr lang="en-US" sz="1800" b="0" u="none" strike="noStrike" dirty="0">
-                <a:solidFill>
-                  <a:schemeClr val="lt1"/>
-                </a:solidFill>
-                <a:effectLst/>
-                <a:uFillTx/>
-                <a:latin typeface="Calibri"/>
-              </a:rPr>
-              <a:t>#</a:t>
-            </a:r>
-            <a:r>
-              <a:rPr lang="en-US" dirty="0">
-                <a:solidFill>
-                  <a:schemeClr val="lt1"/>
-                </a:solidFill>
-              </a:rPr>
-              <a:t> #HIDDEN _</a:t>
-            </a:r>
-            <a:r>
-              <a:rPr lang="en-US" sz="1800" b="0" u="none" strike="noStrike" dirty="0">
-                <a:solidFill>
-                  <a:schemeClr val="lt1"/>
-                </a:solidFill>
-                <a:effectLst/>
-                <a:uFillTx/>
-                <a:latin typeface="Calibri"/>
-              </a:rPr>
-              <a:t>CHOLONLY</a:t>
-            </a:r>
-            <a:endParaRPr lang="en-US" sz="1800" b="0" u="none" strike="noStrike" dirty="0">
-              <a:solidFill>
-                <a:srgbClr val="FFFFFF"/>
-              </a:solidFill>
-              <a:effectLst/>
-              <a:uFillTx/>
-              <a:latin typeface="Arial"/>
-            </a:endParaRPr>
-          </a:p>
-        </p:txBody>
-      </p:sp>
-    </p:spTree>
-  </p:cSld>
-  <p:clrMapOvr>
-    <a:masterClrMapping/>
-  </p:clrMapOvr>
-  <p:transition advTm="10000">
-    <p:fade/>
-  </p:transition>
-</p:sld>
-</file>
-
-<file path=ppt/slides/slide2.xml><?xml version="1.0" encoding="utf-8"?>
-<p:sld xmlns:a="http://schemas.openxmlformats.org/drawingml/2006/main" xmlns:r="http://schemas.openxmlformats.org/officeDocument/2006/relationships" xmlns:p="http://schemas.openxmlformats.org/presentationml/2006/main">
-  <p:cSld>
-    <p:bg>
-      <p:bgPr>
-        <a:blipFill rotWithShape="0">
-          <a:blip r:embed="rId2"/>
-          <a:tile tx="0" ty="0" sx="100000" sy="100000" algn="tl"/>
-        </a:blipFill>
-        <a:effectLst/>
-      </p:bgPr>
-    </p:bg>
-    <p:spTree>
-      <p:nvGrpSpPr>
-        <p:cNvPr id="1" name=""/>
-        <p:cNvGrpSpPr/>
-        <p:nvPr/>
-      </p:nvGrpSpPr>
-      <p:grpSpPr>
-        <a:xfrm>
-          <a:off x="0" y="0"/>
-          <a:ext cx="0" cy="0"/>
-          <a:chOff x="0" y="0"/>
-          <a:chExt cx="0" cy="0"/>
-        </a:xfrm>
-      </p:grpSpPr>
-      <p:sp>
-        <p:nvSpPr>
-          <p:cNvPr id="95" name="Rectangle 7"/>
-          <p:cNvSpPr/>
-          <p:nvPr/>
-        </p:nvSpPr>
-        <p:spPr>
-          <a:xfrm>
-            <a:off x="1125360" y="1852560"/>
-            <a:ext cx="9803160" cy="3138120"/>
-          </a:xfrm>
-          <a:prstGeom prst="rect">
-            <a:avLst/>
-          </a:prstGeom>
-          <a:noFill/>
-          <a:ln w="0">
-            <a:noFill/>
-          </a:ln>
-        </p:spPr>
-        <p:style>
-          <a:lnRef idx="0">
-            <a:scrgbClr r="0" g="0" b="0"/>
-          </a:lnRef>
-          <a:fillRef idx="0">
-            <a:scrgbClr r="0" g="0" b="0"/>
-          </a:fillRef>
-          <a:effectRef idx="0">
-            <a:scrgbClr r="0" g="0" b="0"/>
-          </a:effectRef>
-          <a:fontRef idx="minor"/>
-        </p:style>
-        <p:txBody>
-          <a:bodyPr lIns="90000" tIns="45000" rIns="90000" bIns="45000" anchor="t">
-            <a:spAutoFit/>
-          </a:bodyPr>
-          <a:lstStyle/>
-          <a:p>
-            <a:pPr algn="ctr" defTabSz="914400">
-              <a:lnSpc>
-                <a:spcPct val="100000"/>
-              </a:lnSpc>
-            </a:pPr>
-            <a:r>
-              <a:rPr lang="he-IL" sz="6600" b="1" u="none" strike="noStrike" dirty="0">
-                <a:ln>
-                  <a:solidFill>
-                    <a:schemeClr val="accent2"/>
-                  </a:solidFill>
-                </a:ln>
-                <a:solidFill>
-                  <a:srgbClr val="FFFFFF"/>
-                </a:solidFill>
-                <a:effectLst/>
-                <a:uFillTx/>
-                <a:latin typeface="Calibri"/>
-              </a:rPr>
-              <a:t>שכונת נוה שיר מקדמת את כל האורחים הבאים בשעריה בברכת שבת שלום</a:t>
-            </a:r>
-            <a:endParaRPr lang="en-US" sz="6600" b="0" u="none" strike="noStrike" dirty="0">
-              <a:solidFill>
-                <a:srgbClr val="FFFFFF"/>
-              </a:solidFill>
-              <a:effectLst/>
-              <a:uFillTx/>
-              <a:latin typeface="Arial"/>
-            </a:endParaRPr>
-          </a:p>
-        </p:txBody>
-      </p:sp>
-      <p:sp>
-        <p:nvSpPr>
-          <p:cNvPr id="96" name="Rectangle 2"/>
-          <p:cNvSpPr/>
-          <p:nvPr/>
-        </p:nvSpPr>
-        <p:spPr>
-          <a:xfrm>
-            <a:off x="430920" y="6137640"/>
-            <a:ext cx="2873880" cy="554040"/>
-          </a:xfrm>
-          <a:prstGeom prst="rect">
-            <a:avLst/>
-          </a:prstGeom>
-          <a:solidFill>
-            <a:srgbClr val="000000"/>
-          </a:solidFill>
-          <a:ln>
-            <a:solidFill>
-              <a:srgbClr val="FFFFFF"/>
-            </a:solidFill>
-          </a:ln>
-        </p:spPr>
-        <p:style>
-          <a:lnRef idx="3">
-            <a:schemeClr val="lt1"/>
-          </a:lnRef>
-          <a:fillRef idx="1">
-            <a:schemeClr val="dk1"/>
-          </a:fillRef>
-          <a:effectRef idx="1">
-            <a:schemeClr val="dk1"/>
-          </a:effectRef>
-          <a:fontRef idx="minor"/>
-        </p:style>
-        <p:txBody>
-          <a:bodyPr lIns="90000" tIns="45000" rIns="90000" bIns="45000" anchor="ctr">
-            <a:noAutofit/>
-          </a:bodyPr>
-          <a:lstStyle/>
-          <a:p>
-            <a:pPr algn="ctr" defTabSz="914400">
-              <a:lnSpc>
-                <a:spcPct val="100000"/>
-              </a:lnSpc>
-            </a:pPr>
-            <a:r>
-              <a:rPr lang="en-US" sz="1800" b="0" u="none" strike="noStrike" dirty="0">
-                <a:solidFill>
-                  <a:schemeClr val="lt1"/>
-                </a:solidFill>
-                <a:effectLst/>
-                <a:uFillTx/>
-                <a:latin typeface="Calibri"/>
-              </a:rPr>
-              <a:t>#HIDDEN _NONCHOLONLY</a:t>
-            </a:r>
-            <a:endParaRPr lang="en-US" sz="1800" b="0" u="none" strike="noStrike" dirty="0">
-              <a:solidFill>
-                <a:srgbClr val="FFFFFF"/>
-              </a:solidFill>
-              <a:effectLst/>
-              <a:uFillTx/>
-              <a:latin typeface="Arial"/>
-            </a:endParaRPr>
-          </a:p>
-        </p:txBody>
-      </p:sp>
-    </p:spTree>
-  </p:cSld>
-  <p:clrMapOvr>
-    <a:masterClrMapping/>
-  </p:clrMapOvr>
-  <p:transition advTm="5000">
-    <p:fade/>
-  </p:transition>
-</p:sld>
-</file>
-
-<file path=ppt/slides/slide3.xml><?xml version="1.0" encoding="utf-8"?>
-<p:sld xmlns:a="http://schemas.openxmlformats.org/drawingml/2006/main" xmlns:r="http://schemas.openxmlformats.org/officeDocument/2006/relationships" xmlns:p="http://schemas.openxmlformats.org/presentationml/2006/main">
-  <p:cSld>
-    <p:bg>
-      <p:bgPr>
-        <a:blipFill rotWithShape="0">
-          <a:blip r:embed="rId2"/>
-          <a:tile tx="0" ty="0" sx="100000" sy="100000" algn="tl"/>
-        </a:blipFill>
-        <a:effectLst/>
-      </p:bgPr>
-    </p:bg>
-    <p:spTree>
-      <p:nvGrpSpPr>
-        <p:cNvPr id="1" name=""/>
-        <p:cNvGrpSpPr/>
-        <p:nvPr/>
-      </p:nvGrpSpPr>
-      <p:grpSpPr>
-        <a:xfrm>
-          <a:off x="0" y="0"/>
-          <a:ext cx="0" cy="0"/>
-          <a:chOff x="0" y="0"/>
-          <a:chExt cx="0" cy="0"/>
-        </a:xfrm>
-      </p:grpSpPr>
-      <p:pic>
-        <p:nvPicPr>
-          <p:cNvPr id="97" name="Picture 2" descr="Cartoon Clock Png"/>
-          <p:cNvPicPr/>
-          <p:nvPr/>
-        </p:nvPicPr>
-        <p:blipFill>
-          <a:blip r:embed="rId3"/>
-          <a:stretch/>
-        </p:blipFill>
-        <p:spPr>
-          <a:xfrm>
-            <a:off x="4611600" y="1603080"/>
-            <a:ext cx="2999520" cy="2999520"/>
-          </a:xfrm>
-          <a:prstGeom prst="rect">
-            <a:avLst/>
-          </a:prstGeom>
-          <a:noFill/>
-          <a:ln w="0">
-            <a:noFill/>
-          </a:ln>
-        </p:spPr>
-      </p:pic>
-      <p:sp>
-        <p:nvSpPr>
-          <p:cNvPr id="98" name="Rectangle 1"/>
-          <p:cNvSpPr/>
-          <p:nvPr/>
-        </p:nvSpPr>
-        <p:spPr>
-          <a:xfrm>
-            <a:off x="8032680" y="2962800"/>
-            <a:ext cx="3575160" cy="3542400"/>
-          </a:xfrm>
-          <a:prstGeom prst="rect">
-            <a:avLst/>
-          </a:prstGeom>
-          <a:solidFill>
-            <a:schemeClr val="bg1"/>
-          </a:solidFill>
-          <a:ln w="9525">
-            <a:solidFill>
-              <a:srgbClr val="FFC000"/>
-            </a:solidFill>
-          </a:ln>
-        </p:spPr>
-        <p:style>
-          <a:lnRef idx="2">
-            <a:schemeClr val="accent1">
-              <a:shade val="50000"/>
-            </a:schemeClr>
-          </a:lnRef>
-          <a:fillRef idx="1">
-            <a:schemeClr val="accent1"/>
-          </a:fillRef>
-          <a:effectRef idx="0">
-            <a:schemeClr val="accent1"/>
-          </a:effectRef>
-          <a:fontRef idx="minor"/>
-        </p:style>
-        <p:txBody>
-          <a:bodyPr lIns="90000" tIns="45000" rIns="90000" bIns="45000" anchor="ctr">
-            <a:noAutofit/>
-          </a:bodyPr>
-          <a:lstStyle/>
-          <a:p>
-            <a:endParaRPr lang="en-IL" sz="1800" b="0" u="none" strike="noStrike">
-              <a:solidFill>
-                <a:schemeClr val="lt1"/>
-              </a:solidFill>
-              <a:effectLst/>
-              <a:uFillTx/>
-              <a:latin typeface="Calibri"/>
-            </a:endParaRPr>
-          </a:p>
-        </p:txBody>
-      </p:sp>
-      <p:sp>
-        <p:nvSpPr>
-          <p:cNvPr id="99" name="dtFullZmanim_0"/>
-          <p:cNvSpPr/>
-          <p:nvPr/>
-        </p:nvSpPr>
-        <p:spPr>
-          <a:xfrm>
-            <a:off x="8065080" y="3505320"/>
-            <a:ext cx="3510360" cy="337320"/>
-          </a:xfrm>
-          <a:prstGeom prst="rect">
-            <a:avLst/>
-          </a:prstGeom>
-          <a:solidFill>
-            <a:schemeClr val="bg1"/>
-          </a:solidFill>
-          <a:ln w="0">
-            <a:noFill/>
-          </a:ln>
-        </p:spPr>
-        <p:style>
-          <a:lnRef idx="0">
-            <a:scrgbClr r="0" g="0" b="0"/>
-          </a:lnRef>
-          <a:fillRef idx="0">
-            <a:scrgbClr r="0" g="0" b="0"/>
-          </a:fillRef>
-          <a:effectRef idx="0">
-            <a:scrgbClr r="0" g="0" b="0"/>
-          </a:effectRef>
-          <a:fontRef idx="minor"/>
-        </p:style>
-        <p:txBody>
-          <a:bodyPr lIns="90000" tIns="45000" rIns="90000" bIns="45000" anchor="t">
-            <a:spAutoFit/>
-          </a:bodyPr>
-          <a:lstStyle/>
-          <a:p>
-            <a:pPr algn="ctr" defTabSz="914400" rtl="1">
-              <a:lnSpc>
-                <a:spcPct val="100000"/>
-              </a:lnSpc>
-            </a:pPr>
-            <a:r>
-              <a:rPr lang="en-US" sz="1600" b="0" u="none" strike="noStrike">
-                <a:solidFill>
-                  <a:schemeClr val="dk1"/>
-                </a:solidFill>
-                <a:effectLst/>
-                <a:uFillTx/>
-                <a:latin typeface="Calibri"/>
-              </a:rPr>
-              <a:t>#FULLZMANIM</a:t>
-            </a:r>
-            <a:endParaRPr lang="en-US" sz="1600" b="0" u="none" strike="noStrike">
-              <a:solidFill>
-                <a:srgbClr val="000000"/>
-              </a:solidFill>
-              <a:effectLst/>
-              <a:uFillTx/>
-              <a:latin typeface="Arial"/>
-            </a:endParaRPr>
-          </a:p>
-        </p:txBody>
-      </p:sp>
-      <p:sp>
-        <p:nvSpPr>
-          <p:cNvPr id="100" name="Rectangle 3"/>
-          <p:cNvSpPr/>
-          <p:nvPr/>
-        </p:nvSpPr>
-        <p:spPr>
-          <a:xfrm>
-            <a:off x="8149320" y="3043440"/>
-            <a:ext cx="3319560" cy="460440"/>
-          </a:xfrm>
-          <a:prstGeom prst="rect">
-            <a:avLst/>
-          </a:prstGeom>
-          <a:solidFill>
-            <a:schemeClr val="bg1"/>
-          </a:solidFill>
-          <a:ln w="0">
-            <a:noFill/>
-          </a:ln>
-        </p:spPr>
-        <p:style>
-          <a:lnRef idx="0">
-            <a:scrgbClr r="0" g="0" b="0"/>
-          </a:lnRef>
-          <a:fillRef idx="0">
-            <a:scrgbClr r="0" g="0" b="0"/>
-          </a:fillRef>
-          <a:effectRef idx="0">
-            <a:scrgbClr r="0" g="0" b="0"/>
-          </a:effectRef>
-          <a:fontRef idx="minor"/>
-        </p:style>
-        <p:txBody>
-          <a:bodyPr lIns="90000" tIns="45000" rIns="90000" bIns="45000" anchor="t">
-            <a:spAutoFit/>
-          </a:bodyPr>
-          <a:lstStyle/>
-          <a:p>
-            <a:pPr algn="ctr" defTabSz="914400">
-              <a:lnSpc>
-                <a:spcPct val="100000"/>
-              </a:lnSpc>
-            </a:pPr>
-            <a:r>
-              <a:rPr lang="he-IL" sz="2400" b="1" u="none" strike="noStrike">
-                <a:solidFill>
-                  <a:schemeClr val="dk1"/>
-                </a:solidFill>
-                <a:effectLst/>
-                <a:uFillTx/>
-                <a:latin typeface="Calibri"/>
-              </a:rPr>
-              <a:t>זמני היום</a:t>
-            </a:r>
-            <a:r>
-              <a:rPr lang="en-US" sz="2400" b="1" u="none" strike="noStrike">
-                <a:solidFill>
-                  <a:schemeClr val="dk1"/>
-                </a:solidFill>
-                <a:effectLst/>
-                <a:uFillTx/>
-                <a:latin typeface="Calibri"/>
-              </a:rPr>
-              <a:t>:</a:t>
-            </a:r>
-            <a:endParaRPr lang="en-US" sz="2400" b="0" u="none" strike="noStrike">
-              <a:solidFill>
-                <a:srgbClr val="000000"/>
-              </a:solidFill>
-              <a:effectLst/>
-              <a:uFillTx/>
-              <a:latin typeface="Arial"/>
-            </a:endParaRPr>
-          </a:p>
-        </p:txBody>
-      </p:sp>
-      <p:sp>
-        <p:nvSpPr>
-          <p:cNvPr id="101" name="Rectangle 4"/>
-          <p:cNvSpPr/>
-          <p:nvPr/>
-        </p:nvSpPr>
-        <p:spPr>
-          <a:xfrm>
-            <a:off x="8276760" y="1067760"/>
-            <a:ext cx="3181680" cy="1663200"/>
-          </a:xfrm>
-          <a:prstGeom prst="rect">
-            <a:avLst/>
-          </a:prstGeom>
-          <a:solidFill>
-            <a:schemeClr val="bg1"/>
-          </a:solidFill>
-          <a:ln w="9525">
-            <a:solidFill>
-              <a:srgbClr val="FFC000"/>
-            </a:solidFill>
-          </a:ln>
-        </p:spPr>
-        <p:style>
-          <a:lnRef idx="2">
-            <a:schemeClr val="accent1">
-              <a:shade val="50000"/>
-            </a:schemeClr>
-          </a:lnRef>
-          <a:fillRef idx="1">
-            <a:schemeClr val="accent1"/>
-          </a:fillRef>
-          <a:effectRef idx="0">
-            <a:schemeClr val="accent1"/>
-          </a:effectRef>
-          <a:fontRef idx="minor"/>
-        </p:style>
-        <p:txBody>
-          <a:bodyPr lIns="90000" tIns="45000" rIns="90000" bIns="45000" anchor="ctr">
-            <a:noAutofit/>
-          </a:bodyPr>
-          <a:lstStyle/>
-          <a:p>
-            <a:endParaRPr lang="en-IL" sz="1800" b="0" u="none" strike="noStrike">
-              <a:solidFill>
-                <a:schemeClr val="lt1"/>
-              </a:solidFill>
-              <a:effectLst/>
-              <a:uFillTx/>
-              <a:latin typeface="Calibri"/>
-            </a:endParaRPr>
-          </a:p>
-        </p:txBody>
-      </p:sp>
-      <p:sp>
-        <p:nvSpPr>
-          <p:cNvPr id="102" name="dtHebDate_0"/>
-          <p:cNvSpPr/>
-          <p:nvPr/>
-        </p:nvSpPr>
-        <p:spPr>
-          <a:xfrm>
-            <a:off x="9121320" y="1105560"/>
-            <a:ext cx="1506960" cy="460440"/>
-          </a:xfrm>
-          <a:prstGeom prst="rect">
-            <a:avLst/>
-          </a:prstGeom>
-          <a:solidFill>
-            <a:schemeClr val="bg1"/>
-          </a:solidFill>
-          <a:ln w="0">
-            <a:noFill/>
-          </a:ln>
-        </p:spPr>
-        <p:style>
-          <a:lnRef idx="0">
-            <a:scrgbClr r="0" g="0" b="0"/>
-          </a:lnRef>
-          <a:fillRef idx="0">
-            <a:scrgbClr r="0" g="0" b="0"/>
-          </a:fillRef>
-          <a:effectRef idx="0">
-            <a:scrgbClr r="0" g="0" b="0"/>
-          </a:effectRef>
-          <a:fontRef idx="minor"/>
-        </p:style>
-        <p:txBody>
-          <a:bodyPr wrap="none" lIns="90000" tIns="45000" rIns="90000" bIns="45000" anchor="t">
-            <a:spAutoFit/>
-          </a:bodyPr>
-          <a:lstStyle/>
-          <a:p>
-            <a:pPr algn="ctr" defTabSz="914400">
-              <a:lnSpc>
-                <a:spcPct val="100000"/>
-              </a:lnSpc>
-            </a:pPr>
-            <a:r>
-              <a:rPr lang="en-US" sz="2400" b="1" u="none" strike="noStrike">
-                <a:solidFill>
-                  <a:schemeClr val="dk1"/>
-                </a:solidFill>
-                <a:effectLst/>
-                <a:uFillTx/>
-                <a:latin typeface="Calibri"/>
-              </a:rPr>
-              <a:t>#HEBDATE</a:t>
-            </a:r>
-            <a:endParaRPr lang="en-US" sz="2400" b="0" u="none" strike="noStrike">
-              <a:solidFill>
-                <a:srgbClr val="000000"/>
-              </a:solidFill>
-              <a:effectLst/>
-              <a:uFillTx/>
-              <a:latin typeface="Arial"/>
-            </a:endParaRPr>
-          </a:p>
-        </p:txBody>
-      </p:sp>
-      <p:sp>
-        <p:nvSpPr>
-          <p:cNvPr id="103" name="dtDayZmanim_0"/>
-          <p:cNvSpPr/>
-          <p:nvPr/>
-        </p:nvSpPr>
-        <p:spPr>
-          <a:xfrm>
-            <a:off x="9100080" y="1674000"/>
-            <a:ext cx="1546560" cy="368280"/>
-          </a:xfrm>
-          <a:prstGeom prst="rect">
-            <a:avLst/>
-          </a:prstGeom>
-          <a:solidFill>
-            <a:schemeClr val="bg1"/>
-          </a:solidFill>
-          <a:ln w="0">
-            <a:noFill/>
-          </a:ln>
-        </p:spPr>
-        <p:style>
-          <a:lnRef idx="0">
-            <a:scrgbClr r="0" g="0" b="0"/>
-          </a:lnRef>
-          <a:fillRef idx="0">
-            <a:scrgbClr r="0" g="0" b="0"/>
-          </a:fillRef>
-          <a:effectRef idx="0">
-            <a:scrgbClr r="0" g="0" b="0"/>
-          </a:effectRef>
-          <a:fontRef idx="minor"/>
-        </p:style>
-        <p:txBody>
-          <a:bodyPr wrap="none" lIns="90000" tIns="45000" rIns="90000" bIns="45000" anchor="t">
-            <a:spAutoFit/>
-          </a:bodyPr>
-          <a:lstStyle/>
-          <a:p>
-            <a:pPr algn="ctr" defTabSz="914400" rtl="1">
-              <a:lnSpc>
-                <a:spcPct val="100000"/>
-              </a:lnSpc>
-            </a:pPr>
-            <a:r>
-              <a:rPr lang="en-US" sz="1800" b="1" u="none" strike="noStrike">
-                <a:solidFill>
-                  <a:schemeClr val="dk1"/>
-                </a:solidFill>
-                <a:effectLst/>
-                <a:uFillTx/>
-                <a:latin typeface="Calibri"/>
-              </a:rPr>
-              <a:t>#DAYZMANIM</a:t>
-            </a:r>
-            <a:endParaRPr lang="en-US" sz="1800" b="0" u="none" strike="noStrike">
-              <a:solidFill>
-                <a:srgbClr val="000000"/>
-              </a:solidFill>
-              <a:effectLst/>
-              <a:uFillTx/>
-              <a:latin typeface="Arial"/>
-            </a:endParaRPr>
-          </a:p>
-        </p:txBody>
-      </p:sp>
-      <p:sp>
-        <p:nvSpPr>
-          <p:cNvPr id="104" name="Rectangle 11"/>
-          <p:cNvSpPr/>
-          <p:nvPr/>
-        </p:nvSpPr>
-        <p:spPr>
-          <a:xfrm>
-            <a:off x="4610160" y="1603080"/>
-            <a:ext cx="2999520" cy="2999520"/>
-          </a:xfrm>
-          <a:prstGeom prst="rect">
-            <a:avLst/>
-          </a:prstGeom>
-          <a:noFill/>
-          <a:ln>
-            <a:noFill/>
-          </a:ln>
-        </p:spPr>
-        <p:style>
-          <a:lnRef idx="2">
-            <a:schemeClr val="accent4">
-              <a:shade val="50000"/>
-            </a:schemeClr>
-          </a:lnRef>
-          <a:fillRef idx="1">
-            <a:schemeClr val="accent4"/>
-          </a:fillRef>
-          <a:effectRef idx="0">
-            <a:schemeClr val="accent4"/>
-          </a:effectRef>
-          <a:fontRef idx="minor"/>
-        </p:style>
-        <p:txBody>
-          <a:bodyPr lIns="90000" tIns="45000" rIns="90000" bIns="45000" anchor="ctr">
-            <a:noAutofit/>
-          </a:bodyPr>
-          <a:lstStyle/>
-          <a:p>
-            <a:pPr algn="ctr" defTabSz="914400">
-              <a:lnSpc>
-                <a:spcPct val="100000"/>
-              </a:lnSpc>
-            </a:pPr>
-            <a:r>
-              <a:rPr lang="en-US" sz="1800" b="0" u="none" strike="noStrike" dirty="0">
-                <a:solidFill>
-                  <a:srgbClr val="FF0000"/>
-                </a:solidFill>
-                <a:effectLst/>
-                <a:uFillTx/>
-                <a:latin typeface="Calibri"/>
-              </a:rPr>
-              <a:t>#ANCLOCK</a:t>
-            </a:r>
-            <a:endParaRPr lang="en-US" sz="1800" b="0" u="none" strike="noStrike" dirty="0">
-              <a:solidFill>
-                <a:srgbClr val="000000"/>
-              </a:solidFill>
-              <a:effectLst/>
-              <a:uFillTx/>
-              <a:latin typeface="Arial"/>
-            </a:endParaRPr>
-          </a:p>
-        </p:txBody>
-      </p:sp>
-      <p:sp>
-        <p:nvSpPr>
-          <p:cNvPr id="105" name="Rectangle 26"/>
-          <p:cNvSpPr/>
-          <p:nvPr/>
-        </p:nvSpPr>
-        <p:spPr>
-          <a:xfrm>
-            <a:off x="4187880" y="189000"/>
-            <a:ext cx="3711960" cy="1291680"/>
-          </a:xfrm>
-          <a:prstGeom prst="rect">
-            <a:avLst/>
-          </a:prstGeom>
-          <a:noFill/>
-          <a:ln w="0">
-            <a:noFill/>
-          </a:ln>
-        </p:spPr>
-        <p:style>
-          <a:lnRef idx="0">
-            <a:scrgbClr r="0" g="0" b="0"/>
-          </a:lnRef>
-          <a:fillRef idx="0">
-            <a:scrgbClr r="0" g="0" b="0"/>
-          </a:fillRef>
-          <a:effectRef idx="0">
-            <a:scrgbClr r="0" g="0" b="0"/>
-          </a:effectRef>
-          <a:fontRef idx="minor"/>
-        </p:style>
-        <p:txBody>
-          <a:bodyPr wrap="none" lIns="90000" tIns="45000" rIns="90000" bIns="45000" anchor="t">
-            <a:spAutoFit/>
-          </a:bodyPr>
-          <a:lstStyle/>
-          <a:p>
-            <a:pPr algn="ctr" defTabSz="914400">
-              <a:lnSpc>
-                <a:spcPct val="100000"/>
-              </a:lnSpc>
-            </a:pPr>
-            <a:r>
-              <a:rPr lang="he-IL" sz="5400" b="0" u="none" strike="noStrike">
-                <a:solidFill>
-                  <a:schemeClr val="accent1"/>
-                </a:solidFill>
-                <a:effectLst/>
-                <a:uFillTx/>
-                <a:latin typeface="Aharoni"/>
-                <a:cs typeface="Aharoni"/>
-              </a:rPr>
-              <a:t>בית כנסת 'יחד'</a:t>
-            </a:r>
-            <a:br>
-              <a:rPr sz="5400"/>
-            </a:br>
-            <a:r>
-              <a:rPr lang="he-IL" sz="2400" b="0" u="none" strike="noStrike">
-                <a:solidFill>
-                  <a:schemeClr val="accent1"/>
-                </a:solidFill>
-                <a:effectLst/>
-                <a:uFillTx/>
-                <a:latin typeface="Aharoni"/>
-                <a:cs typeface="Aharoni"/>
-              </a:rPr>
-              <a:t>נוה שיר, עלי</a:t>
-            </a:r>
-            <a:endParaRPr lang="en-US" sz="2400" b="0" u="none" strike="noStrike">
-              <a:solidFill>
-                <a:srgbClr val="000000"/>
-              </a:solidFill>
-              <a:effectLst/>
-              <a:uFillTx/>
-              <a:latin typeface="Arial"/>
-            </a:endParaRPr>
-          </a:p>
-        </p:txBody>
-      </p:sp>
-      <p:pic>
-        <p:nvPicPr>
-          <p:cNvPr id="106" name="Picture 27"/>
-          <p:cNvPicPr/>
-          <p:nvPr/>
-        </p:nvPicPr>
-        <p:blipFill>
-          <a:blip r:embed="rId4"/>
-          <a:stretch/>
-        </p:blipFill>
-        <p:spPr>
-          <a:xfrm>
-            <a:off x="4792680" y="4692240"/>
-            <a:ext cx="2634120" cy="1812960"/>
-          </a:xfrm>
-          <a:prstGeom prst="rect">
-            <a:avLst/>
-          </a:prstGeom>
-          <a:noFill/>
-          <a:ln w="0">
-            <a:noFill/>
-          </a:ln>
-        </p:spPr>
-      </p:pic>
-      <p:sp>
-        <p:nvSpPr>
-          <p:cNvPr id="107" name="Rectangle 28"/>
-          <p:cNvSpPr/>
-          <p:nvPr/>
-        </p:nvSpPr>
-        <p:spPr>
-          <a:xfrm>
-            <a:off x="583200" y="4943520"/>
-            <a:ext cx="3575160" cy="1561680"/>
-          </a:xfrm>
-          <a:prstGeom prst="rect">
-            <a:avLst/>
-          </a:prstGeom>
-          <a:solidFill>
-            <a:schemeClr val="bg1"/>
-          </a:solidFill>
-          <a:ln w="9525">
-            <a:solidFill>
-              <a:srgbClr val="FFC000"/>
-            </a:solidFill>
-          </a:ln>
-        </p:spPr>
-        <p:style>
-          <a:lnRef idx="2">
-            <a:schemeClr val="accent1">
-              <a:shade val="50000"/>
-            </a:schemeClr>
-          </a:lnRef>
-          <a:fillRef idx="1">
-            <a:schemeClr val="accent1"/>
-          </a:fillRef>
-          <a:effectRef idx="0">
-            <a:schemeClr val="accent1"/>
-          </a:effectRef>
-          <a:fontRef idx="minor"/>
-        </p:style>
-        <p:txBody>
-          <a:bodyPr lIns="90000" tIns="45000" rIns="90000" bIns="45000" anchor="ctr">
-            <a:noAutofit/>
-          </a:bodyPr>
-          <a:lstStyle/>
-          <a:p>
-            <a:endParaRPr lang="en-IL" sz="1800" b="0" u="none" strike="noStrike">
-              <a:solidFill>
-                <a:schemeClr val="lt1"/>
-              </a:solidFill>
-              <a:effectLst/>
-              <a:uFillTx/>
-              <a:latin typeface="Calibri"/>
-            </a:endParaRPr>
-          </a:p>
-        </p:txBody>
-      </p:sp>
-      <p:sp>
-        <p:nvSpPr>
-          <p:cNvPr id="108" name="dtParsha_1"/>
-          <p:cNvSpPr/>
-          <p:nvPr/>
-        </p:nvSpPr>
-        <p:spPr>
-          <a:xfrm>
-            <a:off x="598320" y="5018400"/>
-            <a:ext cx="3544200" cy="398880"/>
-          </a:xfrm>
-          <a:prstGeom prst="rect">
-            <a:avLst/>
-          </a:prstGeom>
-          <a:solidFill>
-            <a:schemeClr val="bg1"/>
-          </a:solidFill>
-          <a:ln w="0">
-            <a:noFill/>
-          </a:ln>
-        </p:spPr>
-        <p:style>
-          <a:lnRef idx="0">
-            <a:scrgbClr r="0" g="0" b="0"/>
-          </a:lnRef>
-          <a:fillRef idx="0">
-            <a:scrgbClr r="0" g="0" b="0"/>
-          </a:fillRef>
-          <a:effectRef idx="0">
-            <a:scrgbClr r="0" g="0" b="0"/>
-          </a:effectRef>
-          <a:fontRef idx="minor"/>
-        </p:style>
-        <p:txBody>
-          <a:bodyPr lIns="90000" tIns="45000" rIns="90000" bIns="45000" anchor="t">
-            <a:spAutoFit/>
-          </a:bodyPr>
-          <a:lstStyle/>
-          <a:p>
-            <a:pPr algn="ctr" defTabSz="914400" rtl="1">
-              <a:lnSpc>
-                <a:spcPct val="100000"/>
-              </a:lnSpc>
-            </a:pPr>
-            <a:r>
-              <a:rPr lang="en-US" sz="2000" b="1" u="none" strike="noStrike">
-                <a:solidFill>
-                  <a:srgbClr val="606279"/>
-                </a:solidFill>
-                <a:effectLst/>
-                <a:uFillTx/>
-                <a:latin typeface="Microsoft JhengHei UI Light"/>
-                <a:ea typeface="Microsoft JhengHei UI Light"/>
-              </a:rPr>
-              <a:t>#PARSHA</a:t>
-            </a:r>
-            <a:endParaRPr lang="en-US" sz="2000" b="0" u="none" strike="noStrike">
-              <a:solidFill>
-                <a:srgbClr val="000000"/>
-              </a:solidFill>
-              <a:effectLst/>
-              <a:uFillTx/>
-              <a:latin typeface="Arial"/>
-            </a:endParaRPr>
-          </a:p>
-        </p:txBody>
-      </p:sp>
-      <p:sp>
-        <p:nvSpPr>
-          <p:cNvPr id="109" name="Rectangle 8"/>
-          <p:cNvSpPr/>
-          <p:nvPr/>
-        </p:nvSpPr>
-        <p:spPr>
-          <a:xfrm>
-            <a:off x="583200" y="1063800"/>
-            <a:ext cx="3575160" cy="3542400"/>
-          </a:xfrm>
-          <a:prstGeom prst="rect">
-            <a:avLst/>
-          </a:prstGeom>
-          <a:solidFill>
-            <a:schemeClr val="bg1"/>
-          </a:solidFill>
-          <a:ln w="9525">
-            <a:solidFill>
-              <a:srgbClr val="FFC000"/>
-            </a:solidFill>
-          </a:ln>
-        </p:spPr>
-        <p:style>
-          <a:lnRef idx="2">
-            <a:schemeClr val="accent1">
-              <a:shade val="50000"/>
-            </a:schemeClr>
-          </a:lnRef>
-          <a:fillRef idx="1">
-            <a:schemeClr val="accent1"/>
-          </a:fillRef>
-          <a:effectRef idx="0">
-            <a:schemeClr val="accent1"/>
-          </a:effectRef>
-          <a:fontRef idx="minor"/>
-        </p:style>
-        <p:txBody>
-          <a:bodyPr lIns="90000" tIns="45000" rIns="90000" bIns="45000" anchor="ctr">
-            <a:noAutofit/>
-          </a:bodyPr>
-          <a:lstStyle/>
-          <a:p>
-            <a:endParaRPr lang="en-IL" sz="1800" b="0" u="none" strike="noStrike">
-              <a:solidFill>
-                <a:schemeClr val="lt1"/>
-              </a:solidFill>
-              <a:effectLst/>
-              <a:uFillTx/>
-              <a:latin typeface="Calibri"/>
-            </a:endParaRPr>
-          </a:p>
-        </p:txBody>
-      </p:sp>
-      <p:sp>
-        <p:nvSpPr>
-          <p:cNvPr id="110" name="Rectangle 9"/>
-          <p:cNvSpPr/>
-          <p:nvPr/>
-        </p:nvSpPr>
-        <p:spPr>
-          <a:xfrm>
-            <a:off x="699480" y="1144440"/>
-            <a:ext cx="3319560" cy="460440"/>
-          </a:xfrm>
-          <a:prstGeom prst="rect">
-            <a:avLst/>
-          </a:prstGeom>
-          <a:solidFill>
-            <a:schemeClr val="bg1"/>
-          </a:solidFill>
-          <a:ln w="0">
-            <a:noFill/>
-          </a:ln>
-        </p:spPr>
-        <p:style>
-          <a:lnRef idx="0">
-            <a:scrgbClr r="0" g="0" b="0"/>
-          </a:lnRef>
-          <a:fillRef idx="0">
-            <a:scrgbClr r="0" g="0" b="0"/>
-          </a:fillRef>
-          <a:effectRef idx="0">
-            <a:scrgbClr r="0" g="0" b="0"/>
-          </a:effectRef>
-          <a:fontRef idx="minor"/>
-        </p:style>
-        <p:txBody>
-          <a:bodyPr lIns="90000" tIns="45000" rIns="90000" bIns="45000" anchor="t">
-            <a:spAutoFit/>
-          </a:bodyPr>
-          <a:lstStyle/>
-          <a:p>
-            <a:pPr algn="ctr" defTabSz="914400">
-              <a:lnSpc>
-                <a:spcPct val="100000"/>
-              </a:lnSpc>
-            </a:pPr>
-            <a:r>
-              <a:rPr lang="he-IL" sz="2400" b="1" u="none" strike="noStrike">
-                <a:solidFill>
-                  <a:schemeClr val="dk1"/>
-                </a:solidFill>
-                <a:effectLst/>
-                <a:uFillTx/>
-                <a:latin typeface="Calibri"/>
-              </a:rPr>
-              <a:t>לימוד יומי</a:t>
-            </a:r>
-            <a:r>
-              <a:rPr lang="en-US" sz="2400" b="1" u="none" strike="noStrike">
-                <a:solidFill>
-                  <a:schemeClr val="dk1"/>
-                </a:solidFill>
-                <a:effectLst/>
-                <a:uFillTx/>
-                <a:latin typeface="Calibri"/>
-              </a:rPr>
-              <a:t>:</a:t>
-            </a:r>
-            <a:endParaRPr lang="en-US" sz="2400" b="0" u="none" strike="noStrike">
-              <a:solidFill>
-                <a:srgbClr val="000000"/>
-              </a:solidFill>
-              <a:effectLst/>
-              <a:uFillTx/>
-              <a:latin typeface="Arial"/>
-            </a:endParaRPr>
-          </a:p>
-        </p:txBody>
-      </p:sp>
-      <p:sp>
-        <p:nvSpPr>
-          <p:cNvPr id="111" name="dtLimudYomi_0"/>
-          <p:cNvSpPr/>
-          <p:nvPr/>
-        </p:nvSpPr>
-        <p:spPr>
-          <a:xfrm>
-            <a:off x="771480" y="1567080"/>
-            <a:ext cx="3247200" cy="368280"/>
-          </a:xfrm>
-          <a:prstGeom prst="rect">
-            <a:avLst/>
-          </a:prstGeom>
-          <a:noFill/>
-          <a:ln w="0">
-            <a:noFill/>
-          </a:ln>
-        </p:spPr>
-        <p:style>
-          <a:lnRef idx="0">
-            <a:scrgbClr r="0" g="0" b="0"/>
-          </a:lnRef>
-          <a:fillRef idx="0">
-            <a:scrgbClr r="0" g="0" b="0"/>
-          </a:fillRef>
-          <a:effectRef idx="0">
-            <a:scrgbClr r="0" g="0" b="0"/>
-          </a:effectRef>
-          <a:fontRef idx="minor"/>
-        </p:style>
-        <p:txBody>
-          <a:bodyPr lIns="90000" tIns="45000" rIns="90000" bIns="45000" anchor="t">
-            <a:spAutoFit/>
-          </a:bodyPr>
-          <a:lstStyle/>
-          <a:p>
-            <a:pPr algn="ctr" defTabSz="914400" rtl="1">
-              <a:lnSpc>
-                <a:spcPct val="100000"/>
-              </a:lnSpc>
-            </a:pPr>
-            <a:r>
-              <a:rPr lang="en-US" sz="1800" b="0" u="none" strike="noStrike" dirty="0">
-                <a:solidFill>
-                  <a:schemeClr val="dk1"/>
-                </a:solidFill>
-                <a:effectLst/>
-                <a:uFillTx/>
-                <a:latin typeface="Calibri"/>
-              </a:rPr>
-              <a:t>#LIMUDYOMI</a:t>
-            </a:r>
-            <a:endParaRPr lang="en-US" sz="1800" b="0" u="none" strike="noStrike" dirty="0">
-              <a:solidFill>
-                <a:srgbClr val="000000"/>
-              </a:solidFill>
-              <a:effectLst/>
-              <a:uFillTx/>
-              <a:latin typeface="Arial"/>
-            </a:endParaRPr>
-          </a:p>
-        </p:txBody>
-      </p:sp>
-      <p:sp>
-        <p:nvSpPr>
-          <p:cNvPr id="112" name="dtMozash_1"/>
-          <p:cNvSpPr/>
-          <p:nvPr/>
-        </p:nvSpPr>
-        <p:spPr>
-          <a:xfrm>
-            <a:off x="1127160" y="5985000"/>
-            <a:ext cx="1498680" cy="398880"/>
-          </a:xfrm>
-          <a:prstGeom prst="rect">
-            <a:avLst/>
-          </a:prstGeom>
-          <a:solidFill>
-            <a:schemeClr val="bg1"/>
-          </a:solidFill>
-          <a:ln w="0">
-            <a:noFill/>
-          </a:ln>
-        </p:spPr>
-        <p:style>
-          <a:lnRef idx="0">
-            <a:scrgbClr r="0" g="0" b="0"/>
-          </a:lnRef>
-          <a:fillRef idx="0">
-            <a:scrgbClr r="0" g="0" b="0"/>
-          </a:fillRef>
-          <a:effectRef idx="0">
-            <a:scrgbClr r="0" g="0" b="0"/>
-          </a:effectRef>
-          <a:fontRef idx="minor"/>
-        </p:style>
-        <p:txBody>
-          <a:bodyPr lIns="90000" tIns="45000" rIns="90000" bIns="45000" anchor="t">
-            <a:spAutoFit/>
-          </a:bodyPr>
-          <a:lstStyle/>
-          <a:p>
-            <a:pPr defTabSz="914400" rtl="1">
-              <a:lnSpc>
-                <a:spcPct val="100000"/>
-              </a:lnSpc>
-            </a:pPr>
-            <a:r>
-              <a:rPr lang="en-US" sz="2000" b="0" u="none" strike="noStrike" dirty="0">
-                <a:solidFill>
-                  <a:schemeClr val="dk1"/>
-                </a:solidFill>
-                <a:effectLst/>
-                <a:uFillTx/>
-                <a:latin typeface="Microsoft JhengHei UI Light"/>
-                <a:ea typeface="Microsoft JhengHei UI Light"/>
-              </a:rPr>
-              <a:t>#MOZASH</a:t>
-            </a:r>
-            <a:endParaRPr lang="en-US" sz="2000" b="0" u="none" strike="noStrike" dirty="0">
-              <a:solidFill>
-                <a:srgbClr val="000000"/>
-              </a:solidFill>
-              <a:effectLst/>
-              <a:uFillTx/>
-              <a:latin typeface="Arial"/>
-            </a:endParaRPr>
-          </a:p>
-        </p:txBody>
-      </p:sp>
-      <p:sp>
-        <p:nvSpPr>
-          <p:cNvPr id="113" name="Rectangle 33"/>
-          <p:cNvSpPr/>
-          <p:nvPr/>
-        </p:nvSpPr>
-        <p:spPr>
-          <a:xfrm>
-            <a:off x="2333160" y="5985000"/>
-            <a:ext cx="1309320" cy="398880"/>
-          </a:xfrm>
-          <a:prstGeom prst="rect">
-            <a:avLst/>
-          </a:prstGeom>
-          <a:solidFill>
-            <a:schemeClr val="bg1"/>
-          </a:solidFill>
-          <a:ln w="0">
-            <a:noFill/>
-          </a:ln>
-        </p:spPr>
-        <p:style>
-          <a:lnRef idx="0">
-            <a:scrgbClr r="0" g="0" b="0"/>
-          </a:lnRef>
-          <a:fillRef idx="0">
-            <a:scrgbClr r="0" g="0" b="0"/>
-          </a:fillRef>
-          <a:effectRef idx="0">
-            <a:scrgbClr r="0" g="0" b="0"/>
-          </a:effectRef>
-          <a:fontRef idx="minor"/>
-        </p:style>
-        <p:txBody>
-          <a:bodyPr lIns="90000" tIns="45000" rIns="90000" bIns="45000" anchor="t">
-            <a:spAutoFit/>
-          </a:bodyPr>
-          <a:lstStyle/>
-          <a:p>
-            <a:pPr algn="r" defTabSz="914400">
-              <a:lnSpc>
-                <a:spcPct val="100000"/>
-              </a:lnSpc>
-            </a:pPr>
-            <a:r>
-              <a:rPr lang="he-IL" sz="2000" b="0" u="none" strike="noStrike">
-                <a:solidFill>
-                  <a:schemeClr val="dk1"/>
-                </a:solidFill>
-                <a:effectLst/>
-                <a:uFillTx/>
-                <a:latin typeface="Microsoft JhengHei UI Light"/>
-              </a:rPr>
-              <a:t>צאת שבת</a:t>
-            </a:r>
-            <a:r>
-              <a:rPr lang="en-US" sz="2000" b="0" u="none" strike="noStrike">
-                <a:solidFill>
-                  <a:schemeClr val="dk1"/>
-                </a:solidFill>
-                <a:effectLst/>
-                <a:uFillTx/>
-                <a:latin typeface="Microsoft JhengHei UI Light"/>
-                <a:ea typeface="Microsoft JhengHei UI Light"/>
-              </a:rPr>
-              <a:t>:</a:t>
-            </a:r>
-            <a:endParaRPr lang="en-US" sz="2000" b="0" u="none" strike="noStrike">
-              <a:solidFill>
-                <a:srgbClr val="000000"/>
-              </a:solidFill>
-              <a:effectLst/>
-              <a:uFillTx/>
-              <a:latin typeface="Arial"/>
-            </a:endParaRPr>
-          </a:p>
-        </p:txBody>
-      </p:sp>
-      <p:sp>
-        <p:nvSpPr>
-          <p:cNvPr id="114" name="dtNerot_1"/>
-          <p:cNvSpPr/>
-          <p:nvPr/>
-        </p:nvSpPr>
-        <p:spPr>
-          <a:xfrm>
-            <a:off x="1130040" y="5653800"/>
-            <a:ext cx="1202040" cy="398880"/>
-          </a:xfrm>
-          <a:prstGeom prst="rect">
-            <a:avLst/>
-          </a:prstGeom>
-          <a:solidFill>
-            <a:schemeClr val="bg1"/>
-          </a:solidFill>
-          <a:ln w="0">
-            <a:noFill/>
-          </a:ln>
-        </p:spPr>
-        <p:style>
-          <a:lnRef idx="0">
-            <a:scrgbClr r="0" g="0" b="0"/>
-          </a:lnRef>
-          <a:fillRef idx="0">
-            <a:scrgbClr r="0" g="0" b="0"/>
-          </a:fillRef>
-          <a:effectRef idx="0">
-            <a:scrgbClr r="0" g="0" b="0"/>
-          </a:effectRef>
-          <a:fontRef idx="minor"/>
-        </p:style>
-        <p:txBody>
-          <a:bodyPr lIns="90000" tIns="45000" rIns="90000" bIns="45000" anchor="t">
-            <a:spAutoFit/>
-          </a:bodyPr>
-          <a:lstStyle/>
-          <a:p>
-            <a:pPr defTabSz="914400" rtl="1">
-              <a:lnSpc>
-                <a:spcPct val="100000"/>
-              </a:lnSpc>
-            </a:pPr>
-            <a:r>
-              <a:rPr lang="en-US" sz="2000" b="0" u="none" strike="noStrike" dirty="0">
-                <a:solidFill>
-                  <a:schemeClr val="dk1"/>
-                </a:solidFill>
-                <a:effectLst/>
-                <a:uFillTx/>
-                <a:latin typeface="Microsoft JhengHei UI Light"/>
-                <a:ea typeface="Microsoft JhengHei UI Light"/>
-              </a:rPr>
-              <a:t>#NEROT</a:t>
-            </a:r>
-            <a:endParaRPr lang="en-US" sz="2000" b="0" u="none" strike="noStrike" dirty="0">
-              <a:solidFill>
-                <a:srgbClr val="000000"/>
-              </a:solidFill>
-              <a:effectLst/>
-              <a:uFillTx/>
-              <a:latin typeface="Arial"/>
-            </a:endParaRPr>
-          </a:p>
-        </p:txBody>
-      </p:sp>
-      <p:sp>
-        <p:nvSpPr>
-          <p:cNvPr id="115" name="Rectangle 32"/>
-          <p:cNvSpPr/>
-          <p:nvPr/>
-        </p:nvSpPr>
-        <p:spPr>
-          <a:xfrm>
-            <a:off x="2143800" y="5656320"/>
-            <a:ext cx="1503000" cy="398880"/>
-          </a:xfrm>
-          <a:prstGeom prst="rect">
-            <a:avLst/>
-          </a:prstGeom>
-          <a:solidFill>
-            <a:schemeClr val="bg1"/>
-          </a:solidFill>
-          <a:ln w="0">
-            <a:noFill/>
-          </a:ln>
-        </p:spPr>
-        <p:style>
-          <a:lnRef idx="0">
-            <a:scrgbClr r="0" g="0" b="0"/>
-          </a:lnRef>
-          <a:fillRef idx="0">
-            <a:scrgbClr r="0" g="0" b="0"/>
-          </a:fillRef>
-          <a:effectRef idx="0">
-            <a:scrgbClr r="0" g="0" b="0"/>
-          </a:effectRef>
-          <a:fontRef idx="minor"/>
-        </p:style>
-        <p:txBody>
-          <a:bodyPr lIns="90000" tIns="45000" rIns="90000" bIns="45000" anchor="t">
-            <a:spAutoFit/>
-          </a:bodyPr>
-          <a:lstStyle/>
-          <a:p>
-            <a:pPr algn="r" defTabSz="914400">
-              <a:lnSpc>
-                <a:spcPct val="100000"/>
-              </a:lnSpc>
-            </a:pPr>
-            <a:r>
-              <a:rPr lang="he-IL" sz="2000" b="0" u="none" strike="noStrike">
-                <a:solidFill>
-                  <a:schemeClr val="dk1"/>
-                </a:solidFill>
-                <a:effectLst/>
-                <a:uFillTx/>
-                <a:latin typeface="Microsoft JhengHei UI Light"/>
-              </a:rPr>
-              <a:t>הדלקת נרות</a:t>
-            </a:r>
-            <a:r>
-              <a:rPr lang="en-US" sz="2000" b="0" u="none" strike="noStrike">
-                <a:solidFill>
-                  <a:schemeClr val="dk1"/>
-                </a:solidFill>
-                <a:effectLst/>
-                <a:uFillTx/>
-                <a:latin typeface="Microsoft JhengHei UI Light"/>
-                <a:ea typeface="Microsoft JhengHei UI Light"/>
-              </a:rPr>
-              <a:t>:</a:t>
-            </a:r>
-            <a:endParaRPr lang="en-US" sz="2000" b="0" u="none" strike="noStrike">
-              <a:solidFill>
-                <a:srgbClr val="000000"/>
-              </a:solidFill>
-              <a:effectLst/>
-              <a:uFillTx/>
-              <a:latin typeface="Arial"/>
-            </a:endParaRPr>
-          </a:p>
-        </p:txBody>
-      </p:sp>
-      <p:sp>
-        <p:nvSpPr>
-          <p:cNvPr id="3" name="Rectangle 3">
-            <a:extLst>
-              <a:ext uri="{FF2B5EF4-FFF2-40B4-BE49-F238E27FC236}">
-                <a16:creationId xmlns:a16="http://schemas.microsoft.com/office/drawing/2014/main" id="{06CA9298-AA82-1579-EB6C-610A46E7946B}"/>
-              </a:ext>
-            </a:extLst>
-          </p:cNvPr>
-          <p:cNvSpPr/>
-          <p:nvPr/>
-        </p:nvSpPr>
-        <p:spPr>
-          <a:xfrm>
-            <a:off x="895140" y="2874960"/>
-            <a:ext cx="2873880" cy="554040"/>
-          </a:xfrm>
-          <a:prstGeom prst="rect">
-            <a:avLst/>
-          </a:prstGeom>
-          <a:solidFill>
-            <a:srgbClr val="000000"/>
-          </a:solidFill>
-          <a:ln>
-            <a:solidFill>
-              <a:srgbClr val="FFFFFF"/>
-            </a:solidFill>
-          </a:ln>
-        </p:spPr>
-        <p:style>
-          <a:lnRef idx="3">
-            <a:schemeClr val="lt1"/>
-          </a:lnRef>
-          <a:fillRef idx="1">
-            <a:schemeClr val="dk1"/>
-          </a:fillRef>
-          <a:effectRef idx="1">
-            <a:schemeClr val="dk1"/>
-          </a:effectRef>
-          <a:fontRef idx="minor"/>
-        </p:style>
-        <p:txBody>
-          <a:bodyPr lIns="90000" tIns="45000" rIns="90000" bIns="45000" anchor="ctr">
-            <a:noAutofit/>
-          </a:bodyPr>
-          <a:lstStyle/>
-          <a:p>
-            <a:pPr algn="ctr"/>
-            <a:r>
-              <a:rPr lang="en-US" sz="1800" b="0" u="none" strike="noStrike" dirty="0">
-                <a:solidFill>
-                  <a:schemeClr val="lt1"/>
-                </a:solidFill>
-                <a:effectLst/>
-                <a:uFillTx/>
-                <a:latin typeface="Calibri"/>
-              </a:rPr>
-              <a:t>#</a:t>
-            </a:r>
-            <a:r>
-              <a:rPr lang="en-US" dirty="0">
-                <a:solidFill>
-                  <a:schemeClr val="lt1"/>
-                </a:solidFill>
-              </a:rPr>
-              <a:t> #HIDDEN _</a:t>
-            </a:r>
-            <a:r>
-              <a:rPr lang="en-US" sz="1800" b="0" u="none" strike="noStrike" dirty="0">
-                <a:solidFill>
-                  <a:schemeClr val="lt1"/>
-                </a:solidFill>
-                <a:effectLst/>
-                <a:uFillTx/>
-                <a:latin typeface="Calibri"/>
-              </a:rPr>
-              <a:t>CHOLONLY</a:t>
-            </a:r>
-            <a:endParaRPr lang="en-US" sz="1800" b="0" u="none" strike="noStrike" dirty="0">
-              <a:solidFill>
-                <a:srgbClr val="FFFFFF"/>
-              </a:solidFill>
-              <a:effectLst/>
-              <a:uFillTx/>
-              <a:latin typeface="Arial"/>
-            </a:endParaRPr>
-          </a:p>
-        </p:txBody>
-      </p:sp>
-    </p:spTree>
-  </p:cSld>
-  <p:clrMapOvr>
-    <a:masterClrMapping/>
-  </p:clrMapOvr>
-  <p:transition advTm="5000">
-    <p:fade/>
-  </p:transition>
-</p:sld>
-</file>
-
-<file path=ppt/slides/slide4.xml><?xml version="1.0" encoding="utf-8"?>
-<p:sld xmlns:a="http://schemas.openxmlformats.org/drawingml/2006/main" xmlns:r="http://schemas.openxmlformats.org/officeDocument/2006/relationships" xmlns:p="http://schemas.openxmlformats.org/presentationml/2006/main">
-  <p:cSld>
     <p:spTree>
       <p:nvGrpSpPr>
         <p:cNvPr id="1" name=""/>
@@ -11653,7 +7951,7 @@
           <a:p>
             <a:r>
               <a:rPr lang="en-US" dirty="0"/>
-              <a:t>"</a:t>
+              <a:t>“_</a:t>
             </a:r>
             <a:r>
               <a:rPr lang="en-US" dirty="0" err="1"/>
@@ -11667,7 +7965,7 @@
           <a:p>
             <a:r>
               <a:rPr lang="" dirty="0"/>
-              <a:t>"debug_skip_slideshow": true,</a:t>
+              <a:t>“_debug_skip_slideshow": true,</a:t>
             </a:r>
             <a:endParaRPr lang="en-US" dirty="0"/>
           </a:p>
@@ -11712,10 +8010,22 @@
   <p:clrMapOvr>
     <a:masterClrMapping/>
   </p:clrMapOvr>
+  <mc:AlternateContent xmlns:mc="http://schemas.openxmlformats.org/markup-compatibility/2006" xmlns:p14="http://schemas.microsoft.com/office/powerpoint/2010/main">
+    <mc:Choice Requires="p14">
+      <p:transition spd="med" p14:dur="700">
+        <p:fade/>
+      </p:transition>
+    </mc:Choice>
+    <mc:Fallback xmlns="">
+      <p:transition spd="med">
+        <p:fade/>
+      </p:transition>
+    </mc:Fallback>
+  </mc:AlternateContent>
 </p:sld>
 </file>
 
-<file path=ppt/slides/slide5.xml><?xml version="1.0" encoding="utf-8"?>
+<file path=ppt/slides/slide2.xml><?xml version="1.0" encoding="utf-8"?>
 <p:sld xmlns:a="http://schemas.openxmlformats.org/drawingml/2006/main" xmlns:r="http://schemas.openxmlformats.org/officeDocument/2006/relationships" xmlns:p="http://schemas.openxmlformats.org/presentationml/2006/main">
   <p:cSld>
     <p:bg>
@@ -13207,6 +9517,80 @@
           </a:p>
         </p:txBody>
       </p:sp>
+      <p:sp>
+        <p:nvSpPr>
+          <p:cNvPr id="8" name="Rectangle 2">
+            <a:extLst>
+              <a:ext uri="{FF2B5EF4-FFF2-40B4-BE49-F238E27FC236}">
+                <a16:creationId xmlns:a16="http://schemas.microsoft.com/office/drawing/2014/main" id="{5729A122-ECBC-2C83-6872-09FBBAF8263E}"/>
+              </a:ext>
+            </a:extLst>
+          </p:cNvPr>
+          <p:cNvSpPr/>
+          <p:nvPr/>
+        </p:nvSpPr>
+        <p:spPr>
+          <a:xfrm>
+            <a:off x="430920" y="6137640"/>
+            <a:ext cx="2873880" cy="554040"/>
+          </a:xfrm>
+          <a:prstGeom prst="rect">
+            <a:avLst/>
+          </a:prstGeom>
+          <a:solidFill>
+            <a:srgbClr val="000000"/>
+          </a:solidFill>
+          <a:ln>
+            <a:solidFill>
+              <a:srgbClr val="FFFFFF"/>
+            </a:solidFill>
+          </a:ln>
+        </p:spPr>
+        <p:style>
+          <a:lnRef idx="3">
+            <a:schemeClr val="lt1"/>
+          </a:lnRef>
+          <a:fillRef idx="1">
+            <a:schemeClr val="dk1"/>
+          </a:fillRef>
+          <a:effectRef idx="1">
+            <a:schemeClr val="dk1"/>
+          </a:effectRef>
+          <a:fontRef idx="minor"/>
+        </p:style>
+        <p:txBody>
+          <a:bodyPr lIns="90000" tIns="45000" rIns="90000" bIns="45000" anchor="ctr">
+            <a:noAutofit/>
+          </a:bodyPr>
+          <a:lstStyle/>
+          <a:p>
+            <a:pPr algn="ctr" defTabSz="914400">
+              <a:lnSpc>
+                <a:spcPct val="100000"/>
+              </a:lnSpc>
+            </a:pPr>
+            <a:r>
+              <a:rPr lang="en-US" sz="1800" b="0" u="none" strike="noStrike" dirty="0">
+                <a:solidFill>
+                  <a:schemeClr val="lt1"/>
+                </a:solidFill>
+                <a:effectLst/>
+                <a:uFillTx/>
+                <a:latin typeface="Calibri"/>
+              </a:rPr>
+              <a:t>#CHOLONLY</a:t>
+            </a:r>
+            <a:endParaRPr lang="en-US" sz="1800" b="0" u="none" strike="noStrike" dirty="0">
+              <a:solidFill>
+                <a:srgbClr val="FFFFFF"/>
+              </a:solidFill>
+              <a:effectLst/>
+              <a:uFillTx/>
+              <a:latin typeface="Arial"/>
+            </a:endParaRPr>
+          </a:p>
+        </p:txBody>
+      </p:sp>
     </p:spTree>
     <p:extLst>
       <p:ext uri="{BB962C8B-B14F-4D97-AF65-F5344CB8AC3E}">
@@ -13217,1446 +9601,22 @@
   <p:clrMapOvr>
     <a:masterClrMapping/>
   </p:clrMapOvr>
+  <mc:AlternateContent xmlns:mc="http://schemas.openxmlformats.org/markup-compatibility/2006" xmlns:p14="http://schemas.microsoft.com/office/powerpoint/2010/main">
+    <mc:Choice Requires="p14">
+      <p:transition spd="med" p14:dur="700" advTm="10000">
+        <p:fade/>
+      </p:transition>
+    </mc:Choice>
+    <mc:Fallback xmlns="">
+      <p:transition spd="med" advTm="10000">
+        <p:fade/>
+      </p:transition>
+    </mc:Fallback>
+  </mc:AlternateContent>
 </p:sld>
 </file>
 
-<file path=ppt/slides/slide6.xml><?xml version="1.0" encoding="utf-8"?>
-<p:sld xmlns:a="http://schemas.openxmlformats.org/drawingml/2006/main" xmlns:r="http://schemas.openxmlformats.org/officeDocument/2006/relationships" xmlns:p="http://schemas.openxmlformats.org/presentationml/2006/main">
-  <p:cSld>
-    <p:bg>
-      <p:bgPr>
-        <a:solidFill>
-          <a:srgbClr val="002060"/>
-        </a:solidFill>
-        <a:effectLst/>
-      </p:bgPr>
-    </p:bg>
-    <p:spTree>
-      <p:nvGrpSpPr>
-        <p:cNvPr id="1" name=""/>
-        <p:cNvGrpSpPr/>
-        <p:nvPr/>
-      </p:nvGrpSpPr>
-      <p:grpSpPr>
-        <a:xfrm>
-          <a:off x="0" y="0"/>
-          <a:ext cx="0" cy="0"/>
-          <a:chOff x="0" y="0"/>
-          <a:chExt cx="0" cy="0"/>
-        </a:xfrm>
-      </p:grpSpPr>
-      <p:sp>
-        <p:nvSpPr>
-          <p:cNvPr id="45" name="Rectangle: Rounded Corners 44">
-            <a:extLst>
-              <a:ext uri="{FF2B5EF4-FFF2-40B4-BE49-F238E27FC236}">
-                <a16:creationId xmlns:a16="http://schemas.microsoft.com/office/drawing/2014/main" id="{2ABA875F-9D5A-2053-BF6E-F66A8DA76D40}"/>
-              </a:ext>
-            </a:extLst>
-          </p:cNvPr>
-          <p:cNvSpPr/>
-          <p:nvPr/>
-        </p:nvSpPr>
-        <p:spPr>
-          <a:xfrm>
-            <a:off x="3189680" y="1161936"/>
-            <a:ext cx="5815818" cy="5506458"/>
-          </a:xfrm>
-          <a:prstGeom prst="roundRect">
-            <a:avLst>
-              <a:gd name="adj" fmla="val 0"/>
-            </a:avLst>
-          </a:prstGeom>
-          <a:solidFill>
-            <a:srgbClr val="FAF4E3"/>
-          </a:solidFill>
-          <a:ln w="69850" cap="flat" cmpd="sng" algn="ctr">
-            <a:solidFill>
-              <a:srgbClr val="E2F0D9"/>
-            </a:solidFill>
-            <a:prstDash val="solid"/>
-            <a:round/>
-            <a:headEnd type="none" w="med" len="med"/>
-            <a:tailEnd type="none" w="med" len="med"/>
-          </a:ln>
-        </p:spPr>
-        <p:style>
-          <a:lnRef idx="0">
-            <a:scrgbClr r="0" g="0" b="0"/>
-          </a:lnRef>
-          <a:fillRef idx="0">
-            <a:scrgbClr r="0" g="0" b="0"/>
-          </a:fillRef>
-          <a:effectRef idx="0">
-            <a:scrgbClr r="0" g="0" b="0"/>
-          </a:effectRef>
-          <a:fontRef idx="minor">
-            <a:schemeClr val="dk1"/>
-          </a:fontRef>
-        </p:style>
-        <p:txBody>
-          <a:bodyPr rtlCol="0" anchor="ctr"/>
-          <a:lstStyle/>
-          <a:p>
-            <a:pPr algn="ctr"/>
-            <a:endParaRPr lang="LID4096"/>
-          </a:p>
-        </p:txBody>
-      </p:sp>
-      <p:sp>
-        <p:nvSpPr>
-          <p:cNvPr id="61" name="Rectangle: Rounded Corners 60">
-            <a:extLst>
-              <a:ext uri="{FF2B5EF4-FFF2-40B4-BE49-F238E27FC236}">
-                <a16:creationId xmlns:a16="http://schemas.microsoft.com/office/drawing/2014/main" id="{EFCFE9F0-3614-5B24-3744-8AE0D622E75E}"/>
-              </a:ext>
-            </a:extLst>
-          </p:cNvPr>
-          <p:cNvSpPr/>
-          <p:nvPr/>
-        </p:nvSpPr>
-        <p:spPr>
-          <a:xfrm>
-            <a:off x="3279777" y="1752601"/>
-            <a:ext cx="5641978" cy="4814006"/>
-          </a:xfrm>
-          <a:prstGeom prst="roundRect">
-            <a:avLst>
-              <a:gd name="adj" fmla="val 0"/>
-            </a:avLst>
-          </a:prstGeom>
-          <a:solidFill>
-            <a:srgbClr val="002060"/>
-          </a:solidFill>
-          <a:ln w="69850" cap="flat" cmpd="sng" algn="ctr">
-            <a:solidFill>
-              <a:srgbClr val="E2F0D9"/>
-            </a:solidFill>
-            <a:prstDash val="solid"/>
-            <a:round/>
-            <a:headEnd type="none" w="med" len="med"/>
-            <a:tailEnd type="none" w="med" len="med"/>
-          </a:ln>
-        </p:spPr>
-        <p:style>
-          <a:lnRef idx="0">
-            <a:scrgbClr r="0" g="0" b="0"/>
-          </a:lnRef>
-          <a:fillRef idx="0">
-            <a:scrgbClr r="0" g="0" b="0"/>
-          </a:fillRef>
-          <a:effectRef idx="0">
-            <a:scrgbClr r="0" g="0" b="0"/>
-          </a:effectRef>
-          <a:fontRef idx="minor">
-            <a:schemeClr val="dk1"/>
-          </a:fontRef>
-        </p:style>
-        <p:txBody>
-          <a:bodyPr rtlCol="0" anchor="ctr"/>
-          <a:lstStyle/>
-          <a:p>
-            <a:pPr algn="ctr"/>
-            <a:endParaRPr lang="LID4096"/>
-          </a:p>
-        </p:txBody>
-      </p:sp>
-      <p:sp>
-        <p:nvSpPr>
-          <p:cNvPr id="47" name="Rectangle: Rounded Corners 46">
-            <a:extLst>
-              <a:ext uri="{FF2B5EF4-FFF2-40B4-BE49-F238E27FC236}">
-                <a16:creationId xmlns:a16="http://schemas.microsoft.com/office/drawing/2014/main" id="{63443DA7-67B7-7E86-9229-3920E3E5F324}"/>
-              </a:ext>
-            </a:extLst>
-          </p:cNvPr>
-          <p:cNvSpPr/>
-          <p:nvPr/>
-        </p:nvSpPr>
-        <p:spPr>
-          <a:xfrm>
-            <a:off x="9166221" y="4316459"/>
-            <a:ext cx="2838837" cy="2357044"/>
-          </a:xfrm>
-          <a:prstGeom prst="roundRect">
-            <a:avLst>
-              <a:gd name="adj" fmla="val 0"/>
-            </a:avLst>
-          </a:prstGeom>
-          <a:solidFill>
-            <a:srgbClr val="002060"/>
-          </a:solidFill>
-          <a:ln w="69850" cap="flat" cmpd="sng" algn="ctr">
-            <a:solidFill>
-              <a:srgbClr val="FAF4E3"/>
-            </a:solidFill>
-            <a:prstDash val="solid"/>
-            <a:round/>
-            <a:headEnd type="none" w="med" len="med"/>
-            <a:tailEnd type="none" w="med" len="med"/>
-          </a:ln>
-        </p:spPr>
-        <p:style>
-          <a:lnRef idx="0">
-            <a:scrgbClr r="0" g="0" b="0"/>
-          </a:lnRef>
-          <a:fillRef idx="0">
-            <a:scrgbClr r="0" g="0" b="0"/>
-          </a:fillRef>
-          <a:effectRef idx="0">
-            <a:scrgbClr r="0" g="0" b="0"/>
-          </a:effectRef>
-          <a:fontRef idx="minor">
-            <a:schemeClr val="dk1"/>
-          </a:fontRef>
-        </p:style>
-        <p:txBody>
-          <a:bodyPr rtlCol="0" anchor="ctr"/>
-          <a:lstStyle/>
-          <a:p>
-            <a:pPr algn="ctr"/>
-            <a:endParaRPr lang="LID4096"/>
-          </a:p>
-        </p:txBody>
-      </p:sp>
-      <p:sp>
-        <p:nvSpPr>
-          <p:cNvPr id="43" name="Rectangle: Rounded Corners 42">
-            <a:extLst>
-              <a:ext uri="{FF2B5EF4-FFF2-40B4-BE49-F238E27FC236}">
-                <a16:creationId xmlns:a16="http://schemas.microsoft.com/office/drawing/2014/main" id="{4BCB5AA4-C9ED-2095-4A08-F6DB6E482463}"/>
-              </a:ext>
-            </a:extLst>
-          </p:cNvPr>
-          <p:cNvSpPr/>
-          <p:nvPr/>
-        </p:nvSpPr>
-        <p:spPr>
-          <a:xfrm>
-            <a:off x="9166221" y="1161936"/>
-            <a:ext cx="2829315" cy="2930148"/>
-          </a:xfrm>
-          <a:prstGeom prst="roundRect">
-            <a:avLst>
-              <a:gd name="adj" fmla="val 0"/>
-            </a:avLst>
-          </a:prstGeom>
-          <a:solidFill>
-            <a:srgbClr val="FAF4E3"/>
-          </a:solidFill>
-          <a:ln w="69850" cap="flat" cmpd="sng" algn="ctr">
-            <a:solidFill>
-              <a:srgbClr val="FAF4E3"/>
-            </a:solidFill>
-            <a:prstDash val="solid"/>
-            <a:round/>
-            <a:headEnd type="none" w="med" len="med"/>
-            <a:tailEnd type="none" w="med" len="med"/>
-          </a:ln>
-        </p:spPr>
-        <p:style>
-          <a:lnRef idx="0">
-            <a:scrgbClr r="0" g="0" b="0"/>
-          </a:lnRef>
-          <a:fillRef idx="0">
-            <a:scrgbClr r="0" g="0" b="0"/>
-          </a:fillRef>
-          <a:effectRef idx="0">
-            <a:scrgbClr r="0" g="0" b="0"/>
-          </a:effectRef>
-          <a:fontRef idx="minor">
-            <a:schemeClr val="dk1"/>
-          </a:fontRef>
-        </p:style>
-        <p:txBody>
-          <a:bodyPr rtlCol="0" anchor="ctr"/>
-          <a:lstStyle/>
-          <a:p>
-            <a:pPr algn="ctr"/>
-            <a:endParaRPr lang="LID4096"/>
-          </a:p>
-        </p:txBody>
-      </p:sp>
-      <p:sp>
-        <p:nvSpPr>
-          <p:cNvPr id="4" name="Rectangle: Rounded Corners 3">
-            <a:extLst>
-              <a:ext uri="{FF2B5EF4-FFF2-40B4-BE49-F238E27FC236}">
-                <a16:creationId xmlns:a16="http://schemas.microsoft.com/office/drawing/2014/main" id="{865BBBDF-34EF-3350-5D8C-89B86681B602}"/>
-              </a:ext>
-            </a:extLst>
-          </p:cNvPr>
-          <p:cNvSpPr/>
-          <p:nvPr/>
-        </p:nvSpPr>
-        <p:spPr>
-          <a:xfrm>
-            <a:off x="186940" y="226164"/>
-            <a:ext cx="11818120" cy="767987"/>
-          </a:xfrm>
-          <a:prstGeom prst="roundRect">
-            <a:avLst>
-              <a:gd name="adj" fmla="val 0"/>
-            </a:avLst>
-          </a:prstGeom>
-          <a:solidFill>
-            <a:srgbClr val="FAF4E3"/>
-          </a:solidFill>
-          <a:ln w="69850" cap="flat" cmpd="sng" algn="ctr">
-            <a:solidFill>
-              <a:srgbClr val="E2F0D9"/>
-            </a:solidFill>
-            <a:prstDash val="solid"/>
-            <a:round/>
-            <a:headEnd type="none" w="med" len="med"/>
-            <a:tailEnd type="none" w="med" len="med"/>
-          </a:ln>
-        </p:spPr>
-        <p:style>
-          <a:lnRef idx="0">
-            <a:scrgbClr r="0" g="0" b="0"/>
-          </a:lnRef>
-          <a:fillRef idx="0">
-            <a:scrgbClr r="0" g="0" b="0"/>
-          </a:fillRef>
-          <a:effectRef idx="0">
-            <a:scrgbClr r="0" g="0" b="0"/>
-          </a:effectRef>
-          <a:fontRef idx="minor">
-            <a:schemeClr val="dk1"/>
-          </a:fontRef>
-        </p:style>
-        <p:txBody>
-          <a:bodyPr rtlCol="0" anchor="ctr"/>
-          <a:lstStyle/>
-          <a:p>
-            <a:pPr algn="ctr"/>
-            <a:endParaRPr lang="LID4096"/>
-          </a:p>
-        </p:txBody>
-      </p:sp>
-      <p:pic>
-        <p:nvPicPr>
-          <p:cNvPr id="37" name="Picture 36">
-            <a:extLst>
-              <a:ext uri="{FF2B5EF4-FFF2-40B4-BE49-F238E27FC236}">
-                <a16:creationId xmlns:a16="http://schemas.microsoft.com/office/drawing/2014/main" id="{3D678AA0-A96F-5339-D35E-A017D4083E21}"/>
-              </a:ext>
-            </a:extLst>
-          </p:cNvPr>
-          <p:cNvPicPr>
-            <a:picLocks noChangeAspect="1"/>
-          </p:cNvPicPr>
-          <p:nvPr/>
-        </p:nvPicPr>
-        <p:blipFill>
-          <a:blip r:embed="rId3"/>
-          <a:stretch>
-            <a:fillRect/>
-          </a:stretch>
-        </p:blipFill>
-        <p:spPr>
-          <a:xfrm>
-            <a:off x="3943350" y="317477"/>
-            <a:ext cx="133350" cy="619125"/>
-          </a:xfrm>
-          <a:prstGeom prst="rect">
-            <a:avLst/>
-          </a:prstGeom>
-        </p:spPr>
-      </p:pic>
-      <p:pic>
-        <p:nvPicPr>
-          <p:cNvPr id="38" name="Picture 37">
-            <a:extLst>
-              <a:ext uri="{FF2B5EF4-FFF2-40B4-BE49-F238E27FC236}">
-                <a16:creationId xmlns:a16="http://schemas.microsoft.com/office/drawing/2014/main" id="{57F2B7CB-4178-F3A2-5E7B-FBA9E7EBBB03}"/>
-              </a:ext>
-            </a:extLst>
-          </p:cNvPr>
-          <p:cNvPicPr>
-            <a:picLocks noChangeAspect="1"/>
-          </p:cNvPicPr>
-          <p:nvPr/>
-        </p:nvPicPr>
-        <p:blipFill>
-          <a:blip r:embed="rId3"/>
-          <a:stretch>
-            <a:fillRect/>
-          </a:stretch>
-        </p:blipFill>
-        <p:spPr>
-          <a:xfrm>
-            <a:off x="8143877" y="317477"/>
-            <a:ext cx="133350" cy="619125"/>
-          </a:xfrm>
-          <a:prstGeom prst="rect">
-            <a:avLst/>
-          </a:prstGeom>
-        </p:spPr>
-      </p:pic>
-      <p:grpSp>
-        <p:nvGrpSpPr>
-          <p:cNvPr id="46" name="Group 45">
-            <a:extLst>
-              <a:ext uri="{FF2B5EF4-FFF2-40B4-BE49-F238E27FC236}">
-                <a16:creationId xmlns:a16="http://schemas.microsoft.com/office/drawing/2014/main" id="{0793E57D-3C94-4AC7-C149-6DA983A963BB}"/>
-              </a:ext>
-            </a:extLst>
-          </p:cNvPr>
-          <p:cNvGrpSpPr/>
-          <p:nvPr/>
-        </p:nvGrpSpPr>
-        <p:grpSpPr>
-          <a:xfrm>
-            <a:off x="9307899" y="4186696"/>
-            <a:ext cx="2536436" cy="2536436"/>
-            <a:chOff x="8654743" y="3502910"/>
-            <a:chExt cx="3098224" cy="3098224"/>
-          </a:xfrm>
-        </p:grpSpPr>
-        <p:sp>
-          <p:nvSpPr>
-            <p:cNvPr id="31" name="Oval 30">
-              <a:extLst>
-                <a:ext uri="{FF2B5EF4-FFF2-40B4-BE49-F238E27FC236}">
-                  <a16:creationId xmlns:a16="http://schemas.microsoft.com/office/drawing/2014/main" id="{8EAC478F-6641-35A7-E421-88089C0579F4}"/>
-                </a:ext>
-              </a:extLst>
-            </p:cNvPr>
-            <p:cNvSpPr/>
-            <p:nvPr/>
-          </p:nvSpPr>
-          <p:spPr>
-            <a:xfrm>
-              <a:off x="8654743" y="3502910"/>
-              <a:ext cx="3098224" cy="3098224"/>
-            </a:xfrm>
-            <a:prstGeom prst="ellipse">
-              <a:avLst/>
-            </a:prstGeom>
-            <a:solidFill>
-              <a:schemeClr val="bg1"/>
-            </a:solidFill>
-            <a:ln w="127000" cap="flat" cmpd="sng" algn="ctr">
-              <a:solidFill>
-                <a:srgbClr val="E2F0D9"/>
-              </a:solidFill>
-              <a:prstDash val="solid"/>
-              <a:round/>
-              <a:headEnd type="none" w="med" len="med"/>
-              <a:tailEnd type="none" w="med" len="med"/>
-            </a:ln>
-          </p:spPr>
-          <p:style>
-            <a:lnRef idx="0">
-              <a:scrgbClr r="0" g="0" b="0"/>
-            </a:lnRef>
-            <a:fillRef idx="0">
-              <a:scrgbClr r="0" g="0" b="0"/>
-            </a:fillRef>
-            <a:effectRef idx="0">
-              <a:scrgbClr r="0" g="0" b="0"/>
-            </a:effectRef>
-            <a:fontRef idx="minor">
-              <a:schemeClr val="dk1"/>
-            </a:fontRef>
-          </p:style>
-          <p:txBody>
-            <a:bodyPr rtlCol="0" anchor="ctr"/>
-            <a:lstStyle/>
-            <a:p>
-              <a:pPr algn="ctr"/>
-              <a:endParaRPr lang="LID4096"/>
-            </a:p>
-          </p:txBody>
-        </p:sp>
-        <p:sp>
-          <p:nvSpPr>
-            <p:cNvPr id="8" name="Oval 7">
-              <a:extLst>
-                <a:ext uri="{FF2B5EF4-FFF2-40B4-BE49-F238E27FC236}">
-                  <a16:creationId xmlns:a16="http://schemas.microsoft.com/office/drawing/2014/main" id="{0BC09833-B6B5-704E-7221-760FA878CC48}"/>
-                </a:ext>
-              </a:extLst>
-            </p:cNvPr>
-            <p:cNvSpPr/>
-            <p:nvPr/>
-          </p:nvSpPr>
-          <p:spPr>
-            <a:xfrm>
-              <a:off x="8680235" y="3533288"/>
-              <a:ext cx="3042352" cy="3042352"/>
-            </a:xfrm>
-            <a:prstGeom prst="ellipse">
-              <a:avLst/>
-            </a:prstGeom>
-            <a:solidFill>
-              <a:schemeClr val="bg1"/>
-            </a:solidFill>
-            <a:ln w="127000" cap="flat" cmpd="sng" algn="ctr">
-              <a:solidFill>
-                <a:srgbClr val="002060"/>
-              </a:solidFill>
-              <a:prstDash val="solid"/>
-              <a:round/>
-              <a:headEnd type="none" w="med" len="med"/>
-              <a:tailEnd type="none" w="med" len="med"/>
-            </a:ln>
-          </p:spPr>
-          <p:style>
-            <a:lnRef idx="0">
-              <a:scrgbClr r="0" g="0" b="0"/>
-            </a:lnRef>
-            <a:fillRef idx="0">
-              <a:scrgbClr r="0" g="0" b="0"/>
-            </a:fillRef>
-            <a:effectRef idx="0">
-              <a:scrgbClr r="0" g="0" b="0"/>
-            </a:effectRef>
-            <a:fontRef idx="minor">
-              <a:schemeClr val="dk1"/>
-            </a:fontRef>
-          </p:style>
-          <p:txBody>
-            <a:bodyPr rtlCol="0" anchor="ctr"/>
-            <a:lstStyle/>
-            <a:p>
-              <a:pPr algn="ctr"/>
-              <a:endParaRPr lang="LID4096"/>
-            </a:p>
-          </p:txBody>
-        </p:sp>
-      </p:grpSp>
-      <p:sp>
-        <p:nvSpPr>
-          <p:cNvPr id="40" name="Rectangle 39">
-            <a:extLst>
-              <a:ext uri="{FF2B5EF4-FFF2-40B4-BE49-F238E27FC236}">
-                <a16:creationId xmlns:a16="http://schemas.microsoft.com/office/drawing/2014/main" id="{3609E623-0778-ADD8-33F0-2AB1F5021D26}"/>
-              </a:ext>
-            </a:extLst>
-          </p:cNvPr>
-          <p:cNvSpPr/>
-          <p:nvPr/>
-        </p:nvSpPr>
-        <p:spPr>
-          <a:xfrm>
-            <a:off x="3251200" y="1098436"/>
-            <a:ext cx="5626100" cy="722925"/>
-          </a:xfrm>
-          <a:prstGeom prst="rect">
-            <a:avLst/>
-          </a:prstGeom>
-          <a:noFill/>
-          <a:ln w="0">
-            <a:noFill/>
-          </a:ln>
-        </p:spPr>
-        <p:style>
-          <a:lnRef idx="0">
-            <a:scrgbClr r="0" g="0" b="0"/>
-          </a:lnRef>
-          <a:fillRef idx="0">
-            <a:scrgbClr r="0" g="0" b="0"/>
-          </a:fillRef>
-          <a:effectRef idx="0">
-            <a:scrgbClr r="0" g="0" b="0"/>
-          </a:effectRef>
-          <a:fontRef idx="minor"/>
-        </p:style>
-        <p:txBody>
-          <a:bodyPr wrap="square" lIns="90000" tIns="45000" rIns="90000" bIns="45000" anchor="ctr" anchorCtr="0">
-            <a:normAutofit/>
-          </a:bodyPr>
-          <a:lstStyle/>
-          <a:p>
-            <a:pPr algn="ctr" defTabSz="914400" rtl="1">
-              <a:lnSpc>
-                <a:spcPct val="100000"/>
-              </a:lnSpc>
-            </a:pPr>
-            <a:r>
-              <a:rPr lang="he-IL" sz="3200" b="1" u="none" strike="noStrike" dirty="0">
-                <a:solidFill>
-                  <a:schemeClr val="accent1"/>
-                </a:solidFill>
-                <a:effectLst/>
-                <a:uFillTx/>
-                <a:latin typeface="Calibri"/>
-              </a:rPr>
-              <a:t>#</a:t>
-            </a:r>
-            <a:r>
-              <a:rPr lang="en-US" sz="3200" b="1" u="none" strike="noStrike" dirty="0">
-                <a:solidFill>
-                  <a:schemeClr val="accent1"/>
-                </a:solidFill>
-                <a:effectLst/>
-                <a:uFillTx/>
-                <a:latin typeface="Calibri"/>
-              </a:rPr>
-              <a:t>PARSHA</a:t>
-            </a:r>
-            <a:endParaRPr lang="en-US" sz="3200" b="1" u="none" strike="noStrike" dirty="0">
-              <a:solidFill>
-                <a:srgbClr val="000000"/>
-              </a:solidFill>
-              <a:effectLst/>
-              <a:uFillTx/>
-              <a:latin typeface="Arial"/>
-            </a:endParaRPr>
-          </a:p>
-        </p:txBody>
-      </p:sp>
-      <p:sp>
-        <p:nvSpPr>
-          <p:cNvPr id="42" name="Rectangle 2">
-            <a:extLst>
-              <a:ext uri="{FF2B5EF4-FFF2-40B4-BE49-F238E27FC236}">
-                <a16:creationId xmlns:a16="http://schemas.microsoft.com/office/drawing/2014/main" id="{A2CA2829-FDAA-CC0B-ABC9-CEADD1F190EC}"/>
-              </a:ext>
-            </a:extLst>
-          </p:cNvPr>
-          <p:cNvSpPr/>
-          <p:nvPr/>
-        </p:nvSpPr>
-        <p:spPr>
-          <a:xfrm>
-            <a:off x="3321824" y="1884861"/>
-            <a:ext cx="5555475" cy="4681745"/>
-          </a:xfrm>
-          <a:prstGeom prst="rect">
-            <a:avLst/>
-          </a:prstGeom>
-          <a:noFill/>
-          <a:ln w="0">
-            <a:noFill/>
-          </a:ln>
-        </p:spPr>
-        <p:style>
-          <a:lnRef idx="0">
-            <a:scrgbClr r="0" g="0" b="0"/>
-          </a:lnRef>
-          <a:fillRef idx="0">
-            <a:scrgbClr r="0" g="0" b="0"/>
-          </a:fillRef>
-          <a:effectRef idx="0">
-            <a:scrgbClr r="0" g="0" b="0"/>
-          </a:effectRef>
-          <a:fontRef idx="minor"/>
-        </p:style>
-        <p:txBody>
-          <a:bodyPr wrap="square" lIns="90000" tIns="45000" rIns="90000" bIns="45000" anchor="ctr" anchorCtr="0">
-            <a:normAutofit/>
-          </a:bodyPr>
-          <a:lstStyle/>
-          <a:p>
-            <a:pPr algn="ctr" defTabSz="914400" rtl="1">
-              <a:spcAft>
-                <a:spcPts val="600"/>
-              </a:spcAft>
-              <a:tabLst>
-                <a:tab pos="1257300" algn="r"/>
-              </a:tabLst>
-            </a:pPr>
-            <a:r>
-              <a:rPr lang="he-IL" sz="3600" u="none" strike="noStrike" dirty="0">
-                <a:solidFill>
-                  <a:srgbClr val="FAF4E3"/>
-                </a:solidFill>
-                <a:effectLst/>
-                <a:uFillTx/>
-                <a:latin typeface="Calibri"/>
-              </a:rPr>
-              <a:t>#</a:t>
-            </a:r>
-            <a:r>
-              <a:rPr lang="en-US" sz="3600" u="none" strike="noStrike" dirty="0">
-                <a:solidFill>
-                  <a:srgbClr val="FAF4E3"/>
-                </a:solidFill>
-                <a:effectLst/>
-                <a:uFillTx/>
-                <a:latin typeface="Calibri"/>
-              </a:rPr>
-              <a:t>CMD</a:t>
-            </a:r>
-            <a:r>
-              <a:rPr lang="he-IL" sz="3600" u="none" strike="noStrike" dirty="0">
-                <a:solidFill>
-                  <a:srgbClr val="FAF4E3"/>
-                </a:solidFill>
-                <a:effectLst/>
-                <a:uFillTx/>
-                <a:latin typeface="Calibri"/>
-              </a:rPr>
-              <a:t>:&lt;</a:t>
-            </a:r>
-            <a:r>
-              <a:rPr lang="en-US" sz="3600" u="none" strike="noStrike" dirty="0" err="1">
-                <a:solidFill>
-                  <a:srgbClr val="FAF4E3"/>
-                </a:solidFill>
-                <a:effectLst/>
-                <a:uFillTx/>
-                <a:latin typeface="Calibri"/>
-              </a:rPr>
-              <a:t>chol</a:t>
-            </a:r>
-            <a:r>
-              <a:rPr lang="he-IL" sz="3600" u="none" strike="noStrike" dirty="0">
-                <a:solidFill>
-                  <a:srgbClr val="FAF4E3"/>
-                </a:solidFill>
-                <a:effectLst/>
-                <a:uFillTx/>
-                <a:latin typeface="Calibri"/>
-              </a:rPr>
-              <a:t>&gt;</a:t>
-            </a:r>
-            <a:endParaRPr lang="en-US" sz="3600" u="none" strike="noStrike" dirty="0">
-              <a:solidFill>
-                <a:srgbClr val="FAF4E3"/>
-              </a:solidFill>
-              <a:effectLst/>
-              <a:uFillTx/>
-              <a:latin typeface="Arial"/>
-            </a:endParaRPr>
-          </a:p>
-        </p:txBody>
-      </p:sp>
-      <p:sp>
-        <p:nvSpPr>
-          <p:cNvPr id="50" name="Rectangle: Rounded Corners 49">
-            <a:extLst>
-              <a:ext uri="{FF2B5EF4-FFF2-40B4-BE49-F238E27FC236}">
-                <a16:creationId xmlns:a16="http://schemas.microsoft.com/office/drawing/2014/main" id="{7FC74106-B75D-6DCC-6E33-23FC6C010586}"/>
-              </a:ext>
-            </a:extLst>
-          </p:cNvPr>
-          <p:cNvSpPr/>
-          <p:nvPr/>
-        </p:nvSpPr>
-        <p:spPr>
-          <a:xfrm>
-            <a:off x="186940" y="4316459"/>
-            <a:ext cx="2826138" cy="2357044"/>
-          </a:xfrm>
-          <a:prstGeom prst="roundRect">
-            <a:avLst>
-              <a:gd name="adj" fmla="val 0"/>
-            </a:avLst>
-          </a:prstGeom>
-          <a:solidFill>
-            <a:srgbClr val="002060"/>
-          </a:solidFill>
-          <a:ln w="69850" cap="flat" cmpd="sng" algn="ctr">
-            <a:solidFill>
-              <a:srgbClr val="FAF4E3"/>
-            </a:solidFill>
-            <a:prstDash val="solid"/>
-            <a:round/>
-            <a:headEnd type="none" w="med" len="med"/>
-            <a:tailEnd type="none" w="med" len="med"/>
-          </a:ln>
-        </p:spPr>
-        <p:style>
-          <a:lnRef idx="0">
-            <a:scrgbClr r="0" g="0" b="0"/>
-          </a:lnRef>
-          <a:fillRef idx="0">
-            <a:scrgbClr r="0" g="0" b="0"/>
-          </a:fillRef>
-          <a:effectRef idx="0">
-            <a:scrgbClr r="0" g="0" b="0"/>
-          </a:effectRef>
-          <a:fontRef idx="minor">
-            <a:schemeClr val="dk1"/>
-          </a:fontRef>
-        </p:style>
-        <p:txBody>
-          <a:bodyPr rtlCol="0" anchor="ctr"/>
-          <a:lstStyle/>
-          <a:p>
-            <a:pPr algn="ctr"/>
-            <a:endParaRPr lang="LID4096"/>
-          </a:p>
-        </p:txBody>
-      </p:sp>
-      <p:sp>
-        <p:nvSpPr>
-          <p:cNvPr id="52" name="Rectangle 51">
-            <a:extLst>
-              <a:ext uri="{FF2B5EF4-FFF2-40B4-BE49-F238E27FC236}">
-                <a16:creationId xmlns:a16="http://schemas.microsoft.com/office/drawing/2014/main" id="{51DF3889-91E9-9032-34F7-9CFDF3841985}"/>
-              </a:ext>
-            </a:extLst>
-          </p:cNvPr>
-          <p:cNvSpPr/>
-          <p:nvPr/>
-        </p:nvSpPr>
-        <p:spPr>
-          <a:xfrm>
-            <a:off x="9213854" y="3452397"/>
-            <a:ext cx="2664411" cy="521766"/>
-          </a:xfrm>
-          <a:prstGeom prst="rect">
-            <a:avLst/>
-          </a:prstGeom>
-          <a:noFill/>
-          <a:ln w="0">
-            <a:noFill/>
-          </a:ln>
-        </p:spPr>
-        <p:style>
-          <a:lnRef idx="0">
-            <a:scrgbClr r="0" g="0" b="0"/>
-          </a:lnRef>
-          <a:fillRef idx="0">
-            <a:scrgbClr r="0" g="0" b="0"/>
-          </a:fillRef>
-          <a:effectRef idx="0">
-            <a:scrgbClr r="0" g="0" b="0"/>
-          </a:effectRef>
-          <a:fontRef idx="minor"/>
-        </p:style>
-        <p:txBody>
-          <a:bodyPr wrap="square" lIns="90000" tIns="45000" rIns="90000" bIns="45000" anchor="t">
-            <a:spAutoFit/>
-          </a:bodyPr>
-          <a:lstStyle/>
-          <a:p>
-            <a:pPr algn="ctr" rtl="1"/>
-            <a:r>
-              <a:rPr lang="he-IL" sz="1400" b="1" dirty="0">
-                <a:latin typeface="Arial" panose="020B0604020202020204" pitchFamily="34" charset="0"/>
-                <a:cs typeface="Arial" panose="020B0604020202020204" pitchFamily="34" charset="0"/>
-              </a:rPr>
-              <a:t>הדלקת נרות</a:t>
-            </a:r>
-            <a:r>
-              <a:rPr lang="he-IL" sz="1400" dirty="0">
-                <a:latin typeface="Arial" panose="020B0604020202020204" pitchFamily="34" charset="0"/>
-                <a:cs typeface="Arial" panose="020B0604020202020204" pitchFamily="34" charset="0"/>
-              </a:rPr>
-              <a:t> - </a:t>
-            </a:r>
-            <a:r>
-              <a:rPr lang="en-US" sz="1400" dirty="0">
-                <a:latin typeface="Arial" panose="020B0604020202020204" pitchFamily="34" charset="0"/>
-                <a:cs typeface="Arial" panose="020B0604020202020204" pitchFamily="34" charset="0"/>
-              </a:rPr>
-              <a:t>#SHABBOS-30</a:t>
-            </a:r>
-            <a:endParaRPr lang="he-IL" sz="1400" dirty="0">
-              <a:latin typeface="Arial" panose="020B0604020202020204" pitchFamily="34" charset="0"/>
-              <a:cs typeface="Arial" panose="020B0604020202020204" pitchFamily="34" charset="0"/>
-            </a:endParaRPr>
-          </a:p>
-          <a:p>
-            <a:pPr algn="ctr" rtl="1"/>
-            <a:r>
-              <a:rPr lang="he-IL" sz="1400" b="1" dirty="0">
-                <a:latin typeface="Arial" panose="020B0604020202020204" pitchFamily="34" charset="0"/>
-                <a:cs typeface="Arial" panose="020B0604020202020204" pitchFamily="34" charset="0"/>
-              </a:rPr>
-              <a:t>#</a:t>
-            </a:r>
-            <a:r>
-              <a:rPr lang="en-US" sz="1400" b="1" dirty="0">
-                <a:latin typeface="Arial" panose="020B0604020202020204" pitchFamily="34" charset="0"/>
-                <a:cs typeface="Arial" panose="020B0604020202020204" pitchFamily="34" charset="0"/>
-              </a:rPr>
-              <a:t>MOZASHTITLE</a:t>
-            </a:r>
-            <a:r>
-              <a:rPr lang="he-IL" sz="1400" dirty="0">
-                <a:latin typeface="Arial" panose="020B0604020202020204" pitchFamily="34" charset="0"/>
-                <a:cs typeface="Arial" panose="020B0604020202020204" pitchFamily="34" charset="0"/>
-              </a:rPr>
-              <a:t> - </a:t>
-            </a:r>
-            <a:r>
-              <a:rPr lang="en-US" sz="1400" dirty="0">
-                <a:latin typeface="Arial" panose="020B0604020202020204" pitchFamily="34" charset="0"/>
-                <a:cs typeface="Arial" panose="020B0604020202020204" pitchFamily="34" charset="0"/>
-              </a:rPr>
-              <a:t>#MOZASH</a:t>
-            </a:r>
-            <a:endParaRPr lang="en-US" sz="1400" u="none" strike="noStrike" dirty="0">
-              <a:effectLst/>
-              <a:uFillTx/>
-              <a:latin typeface="Arial" panose="020B0604020202020204" pitchFamily="34" charset="0"/>
-              <a:cs typeface="Arial" panose="020B0604020202020204" pitchFamily="34" charset="0"/>
-            </a:endParaRPr>
-          </a:p>
-        </p:txBody>
-      </p:sp>
-      <p:sp>
-        <p:nvSpPr>
-          <p:cNvPr id="54" name="Rectangle 11">
-            <a:extLst>
-              <a:ext uri="{FF2B5EF4-FFF2-40B4-BE49-F238E27FC236}">
-                <a16:creationId xmlns:a16="http://schemas.microsoft.com/office/drawing/2014/main" id="{B7F77739-78CD-3EE2-AB95-B92E6BCEF58F}"/>
-              </a:ext>
-            </a:extLst>
-          </p:cNvPr>
-          <p:cNvSpPr/>
-          <p:nvPr/>
-        </p:nvSpPr>
-        <p:spPr>
-          <a:xfrm>
-            <a:off x="9366869" y="4259626"/>
-            <a:ext cx="2408768" cy="2408768"/>
-          </a:xfrm>
-          <a:prstGeom prst="rect">
-            <a:avLst/>
-          </a:prstGeom>
-          <a:noFill/>
-          <a:ln>
-            <a:noFill/>
-          </a:ln>
-        </p:spPr>
-        <p:style>
-          <a:lnRef idx="2">
-            <a:schemeClr val="accent4">
-              <a:shade val="50000"/>
-            </a:schemeClr>
-          </a:lnRef>
-          <a:fillRef idx="1">
-            <a:schemeClr val="accent4"/>
-          </a:fillRef>
-          <a:effectRef idx="0">
-            <a:schemeClr val="accent4"/>
-          </a:effectRef>
-          <a:fontRef idx="minor"/>
-        </p:style>
-        <p:txBody>
-          <a:bodyPr lIns="90000" tIns="45000" rIns="90000" bIns="45000" anchor="ctr">
-            <a:noAutofit/>
-          </a:bodyPr>
-          <a:lstStyle/>
-          <a:p>
-            <a:pPr algn="ctr" defTabSz="914400">
-              <a:lnSpc>
-                <a:spcPct val="100000"/>
-              </a:lnSpc>
-            </a:pPr>
-            <a:r>
-              <a:rPr lang="en-US" sz="1800" b="0" u="none" strike="noStrike" dirty="0">
-                <a:solidFill>
-                  <a:srgbClr val="FF0000"/>
-                </a:solidFill>
-                <a:effectLst/>
-                <a:uFillTx/>
-                <a:latin typeface="Calibri"/>
-              </a:rPr>
-              <a:t>#ANCLOCK</a:t>
-            </a:r>
-            <a:endParaRPr lang="en-US" sz="1800" b="0" u="none" strike="noStrike" dirty="0">
-              <a:solidFill>
-                <a:srgbClr val="000000"/>
-              </a:solidFill>
-              <a:effectLst/>
-              <a:uFillTx/>
-              <a:latin typeface="Arial"/>
-            </a:endParaRPr>
-          </a:p>
-        </p:txBody>
-      </p:sp>
-      <p:sp>
-        <p:nvSpPr>
-          <p:cNvPr id="56" name="dtHebDate_0">
-            <a:extLst>
-              <a:ext uri="{FF2B5EF4-FFF2-40B4-BE49-F238E27FC236}">
-                <a16:creationId xmlns:a16="http://schemas.microsoft.com/office/drawing/2014/main" id="{46ADA304-E8E7-F476-8248-AB5163ACCCBF}"/>
-              </a:ext>
-            </a:extLst>
-          </p:cNvPr>
-          <p:cNvSpPr/>
-          <p:nvPr/>
-        </p:nvSpPr>
-        <p:spPr>
-          <a:xfrm>
-            <a:off x="7976846" y="179873"/>
-            <a:ext cx="4158004" cy="839302"/>
-          </a:xfrm>
-          <a:prstGeom prst="rect">
-            <a:avLst/>
-          </a:prstGeom>
-          <a:noFill/>
-          <a:ln w="0">
-            <a:noFill/>
-          </a:ln>
-        </p:spPr>
-        <p:style>
-          <a:lnRef idx="0">
-            <a:scrgbClr r="0" g="0" b="0"/>
-          </a:lnRef>
-          <a:fillRef idx="0">
-            <a:scrgbClr r="0" g="0" b="0"/>
-          </a:fillRef>
-          <a:effectRef idx="0">
-            <a:scrgbClr r="0" g="0" b="0"/>
-          </a:effectRef>
-          <a:fontRef idx="minor"/>
-        </p:style>
-        <p:txBody>
-          <a:bodyPr wrap="square" lIns="90000" tIns="45000" rIns="90000" bIns="45000" anchor="ctr" anchorCtr="0">
-            <a:normAutofit/>
-          </a:bodyPr>
-          <a:lstStyle/>
-          <a:p>
-            <a:pPr algn="ctr" defTabSz="914400" rtl="1">
-              <a:lnSpc>
-                <a:spcPct val="100000"/>
-              </a:lnSpc>
-            </a:pPr>
-            <a:r>
-              <a:rPr lang="en-US" sz="2800" b="1" u="none" strike="noStrike" dirty="0">
-                <a:solidFill>
-                  <a:schemeClr val="dk1"/>
-                </a:solidFill>
-                <a:effectLst/>
-                <a:uFillTx/>
-                <a:latin typeface="Arial" panose="020B0604020202020204" pitchFamily="34" charset="0"/>
-                <a:cs typeface="Arial" panose="020B0604020202020204" pitchFamily="34" charset="0"/>
-              </a:rPr>
-              <a:t>#HEBDATE</a:t>
-            </a:r>
-            <a:r>
-              <a:rPr lang="en-US" sz="2400" b="0" u="none" strike="noStrike" dirty="0">
-                <a:solidFill>
-                  <a:srgbClr val="000000"/>
-                </a:solidFill>
-                <a:effectLst/>
-                <a:uFillTx/>
-                <a:latin typeface="Arial" panose="020B0604020202020204" pitchFamily="34" charset="0"/>
-                <a:cs typeface="Arial" panose="020B0604020202020204" pitchFamily="34" charset="0"/>
-              </a:rPr>
-              <a:t>#DAYINFO:n</a:t>
-            </a:r>
-          </a:p>
-        </p:txBody>
-      </p:sp>
-      <p:sp>
-        <p:nvSpPr>
-          <p:cNvPr id="58" name="dtHebDate_0">
-            <a:extLst>
-              <a:ext uri="{FF2B5EF4-FFF2-40B4-BE49-F238E27FC236}">
-                <a16:creationId xmlns:a16="http://schemas.microsoft.com/office/drawing/2014/main" id="{F0C62599-1767-9F41-BE06-290355C298B4}"/>
-              </a:ext>
-            </a:extLst>
-          </p:cNvPr>
-          <p:cNvSpPr/>
-          <p:nvPr/>
-        </p:nvSpPr>
-        <p:spPr>
-          <a:xfrm>
-            <a:off x="419048" y="179872"/>
-            <a:ext cx="3414133" cy="839301"/>
-          </a:xfrm>
-          <a:prstGeom prst="rect">
-            <a:avLst/>
-          </a:prstGeom>
-          <a:noFill/>
-          <a:ln w="0">
-            <a:noFill/>
-          </a:ln>
-        </p:spPr>
-        <p:style>
-          <a:lnRef idx="0">
-            <a:scrgbClr r="0" g="0" b="0"/>
-          </a:lnRef>
-          <a:fillRef idx="0">
-            <a:scrgbClr r="0" g="0" b="0"/>
-          </a:fillRef>
-          <a:effectRef idx="0">
-            <a:scrgbClr r="0" g="0" b="0"/>
-          </a:effectRef>
-          <a:fontRef idx="minor"/>
-        </p:style>
-        <p:txBody>
-          <a:bodyPr wrap="square" lIns="90000" tIns="45000" rIns="90000" bIns="45000" anchor="ctr" anchorCtr="0">
-            <a:normAutofit/>
-          </a:bodyPr>
-          <a:lstStyle/>
-          <a:p>
-            <a:pPr algn="ctr" defTabSz="914400">
-              <a:lnSpc>
-                <a:spcPct val="100000"/>
-              </a:lnSpc>
-            </a:pPr>
-            <a:r>
-              <a:rPr lang="en-US" sz="2800" b="1" u="none" strike="noStrike" dirty="0">
-                <a:solidFill>
-                  <a:schemeClr val="dk1"/>
-                </a:solidFill>
-                <a:effectLst/>
-                <a:uFillTx/>
-                <a:latin typeface="Arial" panose="020B0604020202020204" pitchFamily="34" charset="0"/>
-                <a:cs typeface="Arial" panose="020B0604020202020204" pitchFamily="34" charset="0"/>
-              </a:rPr>
-              <a:t>#DICLOCK</a:t>
-            </a:r>
-            <a:endParaRPr lang="en-US" sz="2800" b="0" u="none" strike="noStrike" dirty="0">
-              <a:solidFill>
-                <a:srgbClr val="000000"/>
-              </a:solidFill>
-              <a:effectLst/>
-              <a:uFillTx/>
-              <a:latin typeface="Arial" panose="020B0604020202020204" pitchFamily="34" charset="0"/>
-              <a:cs typeface="Arial" panose="020B0604020202020204" pitchFamily="34" charset="0"/>
-            </a:endParaRPr>
-          </a:p>
-        </p:txBody>
-      </p:sp>
-      <p:sp>
-        <p:nvSpPr>
-          <p:cNvPr id="60" name="dtHebDate_0">
-            <a:extLst>
-              <a:ext uri="{FF2B5EF4-FFF2-40B4-BE49-F238E27FC236}">
-                <a16:creationId xmlns:a16="http://schemas.microsoft.com/office/drawing/2014/main" id="{CFA2B258-8BD7-82D9-A344-B1317F35FCBD}"/>
-              </a:ext>
-            </a:extLst>
-          </p:cNvPr>
-          <p:cNvSpPr/>
-          <p:nvPr/>
-        </p:nvSpPr>
-        <p:spPr>
-          <a:xfrm>
-            <a:off x="4097959" y="181691"/>
-            <a:ext cx="3996079" cy="767987"/>
-          </a:xfrm>
-          <a:prstGeom prst="rect">
-            <a:avLst/>
-          </a:prstGeom>
-          <a:noFill/>
-          <a:ln w="0">
-            <a:noFill/>
-          </a:ln>
-        </p:spPr>
-        <p:style>
-          <a:lnRef idx="0">
-            <a:scrgbClr r="0" g="0" b="0"/>
-          </a:lnRef>
-          <a:fillRef idx="0">
-            <a:scrgbClr r="0" g="0" b="0"/>
-          </a:fillRef>
-          <a:effectRef idx="0">
-            <a:scrgbClr r="0" g="0" b="0"/>
-          </a:effectRef>
-          <a:fontRef idx="minor"/>
-        </p:style>
-        <p:txBody>
-          <a:bodyPr wrap="square" lIns="90000" tIns="45000" rIns="90000" bIns="45000" anchor="t">
-            <a:spAutoFit/>
-          </a:bodyPr>
-          <a:lstStyle/>
-          <a:p>
-            <a:pPr algn="ctr" defTabSz="914400">
-              <a:lnSpc>
-                <a:spcPct val="100000"/>
-              </a:lnSpc>
-            </a:pPr>
-            <a:r>
-              <a:rPr lang="he-IL" sz="2000" dirty="0">
-                <a:solidFill>
-                  <a:schemeClr val="dk1"/>
-                </a:solidFill>
-                <a:latin typeface="Arial" panose="020B0604020202020204" pitchFamily="34" charset="0"/>
-                <a:cs typeface="Arial" panose="020B0604020202020204" pitchFamily="34" charset="0"/>
-              </a:rPr>
-              <a:t>בית הכנסת הספרדי</a:t>
-            </a:r>
-          </a:p>
-          <a:p>
-            <a:pPr algn="ctr" defTabSz="914400">
-              <a:lnSpc>
-                <a:spcPct val="100000"/>
-              </a:lnSpc>
-            </a:pPr>
-            <a:r>
-              <a:rPr lang="he-IL" sz="2400" b="1" u="none" strike="noStrike" dirty="0">
-                <a:solidFill>
-                  <a:schemeClr val="dk1"/>
-                </a:solidFill>
-                <a:effectLst/>
-                <a:uFillTx/>
-                <a:latin typeface="Arial" panose="020B0604020202020204" pitchFamily="34" charset="0"/>
-                <a:cs typeface="Arial" panose="020B0604020202020204" pitchFamily="34" charset="0"/>
-              </a:rPr>
-              <a:t>מעשה ניסים</a:t>
-            </a:r>
-            <a:endParaRPr lang="en-US" sz="2400" b="1" u="none" strike="noStrike" dirty="0">
-              <a:solidFill>
-                <a:srgbClr val="000000"/>
-              </a:solidFill>
-              <a:effectLst/>
-              <a:uFillTx/>
-              <a:latin typeface="Arial" panose="020B0604020202020204" pitchFamily="34" charset="0"/>
-              <a:cs typeface="Arial" panose="020B0604020202020204" pitchFamily="34" charset="0"/>
-            </a:endParaRPr>
-          </a:p>
-        </p:txBody>
-      </p:sp>
-      <p:sp>
-        <p:nvSpPr>
-          <p:cNvPr id="63" name="Rectangle 2">
-            <a:extLst>
-              <a:ext uri="{FF2B5EF4-FFF2-40B4-BE49-F238E27FC236}">
-                <a16:creationId xmlns:a16="http://schemas.microsoft.com/office/drawing/2014/main" id="{AB362A89-5CC7-BEE6-CE36-0F2502067525}"/>
-              </a:ext>
-            </a:extLst>
-          </p:cNvPr>
-          <p:cNvSpPr/>
-          <p:nvPr/>
-        </p:nvSpPr>
-        <p:spPr>
-          <a:xfrm>
-            <a:off x="9166221" y="1277624"/>
-            <a:ext cx="2838837" cy="1260430"/>
-          </a:xfrm>
-          <a:prstGeom prst="rect">
-            <a:avLst/>
-          </a:prstGeom>
-          <a:noFill/>
-          <a:ln w="0">
-            <a:noFill/>
-          </a:ln>
-        </p:spPr>
-        <p:style>
-          <a:lnRef idx="0">
-            <a:scrgbClr r="0" g="0" b="0"/>
-          </a:lnRef>
-          <a:fillRef idx="0">
-            <a:scrgbClr r="0" g="0" b="0"/>
-          </a:fillRef>
-          <a:effectRef idx="0">
-            <a:scrgbClr r="0" g="0" b="0"/>
-          </a:effectRef>
-          <a:fontRef idx="minor"/>
-        </p:style>
-        <p:txBody>
-          <a:bodyPr wrap="square" lIns="90000" tIns="45000" rIns="90000" bIns="45000" anchor="t">
-            <a:spAutoFit/>
-          </a:bodyPr>
-          <a:lstStyle/>
-          <a:p>
-            <a:pPr algn="ctr" defTabSz="914400" rtl="1">
-              <a:lnSpc>
-                <a:spcPct val="100000"/>
-              </a:lnSpc>
-            </a:pPr>
-            <a:r>
-              <a:rPr lang="he-IL" sz="2800" b="1" u="none" strike="noStrike" dirty="0">
-                <a:solidFill>
-                  <a:schemeClr val="accent1"/>
-                </a:solidFill>
-                <a:effectLst/>
-                <a:uFillTx/>
-                <a:latin typeface="Calibri"/>
-              </a:rPr>
-              <a:t>זמני היום:</a:t>
-            </a:r>
-            <a:br>
-              <a:rPr lang="en-US" sz="2800" dirty="0">
-                <a:solidFill>
-                  <a:srgbClr val="000000"/>
-                </a:solidFill>
-                <a:latin typeface="Arial" panose="020B0604020202020204" pitchFamily="34" charset="0"/>
-                <a:cs typeface="Arial" panose="020B0604020202020204" pitchFamily="34" charset="0"/>
-              </a:rPr>
-            </a:br>
-            <a:r>
-              <a:rPr lang="en-US" dirty="0">
-                <a:solidFill>
-                  <a:srgbClr val="000000"/>
-                </a:solidFill>
-                <a:latin typeface="Arial" panose="020B0604020202020204" pitchFamily="34" charset="0"/>
-                <a:cs typeface="Arial" panose="020B0604020202020204" pitchFamily="34" charset="0"/>
-              </a:rPr>
-              <a:t>#DAYZMANIM</a:t>
-            </a:r>
-          </a:p>
-          <a:p>
-            <a:pPr algn="ctr" defTabSz="914400" rtl="1">
-              <a:lnSpc>
-                <a:spcPct val="100000"/>
-              </a:lnSpc>
-            </a:pPr>
-            <a:endParaRPr lang="en-US" sz="2800" b="1" u="none" strike="noStrike" dirty="0">
-              <a:solidFill>
-                <a:srgbClr val="000000"/>
-              </a:solidFill>
-              <a:effectLst/>
-              <a:uFillTx/>
-              <a:latin typeface="Arial"/>
-            </a:endParaRPr>
-          </a:p>
-        </p:txBody>
-      </p:sp>
-      <p:sp>
-        <p:nvSpPr>
-          <p:cNvPr id="64" name="Rectangle: Rounded Corners 63">
-            <a:extLst>
-              <a:ext uri="{FF2B5EF4-FFF2-40B4-BE49-F238E27FC236}">
-                <a16:creationId xmlns:a16="http://schemas.microsoft.com/office/drawing/2014/main" id="{AD4F57B3-0F68-5DAB-1071-97E1CFFFEB45}"/>
-              </a:ext>
-            </a:extLst>
-          </p:cNvPr>
-          <p:cNvSpPr/>
-          <p:nvPr/>
-        </p:nvSpPr>
-        <p:spPr>
-          <a:xfrm>
-            <a:off x="196465" y="1161936"/>
-            <a:ext cx="2816614" cy="2930148"/>
-          </a:xfrm>
-          <a:prstGeom prst="roundRect">
-            <a:avLst>
-              <a:gd name="adj" fmla="val 0"/>
-            </a:avLst>
-          </a:prstGeom>
-          <a:solidFill>
-            <a:srgbClr val="FAF4E3"/>
-          </a:solidFill>
-          <a:ln w="69850" cap="flat" cmpd="sng" algn="ctr">
-            <a:solidFill>
-              <a:srgbClr val="FAF4E3"/>
-            </a:solidFill>
-            <a:prstDash val="solid"/>
-            <a:round/>
-            <a:headEnd type="none" w="med" len="med"/>
-            <a:tailEnd type="none" w="med" len="med"/>
-          </a:ln>
-        </p:spPr>
-        <p:style>
-          <a:lnRef idx="0">
-            <a:scrgbClr r="0" g="0" b="0"/>
-          </a:lnRef>
-          <a:fillRef idx="0">
-            <a:scrgbClr r="0" g="0" b="0"/>
-          </a:fillRef>
-          <a:effectRef idx="0">
-            <a:scrgbClr r="0" g="0" b="0"/>
-          </a:effectRef>
-          <a:fontRef idx="minor">
-            <a:schemeClr val="dk1"/>
-          </a:fontRef>
-        </p:style>
-        <p:txBody>
-          <a:bodyPr rtlCol="0" anchor="ctr"/>
-          <a:lstStyle/>
-          <a:p>
-            <a:pPr algn="ctr"/>
-            <a:endParaRPr lang="LID4096"/>
-          </a:p>
-        </p:txBody>
-      </p:sp>
-      <p:sp>
-        <p:nvSpPr>
-          <p:cNvPr id="65" name="Rectangle 2">
-            <a:extLst>
-              <a:ext uri="{FF2B5EF4-FFF2-40B4-BE49-F238E27FC236}">
-                <a16:creationId xmlns:a16="http://schemas.microsoft.com/office/drawing/2014/main" id="{AA0FCFD6-7EF7-B30C-6667-0890174B9988}"/>
-              </a:ext>
-            </a:extLst>
-          </p:cNvPr>
-          <p:cNvSpPr/>
-          <p:nvPr/>
-        </p:nvSpPr>
-        <p:spPr>
-          <a:xfrm>
-            <a:off x="109542" y="4234847"/>
-            <a:ext cx="2919415" cy="2484440"/>
-          </a:xfrm>
-          <a:prstGeom prst="rect">
-            <a:avLst/>
-          </a:prstGeom>
-          <a:noFill/>
-          <a:ln w="0">
-            <a:noFill/>
-          </a:ln>
-        </p:spPr>
-        <p:style>
-          <a:lnRef idx="0">
-            <a:scrgbClr r="0" g="0" b="0"/>
-          </a:lnRef>
-          <a:fillRef idx="0">
-            <a:scrgbClr r="0" g="0" b="0"/>
-          </a:fillRef>
-          <a:effectRef idx="0">
-            <a:scrgbClr r="0" g="0" b="0"/>
-          </a:effectRef>
-          <a:fontRef idx="minor"/>
-        </p:style>
-        <p:txBody>
-          <a:bodyPr wrap="square" lIns="90000" tIns="45000" rIns="90000" bIns="45000" anchor="ctr" anchorCtr="0">
-            <a:normAutofit/>
-          </a:bodyPr>
-          <a:lstStyle/>
-          <a:p>
-            <a:pPr algn="ctr" defTabSz="914400" rtl="1">
-              <a:spcAft>
-                <a:spcPts val="600"/>
-              </a:spcAft>
-              <a:tabLst>
-                <a:tab pos="1257300" algn="r"/>
-              </a:tabLst>
-            </a:pPr>
-            <a:r>
-              <a:rPr lang="he-IL" sz="2000" dirty="0">
-                <a:solidFill>
-                  <a:srgbClr val="FAF4E3"/>
-                </a:solidFill>
-                <a:latin typeface="Arial"/>
-              </a:rPr>
-              <a:t>קהילת מעשה ניסים </a:t>
-            </a:r>
-            <a:br>
-              <a:rPr lang="en-US" sz="2000" dirty="0">
-                <a:solidFill>
-                  <a:srgbClr val="FAF4E3"/>
-                </a:solidFill>
-                <a:latin typeface="Arial"/>
-              </a:rPr>
-            </a:br>
-            <a:r>
-              <a:rPr lang="he-IL" sz="2000" dirty="0">
-                <a:solidFill>
-                  <a:srgbClr val="FAF4E3"/>
-                </a:solidFill>
-                <a:latin typeface="Arial"/>
-              </a:rPr>
-              <a:t>מברכים את כל אורחינו בברכת שבת שלום!</a:t>
-            </a:r>
-            <a:endParaRPr lang="en-US" sz="2000" u="none" strike="noStrike" dirty="0">
-              <a:solidFill>
-                <a:srgbClr val="FAF4E3"/>
-              </a:solidFill>
-              <a:effectLst/>
-              <a:uFillTx/>
-              <a:latin typeface="Arial"/>
-            </a:endParaRPr>
-          </a:p>
-        </p:txBody>
-      </p:sp>
-    </p:spTree>
-    <p:extLst>
-      <p:ext uri="{BB962C8B-B14F-4D97-AF65-F5344CB8AC3E}">
-        <p14:creationId xmlns:p14="http://schemas.microsoft.com/office/powerpoint/2010/main" val="3044285190"/>
-      </p:ext>
-    </p:extLst>
-  </p:cSld>
-  <p:clrMapOvr>
-    <a:masterClrMapping/>
-  </p:clrMapOvr>
-</p:sld>
-</file>
-
-<file path=ppt/slides/slide7.xml><?xml version="1.0" encoding="utf-8"?>
+<file path=ppt/slides/slide3.xml><?xml version="1.0" encoding="utf-8"?>
 <p:sld xmlns:a="http://schemas.openxmlformats.org/drawingml/2006/main" xmlns:r="http://schemas.openxmlformats.org/officeDocument/2006/relationships" xmlns:p="http://schemas.openxmlformats.org/presentationml/2006/main">
   <p:cSld>
     <p:bg>
@@ -14783,8 +9743,8 @@
         </p:nvSpPr>
         <p:spPr>
           <a:xfrm>
-            <a:off x="3412915" y="2024561"/>
-            <a:ext cx="5121486" cy="4542045"/>
+            <a:off x="3412915" y="2024562"/>
+            <a:ext cx="5121486" cy="4356988"/>
           </a:xfrm>
           <a:prstGeom prst="rect">
             <a:avLst/>
@@ -15920,6 +10880,100 @@
           </a:p>
         </p:txBody>
       </p:sp>
+      <p:sp>
+        <p:nvSpPr>
+          <p:cNvPr id="3" name="Rectangle 2">
+            <a:extLst>
+              <a:ext uri="{FF2B5EF4-FFF2-40B4-BE49-F238E27FC236}">
+                <a16:creationId xmlns:a16="http://schemas.microsoft.com/office/drawing/2014/main" id="{D0FB3926-EB42-AA94-7147-206B15E5C495}"/>
+              </a:ext>
+            </a:extLst>
+          </p:cNvPr>
+          <p:cNvSpPr/>
+          <p:nvPr/>
+        </p:nvSpPr>
+        <p:spPr>
+          <a:xfrm>
+            <a:off x="430920" y="6137640"/>
+            <a:ext cx="2873880" cy="554040"/>
+          </a:xfrm>
+          <a:prstGeom prst="rect">
+            <a:avLst/>
+          </a:prstGeom>
+          <a:solidFill>
+            <a:srgbClr val="000000"/>
+          </a:solidFill>
+          <a:ln>
+            <a:solidFill>
+              <a:srgbClr val="FFFFFF"/>
+            </a:solidFill>
+          </a:ln>
+        </p:spPr>
+        <p:style>
+          <a:lnRef idx="3">
+            <a:schemeClr val="lt1"/>
+          </a:lnRef>
+          <a:fillRef idx="1">
+            <a:schemeClr val="dk1"/>
+          </a:fillRef>
+          <a:effectRef idx="1">
+            <a:schemeClr val="dk1"/>
+          </a:effectRef>
+          <a:fontRef idx="minor"/>
+        </p:style>
+        <p:txBody>
+          <a:bodyPr lIns="90000" tIns="45000" rIns="90000" bIns="45000" anchor="ctr">
+            <a:noAutofit/>
+          </a:bodyPr>
+          <a:lstStyle/>
+          <a:p>
+            <a:pPr algn="ctr" defTabSz="914400">
+              <a:lnSpc>
+                <a:spcPct val="100000"/>
+              </a:lnSpc>
+            </a:pPr>
+            <a:r>
+              <a:rPr lang="en-US" sz="1800" b="0" u="none" strike="noStrike" dirty="0">
+                <a:solidFill>
+                  <a:schemeClr val="lt1"/>
+                </a:solidFill>
+                <a:effectLst/>
+                <a:uFillTx/>
+                <a:latin typeface="Calibri"/>
+              </a:rPr>
+              <a:t>#</a:t>
+            </a:r>
+            <a:r>
+              <a:rPr lang="en-US" dirty="0">
+                <a:solidFill>
+                  <a:schemeClr val="lt1"/>
+                </a:solidFill>
+                <a:latin typeface="Calibri"/>
+              </a:rPr>
+              <a:t>NON</a:t>
+            </a:r>
+            <a:r>
+              <a:rPr lang="en-US" sz="1800" b="0" u="none" strike="noStrike" dirty="0">
+                <a:solidFill>
+                  <a:schemeClr val="lt1"/>
+                </a:solidFill>
+                <a:effectLst/>
+                <a:uFillTx/>
+                <a:latin typeface="Calibri"/>
+              </a:rPr>
+              <a:t>CHOLONLY</a:t>
+            </a:r>
+            <a:endParaRPr lang="en-US" sz="1800" b="0" u="none" strike="noStrike" dirty="0">
+              <a:solidFill>
+                <a:srgbClr val="FFFFFF"/>
+              </a:solidFill>
+              <a:effectLst/>
+              <a:uFillTx/>
+              <a:latin typeface="Arial"/>
+            </a:endParaRPr>
+          </a:p>
+        </p:txBody>
+      </p:sp>
     </p:spTree>
     <p:extLst>
       <p:ext uri="{BB962C8B-B14F-4D97-AF65-F5344CB8AC3E}">
@@ -15930,6 +10984,383 @@
   <p:clrMapOvr>
     <a:masterClrMapping/>
   </p:clrMapOvr>
+  <mc:AlternateContent xmlns:mc="http://schemas.openxmlformats.org/markup-compatibility/2006">
+    <mc:Choice xmlns:p14="http://schemas.microsoft.com/office/powerpoint/2010/main" Requires="p14">
+      <p:transition spd="med" p14:dur="700" advTm="40000">
+        <p:fade/>
+      </p:transition>
+    </mc:Choice>
+    <mc:Fallback>
+      <p:transition spd="med" advTm="40000">
+        <p:fade/>
+      </p:transition>
+    </mc:Fallback>
+  </mc:AlternateContent>
+</p:sld>
+</file>
+
+<file path=ppt/slides/slide4.xml><?xml version="1.0" encoding="utf-8"?>
+<p:sld xmlns:a="http://schemas.openxmlformats.org/drawingml/2006/main" xmlns:r="http://schemas.openxmlformats.org/officeDocument/2006/relationships" xmlns:p="http://schemas.openxmlformats.org/presentationml/2006/main">
+  <p:cSld>
+    <p:bg>
+      <p:bgPr>
+        <a:blipFill dpi="0" rotWithShape="1">
+          <a:blip r:embed="rId2">
+            <a:lum/>
+          </a:blip>
+          <a:srcRect/>
+          <a:stretch>
+            <a:fillRect t="-9000" b="-9000"/>
+          </a:stretch>
+        </a:blipFill>
+        <a:effectLst/>
+      </p:bgPr>
+    </p:bg>
+    <p:spTree>
+      <p:nvGrpSpPr>
+        <p:cNvPr id="1" name=""/>
+        <p:cNvGrpSpPr/>
+        <p:nvPr/>
+      </p:nvGrpSpPr>
+      <p:grpSpPr>
+        <a:xfrm>
+          <a:off x="0" y="0"/>
+          <a:ext cx="0" cy="0"/>
+          <a:chOff x="0" y="0"/>
+          <a:chExt cx="0" cy="0"/>
+        </a:xfrm>
+      </p:grpSpPr>
+      <p:sp>
+        <p:nvSpPr>
+          <p:cNvPr id="3" name="Text Placeholder 2">
+            <a:extLst>
+              <a:ext uri="{FF2B5EF4-FFF2-40B4-BE49-F238E27FC236}">
+                <a16:creationId xmlns:a16="http://schemas.microsoft.com/office/drawing/2014/main" id="{F08004E6-9267-4F4A-6E6E-18589D2709BF}"/>
+              </a:ext>
+            </a:extLst>
+          </p:cNvPr>
+          <p:cNvSpPr>
+            <a:spLocks noGrp="1"/>
+          </p:cNvSpPr>
+          <p:nvPr>
+            <p:ph type="body"/>
+          </p:nvPr>
+        </p:nvSpPr>
+        <p:spPr>
+          <a:xfrm>
+            <a:off x="610140" y="1209884"/>
+            <a:ext cx="10971720" cy="3976560"/>
+          </a:xfrm>
+        </p:spPr>
+        <p:txBody>
+          <a:bodyPr>
+            <a:normAutofit/>
+          </a:bodyPr>
+          <a:lstStyle/>
+          <a:p>
+            <a:pPr marL="0" indent="0" algn="ctr" rtl="1">
+              <a:buNone/>
+            </a:pPr>
+            <a:r>
+              <a:rPr lang="he-IL" sz="8800" b="1" dirty="0">
+                <a:ln w="6600">
+                  <a:solidFill>
+                    <a:schemeClr val="accent2"/>
+                  </a:solidFill>
+                  <a:prstDash val="solid"/>
+                </a:ln>
+                <a:solidFill>
+                  <a:srgbClr val="FFFFFF"/>
+                </a:solidFill>
+                <a:effectLst>
+                  <a:outerShdw dist="38100" dir="2700000" algn="tl" rotWithShape="0">
+                    <a:schemeClr val="accent2"/>
+                  </a:outerShdw>
+                </a:effectLst>
+                <a:latin typeface="Arial" panose="020B0604020202020204" pitchFamily="34" charset="0"/>
+                <a:cs typeface="Arial" panose="020B0604020202020204" pitchFamily="34" charset="0"/>
+              </a:rPr>
+              <a:t>קהילת מעשה ניסים</a:t>
+            </a:r>
+          </a:p>
+          <a:p>
+            <a:pPr marL="0" indent="0" algn="ctr" rtl="1">
+              <a:buNone/>
+            </a:pPr>
+            <a:r>
+              <a:rPr lang="he-IL" sz="8800" b="1" dirty="0">
+                <a:ln w="6600">
+                  <a:solidFill>
+                    <a:schemeClr val="accent2"/>
+                  </a:solidFill>
+                  <a:prstDash val="solid"/>
+                </a:ln>
+                <a:solidFill>
+                  <a:srgbClr val="FFFFFF"/>
+                </a:solidFill>
+                <a:effectLst>
+                  <a:outerShdw dist="38100" dir="2700000" algn="tl" rotWithShape="0">
+                    <a:schemeClr val="accent2"/>
+                  </a:outerShdw>
+                </a:effectLst>
+                <a:latin typeface="Arial" panose="020B0604020202020204" pitchFamily="34" charset="0"/>
+                <a:cs typeface="Arial" panose="020B0604020202020204" pitchFamily="34" charset="0"/>
+              </a:rPr>
+              <a:t>מברכים את כל אורחינו</a:t>
+            </a:r>
+          </a:p>
+          <a:p>
+            <a:pPr marL="0" indent="0" algn="ctr" rtl="1">
+              <a:buNone/>
+            </a:pPr>
+            <a:r>
+              <a:rPr lang="he-IL" sz="8800" b="1" dirty="0">
+                <a:ln w="6600">
+                  <a:solidFill>
+                    <a:schemeClr val="accent2"/>
+                  </a:solidFill>
+                  <a:prstDash val="solid"/>
+                </a:ln>
+                <a:solidFill>
+                  <a:srgbClr val="FFFFFF"/>
+                </a:solidFill>
+                <a:effectLst>
+                  <a:outerShdw dist="38100" dir="2700000" algn="tl" rotWithShape="0">
+                    <a:schemeClr val="accent2"/>
+                  </a:outerShdw>
+                </a:effectLst>
+                <a:latin typeface="Arial" panose="020B0604020202020204" pitchFamily="34" charset="0"/>
+                <a:cs typeface="Arial" panose="020B0604020202020204" pitchFamily="34" charset="0"/>
+              </a:rPr>
+              <a:t>בברכת שבת שלום!</a:t>
+            </a:r>
+            <a:endParaRPr lang="LID4096" sz="8800" b="1" dirty="0">
+              <a:ln w="6600">
+                <a:solidFill>
+                  <a:schemeClr val="accent2"/>
+                </a:solidFill>
+                <a:prstDash val="solid"/>
+              </a:ln>
+              <a:solidFill>
+                <a:srgbClr val="FFFFFF"/>
+              </a:solidFill>
+              <a:effectLst>
+                <a:outerShdw dist="38100" dir="2700000" algn="tl" rotWithShape="0">
+                  <a:schemeClr val="accent2"/>
+                </a:outerShdw>
+              </a:effectLst>
+              <a:latin typeface="Arial" panose="020B0604020202020204" pitchFamily="34" charset="0"/>
+              <a:cs typeface="Arial" panose="020B0604020202020204" pitchFamily="34" charset="0"/>
+            </a:endParaRPr>
+          </a:p>
+        </p:txBody>
+      </p:sp>
+      <p:sp>
+        <p:nvSpPr>
+          <p:cNvPr id="5" name="Rectangle 4">
+            <a:extLst>
+              <a:ext uri="{FF2B5EF4-FFF2-40B4-BE49-F238E27FC236}">
+                <a16:creationId xmlns:a16="http://schemas.microsoft.com/office/drawing/2014/main" id="{6BC6C3E0-B110-3BFE-5F66-FF6869CCF8F5}"/>
+              </a:ext>
+            </a:extLst>
+          </p:cNvPr>
+          <p:cNvSpPr/>
+          <p:nvPr/>
+        </p:nvSpPr>
+        <p:spPr>
+          <a:xfrm>
+            <a:off x="8920402" y="5993261"/>
+            <a:ext cx="2873880" cy="554040"/>
+          </a:xfrm>
+          <a:prstGeom prst="rect">
+            <a:avLst/>
+          </a:prstGeom>
+          <a:solidFill>
+            <a:srgbClr val="000000"/>
+          </a:solidFill>
+          <a:ln>
+            <a:solidFill>
+              <a:srgbClr val="FFFFFF"/>
+            </a:solidFill>
+          </a:ln>
+        </p:spPr>
+        <p:style>
+          <a:lnRef idx="3">
+            <a:schemeClr val="lt1"/>
+          </a:lnRef>
+          <a:fillRef idx="1">
+            <a:schemeClr val="dk1"/>
+          </a:fillRef>
+          <a:effectRef idx="1">
+            <a:schemeClr val="dk1"/>
+          </a:effectRef>
+          <a:fontRef idx="minor"/>
+        </p:style>
+        <p:txBody>
+          <a:bodyPr lIns="90000" tIns="45000" rIns="90000" bIns="45000" anchor="ctr">
+            <a:noAutofit/>
+          </a:bodyPr>
+          <a:lstStyle/>
+          <a:p>
+            <a:pPr algn="ctr" defTabSz="914400">
+              <a:lnSpc>
+                <a:spcPct val="100000"/>
+              </a:lnSpc>
+            </a:pPr>
+            <a:r>
+              <a:rPr lang="en-US" sz="1800" b="0" u="none" strike="noStrike" dirty="0">
+                <a:solidFill>
+                  <a:schemeClr val="lt1"/>
+                </a:solidFill>
+                <a:effectLst/>
+                <a:uFillTx/>
+                <a:latin typeface="Calibri"/>
+              </a:rPr>
+              <a:t>#</a:t>
+            </a:r>
+            <a:r>
+              <a:rPr lang="en-US" dirty="0">
+                <a:solidFill>
+                  <a:schemeClr val="lt1"/>
+                </a:solidFill>
+                <a:latin typeface="Calibri"/>
+              </a:rPr>
+              <a:t>NON</a:t>
+            </a:r>
+            <a:r>
+              <a:rPr lang="en-US" sz="1800" b="0" u="none" strike="noStrike" dirty="0">
+                <a:solidFill>
+                  <a:schemeClr val="lt1"/>
+                </a:solidFill>
+                <a:effectLst/>
+                <a:uFillTx/>
+                <a:latin typeface="Calibri"/>
+              </a:rPr>
+              <a:t>CHOLONLY</a:t>
+            </a:r>
+            <a:endParaRPr lang="en-US" sz="1800" b="0" u="none" strike="noStrike" dirty="0">
+              <a:solidFill>
+                <a:srgbClr val="FFFFFF"/>
+              </a:solidFill>
+              <a:effectLst/>
+              <a:uFillTx/>
+              <a:latin typeface="Arial"/>
+            </a:endParaRPr>
+          </a:p>
+        </p:txBody>
+      </p:sp>
+      <p:sp>
+        <p:nvSpPr>
+          <p:cNvPr id="6" name="TextBox 5">
+            <a:extLst>
+              <a:ext uri="{FF2B5EF4-FFF2-40B4-BE49-F238E27FC236}">
+                <a16:creationId xmlns:a16="http://schemas.microsoft.com/office/drawing/2014/main" id="{E6AB4734-C05C-47D1-C2C9-3CD9B31B0CEE}"/>
+              </a:ext>
+            </a:extLst>
+          </p:cNvPr>
+          <p:cNvSpPr txBox="1"/>
+          <p:nvPr/>
+        </p:nvSpPr>
+        <p:spPr>
+          <a:xfrm>
+            <a:off x="610140" y="5852160"/>
+            <a:ext cx="2441068" cy="707886"/>
+          </a:xfrm>
+          <a:prstGeom prst="rect">
+            <a:avLst/>
+          </a:prstGeom>
+          <a:noFill/>
+        </p:spPr>
+        <p:txBody>
+          <a:bodyPr wrap="square" rtlCol="0">
+            <a:spAutoFit/>
+          </a:bodyPr>
+          <a:lstStyle/>
+          <a:p>
+            <a:r>
+              <a:rPr lang="en-US" sz="4000" dirty="0">
+                <a:ln w="12700" cmpd="sng">
+                  <a:solidFill>
+                    <a:schemeClr val="accent4"/>
+                  </a:solidFill>
+                  <a:prstDash val="solid"/>
+                </a:ln>
+                <a:gradFill>
+                  <a:gsLst>
+                    <a:gs pos="0">
+                      <a:schemeClr val="accent4"/>
+                    </a:gs>
+                    <a:gs pos="4000">
+                      <a:schemeClr val="accent4">
+                        <a:lumMod val="60000"/>
+                        <a:lumOff val="40000"/>
+                      </a:schemeClr>
+                    </a:gs>
+                    <a:gs pos="87000">
+                      <a:schemeClr val="accent4">
+                        <a:lumMod val="20000"/>
+                        <a:lumOff val="80000"/>
+                      </a:schemeClr>
+                    </a:gs>
+                  </a:gsLst>
+                  <a:lin ang="5400000"/>
+                </a:gradFill>
+              </a:rPr>
+              <a:t>#DICLOCK</a:t>
+            </a:r>
+            <a:endParaRPr lang="LID4096" sz="4000" dirty="0">
+              <a:ln w="12700" cmpd="sng">
+                <a:solidFill>
+                  <a:schemeClr val="accent4"/>
+                </a:solidFill>
+                <a:prstDash val="solid"/>
+              </a:ln>
+              <a:gradFill>
+                <a:gsLst>
+                  <a:gs pos="0">
+                    <a:schemeClr val="accent4"/>
+                  </a:gs>
+                  <a:gs pos="4000">
+                    <a:schemeClr val="accent4">
+                      <a:lumMod val="60000"/>
+                      <a:lumOff val="40000"/>
+                    </a:schemeClr>
+                  </a:gs>
+                  <a:gs pos="87000">
+                    <a:schemeClr val="accent4">
+                      <a:lumMod val="20000"/>
+                      <a:lumOff val="80000"/>
+                    </a:schemeClr>
+                  </a:gs>
+                </a:gsLst>
+                <a:lin ang="5400000"/>
+              </a:gradFill>
+            </a:endParaRPr>
+          </a:p>
+        </p:txBody>
+      </p:sp>
+    </p:spTree>
+    <p:extLst>
+      <p:ext uri="{BB962C8B-B14F-4D97-AF65-F5344CB8AC3E}">
+        <p14:creationId xmlns:p14="http://schemas.microsoft.com/office/powerpoint/2010/main" val="815572833"/>
+      </p:ext>
+    </p:extLst>
+  </p:cSld>
+  <p:clrMapOvr>
+    <a:masterClrMapping/>
+  </p:clrMapOvr>
+  <mc:AlternateContent xmlns:mc="http://schemas.openxmlformats.org/markup-compatibility/2006" xmlns:p14="http://schemas.microsoft.com/office/powerpoint/2010/main">
+    <mc:Choice Requires="p14">
+      <p:transition spd="med" p14:dur="700" advTm="10000">
+        <p:fade/>
+      </p:transition>
+    </mc:Choice>
+    <mc:Fallback xmlns="">
+      <p:transition spd="med" advTm="10000">
+        <p:fade/>
+      </p:transition>
+    </mc:Fallback>
+  </mc:AlternateContent>
 </p:sld>
 </file>
 

--- a/luah.pptx
+++ b/luah.pptx
@@ -9601,14 +9601,14 @@
   <p:clrMapOvr>
     <a:masterClrMapping/>
   </p:clrMapOvr>
-  <mc:AlternateContent xmlns:mc="http://schemas.openxmlformats.org/markup-compatibility/2006" xmlns:p14="http://schemas.microsoft.com/office/powerpoint/2010/main">
-    <mc:Choice Requires="p14">
-      <p:transition spd="med" p14:dur="700" advTm="10000">
+  <mc:AlternateContent xmlns:mc="http://schemas.openxmlformats.org/markup-compatibility/2006">
+    <mc:Choice xmlns:p14="http://schemas.microsoft.com/office/powerpoint/2010/main" Requires="p14">
+      <p:transition spd="med" p14:dur="700" advTm="40000">
         <p:fade/>
       </p:transition>
     </mc:Choice>
-    <mc:Fallback xmlns="">
-      <p:transition spd="med" advTm="10000">
+    <mc:Fallback>
+      <p:transition spd="med" advTm="40000">
         <p:fade/>
       </p:transition>
     </mc:Fallback>

--- a/luah.pptx
+++ b/luah.pptx
@@ -17,7 +17,7 @@
   <p:notesSz cx="7772400" cy="10058400"/>
   <p:defaultTextStyle>
     <a:defPPr>
-      <a:defRPr lang="LID4096"/>
+      <a:defRPr lang="x-none"/>
     </a:defPPr>
     <a:lvl1pPr marL="0" algn="l" defTabSz="914400" rtl="0" eaLnBrk="1" latinLnBrk="0" hangingPunct="1">
       <a:defRPr sz="1800" kern="1200">
@@ -118,6 +118,14 @@
 </p:presentation>
 </file>
 
+<file path=ppt/revisionInfo.xml><?xml version="1.0" encoding="utf-8"?>
+<p1510:revInfo xmlns:a="http://schemas.openxmlformats.org/drawingml/2006/main" xmlns:r="http://schemas.openxmlformats.org/officeDocument/2006/relationships" xmlns:p1510="http://schemas.microsoft.com/office/powerpoint/2015/10/main">
+  <p1510:revLst>
+    <p1510:client id="{4EED8FCA-2AB1-1DF8-BA20-BED3CD38F1A2}" v="7" dt="2026-10-08T14:52:30.562"/>
+  </p1510:revLst>
+</p1510:revInfo>
+</file>
+
 <file path=ppt/notesMasters/notesMaster1.xml><?xml version="1.0" encoding="utf-8"?>
 <p:notesMaster xmlns:a="http://schemas.openxmlformats.org/drawingml/2006/main" xmlns:r="http://schemas.openxmlformats.org/officeDocument/2006/relationships" xmlns:p="http://schemas.openxmlformats.org/presentationml/2006/main">
   <p:cSld>
@@ -167,7 +175,7 @@
             </a:lvl1pPr>
           </a:lstStyle>
           <a:p>
-            <a:endParaRPr lang="LID4096"/>
+            <a:endParaRPr lang="x-none"/>
           </a:p>
         </p:txBody>
       </p:sp>
@@ -199,10 +207,10 @@
           </a:lstStyle>
           <a:p>
             <a:fld id="{FD5B471E-2D90-49BC-A0B2-2FC9EAC1BE17}" type="datetimeFigureOut">
-              <a:rPr lang="LID4096" smtClean="0"/>
+              <a:rPr lang="x-none" smtClean="0"/>
               <a:t>10/08/2026</a:t>
             </a:fld>
-            <a:endParaRPr lang="LID4096"/>
+            <a:endParaRPr lang="x-none"/>
           </a:p>
         </p:txBody>
       </p:sp>
@@ -235,7 +243,7 @@
           <a:bodyPr vert="horz" lIns="91440" tIns="45720" rIns="91440" bIns="45720" rtlCol="0" anchor="ctr"/>
           <a:lstStyle/>
           <a:p>
-            <a:endParaRPr lang="LID4096"/>
+            <a:endParaRPr lang="x-none"/>
           </a:p>
         </p:txBody>
       </p:sp>
@@ -295,7 +303,7 @@
               <a:rPr lang="en-US"/>
               <a:t>Fifth level</a:t>
             </a:r>
-            <a:endParaRPr lang="LID4096"/>
+            <a:endParaRPr lang="x-none"/>
           </a:p>
         </p:txBody>
       </p:sp>
@@ -326,7 +334,7 @@
             </a:lvl1pPr>
           </a:lstStyle>
           <a:p>
-            <a:endParaRPr lang="LID4096"/>
+            <a:endParaRPr lang="x-none"/>
           </a:p>
         </p:txBody>
       </p:sp>
@@ -358,10 +366,10 @@
           </a:lstStyle>
           <a:p>
             <a:fld id="{B161048A-9FF3-42A8-9F95-F29AC97CB98C}" type="slidenum">
-              <a:rPr lang="LID4096" smtClean="0"/>
+              <a:rPr lang="x-none" smtClean="0"/>
               <a:t>‹#›</a:t>
             </a:fld>
-            <a:endParaRPr lang="LID4096"/>
+            <a:endParaRPr lang="x-none"/>
           </a:p>
         </p:txBody>
       </p:sp>
@@ -1131,7 +1139,7 @@
               <a:tabLst>
                 <a:tab pos="0" algn="l"/>
               </a:tabLst>
-              <a:defRPr lang="en-IL" sz="1200" b="0" u="none" strike="noStrike">
+              <a:defRPr lang="x-none" sz="1200" b="0" u="none" strike="noStrike">
                 <a:solidFill>
                   <a:schemeClr val="dk1">
                     <a:tint val="75000"/>
@@ -1154,7 +1162,7 @@
               </a:tabLst>
             </a:pPr>
             <a:r>
-              <a:rPr lang="en-IL" sz="1200" b="0" u="none" strike="noStrike">
+              <a:rPr lang="x-none" sz="1200" b="0" u="none" strike="noStrike">
                 <a:solidFill>
                   <a:schemeClr val="dk1">
                     <a:tint val="75000"/>
@@ -1283,7 +1291,7 @@
               <a:tabLst>
                 <a:tab pos="0" algn="l"/>
               </a:tabLst>
-              <a:defRPr lang="en-IL" sz="1200" b="0" u="none" strike="noStrike">
+              <a:defRPr lang="x-none" sz="1200" b="0" u="none" strike="noStrike">
                 <a:solidFill>
                   <a:schemeClr val="dk1">
                     <a:tint val="75000"/>
@@ -1306,7 +1314,7 @@
               </a:tabLst>
             </a:pPr>
             <a:fld id="{5299AE77-7776-4BD1-AB5A-EEC0F4189CFB}" type="slidenum">
-              <a:rPr lang="en-IL" sz="1200" b="0" u="none" strike="noStrike">
+              <a:rPr lang="x-none" sz="1200" b="0" u="none" strike="noStrike">
                 <a:solidFill>
                   <a:schemeClr val="dk1">
                     <a:tint val="75000"/>
@@ -1734,7 +1742,7 @@
               <a:tabLst>
                 <a:tab pos="0" algn="l"/>
               </a:tabLst>
-              <a:defRPr lang="en-IL" sz="1200" b="0" u="none" strike="noStrike">
+              <a:defRPr lang="x-none" sz="1200" b="0" u="none" strike="noStrike">
                 <a:solidFill>
                   <a:schemeClr val="dk1">
                     <a:tint val="75000"/>
@@ -1757,7 +1765,7 @@
               </a:tabLst>
             </a:pPr>
             <a:r>
-              <a:rPr lang="en-IL" sz="1200" b="0" u="none" strike="noStrike">
+              <a:rPr lang="x-none" sz="1200" b="0" u="none" strike="noStrike">
                 <a:solidFill>
                   <a:schemeClr val="dk1">
                     <a:tint val="75000"/>
@@ -1886,7 +1894,7 @@
               <a:tabLst>
                 <a:tab pos="0" algn="l"/>
               </a:tabLst>
-              <a:defRPr lang="en-IL" sz="1200" b="0" u="none" strike="noStrike">
+              <a:defRPr lang="x-none" sz="1200" b="0" u="none" strike="noStrike">
                 <a:solidFill>
                   <a:schemeClr val="dk1">
                     <a:tint val="75000"/>
@@ -1909,7 +1917,7 @@
               </a:tabLst>
             </a:pPr>
             <a:fld id="{DCFC6495-8D79-4CFF-B5E9-679EA4901923}" type="slidenum">
-              <a:rPr lang="en-IL" sz="1200" b="0" u="none" strike="noStrike">
+              <a:rPr lang="x-none" sz="1200" b="0" u="none" strike="noStrike">
                 <a:solidFill>
                   <a:schemeClr val="dk1">
                     <a:tint val="75000"/>
@@ -2151,7 +2159,7 @@
               <a:tabLst>
                 <a:tab pos="0" algn="l"/>
               </a:tabLst>
-              <a:defRPr lang="en-IL" sz="1200" b="0" u="none" strike="noStrike">
+              <a:defRPr lang="x-none" sz="1200" b="0" u="none" strike="noStrike">
                 <a:solidFill>
                   <a:schemeClr val="dk1">
                     <a:tint val="75000"/>
@@ -2174,7 +2182,7 @@
               </a:tabLst>
             </a:pPr>
             <a:r>
-              <a:rPr lang="en-IL" sz="1200" b="0" u="none" strike="noStrike">
+              <a:rPr lang="x-none" sz="1200" b="0" u="none" strike="noStrike">
                 <a:solidFill>
                   <a:schemeClr val="dk1">
                     <a:tint val="75000"/>
@@ -2303,7 +2311,7 @@
               <a:tabLst>
                 <a:tab pos="0" algn="l"/>
               </a:tabLst>
-              <a:defRPr lang="en-IL" sz="1200" b="0" u="none" strike="noStrike">
+              <a:defRPr lang="x-none" sz="1200" b="0" u="none" strike="noStrike">
                 <a:solidFill>
                   <a:schemeClr val="dk1">
                     <a:tint val="75000"/>
@@ -2326,7 +2334,7 @@
               </a:tabLst>
             </a:pPr>
             <a:fld id="{1A7D9BC1-D170-4732-A7B4-8079B5F63717}" type="slidenum">
-              <a:rPr lang="en-IL" sz="1200" b="0" u="none" strike="noStrike">
+              <a:rPr lang="x-none" sz="1200" b="0" u="none" strike="noStrike">
                 <a:solidFill>
                   <a:schemeClr val="dk1">
                     <a:tint val="75000"/>
@@ -3248,7 +3256,7 @@
               <a:tabLst>
                 <a:tab pos="0" algn="l"/>
               </a:tabLst>
-              <a:defRPr lang="en-IL" sz="1200" b="0" u="none" strike="noStrike">
+              <a:defRPr lang="x-none" sz="1200" b="0" u="none" strike="noStrike">
                 <a:solidFill>
                   <a:schemeClr val="dk1">
                     <a:tint val="75000"/>
@@ -3271,7 +3279,7 @@
               </a:tabLst>
             </a:pPr>
             <a:r>
-              <a:rPr lang="en-IL" sz="1200" b="0" u="none" strike="noStrike">
+              <a:rPr lang="x-none" sz="1200" b="0" u="none" strike="noStrike">
                 <a:solidFill>
                   <a:schemeClr val="dk1">
                     <a:tint val="75000"/>
@@ -3400,7 +3408,7 @@
               <a:tabLst>
                 <a:tab pos="0" algn="l"/>
               </a:tabLst>
-              <a:defRPr lang="en-IL" sz="1200" b="0" u="none" strike="noStrike">
+              <a:defRPr lang="x-none" sz="1200" b="0" u="none" strike="noStrike">
                 <a:solidFill>
                   <a:schemeClr val="dk1">
                     <a:tint val="75000"/>
@@ -3423,7 +3431,7 @@
               </a:tabLst>
             </a:pPr>
             <a:fld id="{C5B16A08-1D49-4D05-8222-C635F143A348}" type="slidenum">
-              <a:rPr lang="en-IL" sz="1200" b="0" u="none" strike="noStrike">
+              <a:rPr lang="x-none" sz="1200" b="0" u="none" strike="noStrike">
                 <a:solidFill>
                   <a:schemeClr val="dk1">
                     <a:tint val="75000"/>
@@ -3585,7 +3593,7 @@
               <a:tabLst>
                 <a:tab pos="0" algn="l"/>
               </a:tabLst>
-              <a:defRPr lang="en-IL" sz="1200" b="0" u="none" strike="noStrike">
+              <a:defRPr lang="x-none" sz="1200" b="0" u="none" strike="noStrike">
                 <a:solidFill>
                   <a:schemeClr val="dk1">
                     <a:tint val="75000"/>
@@ -3608,7 +3616,7 @@
               </a:tabLst>
             </a:pPr>
             <a:r>
-              <a:rPr lang="en-IL" sz="1200" b="0" u="none" strike="noStrike">
+              <a:rPr lang="x-none" sz="1200" b="0" u="none" strike="noStrike">
                 <a:solidFill>
                   <a:schemeClr val="dk1">
                     <a:tint val="75000"/>
@@ -3737,7 +3745,7 @@
               <a:tabLst>
                 <a:tab pos="0" algn="l"/>
               </a:tabLst>
-              <a:defRPr lang="en-IL" sz="1200" b="0" u="none" strike="noStrike">
+              <a:defRPr lang="x-none" sz="1200" b="0" u="none" strike="noStrike">
                 <a:solidFill>
                   <a:schemeClr val="dk1">
                     <a:tint val="75000"/>
@@ -3760,7 +3768,7 @@
               </a:tabLst>
             </a:pPr>
             <a:fld id="{19903630-ED88-4EE1-8544-B15362092D5A}" type="slidenum">
-              <a:rPr lang="en-IL" sz="1200" b="0" u="none" strike="noStrike">
+              <a:rPr lang="x-none" sz="1200" b="0" u="none" strike="noStrike">
                 <a:solidFill>
                   <a:schemeClr val="dk1">
                     <a:tint val="75000"/>
@@ -3852,7 +3860,7 @@
               <a:tabLst>
                 <a:tab pos="0" algn="l"/>
               </a:tabLst>
-              <a:defRPr lang="en-IL" sz="1200" b="0" u="none" strike="noStrike">
+              <a:defRPr lang="x-none" sz="1200" b="0" u="none" strike="noStrike">
                 <a:solidFill>
                   <a:schemeClr val="dk1">
                     <a:tint val="75000"/>
@@ -3875,7 +3883,7 @@
               </a:tabLst>
             </a:pPr>
             <a:r>
-              <a:rPr lang="en-IL" sz="1200" b="0" u="none" strike="noStrike">
+              <a:rPr lang="x-none" sz="1200" b="0" u="none" strike="noStrike">
                 <a:solidFill>
                   <a:schemeClr val="dk1">
                     <a:tint val="75000"/>
@@ -4004,7 +4012,7 @@
               <a:tabLst>
                 <a:tab pos="0" algn="l"/>
               </a:tabLst>
-              <a:defRPr lang="en-IL" sz="1200" b="0" u="none" strike="noStrike">
+              <a:defRPr lang="x-none" sz="1200" b="0" u="none" strike="noStrike">
                 <a:solidFill>
                   <a:schemeClr val="dk1">
                     <a:tint val="75000"/>
@@ -4027,7 +4035,7 @@
               </a:tabLst>
             </a:pPr>
             <a:fld id="{3458EDF7-AE9E-4A28-94A9-890CC40594A2}" type="slidenum">
-              <a:rPr lang="en-IL" sz="1200" b="0" u="none" strike="noStrike">
+              <a:rPr lang="x-none" sz="1200" b="0" u="none" strike="noStrike">
                 <a:solidFill>
                   <a:schemeClr val="dk1">
                     <a:tint val="75000"/>
@@ -4086,7 +4094,7 @@
               <a:tabLst>
                 <a:tab pos="0" algn="l"/>
               </a:tabLst>
-              <a:defRPr lang="en-IL" sz="4400" b="0" u="none" strike="noStrike">
+              <a:defRPr lang="x-none" sz="4400" b="0" u="none" strike="noStrike">
                 <a:solidFill>
                   <a:schemeClr val="dk1"/>
                 </a:solidFill>
@@ -4107,7 +4115,7 @@
               </a:tabLst>
             </a:pPr>
             <a:r>
-              <a:rPr lang="en-IL" sz="4400" b="0" u="none" strike="noStrike">
+              <a:rPr lang="x-none" sz="4400" b="0" u="none" strike="noStrike">
                 <a:solidFill>
                   <a:schemeClr val="dk1"/>
                 </a:solidFill>
@@ -4160,7 +4168,7 @@
               </a:buClr>
               <a:buFont typeface="Arial"/>
               <a:buChar char="•"/>
-              <a:defRPr lang="en-IL" sz="2800" b="0" u="none" strike="noStrike">
+              <a:defRPr lang="x-none" sz="2800" b="0" u="none" strike="noStrike">
                 <a:solidFill>
                   <a:schemeClr val="dk1"/>
                 </a:solidFill>
@@ -4182,7 +4190,7 @@
               <a:buSzPct val="75000"/>
               <a:buFont typeface="Symbol" charset="2"/>
               <a:buChar char=""/>
-              <a:defRPr lang="en-IL" sz="2400" b="0" u="none" strike="noStrike">
+              <a:defRPr lang="x-none" sz="2400" b="0" u="none" strike="noStrike">
                 <a:solidFill>
                   <a:schemeClr val="dk1"/>
                 </a:solidFill>
@@ -4204,7 +4212,7 @@
               <a:buSzPct val="45000"/>
               <a:buFont typeface="Wingdings" charset="2"/>
               <a:buChar char=""/>
-              <a:defRPr lang="en-IL" sz="2000" b="0" u="none" strike="noStrike">
+              <a:defRPr lang="x-none" sz="2000" b="0" u="none" strike="noStrike">
                 <a:solidFill>
                   <a:schemeClr val="dk1"/>
                 </a:solidFill>
@@ -4226,7 +4234,7 @@
               <a:buSzPct val="75000"/>
               <a:buFont typeface="Symbol" charset="2"/>
               <a:buChar char=""/>
-              <a:defRPr lang="en-IL" sz="1800" b="0" u="none" strike="noStrike">
+              <a:defRPr lang="x-none" sz="1800" b="0" u="none" strike="noStrike">
                 <a:solidFill>
                   <a:schemeClr val="dk1"/>
                 </a:solidFill>
@@ -4248,7 +4256,7 @@
               <a:buSzPct val="45000"/>
               <a:buFont typeface="Wingdings" charset="2"/>
               <a:buChar char=""/>
-              <a:defRPr lang="en-IL" sz="1800" b="0" u="none" strike="noStrike">
+              <a:defRPr lang="x-none" sz="1800" b="0" u="none" strike="noStrike">
                 <a:solidFill>
                   <a:schemeClr val="dk1"/>
                 </a:solidFill>
@@ -4270,7 +4278,7 @@
               <a:buSzPct val="45000"/>
               <a:buFont typeface="Wingdings" charset="2"/>
               <a:buChar char=""/>
-              <a:defRPr lang="en-IL" sz="2000" b="0" u="none" strike="noStrike">
+              <a:defRPr lang="x-none" sz="2000" b="0" u="none" strike="noStrike">
                 <a:solidFill>
                   <a:schemeClr val="dk1"/>
                 </a:solidFill>
@@ -4292,7 +4300,7 @@
               <a:buSzPct val="45000"/>
               <a:buFont typeface="Wingdings" charset="2"/>
               <a:buChar char=""/>
-              <a:defRPr lang="en-IL" sz="2000" b="0" u="none" strike="noStrike">
+              <a:defRPr lang="x-none" sz="2000" b="0" u="none" strike="noStrike">
                 <a:solidFill>
                   <a:schemeClr val="dk1"/>
                 </a:solidFill>
@@ -4317,7 +4325,7 @@
               <a:buChar char="•"/>
             </a:pPr>
             <a:r>
-              <a:rPr lang="en-IL" sz="2800" b="0" u="none" strike="noStrike">
+              <a:rPr lang="x-none" sz="2800" b="0" u="none" strike="noStrike">
                 <a:solidFill>
                   <a:schemeClr val="dk1"/>
                 </a:solidFill>
@@ -4344,7 +4352,7 @@
               <a:buChar char=""/>
             </a:pPr>
             <a:r>
-              <a:rPr lang="en-IL" sz="2400" b="0" u="none" strike="noStrike">
+              <a:rPr lang="x-none" sz="2400" b="0" u="none" strike="noStrike">
                 <a:solidFill>
                   <a:schemeClr val="dk1"/>
                 </a:solidFill>
@@ -4371,7 +4379,7 @@
               <a:buChar char=""/>
             </a:pPr>
             <a:r>
-              <a:rPr lang="en-IL" sz="2000" b="0" u="none" strike="noStrike">
+              <a:rPr lang="x-none" sz="2000" b="0" u="none" strike="noStrike">
                 <a:solidFill>
                   <a:schemeClr val="dk1"/>
                 </a:solidFill>
@@ -4398,7 +4406,7 @@
               <a:buChar char=""/>
             </a:pPr>
             <a:r>
-              <a:rPr lang="en-IL" sz="1800" b="0" u="none" strike="noStrike">
+              <a:rPr lang="x-none" sz="1800" b="0" u="none" strike="noStrike">
                 <a:solidFill>
                   <a:schemeClr val="dk1"/>
                 </a:solidFill>
@@ -4425,7 +4433,7 @@
               <a:buChar char=""/>
             </a:pPr>
             <a:r>
-              <a:rPr lang="en-IL" sz="1800" b="0" u="none" strike="noStrike">
+              <a:rPr lang="x-none" sz="1800" b="0" u="none" strike="noStrike">
                 <a:solidFill>
                   <a:schemeClr val="dk1"/>
                 </a:solidFill>
@@ -4452,7 +4460,7 @@
               <a:buChar char=""/>
             </a:pPr>
             <a:r>
-              <a:rPr lang="en-IL" sz="2000" b="0" u="none" strike="noStrike">
+              <a:rPr lang="x-none" sz="2000" b="0" u="none" strike="noStrike">
                 <a:solidFill>
                   <a:schemeClr val="dk1"/>
                 </a:solidFill>
@@ -4479,7 +4487,7 @@
               <a:buChar char=""/>
             </a:pPr>
             <a:r>
-              <a:rPr lang="en-IL" sz="2000" b="0" u="none" strike="noStrike">
+              <a:rPr lang="x-none" sz="2000" b="0" u="none" strike="noStrike">
                 <a:solidFill>
                   <a:schemeClr val="dk1"/>
                 </a:solidFill>
@@ -4973,7 +4981,7 @@
               <a:tabLst>
                 <a:tab pos="0" algn="l"/>
               </a:tabLst>
-              <a:defRPr lang="en-IL" sz="1200" b="0" u="none" strike="noStrike">
+              <a:defRPr lang="x-none" sz="1200" b="0" u="none" strike="noStrike">
                 <a:solidFill>
                   <a:schemeClr val="dk1">
                     <a:tint val="75000"/>
@@ -4996,7 +5004,7 @@
               </a:tabLst>
             </a:pPr>
             <a:r>
-              <a:rPr lang="en-IL" sz="1200" b="0" u="none" strike="noStrike">
+              <a:rPr lang="x-none" sz="1200" b="0" u="none" strike="noStrike">
                 <a:solidFill>
                   <a:schemeClr val="dk1">
                     <a:tint val="75000"/>
@@ -5125,7 +5133,7 @@
               <a:tabLst>
                 <a:tab pos="0" algn="l"/>
               </a:tabLst>
-              <a:defRPr lang="en-IL" sz="1200" b="0" u="none" strike="noStrike">
+              <a:defRPr lang="x-none" sz="1200" b="0" u="none" strike="noStrike">
                 <a:solidFill>
                   <a:schemeClr val="dk1">
                     <a:tint val="75000"/>
@@ -5148,7 +5156,7 @@
               </a:tabLst>
             </a:pPr>
             <a:fld id="{BBA1531D-7388-46B1-B8B8-68A23A8BC79A}" type="slidenum">
-              <a:rPr lang="en-IL" sz="1200" b="0" u="none" strike="noStrike">
+              <a:rPr lang="x-none" sz="1200" b="0" u="none" strike="noStrike">
                 <a:solidFill>
                   <a:schemeClr val="dk1">
                     <a:tint val="75000"/>
@@ -5432,7 +5440,7 @@
               <a:tabLst>
                 <a:tab pos="0" algn="l"/>
               </a:tabLst>
-              <a:defRPr lang="en-IL" sz="1200" b="0" u="none" strike="noStrike">
+              <a:defRPr lang="x-none" sz="1200" b="0" u="none" strike="noStrike">
                 <a:solidFill>
                   <a:schemeClr val="dk1">
                     <a:tint val="75000"/>
@@ -5455,7 +5463,7 @@
               </a:tabLst>
             </a:pPr>
             <a:r>
-              <a:rPr lang="en-IL" sz="1200" b="0" u="none" strike="noStrike">
+              <a:rPr lang="x-none" sz="1200" b="0" u="none" strike="noStrike">
                 <a:solidFill>
                   <a:schemeClr val="dk1">
                     <a:tint val="75000"/>
@@ -5584,7 +5592,7 @@
               <a:tabLst>
                 <a:tab pos="0" algn="l"/>
               </a:tabLst>
-              <a:defRPr lang="en-IL" sz="1200" b="0" u="none" strike="noStrike">
+              <a:defRPr lang="x-none" sz="1200" b="0" u="none" strike="noStrike">
                 <a:solidFill>
                   <a:schemeClr val="dk1">
                     <a:tint val="75000"/>
@@ -5607,7 +5615,7 @@
               </a:tabLst>
             </a:pPr>
             <a:fld id="{76922409-5C0F-4E6F-BB09-DE198C25E6BD}" type="slidenum">
-              <a:rPr lang="en-IL" sz="1200" b="0" u="none" strike="noStrike">
+              <a:rPr lang="x-none" sz="1200" b="0" u="none" strike="noStrike">
                 <a:solidFill>
                   <a:schemeClr val="dk1">
                     <a:tint val="75000"/>
@@ -5769,7 +5777,7 @@
               <a:tabLst>
                 <a:tab pos="0" algn="l"/>
               </a:tabLst>
-              <a:defRPr lang="en-IL" sz="1200" b="0" u="none" strike="noStrike">
+              <a:defRPr lang="x-none" sz="1200" b="0" u="none" strike="noStrike">
                 <a:solidFill>
                   <a:schemeClr val="dk1">
                     <a:tint val="75000"/>
@@ -5792,7 +5800,7 @@
               </a:tabLst>
             </a:pPr>
             <a:r>
-              <a:rPr lang="en-IL" sz="1200" b="0" u="none" strike="noStrike">
+              <a:rPr lang="x-none" sz="1200" b="0" u="none" strike="noStrike">
                 <a:solidFill>
                   <a:schemeClr val="dk1">
                     <a:tint val="75000"/>
@@ -5921,7 +5929,7 @@
               <a:tabLst>
                 <a:tab pos="0" algn="l"/>
               </a:tabLst>
-              <a:defRPr lang="en-IL" sz="1200" b="0" u="none" strike="noStrike">
+              <a:defRPr lang="x-none" sz="1200" b="0" u="none" strike="noStrike">
                 <a:solidFill>
                   <a:schemeClr val="dk1">
                     <a:tint val="75000"/>
@@ -5944,7 +5952,7 @@
               </a:tabLst>
             </a:pPr>
             <a:fld id="{1A8C7008-9342-4EA7-B80A-31098A996368}" type="slidenum">
-              <a:rPr lang="en-IL" sz="1200" b="0" u="none" strike="noStrike">
+              <a:rPr lang="x-none" sz="1200" b="0" u="none" strike="noStrike">
                 <a:solidFill>
                   <a:schemeClr val="dk1">
                     <a:tint val="75000"/>
@@ -6007,7 +6015,7 @@
               </a:buClr>
               <a:buFont typeface="Arial"/>
               <a:buChar char="•"/>
-              <a:defRPr lang="en-IL" sz="2800" b="0" u="none" strike="noStrike">
+              <a:defRPr lang="x-none" sz="2800" b="0" u="none" strike="noStrike">
                 <a:solidFill>
                   <a:schemeClr val="dk1"/>
                 </a:solidFill>
@@ -6029,7 +6037,7 @@
               <a:buSzPct val="75000"/>
               <a:buFont typeface="Symbol" charset="2"/>
               <a:buChar char=""/>
-              <a:defRPr lang="en-IL" sz="2400" b="0" u="none" strike="noStrike">
+              <a:defRPr lang="x-none" sz="2400" b="0" u="none" strike="noStrike">
                 <a:solidFill>
                   <a:schemeClr val="dk1"/>
                 </a:solidFill>
@@ -6051,7 +6059,7 @@
               <a:buSzPct val="45000"/>
               <a:buFont typeface="Wingdings" charset="2"/>
               <a:buChar char=""/>
-              <a:defRPr lang="en-IL" sz="2000" b="0" u="none" strike="noStrike">
+              <a:defRPr lang="x-none" sz="2000" b="0" u="none" strike="noStrike">
                 <a:solidFill>
                   <a:schemeClr val="dk1"/>
                 </a:solidFill>
@@ -6073,7 +6081,7 @@
               <a:buSzPct val="75000"/>
               <a:buFont typeface="Symbol" charset="2"/>
               <a:buChar char=""/>
-              <a:defRPr lang="en-IL" sz="1800" b="0" u="none" strike="noStrike">
+              <a:defRPr lang="x-none" sz="1800" b="0" u="none" strike="noStrike">
                 <a:solidFill>
                   <a:schemeClr val="dk1"/>
                 </a:solidFill>
@@ -6095,7 +6103,7 @@
               <a:buSzPct val="45000"/>
               <a:buFont typeface="Wingdings" charset="2"/>
               <a:buChar char=""/>
-              <a:defRPr lang="en-IL" sz="1800" b="0" u="none" strike="noStrike">
+              <a:defRPr lang="x-none" sz="1800" b="0" u="none" strike="noStrike">
                 <a:solidFill>
                   <a:schemeClr val="dk1"/>
                 </a:solidFill>
@@ -6117,7 +6125,7 @@
               <a:buSzPct val="45000"/>
               <a:buFont typeface="Wingdings" charset="2"/>
               <a:buChar char=""/>
-              <a:defRPr lang="en-IL" sz="2000" b="0" u="none" strike="noStrike">
+              <a:defRPr lang="x-none" sz="2000" b="0" u="none" strike="noStrike">
                 <a:solidFill>
                   <a:schemeClr val="dk1"/>
                 </a:solidFill>
@@ -6139,7 +6147,7 @@
               <a:buSzPct val="45000"/>
               <a:buFont typeface="Wingdings" charset="2"/>
               <a:buChar char=""/>
-              <a:defRPr lang="en-IL" sz="2000" b="0" u="none" strike="noStrike">
+              <a:defRPr lang="x-none" sz="2000" b="0" u="none" strike="noStrike">
                 <a:solidFill>
                   <a:schemeClr val="dk1"/>
                 </a:solidFill>
@@ -6164,7 +6172,7 @@
               <a:buChar char="•"/>
             </a:pPr>
             <a:r>
-              <a:rPr lang="en-IL" sz="2800" b="0" u="none" strike="noStrike">
+              <a:rPr lang="x-none" sz="2800" b="0" u="none" strike="noStrike">
                 <a:solidFill>
                   <a:schemeClr val="dk1"/>
                 </a:solidFill>
@@ -6191,7 +6199,7 @@
               <a:buChar char=""/>
             </a:pPr>
             <a:r>
-              <a:rPr lang="en-IL" sz="2400" b="0" u="none" strike="noStrike">
+              <a:rPr lang="x-none" sz="2400" b="0" u="none" strike="noStrike">
                 <a:solidFill>
                   <a:schemeClr val="dk1"/>
                 </a:solidFill>
@@ -6218,7 +6226,7 @@
               <a:buChar char=""/>
             </a:pPr>
             <a:r>
-              <a:rPr lang="en-IL" sz="2000" b="0" u="none" strike="noStrike">
+              <a:rPr lang="x-none" sz="2000" b="0" u="none" strike="noStrike">
                 <a:solidFill>
                   <a:schemeClr val="dk1"/>
                 </a:solidFill>
@@ -6245,7 +6253,7 @@
               <a:buChar char=""/>
             </a:pPr>
             <a:r>
-              <a:rPr lang="en-IL" sz="1800" b="0" u="none" strike="noStrike">
+              <a:rPr lang="x-none" sz="1800" b="0" u="none" strike="noStrike">
                 <a:solidFill>
                   <a:schemeClr val="dk1"/>
                 </a:solidFill>
@@ -6272,7 +6280,7 @@
               <a:buChar char=""/>
             </a:pPr>
             <a:r>
-              <a:rPr lang="en-IL" sz="1800" b="0" u="none" strike="noStrike">
+              <a:rPr lang="x-none" sz="1800" b="0" u="none" strike="noStrike">
                 <a:solidFill>
                   <a:schemeClr val="dk1"/>
                 </a:solidFill>
@@ -6299,7 +6307,7 @@
               <a:buChar char=""/>
             </a:pPr>
             <a:r>
-              <a:rPr lang="en-IL" sz="2000" b="0" u="none" strike="noStrike">
+              <a:rPr lang="x-none" sz="2000" b="0" u="none" strike="noStrike">
                 <a:solidFill>
                   <a:schemeClr val="dk1"/>
                 </a:solidFill>
@@ -6326,7 +6334,7 @@
               <a:buChar char=""/>
             </a:pPr>
             <a:r>
-              <a:rPr lang="en-IL" sz="2000" b="0" u="none" strike="noStrike">
+              <a:rPr lang="x-none" sz="2000" b="0" u="none" strike="noStrike">
                 <a:solidFill>
                   <a:schemeClr val="dk1"/>
                 </a:solidFill>
@@ -6744,7 +6752,7 @@
               <a:tabLst>
                 <a:tab pos="0" algn="l"/>
               </a:tabLst>
-              <a:defRPr lang="en-IL" sz="1200" b="0" u="none" strike="noStrike">
+              <a:defRPr lang="x-none" sz="1200" b="0" u="none" strike="noStrike">
                 <a:solidFill>
                   <a:schemeClr val="dk1">
                     <a:tint val="75000"/>
@@ -6767,7 +6775,7 @@
               </a:tabLst>
             </a:pPr>
             <a:r>
-              <a:rPr lang="en-IL" sz="1200" b="0" u="none" strike="noStrike">
+              <a:rPr lang="x-none" sz="1200" b="0" u="none" strike="noStrike">
                 <a:solidFill>
                   <a:schemeClr val="dk1">
                     <a:tint val="75000"/>
@@ -6896,7 +6904,7 @@
               <a:tabLst>
                 <a:tab pos="0" algn="l"/>
               </a:tabLst>
-              <a:defRPr lang="en-IL" sz="1200" b="0" u="none" strike="noStrike">
+              <a:defRPr lang="x-none" sz="1200" b="0" u="none" strike="noStrike">
                 <a:solidFill>
                   <a:schemeClr val="dk1">
                     <a:tint val="75000"/>
@@ -6919,7 +6927,7 @@
               </a:tabLst>
             </a:pPr>
             <a:fld id="{10C1B76E-2C69-4E12-8968-8BD01CE3FB9D}" type="slidenum">
-              <a:rPr lang="en-IL" sz="1200" b="0" u="none" strike="noStrike">
+              <a:rPr lang="x-none" sz="1200" b="0" u="none" strike="noStrike">
                 <a:solidFill>
                   <a:schemeClr val="dk1">
                     <a:tint val="75000"/>
@@ -7347,7 +7355,7 @@
               <a:tabLst>
                 <a:tab pos="0" algn="l"/>
               </a:tabLst>
-              <a:defRPr lang="en-IL" sz="1200" b="0" u="none" strike="noStrike">
+              <a:defRPr lang="x-none" sz="1200" b="0" u="none" strike="noStrike">
                 <a:solidFill>
                   <a:schemeClr val="dk1">
                     <a:tint val="75000"/>
@@ -7370,7 +7378,7 @@
               </a:tabLst>
             </a:pPr>
             <a:r>
-              <a:rPr lang="en-IL" sz="1200" b="0" u="none" strike="noStrike">
+              <a:rPr lang="x-none" sz="1200" b="0" u="none" strike="noStrike">
                 <a:solidFill>
                   <a:schemeClr val="dk1">
                     <a:tint val="75000"/>
@@ -7499,7 +7507,7 @@
               <a:tabLst>
                 <a:tab pos="0" algn="l"/>
               </a:tabLst>
-              <a:defRPr lang="en-IL" sz="1200" b="0" u="none" strike="noStrike">
+              <a:defRPr lang="x-none" sz="1200" b="0" u="none" strike="noStrike">
                 <a:solidFill>
                   <a:schemeClr val="dk1">
                     <a:tint val="75000"/>
@@ -7522,7 +7530,7 @@
               </a:tabLst>
             </a:pPr>
             <a:fld id="{6DD535B1-ACF6-4587-9162-5B5394E6C0A2}" type="slidenum">
-              <a:rPr lang="en-IL" sz="1200" b="0" u="none" strike="noStrike">
+              <a:rPr lang="x-none" sz="1200" b="0" u="none" strike="noStrike">
                 <a:solidFill>
                   <a:schemeClr val="dk1">
                     <a:tint val="75000"/>
@@ -7777,7 +7785,7 @@
     </p:bodyStyle>
     <p:otherStyle>
       <a:defPPr>
-        <a:defRPr lang="LID4096"/>
+        <a:defRPr lang="x-none"/>
       </a:defPPr>
       <a:lvl1pPr marL="0" algn="l" defTabSz="914400" rtl="0" eaLnBrk="1" latinLnBrk="0" hangingPunct="1">
         <a:defRPr sz="1800" kern="1200">
@@ -7914,7 +7922,7 @@
           <a:noFill/>
         </p:spPr>
         <p:txBody>
-          <a:bodyPr wrap="square" rtlCol="0">
+          <a:bodyPr wrap="square" lIns="91440" tIns="45720" rIns="91440" bIns="45720" rtlCol="0" anchor="t">
             <a:spAutoFit/>
           </a:bodyPr>
           <a:lstStyle/>
@@ -7927,8 +7935,63 @@
           <a:p>
             <a:r>
               <a:rPr lang="en-US" dirty="0"/>
-              <a:t>"clock_tick_seconds": 1.0,</a:t>
-            </a:r>
+              <a:t>"</a:t>
+            </a:r>
+            <a:r>
+              <a:rPr lang="en-US" dirty="0" err="1"/>
+              <a:t>clock_tick_seconds</a:t>
+            </a:r>
+            <a:r>
+              <a:rPr lang="en-US" dirty="0"/>
+              <a:t>": 1.0,</a:t>
+            </a:r>
+          </a:p>
+          <a:p>
+            <a:r>
+              <a:rPr lang="en-US" dirty="0"/>
+              <a:t>"mock_start_datetime": </a:t>
+            </a:r>
+            <a:r>
+              <a:rPr lang="en-US"/>
+              <a:t>“2026-10-10T23:47:30</a:t>
+            </a:r>
+            <a:r>
+              <a:rPr lang="en-US" dirty="0"/>
+              <a:t>”,</a:t>
+            </a:r>
+            <a:endParaRPr lang="en-US" dirty="0">
+              <a:ea typeface="Calibri"/>
+              <a:cs typeface="Calibri"/>
+            </a:endParaRPr>
+          </a:p>
+          <a:p>
+            <a:r>
+              <a:rPr lang="en-US" dirty="0"/>
+              <a:t>“_</a:t>
+            </a:r>
+            <a:r>
+              <a:rPr lang="en-US" dirty="0" err="1"/>
+              <a:t>debug_repaint_lock_controllers</a:t>
+            </a:r>
+            <a:r>
+              <a:rPr lang="en-US" dirty="0"/>
+              <a:t>": false,</a:t>
+            </a:r>
+          </a:p>
+          <a:p>
+            <a:r>
+              <a:rPr lang="" dirty="0"/>
+              <a:t>“_</a:t>
+            </a:r>
+            <a:r>
+              <a:rPr lang="" dirty="0" err="1"/>
+              <a:t>debug_skip_slideshow</a:t>
+            </a:r>
+            <a:r>
+              <a:rPr lang="" dirty="0"/>
+              <a:t>": true,</a:t>
+            </a:r>
+            <a:endParaRPr lang="en-US" dirty="0"/>
           </a:p>
           <a:p>
             <a:r>
@@ -7936,45 +7999,6 @@
               <a:t>"</a:t>
             </a:r>
             <a:r>
-              <a:rPr lang="he-IL" dirty="0"/>
-              <a:t>_</a:t>
-            </a:r>
-            <a:r>
-              <a:rPr lang="en-US" dirty="0" err="1"/>
-              <a:t>mock_start_datetime</a:t>
-            </a:r>
-            <a:r>
-              <a:rPr lang="en-US" dirty="0"/>
-              <a:t>": "2026-03-28T14:30:00",</a:t>
-            </a:r>
-          </a:p>
-          <a:p>
-            <a:r>
-              <a:rPr lang="en-US" dirty="0"/>
-              <a:t>“_</a:t>
-            </a:r>
-            <a:r>
-              <a:rPr lang="en-US" dirty="0" err="1"/>
-              <a:t>debug_repaint_lock_controllers</a:t>
-            </a:r>
-            <a:r>
-              <a:rPr lang="en-US" dirty="0"/>
-              <a:t>": false,</a:t>
-            </a:r>
-          </a:p>
-          <a:p>
-            <a:r>
-              <a:rPr lang="" dirty="0"/>
-              <a:t>“_debug_skip_slideshow": true,</a:t>
-            </a:r>
-            <a:endParaRPr lang="en-US" dirty="0"/>
-          </a:p>
-          <a:p>
-            <a:r>
-              <a:rPr lang="en-US" dirty="0"/>
-              <a:t>"</a:t>
-            </a:r>
-            <a:r>
               <a:rPr lang="en-US" dirty="0" err="1"/>
               <a:t>clock_style</a:t>
             </a:r>
@@ -7984,7 +8008,15 @@
             </a:r>
             <a:r>
               <a:rPr lang="" dirty="0"/>
-              <a:t>"hour_color": 0</a:t>
+              <a:t>"</a:t>
+            </a:r>
+            <a:r>
+              <a:rPr lang="" dirty="0" err="1"/>
+              <a:t>hour_color</a:t>
+            </a:r>
+            <a:r>
+              <a:rPr lang="" dirty="0"/>
+              <a:t>": 0</a:t>
             </a:r>
             <a:r>
               <a:rPr lang="en-US" dirty="0"/>
@@ -7996,7 +8028,7 @@
               <a:rPr lang="en-US" dirty="0"/>
               <a:t>}</a:t>
             </a:r>
-            <a:endParaRPr lang="LID4096" dirty="0"/>
+            <a:endParaRPr lang="x-none" dirty="0"/>
           </a:p>
         </p:txBody>
       </p:sp>
@@ -9601,13 +9633,13 @@
   <p:clrMapOvr>
     <a:masterClrMapping/>
   </p:clrMapOvr>
-  <mc:AlternateContent xmlns:mc="http://schemas.openxmlformats.org/markup-compatibility/2006">
-    <mc:Choice xmlns:p14="http://schemas.microsoft.com/office/powerpoint/2010/main" Requires="p14">
+  <mc:AlternateContent xmlns:mc="http://schemas.openxmlformats.org/markup-compatibility/2006" xmlns:p14="http://schemas.microsoft.com/office/powerpoint/2010/main">
+    <mc:Choice Requires="p14">
       <p:transition spd="med" p14:dur="700" advTm="40000">
         <p:fade/>
       </p:transition>
     </mc:Choice>
-    <mc:Fallback>
+    <mc:Fallback xmlns="">
       <p:transition spd="med" advTm="40000">
         <p:fade/>
       </p:transition>
@@ -9772,7 +9804,7 @@
           <a:fontRef idx="minor"/>
         </p:style>
         <p:txBody>
-          <a:bodyPr wrap="square" lIns="90000" tIns="45000" rIns="90000" bIns="45000" anchor="ctr" anchorCtr="0">
+          <a:bodyPr wrap="none" lIns="90000" tIns="45000" rIns="90000" bIns="45000" anchor="ctr" anchorCtr="0">
             <a:normAutofit/>
           </a:bodyPr>
           <a:lstStyle/>
@@ -11134,7 +11166,7 @@
               </a:rPr>
               <a:t>בברכת שבת שלום!</a:t>
             </a:r>
-            <a:endParaRPr lang="LID4096" sz="8800" b="1" dirty="0">
+            <a:endParaRPr lang="x-none" sz="8800" b="1" dirty="0">
               <a:ln w="6600">
                 <a:solidFill>
                   <a:schemeClr val="accent2"/>
@@ -11308,7 +11340,7 @@
               </a:rPr>
               <a:t>#DICLOCK</a:t>
             </a:r>
-            <a:endParaRPr lang="LID4096" sz="4000" dirty="0">
+            <a:endParaRPr lang="x-none" sz="4000" dirty="0">
               <a:ln w="12700" cmpd="sng">
                 <a:solidFill>
                   <a:schemeClr val="accent4"/>
@@ -11349,13 +11381,13 @@
   <p:clrMapOvr>
     <a:masterClrMapping/>
   </p:clrMapOvr>
-  <mc:AlternateContent xmlns:mc="http://schemas.openxmlformats.org/markup-compatibility/2006" xmlns:p14="http://schemas.microsoft.com/office/powerpoint/2010/main">
-    <mc:Choice Requires="p14">
+  <mc:AlternateContent xmlns:mc="http://schemas.openxmlformats.org/markup-compatibility/2006">
+    <mc:Choice xmlns:p14="http://schemas.microsoft.com/office/powerpoint/2010/main" Requires="p14">
       <p:transition spd="med" p14:dur="700" advTm="10000">
         <p:fade/>
       </p:transition>
     </mc:Choice>
-    <mc:Fallback xmlns="">
+    <mc:Fallback>
       <p:transition spd="med" advTm="10000">
         <p:fade/>
       </p:transition>

--- a/luah.pptx
+++ b/luah.pptx
@@ -7949,15 +7949,11 @@
           <a:p>
             <a:r>
               <a:rPr lang="en-US" dirty="0"/>
-              <a:t>"mock_start_datetime": </a:t>
+              <a:t>"mock_start_datetime</a:t>
             </a:r>
             <a:r>
               <a:rPr lang="en-US"/>
-              <a:t>“2026-10-10T23:47:30</a:t>
-            </a:r>
-            <a:r>
-              <a:rPr lang="en-US" dirty="0"/>
-              <a:t>”,</a:t>
+              <a:t>": null,</a:t>
             </a:r>
             <a:endParaRPr lang="en-US" dirty="0">
               <a:ea typeface="Calibri"/>
@@ -10513,39 +10509,37 @@
               </a:tabLst>
             </a:pPr>
             <a:r>
-              <a:rPr lang="he-IL" sz="2000" dirty="0">
+              <a:rPr lang="he-IL" sz="2000" b="1" u="none" strike="noStrike" dirty="0">
                 <a:solidFill>
                   <a:srgbClr val="FAF4E3"/>
                 </a:solidFill>
+                <a:effectLst/>
+                <a:uFillTx/>
                 <a:latin typeface="Arial"/>
               </a:rPr>
-              <a:t>קהילת מעשה ניסים </a:t>
+              <a:t>שבת מברכים</a:t>
             </a:r>
             <a:br>
-              <a:rPr lang="en-US" sz="2000" dirty="0">
+              <a:rPr lang="en-US" sz="2000" u="none" strike="noStrike" dirty="0">
                 <a:solidFill>
                   <a:srgbClr val="FAF4E3"/>
                 </a:solidFill>
+                <a:effectLst/>
+                <a:uFillTx/>
                 <a:latin typeface="Arial"/>
               </a:rPr>
             </a:br>
             <a:r>
-              <a:rPr lang="he-IL" sz="2000" dirty="0">
+              <a:rPr lang="en-US" sz="2000" u="none" strike="noStrike" dirty="0">
                 <a:solidFill>
                   <a:srgbClr val="FAF4E3"/>
                 </a:solidFill>
+                <a:effectLst/>
+                <a:uFillTx/>
                 <a:latin typeface="Arial"/>
               </a:rPr>
-              <a:t>מברכים את כל אורחינו בברכת שבת שלום!</a:t>
-            </a:r>
-            <a:endParaRPr lang="en-US" sz="2000" u="none" strike="noStrike" dirty="0">
-              <a:solidFill>
-                <a:srgbClr val="FAF4E3"/>
-              </a:solidFill>
-              <a:effectLst/>
-              <a:uFillTx/>
-              <a:latin typeface="Arial"/>
-            </a:endParaRPr>
+              <a:t>#MOLAD</a:t>
+            </a:r>
           </a:p>
         </p:txBody>
       </p:sp>
